--- a/docs/project_progress/img/07/07_slides.pptx
+++ b/docs/project_progress/img/07/07_slides.pptx
@@ -9731,7 +9731,7 @@
         </p:nvGraphicFramePr>
         <p:xfrm>
           <a:off x="457200" y="1097280"/>
-          <a:ext cx="11277294" cy="2560320"/>
+          <a:ext cx="11277293" cy="2560320"/>
         </p:xfrm>
         <a:graphic>
           <a:graphicData uri="http://schemas.openxmlformats.org/drawingml/2006/table">
@@ -9740,9 +9740,9 @@
                 <a:tableStyleId>{5C22544A-7EE6-4342-B048-85BDC9FD1C3A}</a:tableStyleId>
               </a:tblPr>
               <a:tblGrid>
-                <a:gridCol w="1423347"/>
-                <a:gridCol w="6569298"/>
-                <a:gridCol w="3284649"/>
+                <a:gridCol w="1253032"/>
+                <a:gridCol w="6265163"/>
+                <a:gridCol w="3759098"/>
               </a:tblGrid>
               <a:tr h="365760">
                 <a:tc>
@@ -9943,7 +9943,7 @@
                           </a:solidFill>
                           <a:latin typeface="Malgun Gothic"/>
                         </a:rPr>
-                        <a:t>알람 API 10초 조회로 9006만 선별해 신규 발생 시 1회 발동. 접속 후 라이브 영역·촬영 모드·타인 점유를 VLM으로 판독</a:t>
+                        <a:t>알람을 10초마다 조회해 Align Fail만 골라 발동. 접속 후 화면에서 라이브 영역·촬영 모드·타인 점유를 읽음</a:t>
                       </a:r>
                     </a:p>
                   </a:txBody>
@@ -9989,7 +9989,7 @@
                           </a:solidFill>
                           <a:latin typeface="Malgun Gothic"/>
                         </a:rPr>
-                        <a:t>알람 확인이 자동화되고 화면 상태를 시스템이 먼저 읽음</a:t>
+                        <a:t>24시간 모니터 감시가 자동화되고 화면 상태를 시스템이 먼저 읽음</a:t>
                       </a:r>
                     </a:p>
                   </a:txBody>
@@ -10083,7 +10083,7 @@
                           </a:solidFill>
                           <a:latin typeface="Malgun Gothic"/>
                         </a:rPr>
-                        <a:t>RCS 접속 → 상시 녹화 → 성공 사례 기준 CV 매칭 → 재정렬 → 확정 → 완료 감시 → 자동 종료</a:t>
+                        <a:t>RCS 접속 → 녹화 → 최근 성공 사례 기준으로 위치 계산 → 재정렬 → 확정 → 측정 재개 감시 → 종료</a:t>
                       </a:r>
                     </a:p>
                   </a:txBody>
@@ -10129,7 +10129,7 @@
                           </a:solidFill>
                           <a:latin typeface="Malgun Gothic"/>
                         </a:rPr>
-                        <a:t>실알람 3건에서 감지~재조정 1분 미만</a:t>
+                        <a:t>감지~재조정 5분 → 1분 미만</a:t>
                       </a:r>
                     </a:p>
                   </a:txBody>
@@ -10177,7 +10177,7 @@
                           </a:solidFill>
                           <a:latin typeface="Malgun Gothic"/>
                         </a:rPr>
-                        <a:t>우선순위 판단 지원</a:t>
+                        <a:t>판단 지원</a:t>
                       </a:r>
                     </a:p>
                   </a:txBody>
@@ -10223,7 +10223,7 @@
                           </a:solidFill>
                           <a:latin typeface="Malgun Gothic"/>
                         </a:rPr>
-                        <a:t>Recipe 구별력 평가로 재등록 검토 후보 제시, 대응 기록의 단계별 실패 분포 집계</a:t>
+                        <a:t>헷갈리는 Align Key Recipe를 재등록 검토 후보로 제시, 대응 기록의 실패 분포 집계</a:t>
                       </a:r>
                     </a:p>
                   </a:txBody>
@@ -10269,7 +10269,7 @@
                           </a:solidFill>
                           <a:latin typeface="Malgun Gothic"/>
                         </a:rPr>
-                        <a:t>"무엇을 먼저 고칠지"를 데이터로</a:t>
+                        <a:t>"무엇을 먼저 고칠지"를 감이 아니라 데이터로</a:t>
                       </a:r>
                     </a:p>
                   </a:txBody>
@@ -10363,7 +10363,7 @@
                           </a:solidFill>
                           <a:latin typeface="Malgun Gothic"/>
                         </a:rPr>
-                        <a:t>실행 전: 좌표 미검출·라벨 불일치·모드 불명이면 차단·보류. 실행 후: 오측 감지 시 후속 측정 중단, 연속 실패 쿨다운</a:t>
+                        <a:t>버튼을 못 찾거나 라벨이 다르거나 모드를 못 읽으면 클릭·보정 보류. 보정 뒤 오측이 보이면 후속 측정 중단</a:t>
                       </a:r>
                     </a:p>
                   </a:txBody>
@@ -10409,7 +10409,7 @@
                           </a:solidFill>
                           <a:latin typeface="Malgun Gothic"/>
                         </a:rPr>
-                        <a:t>불확실한 조작은 보류</a:t>
+                        <a:t>불확실한 조작은 하지 않음</a:t>
                       </a:r>
                     </a:p>
                   </a:txBody>
@@ -10457,7 +10457,7 @@
                           </a:solidFill>
                           <a:latin typeface="Malgun Gothic"/>
                         </a:rPr>
-                        <a:t>Agent 실행 · 알림</a:t>
+                        <a:t>예외 알림</a:t>
                       </a:r>
                     </a:p>
                   </a:txBody>
@@ -10503,7 +10503,7 @@
                           </a:solidFill>
                           <a:latin typeface="Malgun Gothic"/>
                         </a:rPr>
-                        <a:t>정상 경로는 자동, 예외는 큐브 알림(원인·요구 행동)으로 사람에게. 재시도·쿨다운·관전 전환·개입 시 양보·RCS 복구·긴급 중단. 대응 1건 = 기록 1줄</a:t>
+                        <a:t>AI가 진행 못하면 원인·요구 행동을 담아 담당자에게 큐브 알림. 설정 문제와 재등록 검토를 구분</a:t>
                       </a:r>
                     </a:p>
                   </a:txBody>
@@ -10549,7 +10549,7 @@
                           </a:solidFill>
                           <a:latin typeface="Malgun Gothic"/>
                         </a:rPr>
-                        <a:t>사람은 예외 판단만, 다음 행동의 근거 확보</a:t>
+                        <a:t>담당자는 예외만 판단, 다음 행동의 근거 확보</a:t>
                       </a:r>
                     </a:p>
                   </a:txBody>
@@ -10597,7 +10597,7 @@
                           </a:solidFill>
                           <a:latin typeface="Malgun Gothic"/>
                         </a:rPr>
-                        <a:t>암묵지 자산화</a:t>
+                        <a:t>기록·자산화</a:t>
                       </a:r>
                     </a:p>
                   </a:txBody>
@@ -10643,7 +10643,7 @@
                           </a:solidFill>
                           <a:latin typeface="Malgun Gothic"/>
                         </a:rPr>
-                        <a:t>상시 녹화 + 동의한 수동 조작 세션 → 조작 타임라인 → 한국어 절차서</a:t>
+                        <a:t>대응 1건 = 기록 1줄, 실패 화면·녹화 보존. 수동 조작 녹화 → 절차서 변환 경로</a:t>
                       </a:r>
                     </a:p>
                   </a:txBody>
@@ -10689,7 +10689,7 @@
                           </a:solidFill>
                           <a:latin typeface="Malgun Gothic"/>
                         </a:rPr>
-                        <a:t>개인 경험이 기록·절차서로 남을 경로 확보</a:t>
+                        <a:t>개인 경험이 기록으로 남고 개선 근거가 쌓임</a:t>
                       </a:r>
                     </a:p>
                   </a:txBody>

--- a/docs/project_progress/img/07/07_slides.pptx
+++ b/docs/project_progress/img/07/07_slides.pptx
@@ -3106,8 +3106,8 @@
         </p:nvSpPr>
         <p:spPr>
           <a:xfrm>
-            <a:off x="-151582" y="179676"/>
-            <a:ext cx="12493244" cy="302212"/>
+            <a:off x="-659089" y="165708"/>
+            <a:ext cx="13508259" cy="337766"/>
           </a:xfrm>
           <a:prstGeom prst="rect">
             <a:avLst/>
@@ -3122,13 +3122,13 @@
           <a:p>
             <a:pPr algn="ctr"/>
             <a:r>
-              <a:rPr sz="1700" b="1">
+              <a:rPr sz="1900" b="1">
                 <a:solidFill>
                   <a:srgbClr val="111827"/>
                 </a:solidFill>
                 <a:latin typeface="Malgun Gothic"/>
               </a:rPr>
-              <a:t>Before / After : 사람이 5분 걸리던 Align Fail 대응이 AI Agent 루프에서 1분 미만으로</a:t>
+              <a:t>Before / After : 1건 5분 걸리던 Align Fail 대응이 AI Agent 루프에서 1분 미만으로</a:t>
             </a:r>
           </a:p>
         </p:txBody>
@@ -3141,12 +3141,12 @@
         </p:nvSpPr>
         <p:spPr>
           <a:xfrm>
-            <a:off x="253960" y="634900"/>
-            <a:ext cx="11682160" cy="1904700"/>
+            <a:off x="253960" y="698390"/>
+            <a:ext cx="11682160" cy="2031680"/>
           </a:xfrm>
           <a:prstGeom prst="roundRect">
             <a:avLst>
-              <a:gd name="adj" fmla="val 5333"/>
+              <a:gd name="adj" fmla="val 5000"/>
             </a:avLst>
           </a:prstGeom>
           <a:solidFill>
@@ -3189,8 +3189,8 @@
         </p:nvSpPr>
         <p:spPr>
           <a:xfrm>
-            <a:off x="406336" y="715532"/>
-            <a:ext cx="873241" cy="231103"/>
+            <a:off x="406336" y="1058378"/>
+            <a:ext cx="1544965" cy="408875"/>
           </a:xfrm>
           <a:prstGeom prst="rect">
             <a:avLst/>
@@ -3205,7 +3205,7 @@
           <a:p>
             <a:pPr algn="l"/>
             <a:r>
-              <a:rPr sz="1300" b="1">
+              <a:rPr sz="2300" b="1">
                 <a:solidFill>
                   <a:srgbClr val="374151"/>
                 </a:solidFill>
@@ -3224,8 +3224,8 @@
         </p:nvSpPr>
         <p:spPr>
           <a:xfrm>
-            <a:off x="1142820" y="748864"/>
-            <a:ext cx="10160336" cy="186660"/>
+            <a:off x="406336" y="1491380"/>
+            <a:ext cx="1329036" cy="195549"/>
           </a:xfrm>
           <a:prstGeom prst="rect">
             <a:avLst/>
@@ -3240,37 +3240,72 @@
           <a:p>
             <a:pPr algn="l"/>
             <a:r>
-              <a:rPr sz="1050" b="0">
+              <a:rPr sz="1100" b="0">
                 <a:solidFill>
                   <a:srgbClr val="4B5563"/>
                 </a:solidFill>
                 <a:latin typeface="Malgun Gothic"/>
               </a:rPr>
-              <a:t>24시간 교대 인력이 전 과정 수행 · 감지~재조정 1건 평균 5분 = 장비 idle · 주 400~500건 (400건 환산 시 약 33시간)</a:t>
+              <a:t>현업 담당자가</a:t>
             </a:r>
           </a:p>
         </p:txBody>
       </p:sp>
       <p:sp>
         <p:nvSpPr>
-          <p:cNvPr id="6" name="Rounded Rectangle 5"/>
+          <p:cNvPr id="6" name="TextBox 5"/>
+          <p:cNvSpPr txBox="1"/>
+          <p:nvPr/>
+        </p:nvSpPr>
+        <p:spPr>
+          <a:xfrm>
+            <a:off x="406336" y="1694548"/>
+            <a:ext cx="1247324" cy="195549"/>
+          </a:xfrm>
+          <a:prstGeom prst="rect">
+            <a:avLst/>
+          </a:prstGeom>
+          <a:noFill/>
+        </p:spPr>
+        <p:txBody>
+          <a:bodyPr wrap="none" lIns="0" rIns="0" tIns="0" bIns="0" anchor="t">
+            <a:spAutoFit/>
+          </a:bodyPr>
+          <a:lstStyle/>
+          <a:p>
+            <a:pPr algn="l"/>
+            <a:r>
+              <a:rPr sz="1100" b="0">
+                <a:solidFill>
+                  <a:srgbClr val="4B5563"/>
+                </a:solidFill>
+                <a:latin typeface="Malgun Gothic"/>
+              </a:rPr>
+              <a:t>전 과정 수행</a:t>
+            </a:r>
+          </a:p>
+        </p:txBody>
+      </p:sp>
+      <p:sp>
+        <p:nvSpPr>
+          <p:cNvPr id="7" name="Rounded Rectangle 6"/>
           <p:cNvSpPr/>
           <p:nvPr/>
         </p:nvSpPr>
         <p:spPr>
           <a:xfrm>
-            <a:off x="406336" y="1079330"/>
-            <a:ext cx="2095170" cy="660296"/>
+            <a:off x="2095170" y="952350"/>
+            <a:ext cx="1777720" cy="952350"/>
           </a:xfrm>
           <a:prstGeom prst="roundRect">
             <a:avLst>
-              <a:gd name="adj" fmla="val 9615"/>
+              <a:gd name="adj" fmla="val 8000"/>
             </a:avLst>
           </a:prstGeom>
           <a:solidFill>
             <a:srgbClr val="FFFFFF"/>
           </a:solidFill>
-          <a:ln w="12700">
+          <a:ln w="15240">
             <a:solidFill>
               <a:srgbClr val="6B7280"/>
             </a:solidFill>
@@ -3301,14 +3336,14 @@
       </p:sp>
       <p:sp>
         <p:nvSpPr>
-          <p:cNvPr id="7" name="TextBox 6"/>
+          <p:cNvPr id="8" name="TextBox 7"/>
           <p:cNvSpPr txBox="1"/>
           <p:nvPr/>
         </p:nvSpPr>
         <p:spPr>
           <a:xfrm>
-            <a:off x="448937" y="1199326"/>
-            <a:ext cx="2009966" cy="195549"/>
+            <a:off x="2189293" y="1165041"/>
+            <a:ext cx="1589472" cy="266658"/>
           </a:xfrm>
           <a:prstGeom prst="rect">
             <a:avLst/>
@@ -3323,27 +3358,27 @@
           <a:p>
             <a:pPr algn="ctr"/>
             <a:r>
-              <a:rPr sz="1100" b="0">
+              <a:rPr sz="1500" b="1">
                 <a:solidFill>
                   <a:srgbClr val="111827"/>
                 </a:solidFill>
                 <a:latin typeface="Malgun Gothic"/>
               </a:rPr>
-              <a:t>① 24시간 모니터 감시</a:t>
+              <a:t>24시간 감시</a:t>
             </a:r>
           </a:p>
         </p:txBody>
       </p:sp>
       <p:sp>
         <p:nvSpPr>
-          <p:cNvPr id="8" name="TextBox 7"/>
+          <p:cNvPr id="9" name="TextBox 8"/>
           <p:cNvSpPr txBox="1"/>
           <p:nvPr/>
         </p:nvSpPr>
         <p:spPr>
           <a:xfrm>
-            <a:off x="219389" y="1441857"/>
-            <a:ext cx="2469062" cy="159994"/>
+            <a:off x="2169453" y="1530109"/>
+            <a:ext cx="1629153" cy="177772"/>
           </a:xfrm>
           <a:prstGeom prst="rect">
             <a:avLst/>
@@ -3358,37 +3393,37 @@
           <a:p>
             <a:pPr algn="ctr"/>
             <a:r>
-              <a:rPr sz="900" b="0">
+              <a:rPr sz="1000" b="0">
                 <a:solidFill>
                   <a:srgbClr val="6B7280"/>
                 </a:solidFill>
                 <a:latin typeface="Malgun Gothic"/>
               </a:rPr>
-              <a:t>RCS 화면을 사람이 교대로 지켜봄</a:t>
+              <a:t>교대로 화면 지켜봄</a:t>
             </a:r>
           </a:p>
         </p:txBody>
       </p:sp>
       <p:sp>
         <p:nvSpPr>
-          <p:cNvPr id="9" name="Rounded Rectangle 8"/>
+          <p:cNvPr id="10" name="Rounded Rectangle 9"/>
           <p:cNvSpPr/>
           <p:nvPr/>
         </p:nvSpPr>
         <p:spPr>
           <a:xfrm>
-            <a:off x="2717372" y="1079330"/>
-            <a:ext cx="2095170" cy="660296"/>
+            <a:off x="4101454" y="952350"/>
+            <a:ext cx="1777720" cy="952350"/>
           </a:xfrm>
           <a:prstGeom prst="roundRect">
             <a:avLst>
-              <a:gd name="adj" fmla="val 9615"/>
+              <a:gd name="adj" fmla="val 8000"/>
             </a:avLst>
           </a:prstGeom>
           <a:solidFill>
             <a:srgbClr val="FFFFFF"/>
           </a:solidFill>
-          <a:ln w="12700">
+          <a:ln w="15240">
             <a:solidFill>
               <a:srgbClr val="6B7280"/>
             </a:solidFill>
@@ -3419,14 +3454,14 @@
       </p:sp>
       <p:sp>
         <p:nvSpPr>
-          <p:cNvPr id="10" name="TextBox 9"/>
+          <p:cNvPr id="11" name="TextBox 10"/>
           <p:cNvSpPr txBox="1"/>
           <p:nvPr/>
         </p:nvSpPr>
         <p:spPr>
           <a:xfrm>
-            <a:off x="2660104" y="1199326"/>
-            <a:ext cx="2209705" cy="195549"/>
+            <a:off x="4331763" y="1165041"/>
+            <a:ext cx="1317100" cy="266658"/>
           </a:xfrm>
           <a:prstGeom prst="rect">
             <a:avLst/>
@@ -3441,27 +3476,27 @@
           <a:p>
             <a:pPr algn="ctr"/>
             <a:r>
-              <a:rPr sz="1100" b="0">
+              <a:rPr sz="1500" b="1">
                 <a:solidFill>
                   <a:srgbClr val="111827"/>
                 </a:solidFill>
                 <a:latin typeface="Malgun Gothic"/>
               </a:rPr>
-              <a:t>② RCS 실행·로그인·접속</a:t>
+              <a:t>수동 접속</a:t>
             </a:r>
           </a:p>
         </p:txBody>
       </p:sp>
       <p:sp>
         <p:nvSpPr>
-          <p:cNvPr id="11" name="TextBox 10"/>
+          <p:cNvPr id="12" name="TextBox 11"/>
           <p:cNvSpPr txBox="1"/>
           <p:nvPr/>
         </p:nvSpPr>
         <p:spPr>
           <a:xfrm>
-            <a:off x="2652993" y="1441857"/>
-            <a:ext cx="2223927" cy="159994"/>
+            <a:off x="4076692" y="1530109"/>
+            <a:ext cx="1827242" cy="177772"/>
           </a:xfrm>
           <a:prstGeom prst="rect">
             <a:avLst/>
@@ -3476,37 +3511,37 @@
           <a:p>
             <a:pPr algn="ctr"/>
             <a:r>
-              <a:rPr sz="900" b="0">
+              <a:rPr sz="1000" b="0">
                 <a:solidFill>
                   <a:srgbClr val="6B7280"/>
                 </a:solidFill>
                 <a:latin typeface="Malgun Gothic"/>
               </a:rPr>
-              <a:t>장비 목록에서 해당 장비 탐색</a:t>
+              <a:t>RCS 로그인·장비 탐색</a:t>
             </a:r>
           </a:p>
         </p:txBody>
       </p:sp>
       <p:sp>
         <p:nvSpPr>
-          <p:cNvPr id="12" name="Rounded Rectangle 11"/>
+          <p:cNvPr id="13" name="Rounded Rectangle 12"/>
           <p:cNvSpPr/>
           <p:nvPr/>
         </p:nvSpPr>
         <p:spPr>
           <a:xfrm>
-            <a:off x="5028408" y="1079330"/>
-            <a:ext cx="2095170" cy="660296"/>
+            <a:off x="6107738" y="952350"/>
+            <a:ext cx="1777720" cy="952350"/>
           </a:xfrm>
           <a:prstGeom prst="roundRect">
             <a:avLst>
-              <a:gd name="adj" fmla="val 9615"/>
+              <a:gd name="adj" fmla="val 8000"/>
             </a:avLst>
           </a:prstGeom>
           <a:solidFill>
             <a:srgbClr val="FFFFFF"/>
           </a:solidFill>
-          <a:ln w="12700">
+          <a:ln w="15240">
             <a:solidFill>
               <a:srgbClr val="6B7280"/>
             </a:solidFill>
@@ -3537,14 +3572,14 @@
       </p:sp>
       <p:sp>
         <p:nvSpPr>
-          <p:cNvPr id="13" name="TextBox 12"/>
+          <p:cNvPr id="14" name="TextBox 13"/>
           <p:cNvSpPr txBox="1"/>
           <p:nvPr/>
         </p:nvSpPr>
         <p:spPr>
           <a:xfrm>
-            <a:off x="4993837" y="1199326"/>
-            <a:ext cx="2164310" cy="195549"/>
+            <a:off x="5898538" y="1165041"/>
+            <a:ext cx="2196119" cy="266658"/>
           </a:xfrm>
           <a:prstGeom prst="rect">
             <a:avLst/>
@@ -3559,27 +3594,27 @@
           <a:p>
             <a:pPr algn="ctr"/>
             <a:r>
-              <a:rPr sz="1100" b="0">
+              <a:rPr sz="1500" b="1">
                 <a:solidFill>
                   <a:srgbClr val="111827"/>
                 </a:solidFill>
                 <a:latin typeface="Malgun Gothic"/>
               </a:rPr>
-              <a:t>③ Align Key 육안 탐색</a:t>
+              <a:t>육안 탐색·재조정</a:t>
             </a:r>
           </a:p>
         </p:txBody>
       </p:sp>
       <p:sp>
         <p:nvSpPr>
-          <p:cNvPr id="14" name="TextBox 13"/>
+          <p:cNvPr id="15" name="TextBox 14"/>
           <p:cNvSpPr txBox="1"/>
           <p:nvPr/>
         </p:nvSpPr>
         <p:spPr>
           <a:xfrm>
-            <a:off x="5153451" y="1441857"/>
-            <a:ext cx="1845082" cy="159994"/>
+            <a:off x="6000439" y="1530109"/>
+            <a:ext cx="1992316" cy="177772"/>
           </a:xfrm>
           <a:prstGeom prst="rect">
             <a:avLst/>
@@ -3594,155 +3629,37 @@
           <a:p>
             <a:pPr algn="ctr"/>
             <a:r>
-              <a:rPr sz="900" b="0">
+              <a:rPr sz="1000" b="0">
                 <a:solidFill>
                   <a:srgbClr val="6B7280"/>
                 </a:solidFill>
                 <a:latin typeface="Malgun Gothic"/>
               </a:rPr>
-              <a:t>배율 바꿔가며 위치 찾기</a:t>
+              <a:t>배율 바꿔가며 Key 찾기</a:t>
             </a:r>
           </a:p>
         </p:txBody>
       </p:sp>
       <p:sp>
         <p:nvSpPr>
-          <p:cNvPr id="15" name="Rounded Rectangle 14"/>
+          <p:cNvPr id="16" name="Rounded Rectangle 15"/>
           <p:cNvSpPr/>
           <p:nvPr/>
         </p:nvSpPr>
         <p:spPr>
           <a:xfrm>
-            <a:off x="7339444" y="1079330"/>
-            <a:ext cx="2095170" cy="660296"/>
+            <a:off x="8114022" y="952350"/>
+            <a:ext cx="1777720" cy="952350"/>
           </a:xfrm>
           <a:prstGeom prst="roundRect">
             <a:avLst>
-              <a:gd name="adj" fmla="val 9615"/>
+              <a:gd name="adj" fmla="val 8000"/>
             </a:avLst>
           </a:prstGeom>
           <a:solidFill>
             <a:srgbClr val="FFFFFF"/>
           </a:solidFill>
-          <a:ln w="12700">
-            <a:solidFill>
-              <a:srgbClr val="6B7280"/>
-            </a:solidFill>
-          </a:ln>
-          <a:effectLst/>
-        </p:spPr>
-        <p:style>
-          <a:lnRef idx="1">
-            <a:schemeClr val="accent1"/>
-          </a:lnRef>
-          <a:fillRef idx="3">
-            <a:schemeClr val="accent1"/>
-          </a:fillRef>
-          <a:effectRef idx="2">
-            <a:schemeClr val="accent1"/>
-          </a:effectRef>
-          <a:fontRef idx="minor">
-            <a:schemeClr val="lt1"/>
-          </a:fontRef>
-        </p:style>
-        <p:txBody>
-          <a:bodyPr rtlCol="0" anchor="ctr"/>
-          <a:lstStyle/>
-          <a:p>
-            <a:pPr algn="ctr"/>
-          </a:p>
-        </p:txBody>
-      </p:sp>
-      <p:sp>
-        <p:nvSpPr>
-          <p:cNvPr id="16" name="TextBox 15"/>
-          <p:cNvSpPr txBox="1"/>
-          <p:nvPr/>
-        </p:nvSpPr>
-        <p:spPr>
-          <a:xfrm>
-            <a:off x="7341189" y="1199326"/>
-            <a:ext cx="2091678" cy="195549"/>
-          </a:xfrm>
-          <a:prstGeom prst="rect">
-            <a:avLst/>
-          </a:prstGeom>
-          <a:noFill/>
-        </p:spPr>
-        <p:txBody>
-          <a:bodyPr wrap="none" lIns="0" rIns="0" tIns="0" bIns="0" anchor="t">
-            <a:spAutoFit/>
-          </a:bodyPr>
-          <a:lstStyle/>
-          <a:p>
-            <a:pPr algn="ctr"/>
-            <a:r>
-              <a:rPr sz="1100" b="0">
-                <a:solidFill>
-                  <a:srgbClr val="111827"/>
-                </a:solidFill>
-                <a:latin typeface="Malgun Gothic"/>
-              </a:rPr>
-              <a:t>④ 화면 재조정 후 확정</a:t>
-            </a:r>
-          </a:p>
-        </p:txBody>
-      </p:sp>
-      <p:sp>
-        <p:nvSpPr>
-          <p:cNvPr id="17" name="TextBox 16"/>
-          <p:cNvSpPr txBox="1"/>
-          <p:nvPr/>
-        </p:nvSpPr>
-        <p:spPr>
-          <a:xfrm>
-            <a:off x="7464487" y="1441857"/>
-            <a:ext cx="1845082" cy="159994"/>
-          </a:xfrm>
-          <a:prstGeom prst="rect">
-            <a:avLst/>
-          </a:prstGeom>
-          <a:noFill/>
-        </p:spPr>
-        <p:txBody>
-          <a:bodyPr wrap="none" lIns="0" rIns="0" tIns="0" bIns="0" anchor="t">
-            <a:spAutoFit/>
-          </a:bodyPr>
-          <a:lstStyle/>
-          <a:p>
-            <a:pPr algn="ctr"/>
-            <a:r>
-              <a:rPr sz="900" b="0">
-                <a:solidFill>
-                  <a:srgbClr val="6B7280"/>
-                </a:solidFill>
-                <a:latin typeface="Malgun Gothic"/>
-              </a:rPr>
-              <a:t>위치 정밀도가 손에 좌우</a:t>
-            </a:r>
-          </a:p>
-        </p:txBody>
-      </p:sp>
-      <p:sp>
-        <p:nvSpPr>
-          <p:cNvPr id="18" name="Rounded Rectangle 17"/>
-          <p:cNvSpPr/>
-          <p:nvPr/>
-        </p:nvSpPr>
-        <p:spPr>
-          <a:xfrm>
-            <a:off x="9650480" y="1079330"/>
-            <a:ext cx="2095170" cy="660296"/>
-          </a:xfrm>
-          <a:prstGeom prst="roundRect">
-            <a:avLst>
-              <a:gd name="adj" fmla="val 9615"/>
-            </a:avLst>
-          </a:prstGeom>
-          <a:solidFill>
-            <a:srgbClr val="FFFFFF"/>
-          </a:solidFill>
-          <a:ln w="12700">
+          <a:ln w="15240">
             <a:solidFill>
               <a:srgbClr val="9CA3AF"/>
             </a:solidFill>
@@ -3774,14 +3691,14 @@
       </p:sp>
       <p:sp>
         <p:nvSpPr>
-          <p:cNvPr id="19" name="TextBox 18"/>
+          <p:cNvPr id="17" name="TextBox 16"/>
           <p:cNvSpPr txBox="1"/>
           <p:nvPr/>
         </p:nvSpPr>
         <p:spPr>
           <a:xfrm>
-            <a:off x="10346774" y="1199326"/>
-            <a:ext cx="702580" cy="195549"/>
+            <a:off x="8660036" y="1165041"/>
+            <a:ext cx="685692" cy="266658"/>
           </a:xfrm>
           <a:prstGeom prst="rect">
             <a:avLst/>
@@ -3796,27 +3713,27 @@
           <a:p>
             <a:pPr algn="ctr"/>
             <a:r>
-              <a:rPr sz="1100" b="0">
+              <a:rPr sz="1500" b="1">
                 <a:solidFill>
-                  <a:srgbClr val="6B7280"/>
+                  <a:srgbClr val="111827"/>
                 </a:solidFill>
                 <a:latin typeface="Malgun Gothic"/>
               </a:rPr>
-              <a:t>⑤ 기록</a:t>
+              <a:t>확정</a:t>
             </a:r>
           </a:p>
         </p:txBody>
       </p:sp>
       <p:sp>
         <p:nvSpPr>
-          <p:cNvPr id="20" name="TextBox 19"/>
+          <p:cNvPr id="18" name="TextBox 17"/>
           <p:cNvSpPr txBox="1"/>
           <p:nvPr/>
         </p:nvSpPr>
         <p:spPr>
           <a:xfrm>
-            <a:off x="10492357" y="1441857"/>
-            <a:ext cx="411415" cy="159994"/>
+            <a:off x="8563848" y="1530109"/>
+            <a:ext cx="878066" cy="177772"/>
           </a:xfrm>
           <a:prstGeom prst="rect">
             <a:avLst/>
@@ -3831,32 +3748,32 @@
           <a:p>
             <a:pPr algn="ctr"/>
             <a:r>
-              <a:rPr sz="900" b="0">
+              <a:rPr sz="1000" b="0">
                 <a:solidFill>
-                  <a:srgbClr val="6B7280"/>
+                  <a:srgbClr val="B91C1C"/>
                 </a:solidFill>
                 <a:latin typeface="Malgun Gothic"/>
               </a:rPr>
-              <a:t>없음</a:t>
+              <a:t>기록 없음</a:t>
             </a:r>
           </a:p>
         </p:txBody>
       </p:sp>
       <p:cxnSp>
         <p:nvCxnSpPr>
-          <p:cNvPr id="21" name="Connector 20"/>
+          <p:cNvPr id="19" name="Connector 18"/>
           <p:cNvCxnSpPr/>
           <p:nvPr/>
         </p:nvCxnSpPr>
         <p:spPr>
           <a:xfrm>
-            <a:off x="2514204.0" y="1409478.0"/>
-            <a:ext cx="139678.0" cy="0.0"/>
+            <a:off x="3872890.0" y="1428525.0"/>
+            <a:ext cx="126980.0" cy="0.0"/>
           </a:xfrm>
           <a:prstGeom prst="line">
             <a:avLst/>
           </a:prstGeom>
-          <a:ln w="12700">
+          <a:ln w="15240">
             <a:solidFill>
               <a:srgbClr val="6B7280"/>
             </a:solidFill>
@@ -3879,14 +3796,14 @@
       </p:cxnSp>
       <p:sp>
         <p:nvSpPr>
-          <p:cNvPr id="22" name="Freeform 21"/>
+          <p:cNvPr id="20" name="Freeform 19"/>
           <p:cNvSpPr/>
           <p:nvPr/>
         </p:nvSpPr>
         <p:spPr>
           <a:xfrm>
-            <a:off x="2628486" y="1358686"/>
-            <a:ext cx="88886" cy="101584"/>
+            <a:off x="3974474" y="1371384"/>
+            <a:ext cx="126980" cy="114282"/>
           </a:xfrm>
           <a:custGeom>
             <a:avLst/>
@@ -3895,15 +3812,15 @@
             <a:cxnLst/>
             <a:rect l="l" t="t" r="r" b="b"/>
             <a:pathLst>
-              <a:path w="14" h="16">
+              <a:path w="20" h="18">
                 <a:moveTo>
                   <a:pt x="0" y="0"/>
                 </a:moveTo>
                 <a:lnTo>
-                  <a:pt x="14" y="8"/>
+                  <a:pt x="20" y="9"/>
                 </a:lnTo>
                 <a:lnTo>
-                  <a:pt x="0" y="16"/>
+                  <a:pt x="0" y="18"/>
                 </a:lnTo>
                 <a:close/>
               </a:path>
@@ -3941,19 +3858,19 @@
       </p:sp>
       <p:cxnSp>
         <p:nvCxnSpPr>
-          <p:cNvPr id="23" name="Connector 22"/>
+          <p:cNvPr id="21" name="Connector 20"/>
           <p:cNvCxnSpPr/>
           <p:nvPr/>
         </p:nvCxnSpPr>
         <p:spPr>
           <a:xfrm>
-            <a:off x="4825240.0" y="1409478.0"/>
-            <a:ext cx="139678.0" cy="0.0"/>
+            <a:off x="5879174.0" y="1428525.0"/>
+            <a:ext cx="126980.0" cy="0.0"/>
           </a:xfrm>
           <a:prstGeom prst="line">
             <a:avLst/>
           </a:prstGeom>
-          <a:ln w="12700">
+          <a:ln w="15240">
             <a:solidFill>
               <a:srgbClr val="6B7280"/>
             </a:solidFill>
@@ -3976,14 +3893,14 @@
       </p:cxnSp>
       <p:sp>
         <p:nvSpPr>
-          <p:cNvPr id="24" name="Freeform 23"/>
+          <p:cNvPr id="22" name="Freeform 21"/>
           <p:cNvSpPr/>
           <p:nvPr/>
         </p:nvSpPr>
         <p:spPr>
           <a:xfrm>
-            <a:off x="4939522" y="1358686"/>
-            <a:ext cx="88886" cy="101584"/>
+            <a:off x="5980758" y="1371384"/>
+            <a:ext cx="126980" cy="114282"/>
           </a:xfrm>
           <a:custGeom>
             <a:avLst/>
@@ -3992,15 +3909,15 @@
             <a:cxnLst/>
             <a:rect l="l" t="t" r="r" b="b"/>
             <a:pathLst>
-              <a:path w="14" h="16">
+              <a:path w="20" h="18">
                 <a:moveTo>
                   <a:pt x="0" y="0"/>
                 </a:moveTo>
                 <a:lnTo>
-                  <a:pt x="14" y="8"/>
+                  <a:pt x="20" y="9"/>
                 </a:lnTo>
                 <a:lnTo>
-                  <a:pt x="0" y="16"/>
+                  <a:pt x="0" y="18"/>
                 </a:lnTo>
                 <a:close/>
               </a:path>
@@ -4038,19 +3955,19 @@
       </p:sp>
       <p:cxnSp>
         <p:nvCxnSpPr>
-          <p:cNvPr id="25" name="Connector 24"/>
+          <p:cNvPr id="23" name="Connector 22"/>
           <p:cNvCxnSpPr/>
           <p:nvPr/>
         </p:nvCxnSpPr>
         <p:spPr>
           <a:xfrm>
-            <a:off x="7136276.0" y="1409478.0"/>
-            <a:ext cx="139678.0" cy="0.0"/>
+            <a:off x="7885458.0" y="1428525.0"/>
+            <a:ext cx="126980.0" cy="0.0"/>
           </a:xfrm>
           <a:prstGeom prst="line">
             <a:avLst/>
           </a:prstGeom>
-          <a:ln w="12700">
+          <a:ln w="15240">
             <a:solidFill>
               <a:srgbClr val="6B7280"/>
             </a:solidFill>
@@ -4073,14 +3990,14 @@
       </p:cxnSp>
       <p:sp>
         <p:nvSpPr>
-          <p:cNvPr id="26" name="Freeform 25"/>
+          <p:cNvPr id="24" name="Freeform 23"/>
           <p:cNvSpPr/>
           <p:nvPr/>
         </p:nvSpPr>
         <p:spPr>
           <a:xfrm>
-            <a:off x="7250558" y="1358686"/>
-            <a:ext cx="88886" cy="101584"/>
+            <a:off x="7987042" y="1371384"/>
+            <a:ext cx="126980" cy="114282"/>
           </a:xfrm>
           <a:custGeom>
             <a:avLst/>
@@ -4089,15 +4006,15 @@
             <a:cxnLst/>
             <a:rect l="l" t="t" r="r" b="b"/>
             <a:pathLst>
-              <a:path w="14" h="16">
+              <a:path w="20" h="18">
                 <a:moveTo>
                   <a:pt x="0" y="0"/>
                 </a:moveTo>
                 <a:lnTo>
-                  <a:pt x="14" y="8"/>
+                  <a:pt x="20" y="9"/>
                 </a:lnTo>
                 <a:lnTo>
-                  <a:pt x="0" y="16"/>
+                  <a:pt x="0" y="18"/>
                 </a:lnTo>
                 <a:close/>
               </a:path>
@@ -4133,24 +4050,254 @@
           </a:p>
         </p:txBody>
       </p:sp>
+      <p:sp>
+        <p:nvSpPr>
+          <p:cNvPr id="25" name="Rounded Rectangle 24"/>
+          <p:cNvSpPr/>
+          <p:nvPr/>
+        </p:nvSpPr>
+        <p:spPr>
+          <a:xfrm>
+            <a:off x="10158400" y="952350"/>
+            <a:ext cx="1777720" cy="952350"/>
+          </a:xfrm>
+          <a:prstGeom prst="roundRect">
+            <a:avLst>
+              <a:gd name="adj" fmla="val 8000"/>
+            </a:avLst>
+          </a:prstGeom>
+          <a:solidFill>
+            <a:srgbClr val="374151"/>
+          </a:solidFill>
+          <a:ln>
+            <a:noFill/>
+          </a:ln>
+          <a:effectLst/>
+        </p:spPr>
+        <p:style>
+          <a:lnRef idx="1">
+            <a:schemeClr val="accent1"/>
+          </a:lnRef>
+          <a:fillRef idx="3">
+            <a:schemeClr val="accent1"/>
+          </a:fillRef>
+          <a:effectRef idx="2">
+            <a:schemeClr val="accent1"/>
+          </a:effectRef>
+          <a:fontRef idx="minor">
+            <a:schemeClr val="lt1"/>
+          </a:fontRef>
+        </p:style>
+        <p:txBody>
+          <a:bodyPr rtlCol="0" anchor="ctr"/>
+          <a:lstStyle/>
+          <a:p>
+            <a:pPr algn="ctr"/>
+          </a:p>
+        </p:txBody>
+      </p:sp>
+      <p:sp>
+        <p:nvSpPr>
+          <p:cNvPr id="26" name="TextBox 25"/>
+          <p:cNvSpPr txBox="1"/>
+          <p:nvPr/>
+        </p:nvSpPr>
+        <p:spPr>
+          <a:xfrm>
+            <a:off x="9816823" y="1060283"/>
+            <a:ext cx="2460872" cy="533316"/>
+          </a:xfrm>
+          <a:prstGeom prst="rect">
+            <a:avLst/>
+          </a:prstGeom>
+          <a:noFill/>
+        </p:spPr>
+        <p:txBody>
+          <a:bodyPr wrap="none" lIns="0" rIns="0" tIns="0" bIns="0" anchor="t">
+            <a:spAutoFit/>
+          </a:bodyPr>
+          <a:lstStyle/>
+          <a:p>
+            <a:pPr algn="ctr"/>
+            <a:r>
+              <a:rPr sz="3000" b="1">
+                <a:solidFill>
+                  <a:srgbClr val="FFFFFF"/>
+                </a:solidFill>
+                <a:latin typeface="Malgun Gothic"/>
+              </a:rPr>
+              <a:t>5분 / 건</a:t>
+            </a:r>
+          </a:p>
+        </p:txBody>
+      </p:sp>
+      <p:sp>
+        <p:nvSpPr>
+          <p:cNvPr id="27" name="TextBox 26"/>
+          <p:cNvSpPr txBox="1"/>
+          <p:nvPr/>
+        </p:nvSpPr>
+        <p:spPr>
+          <a:xfrm>
+            <a:off x="9815300" y="1599313"/>
+            <a:ext cx="2463919" cy="195549"/>
+          </a:xfrm>
+          <a:prstGeom prst="rect">
+            <a:avLst/>
+          </a:prstGeom>
+          <a:noFill/>
+        </p:spPr>
+        <p:txBody>
+          <a:bodyPr wrap="none" lIns="0" rIns="0" tIns="0" bIns="0" anchor="t">
+            <a:spAutoFit/>
+          </a:bodyPr>
+          <a:lstStyle/>
+          <a:p>
+            <a:pPr algn="ctr"/>
+            <a:r>
+              <a:rPr sz="1100" b="0">
+                <a:solidFill>
+                  <a:srgbClr val="D1D5DB"/>
+                </a:solidFill>
+                <a:latin typeface="Malgun Gothic"/>
+              </a:rPr>
+              <a:t>주 400~500건 · 장비 idle</a:t>
+            </a:r>
+          </a:p>
+        </p:txBody>
+      </p:sp>
+      <p:sp>
+        <p:nvSpPr>
+          <p:cNvPr id="28" name="TextBox 27"/>
+          <p:cNvSpPr txBox="1"/>
+          <p:nvPr/>
+        </p:nvSpPr>
+        <p:spPr>
+          <a:xfrm>
+            <a:off x="2856796" y="2189135"/>
+            <a:ext cx="6273319" cy="213326"/>
+          </a:xfrm>
+          <a:prstGeom prst="rect">
+            <a:avLst/>
+          </a:prstGeom>
+          <a:noFill/>
+        </p:spPr>
+        <p:txBody>
+          <a:bodyPr wrap="none" lIns="0" rIns="0" tIns="0" bIns="0" anchor="t">
+            <a:spAutoFit/>
+          </a:bodyPr>
+          <a:lstStyle/>
+          <a:p>
+            <a:pPr algn="ctr"/>
+            <a:r>
+              <a:rPr sz="1200" b="0">
+                <a:solidFill>
+                  <a:srgbClr val="B91C1C"/>
+                </a:solidFill>
+                <a:latin typeface="Malgun Gothic"/>
+              </a:rPr>
+              <a:t>병목 : 확인 주기 · 매 건 반복 조작 · 숙련도 편차 · 기록 없음</a:t>
+            </a:r>
+          </a:p>
+        </p:txBody>
+      </p:sp>
+      <p:sp>
+        <p:nvSpPr>
+          <p:cNvPr id="29" name="Rounded Rectangle 28"/>
+          <p:cNvSpPr/>
+          <p:nvPr/>
+        </p:nvSpPr>
+        <p:spPr>
+          <a:xfrm>
+            <a:off x="4063360" y="2933238"/>
+            <a:ext cx="4063360" cy="330148"/>
+          </a:xfrm>
+          <a:prstGeom prst="roundRect">
+            <a:avLst>
+              <a:gd name="adj" fmla="val 50000"/>
+            </a:avLst>
+          </a:prstGeom>
+          <a:solidFill>
+            <a:srgbClr val="DBEAFE"/>
+          </a:solidFill>
+          <a:ln>
+            <a:noFill/>
+          </a:ln>
+          <a:effectLst/>
+        </p:spPr>
+        <p:style>
+          <a:lnRef idx="1">
+            <a:schemeClr val="accent1"/>
+          </a:lnRef>
+          <a:fillRef idx="3">
+            <a:schemeClr val="accent1"/>
+          </a:fillRef>
+          <a:effectRef idx="2">
+            <a:schemeClr val="accent1"/>
+          </a:effectRef>
+          <a:fontRef idx="minor">
+            <a:schemeClr val="lt1"/>
+          </a:fontRef>
+        </p:style>
+        <p:txBody>
+          <a:bodyPr rtlCol="0" anchor="ctr"/>
+          <a:lstStyle/>
+          <a:p>
+            <a:pPr algn="ctr"/>
+          </a:p>
+        </p:txBody>
+      </p:sp>
+      <p:sp>
+        <p:nvSpPr>
+          <p:cNvPr id="30" name="TextBox 29"/>
+          <p:cNvSpPr txBox="1"/>
+          <p:nvPr/>
+        </p:nvSpPr>
+        <p:spPr>
+          <a:xfrm>
+            <a:off x="3716323" y="2982125"/>
+            <a:ext cx="4757432" cy="231103"/>
+          </a:xfrm>
+          <a:prstGeom prst="rect">
+            <a:avLst/>
+          </a:prstGeom>
+          <a:noFill/>
+        </p:spPr>
+        <p:txBody>
+          <a:bodyPr wrap="none" lIns="0" rIns="0" tIns="0" bIns="0" anchor="t">
+            <a:spAutoFit/>
+          </a:bodyPr>
+          <a:lstStyle/>
+          <a:p>
+            <a:pPr algn="ctr"/>
+            <a:r>
+              <a:rPr sz="1300" b="1">
+                <a:solidFill>
+                  <a:srgbClr val="1D4ED8"/>
+                </a:solidFill>
+                <a:latin typeface="Malgun Gothic"/>
+              </a:rPr>
+              <a:t>AI Agent 도입 : VLM · OCR · CV 역할 분리</a:t>
+            </a:r>
+          </a:p>
+        </p:txBody>
+      </p:sp>
       <p:cxnSp>
         <p:nvCxnSpPr>
-          <p:cNvPr id="27" name="Connector 26"/>
+          <p:cNvPr id="31" name="Connector 30"/>
           <p:cNvCxnSpPr/>
           <p:nvPr/>
         </p:nvCxnSpPr>
         <p:spPr>
           <a:xfrm>
-            <a:off x="9447312.0" y="1409478.0"/>
-            <a:ext cx="139678.0" cy="0.0"/>
+            <a:off x="6095040.0" y="3276084.0"/>
+            <a:ext cx="0.0" cy="76188.0"/>
           </a:xfrm>
           <a:prstGeom prst="line">
             <a:avLst/>
           </a:prstGeom>
-          <a:ln w="12700">
-            <a:solidFill>
-              <a:srgbClr val="6B7280"/>
-            </a:solidFill>
+          <a:ln>
+            <a:noFill/>
           </a:ln>
         </p:spPr>
         <p:style>
@@ -4170,14 +4317,14 @@
       </p:cxnSp>
       <p:sp>
         <p:nvSpPr>
-          <p:cNvPr id="28" name="Freeform 27"/>
+          <p:cNvPr id="32" name="Freeform 31"/>
           <p:cNvSpPr/>
           <p:nvPr/>
         </p:nvSpPr>
         <p:spPr>
           <a:xfrm>
-            <a:off x="9561594" y="1358686"/>
-            <a:ext cx="88886" cy="101584"/>
+            <a:off x="6018852" y="3339574"/>
+            <a:ext cx="152376" cy="101584"/>
           </a:xfrm>
           <a:custGeom>
             <a:avLst/>
@@ -4186,497 +4333,15 @@
             <a:cxnLst/>
             <a:rect l="l" t="t" r="r" b="b"/>
             <a:pathLst>
-              <a:path w="14" h="16">
+              <a:path w="24" h="16">
                 <a:moveTo>
                   <a:pt x="0" y="0"/>
                 </a:moveTo>
                 <a:lnTo>
-                  <a:pt x="14" y="8"/>
+                  <a:pt x="12" y="16"/>
                 </a:lnTo>
                 <a:lnTo>
-                  <a:pt x="0" y="16"/>
-                </a:lnTo>
-                <a:close/>
-              </a:path>
-            </a:pathLst>
-          </a:custGeom>
-          <a:solidFill>
-            <a:srgbClr val="6B7280"/>
-          </a:solidFill>
-          <a:ln>
-            <a:noFill/>
-          </a:ln>
-          <a:effectLst/>
-        </p:spPr>
-        <p:style>
-          <a:lnRef idx="1">
-            <a:schemeClr val="accent1"/>
-          </a:lnRef>
-          <a:fillRef idx="3">
-            <a:schemeClr val="accent1"/>
-          </a:fillRef>
-          <a:effectRef idx="2">
-            <a:schemeClr val="accent1"/>
-          </a:effectRef>
-          <a:fontRef idx="minor">
-            <a:schemeClr val="lt1"/>
-          </a:fontRef>
-        </p:style>
-        <p:txBody>
-          <a:bodyPr rtlCol="0" anchor="ctr"/>
-          <a:lstStyle/>
-          <a:p>
-            <a:pPr algn="ctr"/>
-          </a:p>
-        </p:txBody>
-      </p:sp>
-      <p:sp>
-        <p:nvSpPr>
-          <p:cNvPr id="29" name="TextBox 28"/>
-          <p:cNvSpPr txBox="1"/>
-          <p:nvPr/>
-        </p:nvSpPr>
-        <p:spPr>
-          <a:xfrm>
-            <a:off x="564807" y="1860891"/>
-            <a:ext cx="1778227" cy="159994"/>
-          </a:xfrm>
-          <a:prstGeom prst="rect">
-            <a:avLst/>
-          </a:prstGeom>
-          <a:noFill/>
-        </p:spPr>
-        <p:txBody>
-          <a:bodyPr wrap="none" lIns="0" rIns="0" tIns="0" bIns="0" anchor="t">
-            <a:spAutoFit/>
-          </a:bodyPr>
-          <a:lstStyle/>
-          <a:p>
-            <a:pPr algn="ctr"/>
-            <a:r>
-              <a:rPr sz="900" b="0">
-                <a:solidFill>
-                  <a:srgbClr val="B91C1C"/>
-                </a:solidFill>
-                <a:latin typeface="Malgun Gothic"/>
-              </a:rPr>
-              <a:t>병목: 사람의 확인 주기</a:t>
-            </a:r>
-          </a:p>
-        </p:txBody>
-      </p:sp>
-      <p:sp>
-        <p:nvSpPr>
-          <p:cNvPr id="30" name="TextBox 29"/>
-          <p:cNvSpPr txBox="1"/>
-          <p:nvPr/>
-        </p:nvSpPr>
-        <p:spPr>
-          <a:xfrm>
-            <a:off x="178533" y="2038663"/>
-            <a:ext cx="2550774" cy="159994"/>
-          </a:xfrm>
-          <a:prstGeom prst="rect">
-            <a:avLst/>
-          </a:prstGeom>
-          <a:noFill/>
-        </p:spPr>
-        <p:txBody>
-          <a:bodyPr wrap="none" lIns="0" rIns="0" tIns="0" bIns="0" anchor="t">
-            <a:spAutoFit/>
-          </a:bodyPr>
-          <a:lstStyle/>
-          <a:p>
-            <a:pPr algn="ctr"/>
-            <a:r>
-              <a:rPr sz="900" b="0">
-                <a:solidFill>
-                  <a:srgbClr val="B91C1C"/>
-                </a:solidFill>
-                <a:latin typeface="Malgun Gothic"/>
-              </a:rPr>
-              <a:t>24시간 교대 인력, 인계 구간 지연</a:t>
-            </a:r>
-          </a:p>
-        </p:txBody>
-      </p:sp>
-      <p:sp>
-        <p:nvSpPr>
-          <p:cNvPr id="31" name="TextBox 30"/>
-          <p:cNvSpPr txBox="1"/>
-          <p:nvPr/>
-        </p:nvSpPr>
-        <p:spPr>
-          <a:xfrm>
-            <a:off x="2719848" y="1860891"/>
-            <a:ext cx="2090217" cy="159994"/>
-          </a:xfrm>
-          <a:prstGeom prst="rect">
-            <a:avLst/>
-          </a:prstGeom>
-          <a:noFill/>
-        </p:spPr>
-        <p:txBody>
-          <a:bodyPr wrap="none" lIns="0" rIns="0" tIns="0" bIns="0" anchor="t">
-            <a:spAutoFit/>
-          </a:bodyPr>
-          <a:lstStyle/>
-          <a:p>
-            <a:pPr algn="ctr"/>
-            <a:r>
-              <a:rPr sz="900" b="0">
-                <a:solidFill>
-                  <a:srgbClr val="B91C1C"/>
-                </a:solidFill>
-                <a:latin typeface="Malgun Gothic"/>
-              </a:rPr>
-              <a:t>병목: 매 건 같은 조작 반복</a:t>
-            </a:r>
-          </a:p>
-        </p:txBody>
-      </p:sp>
-      <p:sp>
-        <p:nvSpPr>
-          <p:cNvPr id="32" name="TextBox 31"/>
-          <p:cNvSpPr txBox="1"/>
-          <p:nvPr/>
-        </p:nvSpPr>
-        <p:spPr>
-          <a:xfrm>
-            <a:off x="2400429" y="2038663"/>
-            <a:ext cx="2729054" cy="159994"/>
-          </a:xfrm>
-          <a:prstGeom prst="rect">
-            <a:avLst/>
-          </a:prstGeom>
-          <a:noFill/>
-        </p:spPr>
-        <p:txBody>
-          <a:bodyPr wrap="none" lIns="0" rIns="0" tIns="0" bIns="0" anchor="t">
-            <a:spAutoFit/>
-          </a:bodyPr>
-          <a:lstStyle/>
-          <a:p>
-            <a:pPr algn="ctr"/>
-            <a:r>
-              <a:rPr sz="900" b="0">
-                <a:solidFill>
-                  <a:srgbClr val="B91C1C"/>
-                </a:solidFill>
-                <a:latin typeface="Malgun Gothic"/>
-              </a:rPr>
-              <a:t>비표준 UI → 기존 UI 인식 도구 실패</a:t>
-            </a:r>
-          </a:p>
-        </p:txBody>
-      </p:sp>
-      <p:sp>
-        <p:nvSpPr>
-          <p:cNvPr id="33" name="TextBox 32"/>
-          <p:cNvSpPr txBox="1"/>
-          <p:nvPr/>
-        </p:nvSpPr>
-        <p:spPr>
-          <a:xfrm>
-            <a:off x="5376301" y="1860891"/>
-            <a:ext cx="1399383" cy="159994"/>
-          </a:xfrm>
-          <a:prstGeom prst="rect">
-            <a:avLst/>
-          </a:prstGeom>
-          <a:noFill/>
-        </p:spPr>
-        <p:txBody>
-          <a:bodyPr wrap="none" lIns="0" rIns="0" tIns="0" bIns="0" anchor="t">
-            <a:spAutoFit/>
-          </a:bodyPr>
-          <a:lstStyle/>
-          <a:p>
-            <a:pPr algn="ctr"/>
-            <a:r>
-              <a:rPr sz="900" b="0">
-                <a:solidFill>
-                  <a:srgbClr val="B91C1C"/>
-                </a:solidFill>
-                <a:latin typeface="Malgun Gothic"/>
-              </a:rPr>
-              <a:t>병목: 숙련도 편차</a:t>
-            </a:r>
-          </a:p>
-        </p:txBody>
-      </p:sp>
-      <p:sp>
-        <p:nvSpPr>
-          <p:cNvPr id="34" name="TextBox 33"/>
-          <p:cNvSpPr txBox="1"/>
-          <p:nvPr/>
-        </p:nvSpPr>
-        <p:spPr>
-          <a:xfrm>
-            <a:off x="4990028" y="2038663"/>
-            <a:ext cx="2171929" cy="159994"/>
-          </a:xfrm>
-          <a:prstGeom prst="rect">
-            <a:avLst/>
-          </a:prstGeom>
-          <a:noFill/>
-        </p:spPr>
-        <p:txBody>
-          <a:bodyPr wrap="none" lIns="0" rIns="0" tIns="0" bIns="0" anchor="t">
-            <a:spAutoFit/>
-          </a:bodyPr>
-          <a:lstStyle/>
-          <a:p>
-            <a:pPr algn="ctr"/>
-            <a:r>
-              <a:rPr sz="900" b="0">
-                <a:solidFill>
-                  <a:srgbClr val="B91C1C"/>
-                </a:solidFill>
-                <a:latin typeface="Malgun Gothic"/>
-              </a:rPr>
-              <a:t>헷갈리는 Key 는 사람도 오판</a:t>
-            </a:r>
-          </a:p>
-        </p:txBody>
-      </p:sp>
-      <p:sp>
-        <p:nvSpPr>
-          <p:cNvPr id="35" name="TextBox 34"/>
-          <p:cNvSpPr txBox="1"/>
-          <p:nvPr/>
-        </p:nvSpPr>
-        <p:spPr>
-          <a:xfrm>
-            <a:off x="7423631" y="1860891"/>
-            <a:ext cx="1926794" cy="159994"/>
-          </a:xfrm>
-          <a:prstGeom prst="rect">
-            <a:avLst/>
-          </a:prstGeom>
-          <a:noFill/>
-        </p:spPr>
-        <p:txBody>
-          <a:bodyPr wrap="none" lIns="0" rIns="0" tIns="0" bIns="0" anchor="t">
-            <a:spAutoFit/>
-          </a:bodyPr>
-          <a:lstStyle/>
-          <a:p>
-            <a:pPr algn="ctr"/>
-            <a:r>
-              <a:rPr sz="900" b="0">
-                <a:solidFill>
-                  <a:srgbClr val="B91C1C"/>
-                </a:solidFill>
-                <a:latin typeface="Malgun Gothic"/>
-              </a:rPr>
-              <a:t>병목: 매번 달라지는 정답</a:t>
-            </a:r>
-          </a:p>
-        </p:txBody>
-      </p:sp>
-      <p:sp>
-        <p:nvSpPr>
-          <p:cNvPr id="36" name="TextBox 35"/>
-          <p:cNvSpPr txBox="1"/>
-          <p:nvPr/>
-        </p:nvSpPr>
-        <p:spPr>
-          <a:xfrm>
-            <a:off x="7349348" y="2038663"/>
-            <a:ext cx="2075361" cy="159994"/>
-          </a:xfrm>
-          <a:prstGeom prst="rect">
-            <a:avLst/>
-          </a:prstGeom>
-          <a:noFill/>
-        </p:spPr>
-        <p:txBody>
-          <a:bodyPr wrap="none" lIns="0" rIns="0" tIns="0" bIns="0" anchor="t">
-            <a:spAutoFit/>
-          </a:bodyPr>
-          <a:lstStyle/>
-          <a:p>
-            <a:pPr algn="ctr"/>
-            <a:r>
-              <a:rPr sz="900" b="0">
-                <a:solidFill>
-                  <a:srgbClr val="B91C1C"/>
-                </a:solidFill>
-                <a:latin typeface="Malgun Gothic"/>
-              </a:rPr>
-              <a:t>고정 좌표 스크립트로 못 풂</a:t>
-            </a:r>
-          </a:p>
-        </p:txBody>
-      </p:sp>
-      <p:sp>
-        <p:nvSpPr>
-          <p:cNvPr id="37" name="TextBox 36"/>
-          <p:cNvSpPr txBox="1"/>
-          <p:nvPr/>
-        </p:nvSpPr>
-        <p:spPr>
-          <a:xfrm>
-            <a:off x="10072656" y="1860891"/>
-            <a:ext cx="1250816" cy="159994"/>
-          </a:xfrm>
-          <a:prstGeom prst="rect">
-            <a:avLst/>
-          </a:prstGeom>
-          <a:noFill/>
-        </p:spPr>
-        <p:txBody>
-          <a:bodyPr wrap="none" lIns="0" rIns="0" tIns="0" bIns="0" anchor="t">
-            <a:spAutoFit/>
-          </a:bodyPr>
-          <a:lstStyle/>
-          <a:p>
-            <a:pPr algn="ctr"/>
-            <a:r>
-              <a:rPr sz="900" b="0">
-                <a:solidFill>
-                  <a:srgbClr val="B91C1C"/>
-                </a:solidFill>
-                <a:latin typeface="Malgun Gothic"/>
-              </a:rPr>
-              <a:t>병목: 축적 없음</a:t>
-            </a:r>
-          </a:p>
-        </p:txBody>
-      </p:sp>
-      <p:sp>
-        <p:nvSpPr>
-          <p:cNvPr id="38" name="TextBox 37"/>
-          <p:cNvSpPr txBox="1"/>
-          <p:nvPr/>
-        </p:nvSpPr>
-        <p:spPr>
-          <a:xfrm>
-            <a:off x="9734667" y="2038663"/>
-            <a:ext cx="1926794" cy="159994"/>
-          </a:xfrm>
-          <a:prstGeom prst="rect">
-            <a:avLst/>
-          </a:prstGeom>
-          <a:noFill/>
-        </p:spPr>
-        <p:txBody>
-          <a:bodyPr wrap="none" lIns="0" rIns="0" tIns="0" bIns="0" anchor="t">
-            <a:spAutoFit/>
-          </a:bodyPr>
-          <a:lstStyle/>
-          <a:p>
-            <a:pPr algn="ctr"/>
-            <a:r>
-              <a:rPr sz="900" b="0">
-                <a:solidFill>
-                  <a:srgbClr val="B91C1C"/>
-                </a:solidFill>
-                <a:latin typeface="Malgun Gothic"/>
-              </a:rPr>
-              <a:t>실패 화면·조치 근거 없음</a:t>
-            </a:r>
-          </a:p>
-        </p:txBody>
-      </p:sp>
-      <p:sp>
-        <p:nvSpPr>
-          <p:cNvPr id="39" name="TextBox 38"/>
-          <p:cNvSpPr txBox="1"/>
-          <p:nvPr/>
-        </p:nvSpPr>
-        <p:spPr>
-          <a:xfrm>
-            <a:off x="2445317" y="2304687"/>
-            <a:ext cx="7299445" cy="177772"/>
-          </a:xfrm>
-          <a:prstGeom prst="rect">
-            <a:avLst/>
-          </a:prstGeom>
-          <a:noFill/>
-        </p:spPr>
-        <p:txBody>
-          <a:bodyPr wrap="none" lIns="0" rIns="0" tIns="0" bIns="0" anchor="t">
-            <a:spAutoFit/>
-          </a:bodyPr>
-          <a:lstStyle/>
-          <a:p>
-            <a:pPr algn="ctr"/>
-            <a:r>
-              <a:rPr sz="1000" b="0">
-                <a:solidFill>
-                  <a:srgbClr val="374151"/>
-                </a:solidFill>
-                <a:latin typeface="Malgun Gothic"/>
-              </a:rPr>
-              <a:t>"화면의 의미 이해" 와 "픽셀 단위 정밀도" 가 동시에 필요 → 규칙 기반 자동화의 사각지대</a:t>
-            </a:r>
-          </a:p>
-        </p:txBody>
-      </p:sp>
-      <p:cxnSp>
-        <p:nvCxnSpPr>
-          <p:cNvPr id="40" name="Connector 39"/>
-          <p:cNvCxnSpPr/>
-          <p:nvPr/>
-        </p:nvCxnSpPr>
-        <p:spPr>
-          <a:xfrm>
-            <a:off x="6095040.0" y="2564996.0"/>
-            <a:ext cx="0.0" cy="279356.0"/>
-          </a:xfrm>
-          <a:prstGeom prst="line">
-            <a:avLst/>
-          </a:prstGeom>
-          <a:ln w="25400">
-            <a:solidFill>
-              <a:srgbClr val="2563EB"/>
-            </a:solidFill>
-          </a:ln>
-        </p:spPr>
-        <p:style>
-          <a:lnRef idx="2">
-            <a:schemeClr val="accent1"/>
-          </a:lnRef>
-          <a:fillRef idx="0">
-            <a:schemeClr val="accent1"/>
-          </a:fillRef>
-          <a:effectRef idx="1">
-            <a:schemeClr val="accent1"/>
-          </a:effectRef>
-          <a:fontRef idx="minor">
-            <a:schemeClr val="tx1"/>
-          </a:fontRef>
-        </p:style>
-      </p:cxnSp>
-      <p:sp>
-        <p:nvSpPr>
-          <p:cNvPr id="41" name="Freeform 40"/>
-          <p:cNvSpPr/>
-          <p:nvPr/>
-        </p:nvSpPr>
-        <p:spPr>
-          <a:xfrm>
-            <a:off x="6006154" y="2806258"/>
-            <a:ext cx="177772" cy="126980"/>
-          </a:xfrm>
-          <a:custGeom>
-            <a:avLst/>
-            <a:gdLst/>
-            <a:ahLst/>
-            <a:cxnLst/>
-            <a:rect l="l" t="t" r="r" b="b"/>
-            <a:pathLst>
-              <a:path w="28" h="20">
-                <a:moveTo>
-                  <a:pt x="0" y="0"/>
-                </a:moveTo>
-                <a:lnTo>
-                  <a:pt x="14" y="20"/>
-                </a:lnTo>
-                <a:lnTo>
-                  <a:pt x="28" y="0"/>
+                  <a:pt x="24" y="0"/>
                 </a:lnTo>
                 <a:close/>
               </a:path>
@@ -4714,99 +4379,18 @@
       </p:sp>
       <p:sp>
         <p:nvSpPr>
-          <p:cNvPr id="42" name="Rounded Rectangle 41"/>
+          <p:cNvPr id="33" name="Rounded Rectangle 32"/>
           <p:cNvSpPr/>
           <p:nvPr/>
         </p:nvSpPr>
         <p:spPr>
           <a:xfrm>
-            <a:off x="6349000" y="2590392"/>
-            <a:ext cx="3428460" cy="279356"/>
+            <a:off x="253960" y="3466554"/>
+            <a:ext cx="11682160" cy="2730070"/>
           </a:xfrm>
           <a:prstGeom prst="roundRect">
             <a:avLst>
-              <a:gd name="adj" fmla="val 50000"/>
-            </a:avLst>
-          </a:prstGeom>
-          <a:solidFill>
-            <a:srgbClr val="DBEAFE"/>
-          </a:solidFill>
-          <a:ln>
-            <a:noFill/>
-          </a:ln>
-          <a:effectLst/>
-        </p:spPr>
-        <p:style>
-          <a:lnRef idx="1">
-            <a:schemeClr val="accent1"/>
-          </a:lnRef>
-          <a:fillRef idx="3">
-            <a:schemeClr val="accent1"/>
-          </a:fillRef>
-          <a:effectRef idx="2">
-            <a:schemeClr val="accent1"/>
-          </a:effectRef>
-          <a:fontRef idx="minor">
-            <a:schemeClr val="lt1"/>
-          </a:fontRef>
-        </p:style>
-        <p:txBody>
-          <a:bodyPr rtlCol="0" anchor="ctr"/>
-          <a:lstStyle/>
-          <a:p>
-            <a:pPr algn="ctr"/>
-          </a:p>
-        </p:txBody>
-      </p:sp>
-      <p:sp>
-        <p:nvSpPr>
-          <p:cNvPr id="43" name="TextBox 42"/>
-          <p:cNvSpPr txBox="1"/>
-          <p:nvPr/>
-        </p:nvSpPr>
-        <p:spPr>
-          <a:xfrm>
-            <a:off x="6050470" y="2634200"/>
-            <a:ext cx="4025519" cy="195549"/>
-          </a:xfrm>
-          <a:prstGeom prst="rect">
-            <a:avLst/>
-          </a:prstGeom>
-          <a:noFill/>
-        </p:spPr>
-        <p:txBody>
-          <a:bodyPr wrap="none" lIns="0" rIns="0" tIns="0" bIns="0" anchor="t">
-            <a:spAutoFit/>
-          </a:bodyPr>
-          <a:lstStyle/>
-          <a:p>
-            <a:pPr algn="ctr"/>
-            <a:r>
-              <a:rPr sz="1100" b="1">
-                <a:solidFill>
-                  <a:srgbClr val="1D4ED8"/>
-                </a:solidFill>
-                <a:latin typeface="Malgun Gothic"/>
-              </a:rPr>
-              <a:t>AI Agent 도입 : VLM + OCR + CV 역할 분리</a:t>
-            </a:r>
-          </a:p>
-        </p:txBody>
-      </p:sp>
-      <p:sp>
-        <p:nvSpPr>
-          <p:cNvPr id="44" name="Rounded Rectangle 43"/>
-          <p:cNvSpPr/>
-          <p:nvPr/>
-        </p:nvSpPr>
-        <p:spPr>
-          <a:xfrm>
-            <a:off x="253960" y="2984030"/>
-            <a:ext cx="11682160" cy="3301480"/>
-          </a:xfrm>
-          <a:prstGeom prst="roundRect">
-            <a:avLst>
-              <a:gd name="adj" fmla="val 3076"/>
+              <a:gd name="adj" fmla="val 3720"/>
             </a:avLst>
           </a:prstGeom>
           <a:solidFill>
@@ -4843,14 +4427,14 @@
       </p:sp>
       <p:sp>
         <p:nvSpPr>
-          <p:cNvPr id="45" name="TextBox 44"/>
+          <p:cNvPr id="34" name="TextBox 33"/>
           <p:cNvSpPr txBox="1"/>
           <p:nvPr/>
         </p:nvSpPr>
         <p:spPr>
           <a:xfrm>
-            <a:off x="406336" y="3064662"/>
-            <a:ext cx="755213" cy="231103"/>
+            <a:off x="406336" y="3826542"/>
+            <a:ext cx="1336147" cy="408875"/>
           </a:xfrm>
           <a:prstGeom prst="rect">
             <a:avLst/>
@@ -4865,7 +4449,7 @@
           <a:p>
             <a:pPr algn="l"/>
             <a:r>
-              <a:rPr sz="1300" b="1">
+              <a:rPr sz="2300" b="1">
                 <a:solidFill>
                   <a:srgbClr val="1E3A8A"/>
                 </a:solidFill>
@@ -4878,14 +4462,14 @@
       </p:sp>
       <p:sp>
         <p:nvSpPr>
-          <p:cNvPr id="46" name="TextBox 45"/>
+          <p:cNvPr id="35" name="TextBox 34"/>
           <p:cNvSpPr txBox="1"/>
           <p:nvPr/>
         </p:nvSpPr>
         <p:spPr>
           <a:xfrm>
-            <a:off x="952350" y="3104661"/>
-            <a:ext cx="13861136" cy="177772"/>
+            <a:off x="406336" y="4259544"/>
+            <a:ext cx="1220087" cy="195549"/>
           </a:xfrm>
           <a:prstGeom prst="rect">
             <a:avLst/>
@@ -4900,37 +4484,72 @@
           <a:p>
             <a:pPr algn="l"/>
             <a:r>
-              <a:rPr sz="1000" b="0">
+              <a:rPr sz="1100" b="0">
                 <a:solidFill>
                   <a:srgbClr val="1E40AF"/>
                 </a:solidFill>
                 <a:latin typeface="Malgun Gothic"/>
               </a:rPr>
-              <a:t>AI 가 감지 → 접속 → 재정렬 → 확정 → 기록을 자동 수행 · 감지~재조정 1분 미만(실알람 3건) · 진행 못 하면 큐브 알림으로 담당자에게 자동 인폼 → 사이클은 멈추지 않는다</a:t>
+              <a:t>AI Agent 가</a:t>
             </a:r>
           </a:p>
         </p:txBody>
       </p:sp>
       <p:sp>
         <p:nvSpPr>
-          <p:cNvPr id="47" name="Rounded Rectangle 46"/>
+          <p:cNvPr id="36" name="TextBox 35"/>
+          <p:cNvSpPr txBox="1"/>
+          <p:nvPr/>
+        </p:nvSpPr>
+        <p:spPr>
+          <a:xfrm>
+            <a:off x="406336" y="4462712"/>
+            <a:ext cx="965873" cy="195549"/>
+          </a:xfrm>
+          <a:prstGeom prst="rect">
+            <a:avLst/>
+          </a:prstGeom>
+          <a:noFill/>
+        </p:spPr>
+        <p:txBody>
+          <a:bodyPr wrap="none" lIns="0" rIns="0" tIns="0" bIns="0" anchor="t">
+            <a:spAutoFit/>
+          </a:bodyPr>
+          <a:lstStyle/>
+          <a:p>
+            <a:pPr algn="l"/>
+            <a:r>
+              <a:rPr sz="1100" b="0">
+                <a:solidFill>
+                  <a:srgbClr val="1E40AF"/>
+                </a:solidFill>
+                <a:latin typeface="Malgun Gothic"/>
+              </a:rPr>
+              <a:t>자동 수행</a:t>
+            </a:r>
+          </a:p>
+        </p:txBody>
+      </p:sp>
+      <p:sp>
+        <p:nvSpPr>
+          <p:cNvPr id="37" name="Rounded Rectangle 36"/>
           <p:cNvSpPr/>
           <p:nvPr/>
         </p:nvSpPr>
         <p:spPr>
           <a:xfrm>
-            <a:off x="507920" y="3428460"/>
-            <a:ext cx="1472968" cy="863464"/>
+            <a:off x="2095170" y="3720514"/>
+            <a:ext cx="1777720" cy="952350"/>
           </a:xfrm>
           <a:prstGeom prst="roundRect">
             <a:avLst>
-              <a:gd name="adj" fmla="val 7352"/>
+              <a:gd name="adj" fmla="val 8000"/>
             </a:avLst>
           </a:prstGeom>
           <a:solidFill>
             <a:srgbClr val="FFFFFF"/>
           </a:solidFill>
-          <a:ln w="15240">
+          <a:ln w="17780">
             <a:solidFill>
               <a:srgbClr val="2563EB"/>
             </a:solidFill>
@@ -4961,14 +4580,14 @@
       </p:sp>
       <p:sp>
         <p:nvSpPr>
-          <p:cNvPr id="48" name="TextBox 47"/>
+          <p:cNvPr id="38" name="TextBox 37"/>
           <p:cNvSpPr txBox="1"/>
           <p:nvPr/>
         </p:nvSpPr>
         <p:spPr>
           <a:xfrm>
-            <a:off x="783418" y="3491632"/>
-            <a:ext cx="921970" cy="186660"/>
+            <a:off x="2325479" y="3933205"/>
+            <a:ext cx="1317100" cy="266658"/>
           </a:xfrm>
           <a:prstGeom prst="rect">
             <a:avLst/>
@@ -4983,7 +4602,7 @@
           <a:p>
             <a:pPr algn="ctr"/>
             <a:r>
-              <a:rPr sz="1050" b="1">
+              <a:rPr sz="1500" b="1">
                 <a:solidFill>
                   <a:srgbClr val="1D4ED8"/>
                 </a:solidFill>
@@ -4996,14 +4615,14 @@
       </p:sp>
       <p:sp>
         <p:nvSpPr>
-          <p:cNvPr id="49" name="TextBox 48"/>
+          <p:cNvPr id="39" name="TextBox 38"/>
           <p:cNvSpPr txBox="1"/>
           <p:nvPr/>
         </p:nvSpPr>
         <p:spPr>
           <a:xfrm>
-            <a:off x="718198" y="3715434"/>
-            <a:ext cx="1052410" cy="142217"/>
+            <a:off x="2025013" y="4298273"/>
+            <a:ext cx="1918032" cy="177772"/>
           </a:xfrm>
           <a:prstGeom prst="rect">
             <a:avLst/>
@@ -5018,109 +4637,39 @@
           <a:p>
             <a:pPr algn="ctr"/>
             <a:r>
-              <a:rPr sz="800" b="0">
+              <a:rPr sz="1000" b="0">
                 <a:solidFill>
                   <a:srgbClr val="374151"/>
                 </a:solidFill>
                 <a:latin typeface="Malgun Gothic"/>
               </a:rPr>
-              <a:t>10초 주기 폴링</a:t>
+              <a:t>10초 폴링 · 자동 발동</a:t>
             </a:r>
           </a:p>
         </p:txBody>
       </p:sp>
       <p:sp>
         <p:nvSpPr>
-          <p:cNvPr id="50" name="TextBox 49"/>
-          <p:cNvSpPr txBox="1"/>
-          <p:nvPr/>
-        </p:nvSpPr>
-        <p:spPr>
-          <a:xfrm>
-            <a:off x="510205" y="3867810"/>
-            <a:ext cx="1468396" cy="142217"/>
-          </a:xfrm>
-          <a:prstGeom prst="rect">
-            <a:avLst/>
-          </a:prstGeom>
-          <a:noFill/>
-        </p:spPr>
-        <p:txBody>
-          <a:bodyPr wrap="none" lIns="0" rIns="0" tIns="0" bIns="0" anchor="t">
-            <a:spAutoFit/>
-          </a:bodyPr>
-          <a:lstStyle/>
-          <a:p>
-            <a:pPr algn="ctr"/>
-            <a:r>
-              <a:rPr sz="800" b="0">
-                <a:solidFill>
-                  <a:srgbClr val="374151"/>
-                </a:solidFill>
-                <a:latin typeface="Malgun Gothic"/>
-              </a:rPr>
-              <a:t>Align Fail(9006) 만</a:t>
-            </a:r>
-          </a:p>
-        </p:txBody>
-      </p:sp>
-      <p:sp>
-        <p:nvSpPr>
-          <p:cNvPr id="51" name="TextBox 50"/>
-          <p:cNvSpPr txBox="1"/>
-          <p:nvPr/>
-        </p:nvSpPr>
-        <p:spPr>
-          <a:xfrm>
-            <a:off x="483793" y="4020186"/>
-            <a:ext cx="1521220" cy="142217"/>
-          </a:xfrm>
-          <a:prstGeom prst="rect">
-            <a:avLst/>
-          </a:prstGeom>
-          <a:noFill/>
-        </p:spPr>
-        <p:txBody>
-          <a:bodyPr wrap="none" lIns="0" rIns="0" tIns="0" bIns="0" anchor="t">
-            <a:spAutoFit/>
-          </a:bodyPr>
-          <a:lstStyle/>
-          <a:p>
-            <a:pPr algn="ctr"/>
-            <a:r>
-              <a:rPr sz="800" b="0">
-                <a:solidFill>
-                  <a:srgbClr val="374151"/>
-                </a:solidFill>
-                <a:latin typeface="Malgun Gothic"/>
-              </a:rPr>
-              <a:t>신규 발생 시 1회 발동</a:t>
-            </a:r>
-          </a:p>
-        </p:txBody>
-      </p:sp>
-      <p:sp>
-        <p:nvSpPr>
-          <p:cNvPr id="52" name="Rounded Rectangle 51"/>
+          <p:cNvPr id="40" name="Rounded Rectangle 39"/>
           <p:cNvSpPr/>
           <p:nvPr/>
         </p:nvSpPr>
         <p:spPr>
           <a:xfrm>
-            <a:off x="2133264" y="3428460"/>
-            <a:ext cx="1472968" cy="863464"/>
+            <a:off x="4101454" y="3720514"/>
+            <a:ext cx="1777720" cy="952350"/>
           </a:xfrm>
           <a:prstGeom prst="roundRect">
             <a:avLst>
-              <a:gd name="adj" fmla="val 7352"/>
+              <a:gd name="adj" fmla="val 8000"/>
             </a:avLst>
           </a:prstGeom>
           <a:solidFill>
             <a:srgbClr val="FFFFFF"/>
           </a:solidFill>
-          <a:ln w="15240">
+          <a:ln w="17780">
             <a:solidFill>
-              <a:srgbClr val="7C3AED"/>
+              <a:srgbClr val="2563EB"/>
             </a:solidFill>
           </a:ln>
           <a:effectLst/>
@@ -5149,14 +4698,14 @@
       </p:sp>
       <p:sp>
         <p:nvSpPr>
-          <p:cNvPr id="53" name="TextBox 52"/>
+          <p:cNvPr id="41" name="TextBox 40"/>
           <p:cNvSpPr txBox="1"/>
           <p:nvPr/>
         </p:nvSpPr>
         <p:spPr>
           <a:xfrm>
-            <a:off x="2092439" y="3491632"/>
-            <a:ext cx="1554616" cy="186660"/>
+            <a:off x="4331763" y="3933205"/>
+            <a:ext cx="1317100" cy="266658"/>
           </a:xfrm>
           <a:prstGeom prst="rect">
             <a:avLst/>
@@ -5171,215 +4720,27 @@
           <a:p>
             <a:pPr algn="ctr"/>
             <a:r>
-              <a:rPr sz="1050" b="1">
-                <a:solidFill>
-                  <a:srgbClr val="6D28D9"/>
-                </a:solidFill>
-                <a:latin typeface="Malgun Gothic"/>
-              </a:rPr>
-              <a:t>사전 고지 (큐브)</a:t>
-            </a:r>
-          </a:p>
-        </p:txBody>
-      </p:sp>
-      <p:sp>
-        <p:nvSpPr>
-          <p:cNvPr id="54" name="TextBox 53"/>
-          <p:cNvSpPr txBox="1"/>
-          <p:nvPr/>
-        </p:nvSpPr>
-        <p:spPr>
-          <a:xfrm>
-            <a:off x="2234594" y="3715434"/>
-            <a:ext cx="1270307" cy="142217"/>
-          </a:xfrm>
-          <a:prstGeom prst="rect">
-            <a:avLst/>
-          </a:prstGeom>
-          <a:noFill/>
-        </p:spPr>
-        <p:txBody>
-          <a:bodyPr wrap="none" lIns="0" rIns="0" tIns="0" bIns="0" anchor="t">
-            <a:spAutoFit/>
-          </a:bodyPr>
-          <a:lstStyle/>
-          <a:p>
-            <a:pPr algn="ctr"/>
-            <a:r>
-              <a:rPr sz="800" b="0">
-                <a:solidFill>
-                  <a:srgbClr val="374151"/>
-                </a:solidFill>
-                <a:latin typeface="Malgun Gothic"/>
-              </a:rPr>
-              <a:t>"AI 가 대응 시작"</a:t>
-            </a:r>
-          </a:p>
-        </p:txBody>
-      </p:sp>
-      <p:sp>
-        <p:nvSpPr>
-          <p:cNvPr id="55" name="TextBox 54"/>
-          <p:cNvSpPr txBox="1"/>
-          <p:nvPr/>
-        </p:nvSpPr>
-        <p:spPr>
-          <a:xfrm>
-            <a:off x="2152057" y="3867810"/>
-            <a:ext cx="1435381" cy="142217"/>
-          </a:xfrm>
-          <a:prstGeom prst="rect">
-            <a:avLst/>
-          </a:prstGeom>
-          <a:noFill/>
-        </p:spPr>
-        <p:txBody>
-          <a:bodyPr wrap="none" lIns="0" rIns="0" tIns="0" bIns="0" anchor="t">
-            <a:spAutoFit/>
-          </a:bodyPr>
-          <a:lstStyle/>
-          <a:p>
-            <a:pPr algn="ctr"/>
-            <a:r>
-              <a:rPr sz="800" b="0">
-                <a:solidFill>
-                  <a:srgbClr val="374151"/>
-                </a:solidFill>
-                <a:latin typeface="Malgun Gothic"/>
-              </a:rPr>
-              <a:t>담당자에게 자동 알림</a:t>
-            </a:r>
-          </a:p>
-        </p:txBody>
-      </p:sp>
-      <p:sp>
-        <p:nvSpPr>
-          <p:cNvPr id="56" name="TextBox 55"/>
-          <p:cNvSpPr txBox="1"/>
-          <p:nvPr/>
-        </p:nvSpPr>
-        <p:spPr>
-          <a:xfrm>
-            <a:off x="2095931" y="4020186"/>
-            <a:ext cx="1547632" cy="142217"/>
-          </a:xfrm>
-          <a:prstGeom prst="rect">
-            <a:avLst/>
-          </a:prstGeom>
-          <a:noFill/>
-        </p:spPr>
-        <p:txBody>
-          <a:bodyPr wrap="none" lIns="0" rIns="0" tIns="0" bIns="0" anchor="t">
-            <a:spAutoFit/>
-          </a:bodyPr>
-          <a:lstStyle/>
-          <a:p>
-            <a:pPr algn="ctr"/>
-            <a:r>
-              <a:rPr sz="800" b="0">
-                <a:solidFill>
-                  <a:srgbClr val="374151"/>
-                </a:solidFill>
-                <a:latin typeface="Malgun Gothic"/>
-              </a:rPr>
-              <a:t>장비·Recipe·알람 시각</a:t>
-            </a:r>
-          </a:p>
-        </p:txBody>
-      </p:sp>
-      <p:sp>
-        <p:nvSpPr>
-          <p:cNvPr id="57" name="Rounded Rectangle 56"/>
-          <p:cNvSpPr/>
-          <p:nvPr/>
-        </p:nvSpPr>
-        <p:spPr>
-          <a:xfrm>
-            <a:off x="3758608" y="3428460"/>
-            <a:ext cx="1472968" cy="863464"/>
-          </a:xfrm>
-          <a:prstGeom prst="roundRect">
-            <a:avLst>
-              <a:gd name="adj" fmla="val 7352"/>
-            </a:avLst>
-          </a:prstGeom>
-          <a:solidFill>
-            <a:srgbClr val="FFFFFF"/>
-          </a:solidFill>
-          <a:ln w="15240">
-            <a:solidFill>
-              <a:srgbClr val="2563EB"/>
-            </a:solidFill>
-          </a:ln>
-          <a:effectLst/>
-        </p:spPr>
-        <p:style>
-          <a:lnRef idx="1">
-            <a:schemeClr val="accent1"/>
-          </a:lnRef>
-          <a:fillRef idx="3">
-            <a:schemeClr val="accent1"/>
-          </a:fillRef>
-          <a:effectRef idx="2">
-            <a:schemeClr val="accent1"/>
-          </a:effectRef>
-          <a:fontRef idx="minor">
-            <a:schemeClr val="lt1"/>
-          </a:fontRef>
-        </p:style>
-        <p:txBody>
-          <a:bodyPr rtlCol="0" anchor="ctr"/>
-          <a:lstStyle/>
-          <a:p>
-            <a:pPr algn="ctr"/>
-          </a:p>
-        </p:txBody>
-      </p:sp>
-      <p:sp>
-        <p:nvSpPr>
-          <p:cNvPr id="58" name="TextBox 57"/>
-          <p:cNvSpPr txBox="1"/>
-          <p:nvPr/>
-        </p:nvSpPr>
-        <p:spPr>
-          <a:xfrm>
-            <a:off x="3843446" y="3491632"/>
-            <a:ext cx="1303290" cy="186660"/>
-          </a:xfrm>
-          <a:prstGeom prst="rect">
-            <a:avLst/>
-          </a:prstGeom>
-          <a:noFill/>
-        </p:spPr>
-        <p:txBody>
-          <a:bodyPr wrap="none" lIns="0" rIns="0" tIns="0" bIns="0" anchor="t">
-            <a:spAutoFit/>
-          </a:bodyPr>
-          <a:lstStyle/>
-          <a:p>
-            <a:pPr algn="ctr"/>
-            <a:r>
-              <a:rPr sz="1050" b="1">
+              <a:rPr sz="1500" b="1">
                 <a:solidFill>
                   <a:srgbClr val="1D4ED8"/>
                 </a:solidFill>
                 <a:latin typeface="Malgun Gothic"/>
               </a:rPr>
-              <a:t>RCS 자동 접속</a:t>
+              <a:t>자동 접속</a:t>
             </a:r>
           </a:p>
         </p:txBody>
       </p:sp>
       <p:sp>
         <p:nvSpPr>
-          <p:cNvPr id="59" name="TextBox 58"/>
+          <p:cNvPr id="42" name="TextBox 41"/>
           <p:cNvSpPr txBox="1"/>
           <p:nvPr/>
         </p:nvSpPr>
         <p:spPr>
           <a:xfrm>
-            <a:off x="3741084" y="3715434"/>
-            <a:ext cx="1508014" cy="142217"/>
+            <a:off x="4097327" y="4298273"/>
+            <a:ext cx="1785973" cy="177772"/>
           </a:xfrm>
           <a:prstGeom prst="rect">
             <a:avLst/>
@@ -5394,42 +4755,7 @@
           <a:p>
             <a:pPr algn="ctr"/>
             <a:r>
-              <a:rPr sz="800" b="0">
-                <a:solidFill>
-                  <a:srgbClr val="374151"/>
-                </a:solidFill>
-                <a:latin typeface="Malgun Gothic"/>
-              </a:rPr>
-              <a:t>실행·로그인·장비 선택</a:t>
-            </a:r>
-          </a:p>
-        </p:txBody>
-      </p:sp>
-      <p:sp>
-        <p:nvSpPr>
-          <p:cNvPr id="60" name="TextBox 59"/>
-          <p:cNvSpPr txBox="1"/>
-          <p:nvPr/>
-        </p:nvSpPr>
-        <p:spPr>
-          <a:xfrm>
-            <a:off x="3780702" y="3867810"/>
-            <a:ext cx="1428778" cy="142217"/>
-          </a:xfrm>
-          <a:prstGeom prst="rect">
-            <a:avLst/>
-          </a:prstGeom>
-          <a:noFill/>
-        </p:spPr>
-        <p:txBody>
-          <a:bodyPr wrap="none" lIns="0" rIns="0" tIns="0" bIns="0" anchor="t">
-            <a:spAutoFit/>
-          </a:bodyPr>
-          <a:lstStyle/>
-          <a:p>
-            <a:pPr algn="ctr"/>
-            <a:r>
-              <a:rPr sz="800" b="0">
+              <a:rPr sz="1000" b="0">
                 <a:solidFill>
                   <a:srgbClr val="374151"/>
                 </a:solidFill>
@@ -5442,61 +4768,26 @@
       </p:sp>
       <p:sp>
         <p:nvSpPr>
-          <p:cNvPr id="61" name="TextBox 60"/>
-          <p:cNvSpPr txBox="1"/>
-          <p:nvPr/>
-        </p:nvSpPr>
-        <p:spPr>
-          <a:xfrm>
-            <a:off x="3807114" y="4020186"/>
-            <a:ext cx="1375955" cy="142217"/>
-          </a:xfrm>
-          <a:prstGeom prst="rect">
-            <a:avLst/>
-          </a:prstGeom>
-          <a:noFill/>
-        </p:spPr>
-        <p:txBody>
-          <a:bodyPr wrap="none" lIns="0" rIns="0" tIns="0" bIns="0" anchor="t">
-            <a:spAutoFit/>
-          </a:bodyPr>
-          <a:lstStyle/>
-          <a:p>
-            <a:pPr algn="ctr"/>
-            <a:r>
-              <a:rPr sz="800" b="0">
-                <a:solidFill>
-                  <a:srgbClr val="374151"/>
-                </a:solidFill>
-                <a:latin typeface="Malgun Gothic"/>
-              </a:rPr>
-              <a:t>접속 즉시 상시 녹화</a:t>
-            </a:r>
-          </a:p>
-        </p:txBody>
-      </p:sp>
-      <p:sp>
-        <p:nvSpPr>
-          <p:cNvPr id="62" name="Rounded Rectangle 61"/>
+          <p:cNvPr id="43" name="Rounded Rectangle 42"/>
           <p:cNvSpPr/>
           <p:nvPr/>
         </p:nvSpPr>
         <p:spPr>
           <a:xfrm>
-            <a:off x="5383952" y="3428460"/>
-            <a:ext cx="1472968" cy="863464"/>
+            <a:off x="6107738" y="3720514"/>
+            <a:ext cx="1777720" cy="952350"/>
           </a:xfrm>
           <a:prstGeom prst="roundRect">
             <a:avLst>
-              <a:gd name="adj" fmla="val 7352"/>
+              <a:gd name="adj" fmla="val 8000"/>
             </a:avLst>
           </a:prstGeom>
           <a:solidFill>
             <a:srgbClr val="FFFFFF"/>
           </a:solidFill>
-          <a:ln w="15240">
+          <a:ln w="17780">
             <a:solidFill>
-              <a:srgbClr val="2563EB"/>
+              <a:srgbClr val="059669"/>
             </a:solidFill>
           </a:ln>
           <a:effectLst/>
@@ -5525,14 +4816,14 @@
       </p:sp>
       <p:sp>
         <p:nvSpPr>
-          <p:cNvPr id="63" name="TextBox 62"/>
+          <p:cNvPr id="44" name="TextBox 43"/>
           <p:cNvSpPr txBox="1"/>
           <p:nvPr/>
         </p:nvSpPr>
         <p:spPr>
           <a:xfrm>
-            <a:off x="5659450" y="3491632"/>
-            <a:ext cx="921970" cy="186660"/>
+            <a:off x="6214242" y="3933205"/>
+            <a:ext cx="1564711" cy="266658"/>
           </a:xfrm>
           <a:prstGeom prst="rect">
             <a:avLst/>
@@ -5547,195 +4838,7 @@
           <a:p>
             <a:pPr algn="ctr"/>
             <a:r>
-              <a:rPr sz="1050" b="1">
-                <a:solidFill>
-                  <a:srgbClr val="1D4ED8"/>
-                </a:solidFill>
-                <a:latin typeface="Malgun Gothic"/>
-              </a:rPr>
-              <a:t>화면 판독</a:t>
-            </a:r>
-          </a:p>
-        </p:txBody>
-      </p:sp>
-      <p:sp>
-        <p:nvSpPr>
-          <p:cNvPr id="64" name="TextBox 63"/>
-          <p:cNvSpPr txBox="1"/>
-          <p:nvPr/>
-        </p:nvSpPr>
-        <p:spPr>
-          <a:xfrm>
-            <a:off x="5389539" y="3715434"/>
-            <a:ext cx="1461793" cy="142217"/>
-          </a:xfrm>
-          <a:prstGeom prst="rect">
-            <a:avLst/>
-          </a:prstGeom>
-          <a:noFill/>
-        </p:spPr>
-        <p:txBody>
-          <a:bodyPr wrap="none" lIns="0" rIns="0" tIns="0" bIns="0" anchor="t">
-            <a:spAutoFit/>
-          </a:bodyPr>
-          <a:lstStyle/>
-          <a:p>
-            <a:pPr algn="ctr"/>
-            <a:r>
-              <a:rPr sz="800" b="0">
-                <a:solidFill>
-                  <a:srgbClr val="374151"/>
-                </a:solidFill>
-                <a:latin typeface="Malgun Gothic"/>
-              </a:rPr>
-              <a:t>라이브 SEM 영역 검출</a:t>
-            </a:r>
-          </a:p>
-        </p:txBody>
-      </p:sp>
-      <p:sp>
-        <p:nvSpPr>
-          <p:cNvPr id="65" name="TextBox 64"/>
-          <p:cNvSpPr txBox="1"/>
-          <p:nvPr/>
-        </p:nvSpPr>
-        <p:spPr>
-          <a:xfrm>
-            <a:off x="5346619" y="3867810"/>
-            <a:ext cx="1547632" cy="142217"/>
-          </a:xfrm>
-          <a:prstGeom prst="rect">
-            <a:avLst/>
-          </a:prstGeom>
-          <a:noFill/>
-        </p:spPr>
-        <p:txBody>
-          <a:bodyPr wrap="none" lIns="0" rIns="0" tIns="0" bIns="0" anchor="t">
-            <a:spAutoFit/>
-          </a:bodyPr>
-          <a:lstStyle/>
-          <a:p>
-            <a:pPr algn="ctr"/>
-            <a:r>
-              <a:rPr sz="800" b="0">
-                <a:solidFill>
-                  <a:srgbClr val="374151"/>
-                </a:solidFill>
-                <a:latin typeface="Malgun Gothic"/>
-              </a:rPr>
-              <a:t>촬영 모드 OM/SEM 판독</a:t>
-            </a:r>
-          </a:p>
-        </p:txBody>
-      </p:sp>
-      <p:sp>
-        <p:nvSpPr>
-          <p:cNvPr id="66" name="TextBox 65"/>
-          <p:cNvSpPr txBox="1"/>
-          <p:nvPr/>
-        </p:nvSpPr>
-        <p:spPr>
-          <a:xfrm>
-            <a:off x="5432458" y="4020186"/>
-            <a:ext cx="1375955" cy="142217"/>
-          </a:xfrm>
-          <a:prstGeom prst="rect">
-            <a:avLst/>
-          </a:prstGeom>
-          <a:noFill/>
-        </p:spPr>
-        <p:txBody>
-          <a:bodyPr wrap="none" lIns="0" rIns="0" tIns="0" bIns="0" anchor="t">
-            <a:spAutoFit/>
-          </a:bodyPr>
-          <a:lstStyle/>
-          <a:p>
-            <a:pPr algn="ctr"/>
-            <a:r>
-              <a:rPr sz="800" b="0">
-                <a:solidFill>
-                  <a:srgbClr val="374151"/>
-                </a:solidFill>
-                <a:latin typeface="Malgun Gothic"/>
-              </a:rPr>
-              <a:t>타인 점유 여부 판별</a:t>
-            </a:r>
-          </a:p>
-        </p:txBody>
-      </p:sp>
-      <p:sp>
-        <p:nvSpPr>
-          <p:cNvPr id="67" name="Rounded Rectangle 66"/>
-          <p:cNvSpPr/>
-          <p:nvPr/>
-        </p:nvSpPr>
-        <p:spPr>
-          <a:xfrm>
-            <a:off x="7009296" y="3428460"/>
-            <a:ext cx="1472968" cy="863464"/>
-          </a:xfrm>
-          <a:prstGeom prst="roundRect">
-            <a:avLst>
-              <a:gd name="adj" fmla="val 7352"/>
-            </a:avLst>
-          </a:prstGeom>
-          <a:solidFill>
-            <a:srgbClr val="FFFFFF"/>
-          </a:solidFill>
-          <a:ln w="15240">
-            <a:solidFill>
-              <a:srgbClr val="059669"/>
-            </a:solidFill>
-          </a:ln>
-          <a:effectLst/>
-        </p:spPr>
-        <p:style>
-          <a:lnRef idx="1">
-            <a:schemeClr val="accent1"/>
-          </a:lnRef>
-          <a:fillRef idx="3">
-            <a:schemeClr val="accent1"/>
-          </a:fillRef>
-          <a:effectRef idx="2">
-            <a:schemeClr val="accent1"/>
-          </a:effectRef>
-          <a:fontRef idx="minor">
-            <a:schemeClr val="lt1"/>
-          </a:fontRef>
-        </p:style>
-        <p:txBody>
-          <a:bodyPr rtlCol="0" anchor="ctr"/>
-          <a:lstStyle/>
-          <a:p>
-            <a:pPr algn="ctr"/>
-          </a:p>
-        </p:txBody>
-      </p:sp>
-      <p:sp>
-        <p:nvSpPr>
-          <p:cNvPr id="68" name="TextBox 67"/>
-          <p:cNvSpPr txBox="1"/>
-          <p:nvPr/>
-        </p:nvSpPr>
-        <p:spPr>
-          <a:xfrm>
-            <a:off x="7198131" y="3491632"/>
-            <a:ext cx="1095297" cy="186660"/>
-          </a:xfrm>
-          <a:prstGeom prst="rect">
-            <a:avLst/>
-          </a:prstGeom>
-          <a:noFill/>
-        </p:spPr>
-        <p:txBody>
-          <a:bodyPr wrap="none" lIns="0" rIns="0" tIns="0" bIns="0" anchor="t">
-            <a:spAutoFit/>
-          </a:bodyPr>
-          <a:lstStyle/>
-          <a:p>
-            <a:pPr algn="ctr"/>
-            <a:r>
-              <a:rPr sz="1050" b="1">
+              <a:rPr sz="1500" b="1">
                 <a:solidFill>
                   <a:srgbClr val="047857"/>
                 </a:solidFill>
@@ -5748,14 +4851,14 @@
       </p:sp>
       <p:sp>
         <p:nvSpPr>
-          <p:cNvPr id="69" name="TextBox 68"/>
+          <p:cNvPr id="45" name="TextBox 44"/>
           <p:cNvSpPr txBox="1"/>
           <p:nvPr/>
         </p:nvSpPr>
         <p:spPr>
           <a:xfrm>
-            <a:off x="7021486" y="3715434"/>
-            <a:ext cx="1448587" cy="142217"/>
+            <a:off x="6045835" y="4298273"/>
+            <a:ext cx="1901525" cy="177772"/>
           </a:xfrm>
           <a:prstGeom prst="rect">
             <a:avLst/>
@@ -5770,27 +4873,75 @@
           <a:p>
             <a:pPr algn="ctr"/>
             <a:r>
-              <a:rPr sz="800" b="0">
+              <a:rPr sz="1000" b="0">
                 <a:solidFill>
                   <a:srgbClr val="374151"/>
                 </a:solidFill>
                 <a:latin typeface="Malgun Gothic"/>
               </a:rPr>
-              <a:t>기준: 성공 사례 종합</a:t>
+              <a:t>CV 매칭으로 좌표 결정</a:t>
             </a:r>
           </a:p>
         </p:txBody>
       </p:sp>
       <p:sp>
         <p:nvSpPr>
-          <p:cNvPr id="70" name="TextBox 69"/>
+          <p:cNvPr id="46" name="Rounded Rectangle 45"/>
+          <p:cNvSpPr/>
+          <p:nvPr/>
+        </p:nvSpPr>
+        <p:spPr>
+          <a:xfrm>
+            <a:off x="8114022" y="3720514"/>
+            <a:ext cx="1777720" cy="952350"/>
+          </a:xfrm>
+          <a:prstGeom prst="roundRect">
+            <a:avLst>
+              <a:gd name="adj" fmla="val 8000"/>
+            </a:avLst>
+          </a:prstGeom>
+          <a:solidFill>
+            <a:srgbClr val="FFFFFF"/>
+          </a:solidFill>
+          <a:ln w="17780">
+            <a:solidFill>
+              <a:srgbClr val="2563EB"/>
+            </a:solidFill>
+          </a:ln>
+          <a:effectLst/>
+        </p:spPr>
+        <p:style>
+          <a:lnRef idx="1">
+            <a:schemeClr val="accent1"/>
+          </a:lnRef>
+          <a:fillRef idx="3">
+            <a:schemeClr val="accent1"/>
+          </a:fillRef>
+          <a:effectRef idx="2">
+            <a:schemeClr val="accent1"/>
+          </a:effectRef>
+          <a:fontRef idx="minor">
+            <a:schemeClr val="lt1"/>
+          </a:fontRef>
+        </p:style>
+        <p:txBody>
+          <a:bodyPr rtlCol="0" anchor="ctr"/>
+          <a:lstStyle/>
+          <a:p>
+            <a:pPr algn="ctr"/>
+          </a:p>
+        </p:txBody>
+      </p:sp>
+      <p:sp>
+        <p:nvSpPr>
+          <p:cNvPr id="47" name="TextBox 46"/>
           <p:cNvSpPr txBox="1"/>
           <p:nvPr/>
         </p:nvSpPr>
         <p:spPr>
           <a:xfrm>
-            <a:off x="6955456" y="3867810"/>
-            <a:ext cx="1580647" cy="142217"/>
+            <a:off x="8344331" y="3933205"/>
+            <a:ext cx="1317100" cy="266658"/>
           </a:xfrm>
           <a:prstGeom prst="rect">
             <a:avLst/>
@@ -5805,443 +4956,67 @@
           <a:p>
             <a:pPr algn="ctr"/>
             <a:r>
-              <a:rPr sz="800" b="0">
+              <a:rPr sz="1500" b="1">
+                <a:solidFill>
+                  <a:srgbClr val="1D4ED8"/>
+                </a:solidFill>
+                <a:latin typeface="Malgun Gothic"/>
+              </a:rPr>
+              <a:t>확정·기록</a:t>
+            </a:r>
+          </a:p>
+        </p:txBody>
+      </p:sp>
+      <p:sp>
+        <p:nvSpPr>
+          <p:cNvPr id="48" name="TextBox 47"/>
+          <p:cNvSpPr txBox="1"/>
+          <p:nvPr/>
+        </p:nvSpPr>
+        <p:spPr>
+          <a:xfrm>
+            <a:off x="8081007" y="4298273"/>
+            <a:ext cx="1843749" cy="177772"/>
+          </a:xfrm>
+          <a:prstGeom prst="rect">
+            <a:avLst/>
+          </a:prstGeom>
+          <a:noFill/>
+        </p:spPr>
+        <p:txBody>
+          <a:bodyPr wrap="none" lIns="0" rIns="0" tIns="0" bIns="0" anchor="t">
+            <a:spAutoFit/>
+          </a:bodyPr>
+          <a:lstStyle/>
+          <a:p>
+            <a:pPr algn="ctr"/>
+            <a:r>
+              <a:rPr sz="1000" b="0">
                 <a:solidFill>
                   <a:srgbClr val="374151"/>
                 </a:solidFill>
                 <a:latin typeface="Malgun Gothic"/>
               </a:rPr>
-              <a:t>(부족하면 등록 이미지)</a:t>
-            </a:r>
-          </a:p>
-        </p:txBody>
-      </p:sp>
-      <p:sp>
-        <p:nvSpPr>
-          <p:cNvPr id="71" name="TextBox 70"/>
-          <p:cNvSpPr txBox="1"/>
-          <p:nvPr/>
-        </p:nvSpPr>
-        <p:spPr>
-          <a:xfrm>
-            <a:off x="7044596" y="4020186"/>
-            <a:ext cx="1402367" cy="142217"/>
-          </a:xfrm>
-          <a:prstGeom prst="rect">
-            <a:avLst/>
-          </a:prstGeom>
-          <a:noFill/>
-        </p:spPr>
-        <p:txBody>
-          <a:bodyPr wrap="none" lIns="0" rIns="0" tIns="0" bIns="0" anchor="t">
-            <a:spAutoFit/>
-          </a:bodyPr>
-          <a:lstStyle/>
-          <a:p>
-            <a:pPr algn="ctr"/>
-            <a:r>
-              <a:rPr sz="800" b="0">
-                <a:solidFill>
-                  <a:srgbClr val="374151"/>
-                </a:solidFill>
-                <a:latin typeface="Malgun Gothic"/>
-              </a:rPr>
-              <a:t>CV 매칭 → 픽셀 좌표</a:t>
-            </a:r>
-          </a:p>
-        </p:txBody>
-      </p:sp>
-      <p:sp>
-        <p:nvSpPr>
-          <p:cNvPr id="72" name="Rounded Rectangle 71"/>
-          <p:cNvSpPr/>
-          <p:nvPr/>
-        </p:nvSpPr>
-        <p:spPr>
-          <a:xfrm>
-            <a:off x="8634640" y="3428460"/>
-            <a:ext cx="1472968" cy="863464"/>
-          </a:xfrm>
-          <a:prstGeom prst="roundRect">
-            <a:avLst>
-              <a:gd name="adj" fmla="val 7352"/>
-            </a:avLst>
-          </a:prstGeom>
-          <a:solidFill>
-            <a:srgbClr val="FFFFFF"/>
-          </a:solidFill>
-          <a:ln w="15240">
-            <a:solidFill>
-              <a:srgbClr val="2563EB"/>
-            </a:solidFill>
-          </a:ln>
-          <a:effectLst/>
-        </p:spPr>
-        <p:style>
-          <a:lnRef idx="1">
-            <a:schemeClr val="accent1"/>
-          </a:lnRef>
-          <a:fillRef idx="3">
-            <a:schemeClr val="accent1"/>
-          </a:fillRef>
-          <a:effectRef idx="2">
-            <a:schemeClr val="accent1"/>
-          </a:effectRef>
-          <a:fontRef idx="minor">
-            <a:schemeClr val="lt1"/>
-          </a:fontRef>
-        </p:style>
-        <p:txBody>
-          <a:bodyPr rtlCol="0" anchor="ctr"/>
-          <a:lstStyle/>
-          <a:p>
-            <a:pPr algn="ctr"/>
-          </a:p>
-        </p:txBody>
-      </p:sp>
-      <p:sp>
-        <p:nvSpPr>
-          <p:cNvPr id="73" name="TextBox 72"/>
-          <p:cNvSpPr txBox="1"/>
-          <p:nvPr/>
-        </p:nvSpPr>
-        <p:spPr>
-          <a:xfrm>
-            <a:off x="8892806" y="3491632"/>
-            <a:ext cx="956635" cy="186660"/>
-          </a:xfrm>
-          <a:prstGeom prst="rect">
-            <a:avLst/>
-          </a:prstGeom>
-          <a:noFill/>
-        </p:spPr>
-        <p:txBody>
-          <a:bodyPr wrap="none" lIns="0" rIns="0" tIns="0" bIns="0" anchor="t">
-            <a:spAutoFit/>
-          </a:bodyPr>
-          <a:lstStyle/>
-          <a:p>
-            <a:pPr algn="ctr"/>
-            <a:r>
-              <a:rPr sz="1050" b="1">
-                <a:solidFill>
-                  <a:srgbClr val="1D4ED8"/>
-                </a:solidFill>
-                <a:latin typeface="Malgun Gothic"/>
-              </a:rPr>
-              <a:t>확정 (OK)</a:t>
-            </a:r>
-          </a:p>
-        </p:txBody>
-      </p:sp>
-      <p:sp>
-        <p:nvSpPr>
-          <p:cNvPr id="74" name="TextBox 73"/>
-          <p:cNvSpPr txBox="1"/>
-          <p:nvPr/>
-        </p:nvSpPr>
-        <p:spPr>
-          <a:xfrm>
-            <a:off x="8785492" y="3715434"/>
-            <a:ext cx="1171263" cy="142217"/>
-          </a:xfrm>
-          <a:prstGeom prst="rect">
-            <a:avLst/>
-          </a:prstGeom>
-          <a:noFill/>
-        </p:spPr>
-        <p:txBody>
-          <a:bodyPr wrap="none" lIns="0" rIns="0" tIns="0" bIns="0" anchor="t">
-            <a:spAutoFit/>
-          </a:bodyPr>
-          <a:lstStyle/>
-          <a:p>
-            <a:pPr algn="ctr"/>
-            <a:r>
-              <a:rPr sz="800" b="0">
-                <a:solidFill>
-                  <a:srgbClr val="374151"/>
-                </a:solidFill>
-                <a:latin typeface="Malgun Gothic"/>
-              </a:rPr>
-              <a:t>재조정 결과 확정</a:t>
-            </a:r>
-          </a:p>
-        </p:txBody>
-      </p:sp>
-      <p:sp>
-        <p:nvSpPr>
-          <p:cNvPr id="75" name="TextBox 74"/>
-          <p:cNvSpPr txBox="1"/>
-          <p:nvPr/>
-        </p:nvSpPr>
-        <p:spPr>
-          <a:xfrm>
-            <a:off x="8640227" y="3867810"/>
-            <a:ext cx="1461793" cy="142217"/>
-          </a:xfrm>
-          <a:prstGeom prst="rect">
-            <a:avLst/>
-          </a:prstGeom>
-          <a:noFill/>
-        </p:spPr>
-        <p:txBody>
-          <a:bodyPr wrap="none" lIns="0" rIns="0" tIns="0" bIns="0" anchor="t">
-            <a:spAutoFit/>
-          </a:bodyPr>
-          <a:lstStyle/>
-          <a:p>
-            <a:pPr algn="ctr"/>
-            <a:r>
-              <a:rPr sz="800" b="0">
-                <a:solidFill>
-                  <a:srgbClr val="374151"/>
-                </a:solidFill>
-                <a:latin typeface="Malgun Gothic"/>
-              </a:rPr>
-              <a:t>현 단계: 담당자가 OK</a:t>
-            </a:r>
-          </a:p>
-        </p:txBody>
-      </p:sp>
-      <p:sp>
-        <p:nvSpPr>
-          <p:cNvPr id="76" name="TextBox 75"/>
-          <p:cNvSpPr txBox="1"/>
-          <p:nvPr/>
-        </p:nvSpPr>
-        <p:spPr>
-          <a:xfrm>
-            <a:off x="8663337" y="4020186"/>
-            <a:ext cx="1415573" cy="142217"/>
-          </a:xfrm>
-          <a:prstGeom prst="rect">
-            <a:avLst/>
-          </a:prstGeom>
-          <a:noFill/>
-        </p:spPr>
-        <p:txBody>
-          <a:bodyPr wrap="none" lIns="0" rIns="0" tIns="0" bIns="0" anchor="t">
-            <a:spAutoFit/>
-          </a:bodyPr>
-          <a:lstStyle/>
-          <a:p>
-            <a:pPr algn="ctr"/>
-            <a:r>
-              <a:rPr sz="800" b="0">
-                <a:solidFill>
-                  <a:srgbClr val="374151"/>
-                </a:solidFill>
-                <a:latin typeface="Malgun Gothic"/>
-              </a:rPr>
-              <a:t>향후: Agent 가 수행</a:t>
-            </a:r>
-          </a:p>
-        </p:txBody>
-      </p:sp>
-      <p:sp>
-        <p:nvSpPr>
-          <p:cNvPr id="77" name="Rounded Rectangle 76"/>
-          <p:cNvSpPr/>
-          <p:nvPr/>
-        </p:nvSpPr>
-        <p:spPr>
-          <a:xfrm>
-            <a:off x="10259984" y="3428460"/>
-            <a:ext cx="1472968" cy="863464"/>
-          </a:xfrm>
-          <a:prstGeom prst="roundRect">
-            <a:avLst>
-              <a:gd name="adj" fmla="val 7352"/>
-            </a:avLst>
-          </a:prstGeom>
-          <a:solidFill>
-            <a:srgbClr val="FFFFFF"/>
-          </a:solidFill>
-          <a:ln w="15240">
-            <a:solidFill>
-              <a:srgbClr val="2563EB"/>
-            </a:solidFill>
-          </a:ln>
-          <a:effectLst/>
-        </p:spPr>
-        <p:style>
-          <a:lnRef idx="1">
-            <a:schemeClr val="accent1"/>
-          </a:lnRef>
-          <a:fillRef idx="3">
-            <a:schemeClr val="accent1"/>
-          </a:fillRef>
-          <a:effectRef idx="2">
-            <a:schemeClr val="accent1"/>
-          </a:effectRef>
-          <a:fontRef idx="minor">
-            <a:schemeClr val="lt1"/>
-          </a:fontRef>
-        </p:style>
-        <p:txBody>
-          <a:bodyPr rtlCol="0" anchor="ctr"/>
-          <a:lstStyle/>
-          <a:p>
-            <a:pPr algn="ctr"/>
-          </a:p>
-        </p:txBody>
-      </p:sp>
-      <p:sp>
-        <p:nvSpPr>
-          <p:cNvPr id="78" name="TextBox 77"/>
-          <p:cNvSpPr txBox="1"/>
-          <p:nvPr/>
-        </p:nvSpPr>
-        <p:spPr>
-          <a:xfrm>
-            <a:off x="10093497" y="3491632"/>
-            <a:ext cx="1805941" cy="186660"/>
-          </a:xfrm>
-          <a:prstGeom prst="rect">
-            <a:avLst/>
-          </a:prstGeom>
-          <a:noFill/>
-        </p:spPr>
-        <p:txBody>
-          <a:bodyPr wrap="none" lIns="0" rIns="0" tIns="0" bIns="0" anchor="t">
-            <a:spAutoFit/>
-          </a:bodyPr>
-          <a:lstStyle/>
-          <a:p>
-            <a:pPr algn="ctr"/>
-            <a:r>
-              <a:rPr sz="1050" b="1">
-                <a:solidFill>
-                  <a:srgbClr val="1D4ED8"/>
-                </a:solidFill>
-                <a:latin typeface="Malgun Gothic"/>
-              </a:rPr>
-              <a:t>완료 감시·종료·기록</a:t>
-            </a:r>
-          </a:p>
-        </p:txBody>
-      </p:sp>
-      <p:sp>
-        <p:nvSpPr>
-          <p:cNvPr id="79" name="TextBox 78"/>
-          <p:cNvSpPr txBox="1"/>
-          <p:nvPr/>
-        </p:nvSpPr>
-        <p:spPr>
-          <a:xfrm>
-            <a:off x="10308490" y="3715434"/>
-            <a:ext cx="1375955" cy="142217"/>
-          </a:xfrm>
-          <a:prstGeom prst="rect">
-            <a:avLst/>
-          </a:prstGeom>
-          <a:noFill/>
-        </p:spPr>
-        <p:txBody>
-          <a:bodyPr wrap="none" lIns="0" rIns="0" tIns="0" bIns="0" anchor="t">
-            <a:spAutoFit/>
-          </a:bodyPr>
-          <a:lstStyle/>
-          <a:p>
-            <a:pPr algn="ctr"/>
-            <a:r>
-              <a:rPr sz="800" b="0">
-                <a:solidFill>
-                  <a:srgbClr val="374151"/>
-                </a:solidFill>
-                <a:latin typeface="Malgun Gothic"/>
-              </a:rPr>
-              <a:t>완료·개입 종료 감지</a:t>
-            </a:r>
-          </a:p>
-        </p:txBody>
-      </p:sp>
-      <p:sp>
-        <p:nvSpPr>
-          <p:cNvPr id="80" name="TextBox 79"/>
-          <p:cNvSpPr txBox="1"/>
-          <p:nvPr/>
-        </p:nvSpPr>
-        <p:spPr>
-          <a:xfrm>
-            <a:off x="10361314" y="3867810"/>
-            <a:ext cx="1270307" cy="142217"/>
-          </a:xfrm>
-          <a:prstGeom prst="rect">
-            <a:avLst/>
-          </a:prstGeom>
-          <a:noFill/>
-        </p:spPr>
-        <p:txBody>
-          <a:bodyPr wrap="none" lIns="0" rIns="0" tIns="0" bIns="0" anchor="t">
-            <a:spAutoFit/>
-          </a:bodyPr>
-          <a:lstStyle/>
-          <a:p>
-            <a:pPr algn="ctr"/>
-            <a:r>
-              <a:rPr sz="800" b="0">
-                <a:solidFill>
-                  <a:srgbClr val="374151"/>
-                </a:solidFill>
-                <a:latin typeface="Malgun Gothic"/>
-              </a:rPr>
-              <a:t>tool 창 자동 종료</a:t>
-            </a:r>
-          </a:p>
-        </p:txBody>
-      </p:sp>
-      <p:sp>
-        <p:nvSpPr>
-          <p:cNvPr id="81" name="TextBox 80"/>
-          <p:cNvSpPr txBox="1"/>
-          <p:nvPr/>
-        </p:nvSpPr>
-        <p:spPr>
-          <a:xfrm>
-            <a:off x="10295284" y="4020186"/>
-            <a:ext cx="1402367" cy="142217"/>
-          </a:xfrm>
-          <a:prstGeom prst="rect">
-            <a:avLst/>
-          </a:prstGeom>
-          <a:noFill/>
-        </p:spPr>
-        <p:txBody>
-          <a:bodyPr wrap="none" lIns="0" rIns="0" tIns="0" bIns="0" anchor="t">
-            <a:spAutoFit/>
-          </a:bodyPr>
-          <a:lstStyle/>
-          <a:p>
-            <a:pPr algn="ctr"/>
-            <a:r>
-              <a:rPr sz="800" b="0">
-                <a:solidFill>
-                  <a:srgbClr val="374151"/>
-                </a:solidFill>
-                <a:latin typeface="Malgun Gothic"/>
-              </a:rPr>
-              <a:t>대응 1건 = 기록 1줄</a:t>
+              <a:t>담당자 OK · 기록 1줄</a:t>
             </a:r>
           </a:p>
         </p:txBody>
       </p:sp>
       <p:cxnSp>
         <p:nvCxnSpPr>
-          <p:cNvPr id="82" name="Connector 81"/>
+          <p:cNvPr id="49" name="Connector 48"/>
           <p:cNvCxnSpPr/>
           <p:nvPr/>
         </p:nvCxnSpPr>
         <p:spPr>
           <a:xfrm>
-            <a:off x="1980888.0" y="3860192.0"/>
-            <a:ext cx="88886.0" cy="0.0"/>
+            <a:off x="3872890.0" y="4196689.0"/>
+            <a:ext cx="126980.0" cy="0.0"/>
           </a:xfrm>
           <a:prstGeom prst="line">
             <a:avLst/>
           </a:prstGeom>
-          <a:ln w="12700">
+          <a:ln w="15240">
             <a:solidFill>
               <a:srgbClr val="2563EB"/>
             </a:solidFill>
@@ -6264,14 +5039,14 @@
       </p:cxnSp>
       <p:sp>
         <p:nvSpPr>
-          <p:cNvPr id="83" name="Freeform 82"/>
+          <p:cNvPr id="50" name="Freeform 49"/>
           <p:cNvSpPr/>
           <p:nvPr/>
         </p:nvSpPr>
         <p:spPr>
           <a:xfrm>
-            <a:off x="2057076" y="3815749"/>
-            <a:ext cx="76188" cy="88886"/>
+            <a:off x="3974474" y="4139548"/>
+            <a:ext cx="126980" cy="114282"/>
           </a:xfrm>
           <a:custGeom>
             <a:avLst/>
@@ -6280,15 +5055,15 @@
             <a:cxnLst/>
             <a:rect l="l" t="t" r="r" b="b"/>
             <a:pathLst>
-              <a:path w="12" h="14">
+              <a:path w="20" h="18">
                 <a:moveTo>
                   <a:pt x="0" y="0"/>
                 </a:moveTo>
                 <a:lnTo>
-                  <a:pt x="12" y="7"/>
+                  <a:pt x="20" y="9"/>
                 </a:lnTo>
                 <a:lnTo>
-                  <a:pt x="0" y="14"/>
+                  <a:pt x="0" y="18"/>
                 </a:lnTo>
                 <a:close/>
               </a:path>
@@ -6326,19 +5101,19 @@
       </p:sp>
       <p:cxnSp>
         <p:nvCxnSpPr>
-          <p:cNvPr id="84" name="Connector 83"/>
+          <p:cNvPr id="51" name="Connector 50"/>
           <p:cNvCxnSpPr/>
           <p:nvPr/>
         </p:nvCxnSpPr>
         <p:spPr>
           <a:xfrm>
-            <a:off x="3606232.0" y="3860192.0"/>
-            <a:ext cx="88886.0" cy="0.0"/>
+            <a:off x="5879174.0" y="4196689.0"/>
+            <a:ext cx="126980.0" cy="0.0"/>
           </a:xfrm>
           <a:prstGeom prst="line">
             <a:avLst/>
           </a:prstGeom>
-          <a:ln w="12700">
+          <a:ln w="15240">
             <a:solidFill>
               <a:srgbClr val="2563EB"/>
             </a:solidFill>
@@ -6361,14 +5136,14 @@
       </p:cxnSp>
       <p:sp>
         <p:nvSpPr>
-          <p:cNvPr id="85" name="Freeform 84"/>
+          <p:cNvPr id="52" name="Freeform 51"/>
           <p:cNvSpPr/>
           <p:nvPr/>
         </p:nvSpPr>
         <p:spPr>
           <a:xfrm>
-            <a:off x="3682420" y="3815749"/>
-            <a:ext cx="76188" cy="88886"/>
+            <a:off x="5980758" y="4139548"/>
+            <a:ext cx="126980" cy="114282"/>
           </a:xfrm>
           <a:custGeom>
             <a:avLst/>
@@ -6377,15 +5152,15 @@
             <a:cxnLst/>
             <a:rect l="l" t="t" r="r" b="b"/>
             <a:pathLst>
-              <a:path w="12" h="14">
+              <a:path w="20" h="18">
                 <a:moveTo>
                   <a:pt x="0" y="0"/>
                 </a:moveTo>
                 <a:lnTo>
-                  <a:pt x="12" y="7"/>
+                  <a:pt x="20" y="9"/>
                 </a:lnTo>
                 <a:lnTo>
-                  <a:pt x="0" y="14"/>
+                  <a:pt x="0" y="18"/>
                 </a:lnTo>
                 <a:close/>
               </a:path>
@@ -6423,19 +5198,19 @@
       </p:sp>
       <p:cxnSp>
         <p:nvCxnSpPr>
-          <p:cNvPr id="86" name="Connector 85"/>
+          <p:cNvPr id="53" name="Connector 52"/>
           <p:cNvCxnSpPr/>
           <p:nvPr/>
         </p:nvCxnSpPr>
         <p:spPr>
           <a:xfrm>
-            <a:off x="5231576.0" y="3860192.0"/>
-            <a:ext cx="88886.0" cy="0.0"/>
+            <a:off x="7885458.0" y="4196689.0"/>
+            <a:ext cx="126980.0" cy="0.0"/>
           </a:xfrm>
           <a:prstGeom prst="line">
             <a:avLst/>
           </a:prstGeom>
-          <a:ln w="12700">
+          <a:ln w="15240">
             <a:solidFill>
               <a:srgbClr val="2563EB"/>
             </a:solidFill>
@@ -6458,14 +5233,14 @@
       </p:cxnSp>
       <p:sp>
         <p:nvSpPr>
-          <p:cNvPr id="87" name="Freeform 86"/>
+          <p:cNvPr id="54" name="Freeform 53"/>
           <p:cNvSpPr/>
           <p:nvPr/>
         </p:nvSpPr>
         <p:spPr>
           <a:xfrm>
-            <a:off x="5307764" y="3815749"/>
-            <a:ext cx="76188" cy="88886"/>
+            <a:off x="7987042" y="4139548"/>
+            <a:ext cx="126980" cy="114282"/>
           </a:xfrm>
           <a:custGeom>
             <a:avLst/>
@@ -6474,15 +5249,15 @@
             <a:cxnLst/>
             <a:rect l="l" t="t" r="r" b="b"/>
             <a:pathLst>
-              <a:path w="12" h="14">
+              <a:path w="20" h="18">
                 <a:moveTo>
                   <a:pt x="0" y="0"/>
                 </a:moveTo>
                 <a:lnTo>
-                  <a:pt x="12" y="7"/>
+                  <a:pt x="20" y="9"/>
                 </a:lnTo>
                 <a:lnTo>
-                  <a:pt x="0" y="14"/>
+                  <a:pt x="0" y="18"/>
                 </a:lnTo>
                 <a:close/>
               </a:path>
@@ -6518,51 +5293,132 @@
           </a:p>
         </p:txBody>
       </p:sp>
-      <p:cxnSp>
-        <p:nvCxnSpPr>
-          <p:cNvPr id="88" name="Connector 87"/>
-          <p:cNvCxnSpPr/>
-          <p:nvPr/>
-        </p:nvCxnSpPr>
-        <p:spPr>
-          <a:xfrm>
-            <a:off x="6856920.0" y="3860192.0"/>
-            <a:ext cx="88886.0" cy="0.0"/>
-          </a:xfrm>
-          <a:prstGeom prst="line">
+      <p:sp>
+        <p:nvSpPr>
+          <p:cNvPr id="55" name="Rounded Rectangle 54"/>
+          <p:cNvSpPr/>
+          <p:nvPr/>
+        </p:nvSpPr>
+        <p:spPr>
+          <a:xfrm>
+            <a:off x="10158400" y="3720514"/>
+            <a:ext cx="1777720" cy="952350"/>
+          </a:xfrm>
+          <a:prstGeom prst="roundRect">
+            <a:avLst>
+              <a:gd name="adj" fmla="val 8000"/>
+            </a:avLst>
+          </a:prstGeom>
+          <a:solidFill>
+            <a:srgbClr val="1D4ED8"/>
+          </a:solidFill>
+          <a:ln>
+            <a:noFill/>
+          </a:ln>
+          <a:effectLst/>
+        </p:spPr>
+        <p:style>
+          <a:lnRef idx="1">
+            <a:schemeClr val="accent1"/>
+          </a:lnRef>
+          <a:fillRef idx="3">
+            <a:schemeClr val="accent1"/>
+          </a:fillRef>
+          <a:effectRef idx="2">
+            <a:schemeClr val="accent1"/>
+          </a:effectRef>
+          <a:fontRef idx="minor">
+            <a:schemeClr val="lt1"/>
+          </a:fontRef>
+        </p:style>
+        <p:txBody>
+          <a:bodyPr rtlCol="0" anchor="ctr"/>
+          <a:lstStyle/>
+          <a:p>
+            <a:pPr algn="ctr"/>
+          </a:p>
+        </p:txBody>
+      </p:sp>
+      <p:sp>
+        <p:nvSpPr>
+          <p:cNvPr id="56" name="TextBox 55"/>
+          <p:cNvSpPr txBox="1"/>
+          <p:nvPr/>
+        </p:nvSpPr>
+        <p:spPr>
+          <a:xfrm>
+            <a:off x="9921963" y="3855112"/>
+            <a:ext cx="2250593" cy="497761"/>
+          </a:xfrm>
+          <a:prstGeom prst="rect">
             <a:avLst/>
           </a:prstGeom>
-          <a:ln w="12700">
-            <a:solidFill>
-              <a:srgbClr val="2563EB"/>
-            </a:solidFill>
-          </a:ln>
-        </p:spPr>
-        <p:style>
-          <a:lnRef idx="2">
-            <a:schemeClr val="accent1"/>
-          </a:lnRef>
-          <a:fillRef idx="0">
-            <a:schemeClr val="accent1"/>
-          </a:fillRef>
-          <a:effectRef idx="1">
-            <a:schemeClr val="accent1"/>
-          </a:effectRef>
-          <a:fontRef idx="minor">
-            <a:schemeClr val="tx1"/>
-          </a:fontRef>
-        </p:style>
-      </p:cxnSp>
-      <p:sp>
-        <p:nvSpPr>
-          <p:cNvPr id="89" name="Freeform 88"/>
+          <a:noFill/>
+        </p:spPr>
+        <p:txBody>
+          <a:bodyPr wrap="none" lIns="0" rIns="0" tIns="0" bIns="0" anchor="t">
+            <a:spAutoFit/>
+          </a:bodyPr>
+          <a:lstStyle/>
+          <a:p>
+            <a:pPr algn="ctr"/>
+            <a:r>
+              <a:rPr sz="2800" b="1">
+                <a:solidFill>
+                  <a:srgbClr val="FFFFFF"/>
+                </a:solidFill>
+                <a:latin typeface="Malgun Gothic"/>
+              </a:rPr>
+              <a:t>1분 미만</a:t>
+            </a:r>
+          </a:p>
+        </p:txBody>
+      </p:sp>
+      <p:sp>
+        <p:nvSpPr>
+          <p:cNvPr id="57" name="TextBox 56"/>
+          <p:cNvSpPr txBox="1"/>
+          <p:nvPr/>
+        </p:nvSpPr>
+        <p:spPr>
+          <a:xfrm>
+            <a:off x="9860695" y="4367477"/>
+            <a:ext cx="2373129" cy="195549"/>
+          </a:xfrm>
+          <a:prstGeom prst="rect">
+            <a:avLst/>
+          </a:prstGeom>
+          <a:noFill/>
+        </p:spPr>
+        <p:txBody>
+          <a:bodyPr wrap="none" lIns="0" rIns="0" tIns="0" bIns="0" anchor="t">
+            <a:spAutoFit/>
+          </a:bodyPr>
+          <a:lstStyle/>
+          <a:p>
+            <a:pPr algn="ctr"/>
+            <a:r>
+              <a:rPr sz="1100" b="0">
+                <a:solidFill>
+                  <a:srgbClr val="BFDBFE"/>
+                </a:solidFill>
+                <a:latin typeface="Malgun Gothic"/>
+              </a:rPr>
+              <a:t>감지~재조정 · 실알람 3건</a:t>
+            </a:r>
+          </a:p>
+        </p:txBody>
+      </p:sp>
+      <p:sp>
+        <p:nvSpPr>
+          <p:cNvPr id="58" name="Freeform 57"/>
           <p:cNvSpPr/>
           <p:nvPr/>
         </p:nvSpPr>
         <p:spPr>
           <a:xfrm>
-            <a:off x="6933108" y="3815749"/>
-            <a:ext cx="76188" cy="88886"/>
+            <a:off x="2984030" y="4698260"/>
+            <a:ext cx="4012568" cy="203168"/>
           </a:xfrm>
           <a:custGeom>
             <a:avLst/>
@@ -6571,25 +5427,27 @@
             <a:cxnLst/>
             <a:rect l="l" t="t" r="r" b="b"/>
             <a:pathLst>
-              <a:path w="12" h="14">
+              <a:path w="632" h="32">
                 <a:moveTo>
-                  <a:pt x="0" y="0"/>
+                  <a:pt x="632" y="0"/>
                 </a:moveTo>
                 <a:lnTo>
-                  <a:pt x="12" y="7"/>
+                  <a:pt x="632" y="26"/>
                 </a:lnTo>
                 <a:lnTo>
-                  <a:pt x="0" y="14"/>
+                  <a:pt x="0" y="26"/>
                 </a:lnTo>
-                <a:close/>
+                <a:lnTo>
+                  <a:pt x="0" y="32"/>
+                </a:lnTo>
               </a:path>
             </a:pathLst>
           </a:custGeom>
-          <a:solidFill>
-            <a:srgbClr val="2563EB"/>
-          </a:solidFill>
-          <a:ln>
-            <a:noFill/>
+          <a:noFill/>
+          <a:ln w="15240">
+            <a:solidFill>
+              <a:srgbClr val="DC2626"/>
+            </a:solidFill>
           </a:ln>
           <a:effectLst/>
         </p:spPr>
@@ -6615,51 +5473,16 @@
           </a:p>
         </p:txBody>
       </p:sp>
-      <p:cxnSp>
-        <p:nvCxnSpPr>
-          <p:cNvPr id="90" name="Connector 89"/>
-          <p:cNvCxnSpPr/>
-          <p:nvPr/>
-        </p:nvCxnSpPr>
-        <p:spPr>
-          <a:xfrm>
-            <a:off x="8482264.0" y="3860192.0"/>
-            <a:ext cx="88886.0" cy="0.0"/>
-          </a:xfrm>
-          <a:prstGeom prst="line">
-            <a:avLst/>
-          </a:prstGeom>
-          <a:ln w="12700">
-            <a:solidFill>
-              <a:srgbClr val="2563EB"/>
-            </a:solidFill>
-          </a:ln>
-        </p:spPr>
-        <p:style>
-          <a:lnRef idx="2">
-            <a:schemeClr val="accent1"/>
-          </a:lnRef>
-          <a:fillRef idx="0">
-            <a:schemeClr val="accent1"/>
-          </a:fillRef>
-          <a:effectRef idx="1">
-            <a:schemeClr val="accent1"/>
-          </a:effectRef>
-          <a:fontRef idx="minor">
-            <a:schemeClr val="tx1"/>
-          </a:fontRef>
-        </p:style>
-      </p:cxnSp>
-      <p:sp>
-        <p:nvSpPr>
-          <p:cNvPr id="91" name="Freeform 90"/>
+      <p:sp>
+        <p:nvSpPr>
+          <p:cNvPr id="59" name="Freeform 58"/>
           <p:cNvSpPr/>
           <p:nvPr/>
         </p:nvSpPr>
         <p:spPr>
           <a:xfrm>
-            <a:off x="8558452" y="3815749"/>
-            <a:ext cx="76188" cy="88886"/>
+            <a:off x="2926889" y="4888730"/>
+            <a:ext cx="114282" cy="126980"/>
           </a:xfrm>
           <a:custGeom>
             <a:avLst/>
@@ -6668,209 +5491,15 @@
             <a:cxnLst/>
             <a:rect l="l" t="t" r="r" b="b"/>
             <a:pathLst>
-              <a:path w="12" h="14">
+              <a:path w="18" h="20">
                 <a:moveTo>
                   <a:pt x="0" y="0"/>
                 </a:moveTo>
                 <a:lnTo>
-                  <a:pt x="12" y="7"/>
+                  <a:pt x="9" y="20"/>
                 </a:lnTo>
                 <a:lnTo>
-                  <a:pt x="0" y="14"/>
-                </a:lnTo>
-                <a:close/>
-              </a:path>
-            </a:pathLst>
-          </a:custGeom>
-          <a:solidFill>
-            <a:srgbClr val="2563EB"/>
-          </a:solidFill>
-          <a:ln>
-            <a:noFill/>
-          </a:ln>
-          <a:effectLst/>
-        </p:spPr>
-        <p:style>
-          <a:lnRef idx="1">
-            <a:schemeClr val="accent1"/>
-          </a:lnRef>
-          <a:fillRef idx="3">
-            <a:schemeClr val="accent1"/>
-          </a:fillRef>
-          <a:effectRef idx="2">
-            <a:schemeClr val="accent1"/>
-          </a:effectRef>
-          <a:fontRef idx="minor">
-            <a:schemeClr val="lt1"/>
-          </a:fontRef>
-        </p:style>
-        <p:txBody>
-          <a:bodyPr rtlCol="0" anchor="ctr"/>
-          <a:lstStyle/>
-          <a:p>
-            <a:pPr algn="ctr"/>
-          </a:p>
-        </p:txBody>
-      </p:sp>
-      <p:cxnSp>
-        <p:nvCxnSpPr>
-          <p:cNvPr id="92" name="Connector 91"/>
-          <p:cNvCxnSpPr/>
-          <p:nvPr/>
-        </p:nvCxnSpPr>
-        <p:spPr>
-          <a:xfrm>
-            <a:off x="10107608.0" y="3860192.0"/>
-            <a:ext cx="88886.0" cy="0.0"/>
-          </a:xfrm>
-          <a:prstGeom prst="line">
-            <a:avLst/>
-          </a:prstGeom>
-          <a:ln w="12700">
-            <a:solidFill>
-              <a:srgbClr val="2563EB"/>
-            </a:solidFill>
-          </a:ln>
-        </p:spPr>
-        <p:style>
-          <a:lnRef idx="2">
-            <a:schemeClr val="accent1"/>
-          </a:lnRef>
-          <a:fillRef idx="0">
-            <a:schemeClr val="accent1"/>
-          </a:fillRef>
-          <a:effectRef idx="1">
-            <a:schemeClr val="accent1"/>
-          </a:effectRef>
-          <a:fontRef idx="minor">
-            <a:schemeClr val="tx1"/>
-          </a:fontRef>
-        </p:style>
-      </p:cxnSp>
-      <p:sp>
-        <p:nvSpPr>
-          <p:cNvPr id="93" name="Freeform 92"/>
-          <p:cNvSpPr/>
-          <p:nvPr/>
-        </p:nvSpPr>
-        <p:spPr>
-          <a:xfrm>
-            <a:off x="10183796" y="3815749"/>
-            <a:ext cx="76188" cy="88886"/>
-          </a:xfrm>
-          <a:custGeom>
-            <a:avLst/>
-            <a:gdLst/>
-            <a:ahLst/>
-            <a:cxnLst/>
-            <a:rect l="l" t="t" r="r" b="b"/>
-            <a:pathLst>
-              <a:path w="12" h="14">
-                <a:moveTo>
-                  <a:pt x="0" y="0"/>
-                </a:moveTo>
-                <a:lnTo>
-                  <a:pt x="12" y="7"/>
-                </a:lnTo>
-                <a:lnTo>
-                  <a:pt x="0" y="14"/>
-                </a:lnTo>
-                <a:close/>
-              </a:path>
-            </a:pathLst>
-          </a:custGeom>
-          <a:solidFill>
-            <a:srgbClr val="2563EB"/>
-          </a:solidFill>
-          <a:ln>
-            <a:noFill/>
-          </a:ln>
-          <a:effectLst/>
-        </p:spPr>
-        <p:style>
-          <a:lnRef idx="1">
-            <a:schemeClr val="accent1"/>
-          </a:lnRef>
-          <a:fillRef idx="3">
-            <a:schemeClr val="accent1"/>
-          </a:fillRef>
-          <a:effectRef idx="2">
-            <a:schemeClr val="accent1"/>
-          </a:effectRef>
-          <a:fontRef idx="minor">
-            <a:schemeClr val="lt1"/>
-          </a:fontRef>
-        </p:style>
-        <p:txBody>
-          <a:bodyPr rtlCol="0" anchor="ctr"/>
-          <a:lstStyle/>
-          <a:p>
-            <a:pPr algn="ctr"/>
-          </a:p>
-        </p:txBody>
-      </p:sp>
-      <p:cxnSp>
-        <p:nvCxnSpPr>
-          <p:cNvPr id="94" name="Connector 93"/>
-          <p:cNvCxnSpPr/>
-          <p:nvPr/>
-        </p:nvCxnSpPr>
-        <p:spPr>
-          <a:xfrm>
-            <a:off x="6120436.0" y="4304622.0"/>
-            <a:ext cx="0.0" cy="431732.0"/>
-          </a:xfrm>
-          <a:prstGeom prst="line">
-            <a:avLst/>
-          </a:prstGeom>
-          <a:ln w="15240">
-            <a:solidFill>
-              <a:srgbClr val="DC2626"/>
-            </a:solidFill>
-          </a:ln>
-        </p:spPr>
-        <p:style>
-          <a:lnRef idx="2">
-            <a:schemeClr val="accent1"/>
-          </a:lnRef>
-          <a:fillRef idx="0">
-            <a:schemeClr val="accent1"/>
-          </a:fillRef>
-          <a:effectRef idx="1">
-            <a:schemeClr val="accent1"/>
-          </a:effectRef>
-          <a:fontRef idx="minor">
-            <a:schemeClr val="tx1"/>
-          </a:fontRef>
-        </p:style>
-      </p:cxnSp>
-      <p:sp>
-        <p:nvSpPr>
-          <p:cNvPr id="95" name="Freeform 94"/>
-          <p:cNvSpPr/>
-          <p:nvPr/>
-        </p:nvSpPr>
-        <p:spPr>
-          <a:xfrm>
-            <a:off x="6069644" y="4723656"/>
-            <a:ext cx="101584" cy="101584"/>
-          </a:xfrm>
-          <a:custGeom>
-            <a:avLst/>
-            <a:gdLst/>
-            <a:ahLst/>
-            <a:cxnLst/>
-            <a:rect l="l" t="t" r="r" b="b"/>
-            <a:pathLst>
-              <a:path w="16" h="16">
-                <a:moveTo>
-                  <a:pt x="0" y="0"/>
-                </a:moveTo>
-                <a:lnTo>
-                  <a:pt x="8" y="16"/>
-                </a:lnTo>
-                <a:lnTo>
-                  <a:pt x="16" y="0"/>
+                  <a:pt x="18" y="0"/>
                 </a:lnTo>
                 <a:close/>
               </a:path>
@@ -6906,117 +5535,55 @@
           </a:p>
         </p:txBody>
       </p:sp>
-      <p:cxnSp>
-        <p:nvCxnSpPr>
-          <p:cNvPr id="96" name="Connector 95"/>
-          <p:cNvCxnSpPr/>
-          <p:nvPr/>
-        </p:nvCxnSpPr>
-        <p:spPr>
-          <a:xfrm>
-            <a:off x="7745780.0" y="4304622.0"/>
-            <a:ext cx="0.0" cy="431732.0"/>
-          </a:xfrm>
-          <a:prstGeom prst="line">
+      <p:sp>
+        <p:nvSpPr>
+          <p:cNvPr id="60" name="TextBox 59"/>
+          <p:cNvSpPr txBox="1"/>
+          <p:nvPr/>
+        </p:nvSpPr>
+        <p:spPr>
+          <a:xfrm>
+            <a:off x="406336" y="5255067"/>
+            <a:ext cx="926890" cy="231103"/>
+          </a:xfrm>
+          <a:prstGeom prst="rect">
             <a:avLst/>
           </a:prstGeom>
-          <a:ln w="15240">
-            <a:solidFill>
-              <a:srgbClr val="DC2626"/>
-            </a:solidFill>
-          </a:ln>
-        </p:spPr>
-        <p:style>
-          <a:lnRef idx="2">
-            <a:schemeClr val="accent1"/>
-          </a:lnRef>
-          <a:fillRef idx="0">
-            <a:schemeClr val="accent1"/>
-          </a:fillRef>
-          <a:effectRef idx="1">
-            <a:schemeClr val="accent1"/>
-          </a:effectRef>
-          <a:fontRef idx="minor">
-            <a:schemeClr val="tx1"/>
-          </a:fontRef>
-        </p:style>
-      </p:cxnSp>
-      <p:sp>
-        <p:nvSpPr>
-          <p:cNvPr id="97" name="Freeform 96"/>
+          <a:noFill/>
+        </p:spPr>
+        <p:txBody>
+          <a:bodyPr wrap="none" lIns="0" rIns="0" tIns="0" bIns="0" anchor="t">
+            <a:spAutoFit/>
+          </a:bodyPr>
+          <a:lstStyle/>
+          <a:p>
+            <a:pPr algn="l"/>
+            <a:r>
+              <a:rPr sz="1300" b="1">
+                <a:solidFill>
+                  <a:srgbClr val="B91C1C"/>
+                </a:solidFill>
+                <a:latin typeface="Malgun Gothic"/>
+              </a:rPr>
+              <a:t>예외 시</a:t>
+            </a:r>
+          </a:p>
+        </p:txBody>
+      </p:sp>
+      <p:sp>
+        <p:nvSpPr>
+          <p:cNvPr id="61" name="Rounded Rectangle 60"/>
           <p:cNvSpPr/>
           <p:nvPr/>
         </p:nvSpPr>
         <p:spPr>
           <a:xfrm>
-            <a:off x="7694988" y="4723656"/>
-            <a:ext cx="101584" cy="101584"/>
-          </a:xfrm>
-          <a:custGeom>
-            <a:avLst/>
-            <a:gdLst/>
-            <a:ahLst/>
-            <a:cxnLst/>
-            <a:rect l="l" t="t" r="r" b="b"/>
-            <a:pathLst>
-              <a:path w="16" h="16">
-                <a:moveTo>
-                  <a:pt x="0" y="0"/>
-                </a:moveTo>
-                <a:lnTo>
-                  <a:pt x="8" y="16"/>
-                </a:lnTo>
-                <a:lnTo>
-                  <a:pt x="16" y="0"/>
-                </a:lnTo>
-                <a:close/>
-              </a:path>
-            </a:pathLst>
-          </a:custGeom>
-          <a:solidFill>
-            <a:srgbClr val="DC2626"/>
-          </a:solidFill>
-          <a:ln>
-            <a:noFill/>
-          </a:ln>
-          <a:effectLst/>
-        </p:spPr>
-        <p:style>
-          <a:lnRef idx="1">
-            <a:schemeClr val="accent1"/>
-          </a:lnRef>
-          <a:fillRef idx="3">
-            <a:schemeClr val="accent1"/>
-          </a:fillRef>
-          <a:effectRef idx="2">
-            <a:schemeClr val="accent1"/>
-          </a:effectRef>
-          <a:fontRef idx="minor">
-            <a:schemeClr val="lt1"/>
-          </a:fontRef>
-        </p:style>
-        <p:txBody>
-          <a:bodyPr rtlCol="0" anchor="ctr"/>
-          <a:lstStyle/>
-          <a:p>
-            <a:pPr algn="ctr"/>
-          </a:p>
-        </p:txBody>
-      </p:sp>
-      <p:sp>
-        <p:nvSpPr>
-          <p:cNvPr id="98" name="Rounded Rectangle 97"/>
-          <p:cNvSpPr/>
-          <p:nvPr/>
-        </p:nvSpPr>
-        <p:spPr>
-          <a:xfrm>
-            <a:off x="5383952" y="4825240"/>
-            <a:ext cx="2691976" cy="761880"/>
+            <a:off x="2095170" y="5053804"/>
+            <a:ext cx="1777720" cy="634900"/>
           </a:xfrm>
           <a:prstGeom prst="roundRect">
             <a:avLst>
-              <a:gd name="adj" fmla="val 8333"/>
+              <a:gd name="adj" fmla="val 12000"/>
             </a:avLst>
           </a:prstGeom>
           <a:solidFill>
@@ -7053,14 +5620,14 @@
       </p:sp>
       <p:sp>
         <p:nvSpPr>
-          <p:cNvPr id="99" name="TextBox 98"/>
+          <p:cNvPr id="62" name="TextBox 61"/>
           <p:cNvSpPr txBox="1"/>
           <p:nvPr/>
         </p:nvSpPr>
         <p:spPr>
           <a:xfrm>
-            <a:off x="5898855" y="4895079"/>
-            <a:ext cx="1662168" cy="177772"/>
+            <a:off x="2293766" y="5160467"/>
+            <a:ext cx="1380526" cy="213326"/>
           </a:xfrm>
           <a:prstGeom prst="rect">
             <a:avLst/>
@@ -7075,27 +5642,27 @@
           <a:p>
             <a:pPr algn="ctr"/>
             <a:r>
-              <a:rPr sz="1000" b="1">
+              <a:rPr sz="1200" b="1">
                 <a:solidFill>
                   <a:srgbClr val="B91C1C"/>
                 </a:solidFill>
                 <a:latin typeface="Malgun Gothic"/>
               </a:rPr>
-              <a:t>AI 가 진행 못할 때</a:t>
+              <a:t>AI 가 물러남</a:t>
             </a:r>
           </a:p>
         </p:txBody>
       </p:sp>
       <p:sp>
         <p:nvSpPr>
-          <p:cNvPr id="100" name="TextBox 99"/>
+          <p:cNvPr id="63" name="TextBox 62"/>
           <p:cNvSpPr txBox="1"/>
           <p:nvPr/>
         </p:nvSpPr>
         <p:spPr>
           <a:xfrm>
-            <a:off x="5391570" y="5099516"/>
-            <a:ext cx="2676738" cy="142217"/>
+            <a:off x="2176627" y="5416331"/>
+            <a:ext cx="1614804" cy="159994"/>
           </a:xfrm>
           <a:prstGeom prst="rect">
             <a:avLst/>
@@ -7110,101 +5677,31 @@
           <a:p>
             <a:pPr algn="ctr"/>
             <a:r>
-              <a:rPr sz="800" b="0">
+              <a:rPr sz="900" b="0">
                 <a:solidFill>
                   <a:srgbClr val="7F1D1D"/>
                 </a:solidFill>
                 <a:latin typeface="Malgun Gothic"/>
               </a:rPr>
-              <a:t>보정 불가 · 촬영 모드 불명 · 위치 모호</a:t>
+              <a:t>추측해서 누르지 않음</a:t>
             </a:r>
           </a:p>
         </p:txBody>
       </p:sp>
       <p:sp>
         <p:nvSpPr>
-          <p:cNvPr id="101" name="TextBox 100"/>
-          <p:cNvSpPr txBox="1"/>
-          <p:nvPr/>
-        </p:nvSpPr>
-        <p:spPr>
-          <a:xfrm>
-            <a:off x="5450997" y="5251892"/>
-            <a:ext cx="2557885" cy="142217"/>
-          </a:xfrm>
-          <a:prstGeom prst="rect">
-            <a:avLst/>
-          </a:prstGeom>
-          <a:noFill/>
-        </p:spPr>
-        <p:txBody>
-          <a:bodyPr wrap="none" lIns="0" rIns="0" tIns="0" bIns="0" anchor="t">
-            <a:spAutoFit/>
-          </a:bodyPr>
-          <a:lstStyle/>
-          <a:p>
-            <a:pPr algn="ctr"/>
-            <a:r>
-              <a:rPr sz="800" b="0">
-                <a:solidFill>
-                  <a:srgbClr val="7F1D1D"/>
-                </a:solidFill>
-                <a:latin typeface="Malgun Gothic"/>
-              </a:rPr>
-              <a:t>타인 점유 · OCR 확인 실패(클릭 차단)</a:t>
-            </a:r>
-          </a:p>
-        </p:txBody>
-      </p:sp>
-      <p:sp>
-        <p:nvSpPr>
-          <p:cNvPr id="102" name="TextBox 101"/>
-          <p:cNvSpPr txBox="1"/>
-          <p:nvPr/>
-        </p:nvSpPr>
-        <p:spPr>
-          <a:xfrm>
-            <a:off x="5711814" y="5404268"/>
-            <a:ext cx="2036251" cy="142217"/>
-          </a:xfrm>
-          <a:prstGeom prst="rect">
-            <a:avLst/>
-          </a:prstGeom>
-          <a:noFill/>
-        </p:spPr>
-        <p:txBody>
-          <a:bodyPr wrap="none" lIns="0" rIns="0" tIns="0" bIns="0" anchor="t">
-            <a:spAutoFit/>
-          </a:bodyPr>
-          <a:lstStyle/>
-          <a:p>
-            <a:pPr algn="ctr"/>
-            <a:r>
-              <a:rPr sz="800" b="0">
-                <a:solidFill>
-                  <a:srgbClr val="7F1D1D"/>
-                </a:solidFill>
-                <a:latin typeface="Malgun Gothic"/>
-              </a:rPr>
-              <a:t>추측해서 누르지 않고 물러난다</a:t>
-            </a:r>
-          </a:p>
-        </p:txBody>
-      </p:sp>
-      <p:sp>
-        <p:nvSpPr>
-          <p:cNvPr id="103" name="Rounded Rectangle 102"/>
+          <p:cNvPr id="64" name="Rounded Rectangle 63"/>
           <p:cNvSpPr/>
           <p:nvPr/>
         </p:nvSpPr>
         <p:spPr>
           <a:xfrm>
-            <a:off x="8253700" y="4825240"/>
-            <a:ext cx="1841210" cy="761880"/>
+            <a:off x="4101454" y="5053804"/>
+            <a:ext cx="1777720" cy="634900"/>
           </a:xfrm>
           <a:prstGeom prst="roundRect">
             <a:avLst>
-              <a:gd name="adj" fmla="val 8333"/>
+              <a:gd name="adj" fmla="val 12000"/>
             </a:avLst>
           </a:prstGeom>
           <a:solidFill>
@@ -7241,14 +5738,14 @@
       </p:sp>
       <p:sp>
         <p:nvSpPr>
-          <p:cNvPr id="104" name="TextBox 103"/>
+          <p:cNvPr id="65" name="TextBox 64"/>
           <p:cNvSpPr txBox="1"/>
           <p:nvPr/>
         </p:nvSpPr>
         <p:spPr>
           <a:xfrm>
-            <a:off x="8215288" y="4895079"/>
-            <a:ext cx="1918032" cy="177772"/>
+            <a:off x="4463473" y="5160467"/>
+            <a:ext cx="1053680" cy="213326"/>
           </a:xfrm>
           <a:prstGeom prst="rect">
             <a:avLst/>
@@ -7263,27 +5760,27 @@
           <a:p>
             <a:pPr algn="ctr"/>
             <a:r>
-              <a:rPr sz="1000" b="1">
+              <a:rPr sz="1200" b="1">
                 <a:solidFill>
                   <a:srgbClr val="6D28D9"/>
                 </a:solidFill>
                 <a:latin typeface="Malgun Gothic"/>
               </a:rPr>
-              <a:t>큐브 알림 → MI 담당자</a:t>
+              <a:t>큐브 알림</a:t>
             </a:r>
           </a:p>
         </p:txBody>
       </p:sp>
       <p:sp>
         <p:nvSpPr>
-          <p:cNvPr id="105" name="TextBox 104"/>
+          <p:cNvPr id="66" name="TextBox 65"/>
           <p:cNvSpPr txBox="1"/>
           <p:nvPr/>
         </p:nvSpPr>
         <p:spPr>
           <a:xfrm>
-            <a:off x="8172686" y="5099516"/>
-            <a:ext cx="2003236" cy="142217"/>
+            <a:off x="3945205" y="5416331"/>
+            <a:ext cx="2090217" cy="159994"/>
           </a:xfrm>
           <a:prstGeom prst="rect">
             <a:avLst/>
@@ -7298,101 +5795,31 @@
           <a:p>
             <a:pPr algn="ctr"/>
             <a:r>
-              <a:rPr sz="800" b="0">
+              <a:rPr sz="900" b="0">
                 <a:solidFill>
                   <a:srgbClr val="4C1D95"/>
                 </a:solidFill>
                 <a:latin typeface="Malgun Gothic"/>
               </a:rPr>
-              <a:t>원인 + 요구 행동 + 매칭 점수</a:t>
+              <a:t>원인 + 요구 행동 자동 발송</a:t>
             </a:r>
           </a:p>
         </p:txBody>
       </p:sp>
       <p:sp>
         <p:nvSpPr>
-          <p:cNvPr id="106" name="TextBox 105"/>
-          <p:cNvSpPr txBox="1"/>
-          <p:nvPr/>
-        </p:nvSpPr>
-        <p:spPr>
-          <a:xfrm>
-            <a:off x="8142973" y="5251892"/>
-            <a:ext cx="2062663" cy="142217"/>
-          </a:xfrm>
-          <a:prstGeom prst="rect">
-            <a:avLst/>
-          </a:prstGeom>
-          <a:noFill/>
-        </p:spPr>
-        <p:txBody>
-          <a:bodyPr wrap="none" lIns="0" rIns="0" tIns="0" bIns="0" anchor="t">
-            <a:spAutoFit/>
-          </a:bodyPr>
-          <a:lstStyle/>
-          <a:p>
-            <a:pPr algn="ctr"/>
-            <a:r>
-              <a:rPr sz="800" b="0">
-                <a:solidFill>
-                  <a:srgbClr val="4C1D95"/>
-                </a:solidFill>
-                <a:latin typeface="Malgun Gothic"/>
-              </a:rPr>
-              <a:t>설정 문제 vs 재등록 검토 구분</a:t>
-            </a:r>
-          </a:p>
-        </p:txBody>
-      </p:sp>
-      <p:sp>
-        <p:nvSpPr>
-          <p:cNvPr id="107" name="TextBox 106"/>
-          <p:cNvSpPr txBox="1"/>
-          <p:nvPr/>
-        </p:nvSpPr>
-        <p:spPr>
-          <a:xfrm>
-            <a:off x="8317951" y="5404268"/>
-            <a:ext cx="1712706" cy="142217"/>
-          </a:xfrm>
-          <a:prstGeom prst="rect">
-            <a:avLst/>
-          </a:prstGeom>
-          <a:noFill/>
-        </p:spPr>
-        <p:txBody>
-          <a:bodyPr wrap="none" lIns="0" rIns="0" tIns="0" bIns="0" anchor="t">
-            <a:spAutoFit/>
-          </a:bodyPr>
-          <a:lstStyle/>
-          <a:p>
-            <a:pPr algn="ctr"/>
-            <a:r>
-              <a:rPr sz="800" b="0">
-                <a:solidFill>
-                  <a:srgbClr val="4C1D95"/>
-                </a:solidFill>
-                <a:latin typeface="Malgun Gothic"/>
-              </a:rPr>
-              <a:t>사람 개입 없이 자동 발송</a:t>
-            </a:r>
-          </a:p>
-        </p:txBody>
-      </p:sp>
-      <p:sp>
-        <p:nvSpPr>
-          <p:cNvPr id="108" name="Rounded Rectangle 107"/>
+          <p:cNvPr id="67" name="Rounded Rectangle 66"/>
           <p:cNvSpPr/>
           <p:nvPr/>
         </p:nvSpPr>
         <p:spPr>
           <a:xfrm>
-            <a:off x="10259984" y="4825240"/>
-            <a:ext cx="1472968" cy="761880"/>
+            <a:off x="6107738" y="5053804"/>
+            <a:ext cx="1777720" cy="634900"/>
           </a:xfrm>
           <a:prstGeom prst="roundRect">
             <a:avLst>
-              <a:gd name="adj" fmla="val 8333"/>
+              <a:gd name="adj" fmla="val 12000"/>
             </a:avLst>
           </a:prstGeom>
           <a:solidFill>
@@ -7429,14 +5856,14 @@
       </p:sp>
       <p:sp>
         <p:nvSpPr>
-          <p:cNvPr id="109" name="TextBox 108"/>
+          <p:cNvPr id="68" name="TextBox 67"/>
           <p:cNvSpPr txBox="1"/>
           <p:nvPr/>
         </p:nvSpPr>
         <p:spPr>
           <a:xfrm>
-            <a:off x="10474897" y="4895079"/>
-            <a:ext cx="1043140" cy="177772"/>
+            <a:off x="6370713" y="5160467"/>
+            <a:ext cx="1251768" cy="213326"/>
           </a:xfrm>
           <a:prstGeom prst="rect">
             <a:avLst/>
@@ -7451,7 +5878,7 @@
           <a:p>
             <a:pPr algn="ctr"/>
             <a:r>
-              <a:rPr sz="1000" b="1">
+              <a:rPr sz="1200" b="1">
                 <a:solidFill>
                   <a:srgbClr val="C2410C"/>
                 </a:solidFill>
@@ -7464,14 +5891,14 @@
       </p:sp>
       <p:sp>
         <p:nvSpPr>
-          <p:cNvPr id="110" name="TextBox 109"/>
+          <p:cNvPr id="69" name="TextBox 68"/>
           <p:cNvSpPr txBox="1"/>
           <p:nvPr/>
         </p:nvSpPr>
         <p:spPr>
           <a:xfrm>
-            <a:off x="10235857" y="5099516"/>
-            <a:ext cx="1521220" cy="142217"/>
+            <a:off x="6092627" y="5416331"/>
+            <a:ext cx="1807941" cy="159994"/>
           </a:xfrm>
           <a:prstGeom prst="rect">
             <a:avLst/>
@@ -7486,27 +5913,75 @@
           <a:p>
             <a:pPr algn="ctr"/>
             <a:r>
-              <a:rPr sz="800" b="0">
+              <a:rPr sz="900" b="0">
                 <a:solidFill>
                   <a:srgbClr val="7C2D12"/>
                 </a:solidFill>
                 <a:latin typeface="Malgun Gothic"/>
               </a:rPr>
-              <a:t>수동 정렬 · 점유 해제</a:t>
+              <a:t>수동 정렬 · AI 는 관전</a:t>
             </a:r>
           </a:p>
         </p:txBody>
       </p:sp>
       <p:sp>
         <p:nvSpPr>
-          <p:cNvPr id="111" name="TextBox 110"/>
+          <p:cNvPr id="70" name="Rounded Rectangle 69"/>
+          <p:cNvSpPr/>
+          <p:nvPr/>
+        </p:nvSpPr>
+        <p:spPr>
+          <a:xfrm>
+            <a:off x="8114022" y="5053804"/>
+            <a:ext cx="1777720" cy="634900"/>
+          </a:xfrm>
+          <a:prstGeom prst="roundRect">
+            <a:avLst>
+              <a:gd name="adj" fmla="val 12000"/>
+            </a:avLst>
+          </a:prstGeom>
+          <a:solidFill>
+            <a:srgbClr val="FFFFFF"/>
+          </a:solidFill>
+          <a:ln w="15240">
+            <a:solidFill>
+              <a:srgbClr val="2563EB"/>
+            </a:solidFill>
+          </a:ln>
+          <a:effectLst/>
+        </p:spPr>
+        <p:style>
+          <a:lnRef idx="1">
+            <a:schemeClr val="accent1"/>
+          </a:lnRef>
+          <a:fillRef idx="3">
+            <a:schemeClr val="accent1"/>
+          </a:fillRef>
+          <a:effectRef idx="2">
+            <a:schemeClr val="accent1"/>
+          </a:effectRef>
+          <a:fontRef idx="minor">
+            <a:schemeClr val="lt1"/>
+          </a:fontRef>
+        </p:style>
+        <p:txBody>
+          <a:bodyPr rtlCol="0" anchor="ctr"/>
+          <a:lstStyle/>
+          <a:p>
+            <a:pPr algn="ctr"/>
+          </a:p>
+        </p:txBody>
+      </p:sp>
+      <p:sp>
+        <p:nvSpPr>
+          <p:cNvPr id="71" name="TextBox 70"/>
           <p:cNvSpPr txBox="1"/>
           <p:nvPr/>
         </p:nvSpPr>
         <p:spPr>
           <a:xfrm>
-            <a:off x="10216048" y="5251892"/>
-            <a:ext cx="1560838" cy="142217"/>
+            <a:off x="8114529" y="5160467"/>
+            <a:ext cx="1776704" cy="213326"/>
           </a:xfrm>
           <a:prstGeom prst="rect">
             <a:avLst/>
@@ -7521,27 +5996,27 @@
           <a:p>
             <a:pPr algn="ctr"/>
             <a:r>
-              <a:rPr sz="800" b="0">
+              <a:rPr sz="1200" b="1">
                 <a:solidFill>
-                  <a:srgbClr val="7C2D12"/>
+                  <a:srgbClr val="1D4ED8"/>
                 </a:solidFill>
                 <a:latin typeface="Malgun Gothic"/>
               </a:rPr>
-              <a:t>Align Key 재등록 검토</a:t>
+              <a:t>기록 → 다음 알람</a:t>
             </a:r>
           </a:p>
         </p:txBody>
       </p:sp>
       <p:sp>
         <p:nvSpPr>
-          <p:cNvPr id="112" name="TextBox 111"/>
+          <p:cNvPr id="72" name="TextBox 71"/>
           <p:cNvSpPr txBox="1"/>
           <p:nvPr/>
         </p:nvSpPr>
         <p:spPr>
           <a:xfrm>
-            <a:off x="10199541" y="5404268"/>
-            <a:ext cx="1593852" cy="142217"/>
+            <a:off x="8336617" y="5416331"/>
+            <a:ext cx="1332528" cy="159994"/>
           </a:xfrm>
           <a:prstGeom prst="rect">
             <a:avLst/>
@@ -7556,27 +6031,27 @@
           <a:p>
             <a:pPr algn="ctr"/>
             <a:r>
-              <a:rPr sz="800" b="0">
+              <a:rPr sz="900" b="0">
                 <a:solidFill>
-                  <a:srgbClr val="7C2D12"/>
+                  <a:srgbClr val="374151"/>
                 </a:solidFill>
                 <a:latin typeface="Malgun Gothic"/>
               </a:rPr>
-              <a:t>AI 는 관전·녹화로 양보</a:t>
+              <a:t>24시간 무인 반복</a:t>
             </a:r>
           </a:p>
         </p:txBody>
       </p:sp>
       <p:cxnSp>
         <p:nvCxnSpPr>
-          <p:cNvPr id="113" name="Connector 112"/>
+          <p:cNvPr id="73" name="Connector 72"/>
           <p:cNvCxnSpPr/>
           <p:nvPr/>
         </p:nvCxnSpPr>
         <p:spPr>
           <a:xfrm>
-            <a:off x="8075928.0" y="5206180.0"/>
-            <a:ext cx="101584.0" cy="0.0"/>
+            <a:off x="3872890.0" y="5371254.0"/>
+            <a:ext cx="126980.0" cy="0.0"/>
           </a:xfrm>
           <a:prstGeom prst="line">
             <a:avLst/>
@@ -7604,14 +6079,14 @@
       </p:cxnSp>
       <p:sp>
         <p:nvSpPr>
-          <p:cNvPr id="114" name="Freeform 113"/>
+          <p:cNvPr id="74" name="Freeform 73"/>
           <p:cNvSpPr/>
           <p:nvPr/>
         </p:nvSpPr>
         <p:spPr>
           <a:xfrm>
-            <a:off x="8164814" y="5155388"/>
-            <a:ext cx="88886" cy="101584"/>
+            <a:off x="3974474" y="5314113"/>
+            <a:ext cx="126980" cy="114282"/>
           </a:xfrm>
           <a:custGeom>
             <a:avLst/>
@@ -7620,15 +6095,15 @@
             <a:cxnLst/>
             <a:rect l="l" t="t" r="r" b="b"/>
             <a:pathLst>
-              <a:path w="14" h="16">
+              <a:path w="20" h="18">
                 <a:moveTo>
                   <a:pt x="0" y="0"/>
                 </a:moveTo>
                 <a:lnTo>
-                  <a:pt x="14" y="8"/>
+                  <a:pt x="20" y="9"/>
                 </a:lnTo>
                 <a:lnTo>
-                  <a:pt x="0" y="16"/>
+                  <a:pt x="0" y="18"/>
                 </a:lnTo>
                 <a:close/>
               </a:path>
@@ -7666,14 +6141,14 @@
       </p:sp>
       <p:cxnSp>
         <p:nvCxnSpPr>
-          <p:cNvPr id="115" name="Connector 114"/>
+          <p:cNvPr id="75" name="Connector 74"/>
           <p:cNvCxnSpPr/>
           <p:nvPr/>
         </p:nvCxnSpPr>
         <p:spPr>
           <a:xfrm>
-            <a:off x="10094910.0" y="5206180.0"/>
-            <a:ext cx="88886.0" cy="0.0"/>
+            <a:off x="5879174.0" y="5371254.0"/>
+            <a:ext cx="126980.0" cy="0.0"/>
           </a:xfrm>
           <a:prstGeom prst="line">
             <a:avLst/>
@@ -7701,14 +6176,14 @@
       </p:cxnSp>
       <p:sp>
         <p:nvSpPr>
-          <p:cNvPr id="116" name="Freeform 115"/>
+          <p:cNvPr id="76" name="Freeform 75"/>
           <p:cNvSpPr/>
           <p:nvPr/>
         </p:nvSpPr>
         <p:spPr>
           <a:xfrm>
-            <a:off x="10171098" y="5155388"/>
-            <a:ext cx="88886" cy="101584"/>
+            <a:off x="5980758" y="5314113"/>
+            <a:ext cx="126980" cy="114282"/>
           </a:xfrm>
           <a:custGeom>
             <a:avLst/>
@@ -7717,15 +6192,15 @@
             <a:cxnLst/>
             <a:rect l="l" t="t" r="r" b="b"/>
             <a:pathLst>
-              <a:path w="14" h="16">
+              <a:path w="20" h="18">
                 <a:moveTo>
                   <a:pt x="0" y="0"/>
                 </a:moveTo>
                 <a:lnTo>
-                  <a:pt x="14" y="8"/>
+                  <a:pt x="20" y="9"/>
                 </a:lnTo>
                 <a:lnTo>
-                  <a:pt x="0" y="16"/>
+                  <a:pt x="0" y="18"/>
                 </a:lnTo>
                 <a:close/>
               </a:path>
@@ -7763,14 +6238,14 @@
       </p:sp>
       <p:cxnSp>
         <p:nvCxnSpPr>
-          <p:cNvPr id="117" name="Connector 116"/>
+          <p:cNvPr id="77" name="Connector 76"/>
           <p:cNvCxnSpPr/>
           <p:nvPr/>
         </p:nvCxnSpPr>
         <p:spPr>
-          <a:xfrm flipV="1">
-            <a:off x="10996468.0" y="4393508.0"/>
-            <a:ext cx="0.0" cy="431732.0"/>
+          <a:xfrm>
+            <a:off x="7885458.0" y="5371254.0"/>
+            <a:ext cx="126980.0" cy="0.0"/>
           </a:xfrm>
           <a:prstGeom prst="line">
             <a:avLst/>
@@ -7798,14 +6273,14 @@
       </p:cxnSp>
       <p:sp>
         <p:nvSpPr>
-          <p:cNvPr id="118" name="Freeform 117"/>
+          <p:cNvPr id="78" name="Freeform 77"/>
           <p:cNvSpPr/>
           <p:nvPr/>
         </p:nvSpPr>
         <p:spPr>
           <a:xfrm>
-            <a:off x="10945676" y="4304622"/>
-            <a:ext cx="101584" cy="101584"/>
+            <a:off x="7987042" y="5314113"/>
+            <a:ext cx="126980" cy="114282"/>
           </a:xfrm>
           <a:custGeom>
             <a:avLst/>
@@ -7814,15 +6289,15 @@
             <a:cxnLst/>
             <a:rect l="l" t="t" r="r" b="b"/>
             <a:pathLst>
-              <a:path w="16" h="16">
+              <a:path w="20" h="18">
                 <a:moveTo>
-                  <a:pt x="0" y="16"/>
+                  <a:pt x="0" y="0"/>
                 </a:moveTo>
                 <a:lnTo>
-                  <a:pt x="8" y="0"/>
+                  <a:pt x="20" y="9"/>
                 </a:lnTo>
                 <a:lnTo>
-                  <a:pt x="16" y="16"/>
+                  <a:pt x="0" y="18"/>
                 </a:lnTo>
                 <a:close/>
               </a:path>
@@ -7860,14 +6335,14 @@
       </p:sp>
       <p:sp>
         <p:nvSpPr>
-          <p:cNvPr id="119" name="TextBox 118"/>
+          <p:cNvPr id="79" name="TextBox 78"/>
           <p:cNvSpPr txBox="1"/>
           <p:nvPr/>
         </p:nvSpPr>
         <p:spPr>
           <a:xfrm>
-            <a:off x="11174240" y="4516043"/>
-            <a:ext cx="793751" cy="124440"/>
+            <a:off x="1474872" y="5859492"/>
+            <a:ext cx="9037166" cy="195549"/>
           </a:xfrm>
           <a:prstGeom prst="rect">
             <a:avLst/>
@@ -7880,431 +6355,29 @@
           </a:bodyPr>
           <a:lstStyle/>
           <a:p>
-            <a:pPr algn="l"/>
-            <a:r>
-              <a:rPr sz="700" b="0">
-                <a:solidFill>
-                  <a:srgbClr val="C2410C"/>
-                </a:solidFill>
-                <a:latin typeface="Malgun Gothic"/>
-              </a:rPr>
-              <a:t>조치 후 기록</a:t>
-            </a:r>
-          </a:p>
-        </p:txBody>
-      </p:sp>
-      <p:sp>
-        <p:nvSpPr>
-          <p:cNvPr id="120" name="Rounded Rectangle 119"/>
-          <p:cNvSpPr/>
-          <p:nvPr/>
-        </p:nvSpPr>
-        <p:spPr>
-          <a:xfrm>
-            <a:off x="507920" y="4825240"/>
-            <a:ext cx="4698260" cy="761880"/>
-          </a:xfrm>
-          <a:prstGeom prst="roundRect">
-            <a:avLst>
-              <a:gd name="adj" fmla="val 8333"/>
-            </a:avLst>
-          </a:prstGeom>
-          <a:solidFill>
-            <a:srgbClr val="111827"/>
-          </a:solidFill>
-          <a:ln>
-            <a:noFill/>
-          </a:ln>
-          <a:effectLst/>
-        </p:spPr>
-        <p:style>
-          <a:lnRef idx="1">
-            <a:schemeClr val="accent1"/>
-          </a:lnRef>
-          <a:fillRef idx="3">
-            <a:schemeClr val="accent1"/>
-          </a:fillRef>
-          <a:effectRef idx="2">
-            <a:schemeClr val="accent1"/>
-          </a:effectRef>
-          <a:fontRef idx="minor">
-            <a:schemeClr val="lt1"/>
-          </a:fontRef>
-        </p:style>
-        <p:txBody>
-          <a:bodyPr rtlCol="0" anchor="ctr"/>
-          <a:lstStyle/>
-          <a:p>
-            <a:pPr algn="ctr"/>
-          </a:p>
-        </p:txBody>
-      </p:sp>
-      <p:sp>
-        <p:nvSpPr>
-          <p:cNvPr id="121" name="TextBox 120"/>
-          <p:cNvSpPr txBox="1"/>
-          <p:nvPr/>
-        </p:nvSpPr>
-        <p:spPr>
-          <a:xfrm>
-            <a:off x="634900" y="4895713"/>
-            <a:ext cx="1859939" cy="159994"/>
-          </a:xfrm>
-          <a:prstGeom prst="rect">
-            <a:avLst/>
-          </a:prstGeom>
-          <a:noFill/>
-        </p:spPr>
-        <p:txBody>
-          <a:bodyPr wrap="none" lIns="0" rIns="0" tIns="0" bIns="0" anchor="t">
-            <a:spAutoFit/>
-          </a:bodyPr>
-          <a:lstStyle/>
-          <a:p>
-            <a:pPr algn="l"/>
-            <a:r>
-              <a:rPr sz="900" b="1">
-                <a:solidFill>
-                  <a:srgbClr val="F9FAFB"/>
-                </a:solidFill>
-                <a:latin typeface="Malgun Gothic"/>
-              </a:rPr>
-              <a:t>안전 원칙 (코드에 고정)</a:t>
-            </a:r>
-          </a:p>
-        </p:txBody>
-      </p:sp>
-      <p:sp>
-        <p:nvSpPr>
-          <p:cNvPr id="122" name="TextBox 121"/>
-          <p:cNvSpPr txBox="1"/>
-          <p:nvPr/>
-        </p:nvSpPr>
-        <p:spPr>
-          <a:xfrm>
-            <a:off x="634900" y="5086818"/>
-            <a:ext cx="5634864" cy="142217"/>
-          </a:xfrm>
-          <a:prstGeom prst="rect">
-            <a:avLst/>
-          </a:prstGeom>
-          <a:noFill/>
-        </p:spPr>
-        <p:txBody>
-          <a:bodyPr wrap="none" lIns="0" rIns="0" tIns="0" bIns="0" anchor="t">
-            <a:spAutoFit/>
-          </a:bodyPr>
-          <a:lstStyle/>
-          <a:p>
-            <a:pPr algn="l"/>
-            <a:r>
-              <a:rPr sz="800" b="0">
-                <a:solidFill>
-                  <a:srgbClr val="E5E7EB"/>
-                </a:solidFill>
-                <a:latin typeface="Malgun Gothic"/>
-              </a:rPr>
-              <a:t>① 확인 안 된 클릭은 나가지 않는다 (VLM 좌표 → OCR 라벨 확인 → 클릭, fail-closed)</a:t>
-            </a:r>
-          </a:p>
-        </p:txBody>
-      </p:sp>
-      <p:sp>
-        <p:nvSpPr>
-          <p:cNvPr id="123" name="TextBox 122"/>
-          <p:cNvSpPr txBox="1"/>
-          <p:nvPr/>
-        </p:nvSpPr>
-        <p:spPr>
-          <a:xfrm>
-            <a:off x="634900" y="5239194"/>
-            <a:ext cx="4492552" cy="142217"/>
-          </a:xfrm>
-          <a:prstGeom prst="rect">
-            <a:avLst/>
-          </a:prstGeom>
-          <a:noFill/>
-        </p:spPr>
-        <p:txBody>
-          <a:bodyPr wrap="none" lIns="0" rIns="0" tIns="0" bIns="0" anchor="t">
-            <a:spAutoFit/>
-          </a:bodyPr>
-          <a:lstStyle/>
-          <a:p>
-            <a:pPr algn="l"/>
-            <a:r>
-              <a:rPr sz="800" b="0">
-                <a:solidFill>
-                  <a:srgbClr val="E5E7EB"/>
-                </a:solidFill>
-                <a:latin typeface="Malgun Gothic"/>
-              </a:rPr>
-              <a:t>② 예외가 나도 녹화 종료 · 창 닫기 · 팝업 정리를 순서대로 시도한다</a:t>
-            </a:r>
-          </a:p>
-        </p:txBody>
-      </p:sp>
-      <p:sp>
-        <p:nvSpPr>
-          <p:cNvPr id="124" name="TextBox 123"/>
-          <p:cNvSpPr txBox="1"/>
-          <p:nvPr/>
-        </p:nvSpPr>
-        <p:spPr>
-          <a:xfrm>
-            <a:off x="634900" y="5391570"/>
-            <a:ext cx="5357540" cy="142217"/>
-          </a:xfrm>
-          <a:prstGeom prst="rect">
-            <a:avLst/>
-          </a:prstGeom>
-          <a:noFill/>
-        </p:spPr>
-        <p:txBody>
-          <a:bodyPr wrap="none" lIns="0" rIns="0" tIns="0" bIns="0" anchor="t">
-            <a:spAutoFit/>
-          </a:bodyPr>
-          <a:lstStyle/>
-          <a:p>
-            <a:pPr algn="l"/>
-            <a:r>
-              <a:rPr sz="800" b="0">
-                <a:solidFill>
-                  <a:srgbClr val="E5E7EB"/>
-                </a:solidFill>
-                <a:latin typeface="Malgun Gothic"/>
-              </a:rPr>
-              <a:t>③ 사람이 개입하면 자동화가 양보한다 · 긴급 중단 단축키 · 점유 중이면 관전 녹화</a:t>
-            </a:r>
-          </a:p>
-        </p:txBody>
-      </p:sp>
-      <p:sp>
-        <p:nvSpPr>
-          <p:cNvPr id="125" name="Freeform 124"/>
-          <p:cNvSpPr/>
-          <p:nvPr/>
-        </p:nvSpPr>
-        <p:spPr>
-          <a:xfrm>
-            <a:off x="355544" y="3860192"/>
-            <a:ext cx="11491690" cy="2107868"/>
-          </a:xfrm>
-          <a:custGeom>
-            <a:avLst/>
-            <a:gdLst/>
-            <a:ahLst/>
-            <a:cxnLst/>
-            <a:rect l="l" t="t" r="r" b="b"/>
-            <a:pathLst>
-              <a:path w="1810" h="332">
-                <a:moveTo>
-                  <a:pt x="1792" y="32"/>
-                </a:moveTo>
-                <a:lnTo>
-                  <a:pt x="1810" y="32"/>
-                </a:lnTo>
-                <a:lnTo>
-                  <a:pt x="1810" y="332"/>
-                </a:lnTo>
-                <a:lnTo>
-                  <a:pt x="0" y="332"/>
-                </a:lnTo>
-                <a:lnTo>
-                  <a:pt x="0" y="0"/>
-                </a:lnTo>
-                <a:lnTo>
-                  <a:pt x="10" y="0"/>
-                </a:lnTo>
-              </a:path>
-            </a:pathLst>
-          </a:custGeom>
-          <a:noFill/>
-          <a:ln w="15240">
-            <a:solidFill>
-              <a:srgbClr val="2563EB"/>
-            </a:solidFill>
-            <a:prstDash val="dash"/>
-          </a:ln>
-          <a:effectLst/>
-        </p:spPr>
-        <p:style>
-          <a:lnRef idx="1">
-            <a:schemeClr val="accent1"/>
-          </a:lnRef>
-          <a:fillRef idx="3">
-            <a:schemeClr val="accent1"/>
-          </a:fillRef>
-          <a:effectRef idx="2">
-            <a:schemeClr val="accent1"/>
-          </a:effectRef>
-          <a:fontRef idx="minor">
-            <a:schemeClr val="lt1"/>
-          </a:fontRef>
-        </p:style>
-        <p:txBody>
-          <a:bodyPr rtlCol="0" anchor="ctr"/>
-          <a:lstStyle/>
-          <a:p>
-            <a:pPr algn="ctr"/>
-          </a:p>
-        </p:txBody>
-      </p:sp>
-      <p:sp>
-        <p:nvSpPr>
-          <p:cNvPr id="126" name="Freeform 125"/>
-          <p:cNvSpPr/>
-          <p:nvPr/>
-        </p:nvSpPr>
-        <p:spPr>
-          <a:xfrm>
-            <a:off x="419034" y="3809400"/>
-            <a:ext cx="88886" cy="101584"/>
-          </a:xfrm>
-          <a:custGeom>
-            <a:avLst/>
-            <a:gdLst/>
-            <a:ahLst/>
-            <a:cxnLst/>
-            <a:rect l="l" t="t" r="r" b="b"/>
-            <a:pathLst>
-              <a:path w="14" h="16">
-                <a:moveTo>
-                  <a:pt x="0" y="0"/>
-                </a:moveTo>
-                <a:lnTo>
-                  <a:pt x="14" y="8"/>
-                </a:lnTo>
-                <a:lnTo>
-                  <a:pt x="0" y="16"/>
-                </a:lnTo>
-                <a:close/>
-              </a:path>
-            </a:pathLst>
-          </a:custGeom>
-          <a:solidFill>
-            <a:srgbClr val="2563EB"/>
-          </a:solidFill>
-          <a:ln>
-            <a:noFill/>
-          </a:ln>
-          <a:effectLst/>
-        </p:spPr>
-        <p:style>
-          <a:lnRef idx="1">
-            <a:schemeClr val="accent1"/>
-          </a:lnRef>
-          <a:fillRef idx="3">
-            <a:schemeClr val="accent1"/>
-          </a:fillRef>
-          <a:effectRef idx="2">
-            <a:schemeClr val="accent1"/>
-          </a:effectRef>
-          <a:fontRef idx="minor">
-            <a:schemeClr val="lt1"/>
-          </a:fontRef>
-        </p:style>
-        <p:txBody>
-          <a:bodyPr rtlCol="0" anchor="ctr"/>
-          <a:lstStyle/>
-          <a:p>
-            <a:pPr algn="ctr"/>
-          </a:p>
-        </p:txBody>
-      </p:sp>
-      <p:sp>
-        <p:nvSpPr>
-          <p:cNvPr id="127" name="TextBox 126"/>
-          <p:cNvSpPr txBox="1"/>
-          <p:nvPr/>
-        </p:nvSpPr>
-        <p:spPr>
-          <a:xfrm>
-            <a:off x="1533521" y="5765844"/>
-            <a:ext cx="9123036" cy="151106"/>
-          </a:xfrm>
-          <a:prstGeom prst="rect">
-            <a:avLst/>
-          </a:prstGeom>
-          <a:noFill/>
-        </p:spPr>
-        <p:txBody>
-          <a:bodyPr wrap="none" lIns="0" rIns="0" tIns="0" bIns="0" anchor="t">
-            <a:spAutoFit/>
-          </a:bodyPr>
-          <a:lstStyle/>
-          <a:p>
             <a:pPr algn="ctr"/>
             <a:r>
-              <a:rPr sz="850" b="0">
+              <a:rPr sz="1100" b="0">
                 <a:solidFill>
                   <a:srgbClr val="1E3A8A"/>
                 </a:solidFill>
                 <a:latin typeface="Malgun Gothic"/>
               </a:rPr>
-              <a:t>↻ 정상·예외 경로 모두 기록 1줄로 끝나고 tool 창을 닫은 뒤 다음 알람 대기 · 점유·실패 건은 쿨다운 후 재시도 · 24시간 무인 반복</a:t>
+              <a:t>안전 원칙 : 확인 안 된 클릭은 나가지 않는다 · 담당자가 개입하면 자동화가 양보 · 긴급 중단 단축키</a:t>
             </a:r>
           </a:p>
         </p:txBody>
       </p:sp>
       <p:sp>
         <p:nvSpPr>
-          <p:cNvPr id="128" name="Rounded Rectangle 127"/>
-          <p:cNvSpPr/>
-          <p:nvPr/>
-        </p:nvSpPr>
-        <p:spPr>
-          <a:xfrm>
-            <a:off x="507920" y="6425188"/>
-            <a:ext cx="101584" cy="101584"/>
-          </a:xfrm>
-          <a:prstGeom prst="roundRect">
-            <a:avLst>
-              <a:gd name="adj" fmla="val 18750"/>
-            </a:avLst>
-          </a:prstGeom>
-          <a:solidFill>
-            <a:srgbClr val="FFFFFF"/>
-          </a:solidFill>
-          <a:ln w="12700">
-            <a:solidFill>
-              <a:srgbClr val="6B7280"/>
-            </a:solidFill>
-          </a:ln>
-          <a:effectLst/>
-        </p:spPr>
-        <p:style>
-          <a:lnRef idx="1">
-            <a:schemeClr val="accent1"/>
-          </a:lnRef>
-          <a:fillRef idx="3">
-            <a:schemeClr val="accent1"/>
-          </a:fillRef>
-          <a:effectRef idx="2">
-            <a:schemeClr val="accent1"/>
-          </a:effectRef>
-          <a:fontRef idx="minor">
-            <a:schemeClr val="lt1"/>
-          </a:fontRef>
-        </p:style>
-        <p:txBody>
-          <a:bodyPr rtlCol="0" anchor="ctr"/>
-          <a:lstStyle/>
-          <a:p>
-            <a:pPr algn="ctr"/>
-          </a:p>
-        </p:txBody>
-      </p:sp>
-      <p:sp>
-        <p:nvSpPr>
-          <p:cNvPr id="129" name="TextBox 128"/>
+          <p:cNvPr id="80" name="TextBox 79"/>
           <p:cNvSpPr txBox="1"/>
           <p:nvPr/>
         </p:nvSpPr>
         <p:spPr>
           <a:xfrm>
-            <a:off x="660296" y="6400744"/>
-            <a:ext cx="1258498" cy="151106"/>
+            <a:off x="2264307" y="6419473"/>
+            <a:ext cx="7661465" cy="159994"/>
           </a:xfrm>
           <a:prstGeom prst="rect">
             <a:avLst/>
@@ -8317,347 +6390,15 @@
           </a:bodyPr>
           <a:lstStyle/>
           <a:p>
-            <a:pPr algn="l"/>
+            <a:pPr algn="ctr"/>
             <a:r>
-              <a:rPr sz="850" b="0">
+              <a:rPr sz="900" b="0">
                 <a:solidFill>
-                  <a:srgbClr val="374151"/>
+                  <a:srgbClr val="6B7280"/>
                 </a:solidFill>
                 <a:latin typeface="Malgun Gothic"/>
               </a:rPr>
-              <a:t>사람 수행 (기존)</a:t>
-            </a:r>
-          </a:p>
-        </p:txBody>
-      </p:sp>
-      <p:sp>
-        <p:nvSpPr>
-          <p:cNvPr id="130" name="Rounded Rectangle 129"/>
-          <p:cNvSpPr/>
-          <p:nvPr/>
-        </p:nvSpPr>
-        <p:spPr>
-          <a:xfrm>
-            <a:off x="1904700" y="6425188"/>
-            <a:ext cx="101584" cy="101584"/>
-          </a:xfrm>
-          <a:prstGeom prst="roundRect">
-            <a:avLst>
-              <a:gd name="adj" fmla="val 18750"/>
-            </a:avLst>
-          </a:prstGeom>
-          <a:solidFill>
-            <a:srgbClr val="FFFFFF"/>
-          </a:solidFill>
-          <a:ln w="15240">
-            <a:solidFill>
-              <a:srgbClr val="2563EB"/>
-            </a:solidFill>
-          </a:ln>
-          <a:effectLst/>
-        </p:spPr>
-        <p:style>
-          <a:lnRef idx="1">
-            <a:schemeClr val="accent1"/>
-          </a:lnRef>
-          <a:fillRef idx="3">
-            <a:schemeClr val="accent1"/>
-          </a:fillRef>
-          <a:effectRef idx="2">
-            <a:schemeClr val="accent1"/>
-          </a:effectRef>
-          <a:fontRef idx="minor">
-            <a:schemeClr val="lt1"/>
-          </a:fontRef>
-        </p:style>
-        <p:txBody>
-          <a:bodyPr rtlCol="0" anchor="ctr"/>
-          <a:lstStyle/>
-          <a:p>
-            <a:pPr algn="ctr"/>
-          </a:p>
-        </p:txBody>
-      </p:sp>
-      <p:sp>
-        <p:nvSpPr>
-          <p:cNvPr id="131" name="TextBox 130"/>
-          <p:cNvSpPr txBox="1"/>
-          <p:nvPr/>
-        </p:nvSpPr>
-        <p:spPr>
-          <a:xfrm>
-            <a:off x="2057076" y="6400744"/>
-            <a:ext cx="2731784" cy="151106"/>
-          </a:xfrm>
-          <a:prstGeom prst="rect">
-            <a:avLst/>
-          </a:prstGeom>
-          <a:noFill/>
-        </p:spPr>
-        <p:txBody>
-          <a:bodyPr wrap="none" lIns="0" rIns="0" tIns="0" bIns="0" anchor="t">
-            <a:spAutoFit/>
-          </a:bodyPr>
-          <a:lstStyle/>
-          <a:p>
-            <a:pPr algn="l"/>
-            <a:r>
-              <a:rPr sz="850" b="0">
-                <a:solidFill>
-                  <a:srgbClr val="374151"/>
-                </a:solidFill>
-                <a:latin typeface="Malgun Gothic"/>
-              </a:rPr>
-              <a:t>시스템 자동 수행 (VLM·OCR 판단 포함)</a:t>
-            </a:r>
-          </a:p>
-        </p:txBody>
-      </p:sp>
-      <p:sp>
-        <p:nvSpPr>
-          <p:cNvPr id="132" name="Rounded Rectangle 131"/>
-          <p:cNvSpPr/>
-          <p:nvPr/>
-        </p:nvSpPr>
-        <p:spPr>
-          <a:xfrm>
-            <a:off x="4317320" y="6425188"/>
-            <a:ext cx="101584" cy="101584"/>
-          </a:xfrm>
-          <a:prstGeom prst="roundRect">
-            <a:avLst>
-              <a:gd name="adj" fmla="val 18750"/>
-            </a:avLst>
-          </a:prstGeom>
-          <a:solidFill>
-            <a:srgbClr val="FFFFFF"/>
-          </a:solidFill>
-          <a:ln w="15240">
-            <a:solidFill>
-              <a:srgbClr val="059669"/>
-            </a:solidFill>
-          </a:ln>
-          <a:effectLst/>
-        </p:spPr>
-        <p:style>
-          <a:lnRef idx="1">
-            <a:schemeClr val="accent1"/>
-          </a:lnRef>
-          <a:fillRef idx="3">
-            <a:schemeClr val="accent1"/>
-          </a:fillRef>
-          <a:effectRef idx="2">
-            <a:schemeClr val="accent1"/>
-          </a:effectRef>
-          <a:fontRef idx="minor">
-            <a:schemeClr val="lt1"/>
-          </a:fontRef>
-        </p:style>
-        <p:txBody>
-          <a:bodyPr rtlCol="0" anchor="ctr"/>
-          <a:lstStyle/>
-          <a:p>
-            <a:pPr algn="ctr"/>
-          </a:p>
-        </p:txBody>
-      </p:sp>
-      <p:sp>
-        <p:nvSpPr>
-          <p:cNvPr id="133" name="TextBox 132"/>
-          <p:cNvSpPr txBox="1"/>
-          <p:nvPr/>
-        </p:nvSpPr>
-        <p:spPr>
-          <a:xfrm>
-            <a:off x="4469696" y="6400744"/>
-            <a:ext cx="1833781" cy="151106"/>
-          </a:xfrm>
-          <a:prstGeom prst="rect">
-            <a:avLst/>
-          </a:prstGeom>
-          <a:noFill/>
-        </p:spPr>
-        <p:txBody>
-          <a:bodyPr wrap="none" lIns="0" rIns="0" tIns="0" bIns="0" anchor="t">
-            <a:spAutoFit/>
-          </a:bodyPr>
-          <a:lstStyle/>
-          <a:p>
-            <a:pPr algn="l"/>
-            <a:r>
-              <a:rPr sz="850" b="0">
-                <a:solidFill>
-                  <a:srgbClr val="374151"/>
-                </a:solidFill>
-                <a:latin typeface="Malgun Gothic"/>
-              </a:rPr>
-              <a:t>CV 매칭 엔진이 좌표 결정</a:t>
-            </a:r>
-          </a:p>
-        </p:txBody>
-      </p:sp>
-      <p:sp>
-        <p:nvSpPr>
-          <p:cNvPr id="134" name="Rounded Rectangle 133"/>
-          <p:cNvSpPr/>
-          <p:nvPr/>
-        </p:nvSpPr>
-        <p:spPr>
-          <a:xfrm>
-            <a:off x="6095040" y="6425188"/>
-            <a:ext cx="101584" cy="101584"/>
-          </a:xfrm>
-          <a:prstGeom prst="roundRect">
-            <a:avLst>
-              <a:gd name="adj" fmla="val 18750"/>
-            </a:avLst>
-          </a:prstGeom>
-          <a:solidFill>
-            <a:srgbClr val="F5F3FF"/>
-          </a:solidFill>
-          <a:ln w="15240">
-            <a:solidFill>
-              <a:srgbClr val="7C3AED"/>
-            </a:solidFill>
-          </a:ln>
-          <a:effectLst/>
-        </p:spPr>
-        <p:style>
-          <a:lnRef idx="1">
-            <a:schemeClr val="accent1"/>
-          </a:lnRef>
-          <a:fillRef idx="3">
-            <a:schemeClr val="accent1"/>
-          </a:fillRef>
-          <a:effectRef idx="2">
-            <a:schemeClr val="accent1"/>
-          </a:effectRef>
-          <a:fontRef idx="minor">
-            <a:schemeClr val="lt1"/>
-          </a:fontRef>
-        </p:style>
-        <p:txBody>
-          <a:bodyPr rtlCol="0" anchor="ctr"/>
-          <a:lstStyle/>
-          <a:p>
-            <a:pPr algn="ctr"/>
-          </a:p>
-        </p:txBody>
-      </p:sp>
-      <p:sp>
-        <p:nvSpPr>
-          <p:cNvPr id="135" name="TextBox 134"/>
-          <p:cNvSpPr txBox="1"/>
-          <p:nvPr/>
-        </p:nvSpPr>
-        <p:spPr>
-          <a:xfrm>
-            <a:off x="6247416" y="6400744"/>
-            <a:ext cx="1616296" cy="151106"/>
-          </a:xfrm>
-          <a:prstGeom prst="rect">
-            <a:avLst/>
-          </a:prstGeom>
-          <a:noFill/>
-        </p:spPr>
-        <p:txBody>
-          <a:bodyPr wrap="none" lIns="0" rIns="0" tIns="0" bIns="0" anchor="t">
-            <a:spAutoFit/>
-          </a:bodyPr>
-          <a:lstStyle/>
-          <a:p>
-            <a:pPr algn="l"/>
-            <a:r>
-              <a:rPr sz="850" b="0">
-                <a:solidFill>
-                  <a:srgbClr val="374151"/>
-                </a:solidFill>
-                <a:latin typeface="Malgun Gothic"/>
-              </a:rPr>
-              <a:t>큐브 알림 (자동 발송)</a:t>
-            </a:r>
-          </a:p>
-        </p:txBody>
-      </p:sp>
-      <p:sp>
-        <p:nvSpPr>
-          <p:cNvPr id="136" name="Rounded Rectangle 135"/>
-          <p:cNvSpPr/>
-          <p:nvPr/>
-        </p:nvSpPr>
-        <p:spPr>
-          <a:xfrm>
-            <a:off x="7745780" y="6425188"/>
-            <a:ext cx="101584" cy="101584"/>
-          </a:xfrm>
-          <a:prstGeom prst="roundRect">
-            <a:avLst>
-              <a:gd name="adj" fmla="val 18750"/>
-            </a:avLst>
-          </a:prstGeom>
-          <a:solidFill>
-            <a:srgbClr val="FEF2F2"/>
-          </a:solidFill>
-          <a:ln w="15240">
-            <a:solidFill>
-              <a:srgbClr val="DC2626"/>
-            </a:solidFill>
-          </a:ln>
-          <a:effectLst/>
-        </p:spPr>
-        <p:style>
-          <a:lnRef idx="1">
-            <a:schemeClr val="accent1"/>
-          </a:lnRef>
-          <a:fillRef idx="3">
-            <a:schemeClr val="accent1"/>
-          </a:fillRef>
-          <a:effectRef idx="2">
-            <a:schemeClr val="accent1"/>
-          </a:effectRef>
-          <a:fontRef idx="minor">
-            <a:schemeClr val="lt1"/>
-          </a:fontRef>
-        </p:style>
-        <p:txBody>
-          <a:bodyPr rtlCol="0" anchor="ctr"/>
-          <a:lstStyle/>
-          <a:p>
-            <a:pPr algn="ctr"/>
-          </a:p>
-        </p:txBody>
-      </p:sp>
-      <p:sp>
-        <p:nvSpPr>
-          <p:cNvPr id="137" name="TextBox 136"/>
-          <p:cNvSpPr txBox="1"/>
-          <p:nvPr/>
-        </p:nvSpPr>
-        <p:spPr>
-          <a:xfrm>
-            <a:off x="7898156" y="6400744"/>
-            <a:ext cx="4317320" cy="151106"/>
-          </a:xfrm>
-          <a:prstGeom prst="rect">
-            <a:avLst/>
-          </a:prstGeom>
-          <a:noFill/>
-        </p:spPr>
-        <p:txBody>
-          <a:bodyPr wrap="none" lIns="0" rIns="0" tIns="0" bIns="0" anchor="t">
-            <a:spAutoFit/>
-          </a:bodyPr>
-          <a:lstStyle/>
-          <a:p>
-            <a:pPr algn="l"/>
-            <a:r>
-              <a:rPr sz="850" b="0">
-                <a:solidFill>
-                  <a:srgbClr val="374151"/>
-                </a:solidFill>
-                <a:latin typeface="Malgun Gothic"/>
-              </a:rPr>
-              <a:t>AI 가 진행 못할 때 → 알림 → 담당자 조치 → 기록 → 다음 알람</a:t>
+              <a:t>회색 = 담당자 수행 · 파랑 = 시스템 자동 수행 (VLM·OCR 판단 포함) · 초록 = CV 매칭 엔진이 좌표 결정</a:t>
             </a:r>
           </a:p>
         </p:txBody>
@@ -10754,8 +8495,8 @@
         </p:nvSpPr>
         <p:spPr>
           <a:xfrm>
-            <a:off x="3328177" y="179676"/>
-            <a:ext cx="5533724" cy="302212"/>
+            <a:off x="3002664" y="165708"/>
+            <a:ext cx="6184751" cy="337766"/>
           </a:xfrm>
           <a:prstGeom prst="rect">
             <a:avLst/>
@@ -10770,7 +8511,7 @@
           <a:p>
             <a:pPr algn="ctr"/>
             <a:r>
-              <a:rPr sz="1700" b="1">
+              <a:rPr sz="1900" b="1">
                 <a:solidFill>
                   <a:srgbClr val="111827"/>
                 </a:solidFill>
@@ -10789,8 +8530,8 @@
         </p:nvSpPr>
         <p:spPr>
           <a:xfrm>
-            <a:off x="-653407" y="520300"/>
-            <a:ext cx="13496894" cy="186660"/>
+            <a:off x="318846" y="551093"/>
+            <a:ext cx="11552386" cy="213326"/>
           </a:xfrm>
           <a:prstGeom prst="rect">
             <a:avLst/>
@@ -10805,13 +8546,13 @@
           <a:p>
             <a:pPr algn="ctr"/>
             <a:r>
-              <a:rPr sz="1050" b="0">
+              <a:rPr sz="1200" b="0">
                 <a:solidFill>
                   <a:srgbClr val="4B5563"/>
                 </a:solidFill>
                 <a:latin typeface="Malgun Gothic"/>
               </a:rPr>
-              <a:t>한 모델에 다 맡기지 않는다. UI 조작은 VLM 이 찍고 OCR 이 검증하며, 정렬 좌표는 CV 만 결정하고, AI 가 진행 못하는 예외는 큐브 알림으로 사람에게 넘긴다.</a:t>
+              <a:t>한 모델에 다 맡기지 않는다 · UI 는 VLM 이 찍고 OCR 이 확인 · 좌표는 CV 만 결정 · AI 가 못 푸는 것은 현업 담당자</a:t>
             </a:r>
           </a:p>
         </p:txBody>
@@ -10824,20 +8565,20 @@
         </p:nvSpPr>
         <p:spPr>
           <a:xfrm>
-            <a:off x="253960" y="1015840"/>
-            <a:ext cx="1269800" cy="3174500"/>
+            <a:off x="380940" y="1015840"/>
+            <a:ext cx="2666580" cy="3682420"/>
           </a:xfrm>
           <a:prstGeom prst="roundRect">
             <a:avLst>
-              <a:gd name="adj" fmla="val 6000"/>
+              <a:gd name="adj" fmla="val 3333"/>
             </a:avLst>
           </a:prstGeom>
           <a:solidFill>
-            <a:srgbClr val="F9FAFB"/>
+            <a:srgbClr val="EFF6FF"/>
           </a:solidFill>
-          <a:ln w="6350">
+          <a:ln w="17780">
             <a:solidFill>
-              <a:srgbClr val="D1D5DB"/>
+              <a:srgbClr val="2563EB"/>
             </a:solidFill>
           </a:ln>
           <a:effectLst/>
@@ -10866,346 +8607,18 @@
       </p:sp>
       <p:sp>
         <p:nvSpPr>
-          <p:cNvPr id="5" name="TextBox 4"/>
-          <p:cNvSpPr txBox="1"/>
-          <p:nvPr/>
-        </p:nvSpPr>
-        <p:spPr>
-          <a:xfrm>
-            <a:off x="437700" y="1250118"/>
-            <a:ext cx="902319" cy="195549"/>
-          </a:xfrm>
-          <a:prstGeom prst="rect">
-            <a:avLst/>
-          </a:prstGeom>
-          <a:noFill/>
-        </p:spPr>
-        <p:txBody>
-          <a:bodyPr wrap="none" lIns="0" rIns="0" tIns="0" bIns="0" anchor="t">
-            <a:spAutoFit/>
-          </a:bodyPr>
-          <a:lstStyle/>
-          <a:p>
-            <a:pPr algn="ctr"/>
-            <a:r>
-              <a:rPr sz="1100" b="1">
-                <a:solidFill>
-                  <a:srgbClr val="374151"/>
-                </a:solidFill>
-                <a:latin typeface="Malgun Gothic"/>
-              </a:rPr>
-              <a:t>RCS 화면</a:t>
-            </a:r>
-          </a:p>
-        </p:txBody>
-      </p:sp>
-      <p:sp>
-        <p:nvSpPr>
-          <p:cNvPr id="6" name="TextBox 5"/>
-          <p:cNvSpPr txBox="1"/>
-          <p:nvPr/>
-        </p:nvSpPr>
-        <p:spPr>
-          <a:xfrm>
-            <a:off x="445525" y="1486618"/>
-            <a:ext cx="886669" cy="151106"/>
-          </a:xfrm>
-          <a:prstGeom prst="rect">
-            <a:avLst/>
-          </a:prstGeom>
-          <a:noFill/>
-        </p:spPr>
-        <p:txBody>
-          <a:bodyPr wrap="none" lIns="0" rIns="0" tIns="0" bIns="0" anchor="t">
-            <a:spAutoFit/>
-          </a:bodyPr>
-          <a:lstStyle/>
-          <a:p>
-            <a:pPr algn="ctr"/>
-            <a:r>
-              <a:rPr sz="850" b="0">
-                <a:solidFill>
-                  <a:srgbClr val="6B7280"/>
-                </a:solidFill>
-                <a:latin typeface="Malgun Gothic"/>
-              </a:rPr>
-              <a:t>캡처 이미지</a:t>
-            </a:r>
-          </a:p>
-        </p:txBody>
-      </p:sp>
-      <p:sp>
-        <p:nvSpPr>
-          <p:cNvPr id="7" name="TextBox 6"/>
-          <p:cNvSpPr txBox="1"/>
-          <p:nvPr/>
-        </p:nvSpPr>
-        <p:spPr>
-          <a:xfrm>
-            <a:off x="399923" y="1791370"/>
-            <a:ext cx="977872" cy="151106"/>
-          </a:xfrm>
-          <a:prstGeom prst="rect">
-            <a:avLst/>
-          </a:prstGeom>
-          <a:noFill/>
-        </p:spPr>
-        <p:txBody>
-          <a:bodyPr wrap="none" lIns="0" rIns="0" tIns="0" bIns="0" anchor="t">
-            <a:spAutoFit/>
-          </a:bodyPr>
-          <a:lstStyle/>
-          <a:p>
-            <a:pPr algn="ctr"/>
-            <a:r>
-              <a:rPr sz="850" b="0">
-                <a:solidFill>
-                  <a:srgbClr val="6B7280"/>
-                </a:solidFill>
-                <a:latin typeface="Malgun Gothic"/>
-              </a:rPr>
-              <a:t>표준 UI 아님</a:t>
-            </a:r>
-          </a:p>
-        </p:txBody>
-      </p:sp>
-      <p:sp>
-        <p:nvSpPr>
-          <p:cNvPr id="8" name="TextBox 7"/>
-          <p:cNvSpPr txBox="1"/>
-          <p:nvPr/>
-        </p:nvSpPr>
-        <p:spPr>
-          <a:xfrm>
-            <a:off x="266626" y="1969142"/>
-            <a:ext cx="1244467" cy="151106"/>
-          </a:xfrm>
-          <a:prstGeom prst="rect">
-            <a:avLst/>
-          </a:prstGeom>
-          <a:noFill/>
-        </p:spPr>
-        <p:txBody>
-          <a:bodyPr wrap="none" lIns="0" rIns="0" tIns="0" bIns="0" anchor="t">
-            <a:spAutoFit/>
-          </a:bodyPr>
-          <a:lstStyle/>
-          <a:p>
-            <a:pPr algn="ctr"/>
-            <a:r>
-              <a:rPr sz="850" b="0">
-                <a:solidFill>
-                  <a:srgbClr val="6B7280"/>
-                </a:solidFill>
-                <a:latin typeface="Malgun Gothic"/>
-              </a:rPr>
-              <a:t>컨트롤 트리 없음</a:t>
-            </a:r>
-          </a:p>
-        </p:txBody>
-      </p:sp>
-      <p:sp>
-        <p:nvSpPr>
-          <p:cNvPr id="9" name="TextBox 8"/>
-          <p:cNvSpPr txBox="1"/>
-          <p:nvPr/>
-        </p:nvSpPr>
-        <p:spPr>
-          <a:xfrm>
-            <a:off x="378876" y="2273894"/>
-            <a:ext cx="1019966" cy="151106"/>
-          </a:xfrm>
-          <a:prstGeom prst="rect">
-            <a:avLst/>
-          </a:prstGeom>
-          <a:noFill/>
-        </p:spPr>
-        <p:txBody>
-          <a:bodyPr wrap="none" lIns="0" rIns="0" tIns="0" bIns="0" anchor="t">
-            <a:spAutoFit/>
-          </a:bodyPr>
-          <a:lstStyle/>
-          <a:p>
-            <a:pPr algn="ctr"/>
-            <a:r>
-              <a:rPr sz="850" b="0">
-                <a:solidFill>
-                  <a:srgbClr val="6B7280"/>
-                </a:solidFill>
-                <a:latin typeface="Malgun Gothic"/>
-              </a:rPr>
-              <a:t>Align Key 는</a:t>
-            </a:r>
-          </a:p>
-        </p:txBody>
-      </p:sp>
-      <p:sp>
-        <p:nvSpPr>
-          <p:cNvPr id="10" name="TextBox 9"/>
-          <p:cNvSpPr txBox="1"/>
-          <p:nvPr/>
-        </p:nvSpPr>
-        <p:spPr>
-          <a:xfrm>
-            <a:off x="266626" y="2451666"/>
-            <a:ext cx="1244467" cy="151106"/>
-          </a:xfrm>
-          <a:prstGeom prst="rect">
-            <a:avLst/>
-          </a:prstGeom>
-          <a:noFill/>
-        </p:spPr>
-        <p:txBody>
-          <a:bodyPr wrap="none" lIns="0" rIns="0" tIns="0" bIns="0" anchor="t">
-            <a:spAutoFit/>
-          </a:bodyPr>
-          <a:lstStyle/>
-          <a:p>
-            <a:pPr algn="ctr"/>
-            <a:r>
-              <a:rPr sz="850" b="0">
-                <a:solidFill>
-                  <a:srgbClr val="6B7280"/>
-                </a:solidFill>
-                <a:latin typeface="Malgun Gothic"/>
-              </a:rPr>
-              <a:t>매번 조금씩 다름</a:t>
-            </a:r>
-          </a:p>
-        </p:txBody>
-      </p:sp>
-      <p:sp>
-        <p:nvSpPr>
-          <p:cNvPr id="11" name="TextBox 10"/>
-          <p:cNvSpPr txBox="1"/>
-          <p:nvPr/>
-        </p:nvSpPr>
-        <p:spPr>
-          <a:xfrm>
-            <a:off x="375368" y="2756418"/>
-            <a:ext cx="1026982" cy="151106"/>
-          </a:xfrm>
-          <a:prstGeom prst="rect">
-            <a:avLst/>
-          </a:prstGeom>
-          <a:noFill/>
-        </p:spPr>
-        <p:txBody>
-          <a:bodyPr wrap="none" lIns="0" rIns="0" tIns="0" bIns="0" anchor="t">
-            <a:spAutoFit/>
-          </a:bodyPr>
-          <a:lstStyle/>
-          <a:p>
-            <a:pPr algn="ctr"/>
-            <a:r>
-              <a:rPr sz="850" b="0">
-                <a:solidFill>
-                  <a:srgbClr val="6B7280"/>
-                </a:solidFill>
-                <a:latin typeface="Malgun Gothic"/>
-              </a:rPr>
-              <a:t>라이브 영상이</a:t>
-            </a:r>
-          </a:p>
-        </p:txBody>
-      </p:sp>
-      <p:sp>
-        <p:nvSpPr>
-          <p:cNvPr id="12" name="TextBox 11"/>
-          <p:cNvSpPr txBox="1"/>
-          <p:nvPr/>
-        </p:nvSpPr>
-        <p:spPr>
-          <a:xfrm>
-            <a:off x="515681" y="2934190"/>
-            <a:ext cx="746356" cy="151106"/>
-          </a:xfrm>
-          <a:prstGeom prst="rect">
-            <a:avLst/>
-          </a:prstGeom>
-          <a:noFill/>
-        </p:spPr>
-        <p:txBody>
-          <a:bodyPr wrap="none" lIns="0" rIns="0" tIns="0" bIns="0" anchor="t">
-            <a:spAutoFit/>
-          </a:bodyPr>
-          <a:lstStyle/>
-          <a:p>
-            <a:pPr algn="ctr"/>
-            <a:r>
-              <a:rPr sz="850" b="0">
-                <a:solidFill>
-                  <a:srgbClr val="6B7280"/>
-                </a:solidFill>
-                <a:latin typeface="Malgun Gothic"/>
-              </a:rPr>
-              <a:t>계속 바뀜</a:t>
-            </a:r>
-          </a:p>
-        </p:txBody>
-      </p:sp>
-      <p:sp>
-        <p:nvSpPr>
-          <p:cNvPr id="13" name="Rounded Rectangle 12"/>
+          <p:cNvPr id="5" name="Rounded Rectangle 4"/>
           <p:cNvSpPr/>
           <p:nvPr/>
         </p:nvSpPr>
         <p:spPr>
           <a:xfrm>
-            <a:off x="1777720" y="888860"/>
-            <a:ext cx="2387224" cy="3301480"/>
+            <a:off x="380940" y="1015840"/>
+            <a:ext cx="2666580" cy="571410"/>
           </a:xfrm>
           <a:prstGeom prst="roundRect">
             <a:avLst>
-              <a:gd name="adj" fmla="val 3191"/>
-            </a:avLst>
-          </a:prstGeom>
-          <a:solidFill>
-            <a:srgbClr val="EFF6FF"/>
-          </a:solidFill>
-          <a:ln w="15240">
-            <a:solidFill>
-              <a:srgbClr val="2563EB"/>
-            </a:solidFill>
-          </a:ln>
-          <a:effectLst/>
-        </p:spPr>
-        <p:style>
-          <a:lnRef idx="1">
-            <a:schemeClr val="accent1"/>
-          </a:lnRef>
-          <a:fillRef idx="3">
-            <a:schemeClr val="accent1"/>
-          </a:fillRef>
-          <a:effectRef idx="2">
-            <a:schemeClr val="accent1"/>
-          </a:effectRef>
-          <a:fontRef idx="minor">
-            <a:schemeClr val="lt1"/>
-          </a:fontRef>
-        </p:style>
-        <p:txBody>
-          <a:bodyPr rtlCol="0" anchor="ctr"/>
-          <a:lstStyle/>
-          <a:p>
-            <a:pPr algn="ctr"/>
-          </a:p>
-        </p:txBody>
-      </p:sp>
-      <p:sp>
-        <p:nvSpPr>
-          <p:cNvPr id="14" name="Rounded Rectangle 13"/>
-          <p:cNvSpPr/>
-          <p:nvPr/>
-        </p:nvSpPr>
-        <p:spPr>
-          <a:xfrm>
-            <a:off x="1777720" y="888860"/>
-            <a:ext cx="2387224" cy="406336"/>
-          </a:xfrm>
-          <a:prstGeom prst="roundRect">
-            <a:avLst>
-              <a:gd name="adj" fmla="val 18750"/>
+              <a:gd name="adj" fmla="val 15555"/>
             </a:avLst>
           </a:prstGeom>
           <a:solidFill>
@@ -11240,14 +8653,14 @@
       </p:sp>
       <p:sp>
         <p:nvSpPr>
-          <p:cNvPr id="15" name="TextBox 14"/>
+          <p:cNvPr id="6" name="TextBox 5"/>
           <p:cNvSpPr txBox="1"/>
           <p:nvPr/>
         </p:nvSpPr>
         <p:spPr>
           <a:xfrm>
-            <a:off x="2084059" y="982190"/>
-            <a:ext cx="1774545" cy="231103"/>
+            <a:off x="708294" y="1163771"/>
+            <a:ext cx="2011871" cy="302212"/>
           </a:xfrm>
           <a:prstGeom prst="rect">
             <a:avLst/>
@@ -11262,27 +8675,27 @@
           <a:p>
             <a:pPr algn="ctr"/>
             <a:r>
-              <a:rPr sz="1300" b="1">
+              <a:rPr sz="1700" b="1">
                 <a:solidFill>
                   <a:srgbClr val="FFFFFF"/>
                 </a:solidFill>
                 <a:latin typeface="Malgun Gothic"/>
               </a:rPr>
-              <a:t>① VLM  ·  이해</a:t>
+              <a:t>① VLM · 이해</a:t>
             </a:r>
           </a:p>
         </p:txBody>
       </p:sp>
       <p:sp>
         <p:nvSpPr>
-          <p:cNvPr id="16" name="TextBox 15"/>
+          <p:cNvPr id="7" name="TextBox 6"/>
           <p:cNvSpPr txBox="1"/>
           <p:nvPr/>
         </p:nvSpPr>
         <p:spPr>
           <a:xfrm>
-            <a:off x="2328352" y="1383764"/>
-            <a:ext cx="1285958" cy="186660"/>
+            <a:off x="795688" y="1831686"/>
+            <a:ext cx="1837083" cy="266658"/>
           </a:xfrm>
           <a:prstGeom prst="rect">
             <a:avLst/>
@@ -11297,7 +8710,7 @@
           <a:p>
             <a:pPr algn="ctr"/>
             <a:r>
-              <a:rPr sz="1050" b="1">
+              <a:rPr sz="1500" b="1">
                 <a:solidFill>
                   <a:srgbClr val="1E3A8A"/>
                 </a:solidFill>
@@ -11310,14 +8723,14 @@
       </p:sp>
       <p:sp>
         <p:nvSpPr>
-          <p:cNvPr id="17" name="TextBox 16"/>
+          <p:cNvPr id="8" name="TextBox 7"/>
           <p:cNvSpPr txBox="1"/>
           <p:nvPr/>
         </p:nvSpPr>
         <p:spPr>
           <a:xfrm>
-            <a:off x="1917398" y="1695817"/>
-            <a:ext cx="2729054" cy="159994"/>
+            <a:off x="355417" y="2443095"/>
+            <a:ext cx="2717625" cy="213326"/>
           </a:xfrm>
           <a:prstGeom prst="rect">
             <a:avLst/>
@@ -11330,29 +8743,29 @@
           </a:bodyPr>
           <a:lstStyle/>
           <a:p>
-            <a:pPr algn="l"/>
+            <a:pPr algn="ctr"/>
             <a:r>
-              <a:rPr sz="900" b="0">
+              <a:rPr sz="1200" b="0">
                 <a:solidFill>
                   <a:srgbClr val="1F2937"/>
                 </a:solidFill>
                 <a:latin typeface="Malgun Gothic"/>
               </a:rPr>
-              <a:t>• UI 요소 위치 (로그인·탭·장비 행)</a:t>
+              <a:t>UI 요소 위치 (2단계 정밀)</a:t>
             </a:r>
           </a:p>
         </p:txBody>
       </p:sp>
       <p:sp>
         <p:nvSpPr>
-          <p:cNvPr id="18" name="TextBox 17"/>
+          <p:cNvPr id="9" name="TextBox 8"/>
           <p:cNvSpPr txBox="1"/>
           <p:nvPr/>
         </p:nvSpPr>
         <p:spPr>
           <a:xfrm>
-            <a:off x="1917398" y="1886287"/>
-            <a:ext cx="2535917" cy="159994"/>
+            <a:off x="617884" y="2773243"/>
+            <a:ext cx="2192690" cy="213326"/>
           </a:xfrm>
           <a:prstGeom prst="rect">
             <a:avLst/>
@@ -11365,29 +8778,29 @@
           </a:bodyPr>
           <a:lstStyle/>
           <a:p>
-            <a:pPr algn="l"/>
+            <a:pPr algn="ctr"/>
             <a:r>
-              <a:rPr sz="900" b="0">
+              <a:rPr sz="1200" b="0">
                 <a:solidFill>
                   <a:srgbClr val="1F2937"/>
                 </a:solidFill>
                 <a:latin typeface="Malgun Gothic"/>
               </a:rPr>
-              <a:t>전체에서 대략 → 잘라 확대해 정밀</a:t>
+              <a:t>라이브 SEM 영역 검출</a:t>
             </a:r>
           </a:p>
         </p:txBody>
       </p:sp>
       <p:sp>
         <p:nvSpPr>
-          <p:cNvPr id="19" name="TextBox 18"/>
+          <p:cNvPr id="10" name="TextBox 9"/>
           <p:cNvSpPr txBox="1"/>
           <p:nvPr/>
         </p:nvSpPr>
         <p:spPr>
           <a:xfrm>
-            <a:off x="1917398" y="2076757"/>
-            <a:ext cx="1800512" cy="159994"/>
+            <a:off x="444556" y="3103391"/>
+            <a:ext cx="2539346" cy="213326"/>
           </a:xfrm>
           <a:prstGeom prst="rect">
             <a:avLst/>
@@ -11400,29 +8813,75 @@
           </a:bodyPr>
           <a:lstStyle/>
           <a:p>
-            <a:pPr algn="l"/>
+            <a:pPr algn="ctr"/>
             <a:r>
-              <a:rPr sz="900" b="0">
+              <a:rPr sz="1200" b="0">
                 <a:solidFill>
                   <a:srgbClr val="1F2937"/>
                 </a:solidFill>
                 <a:latin typeface="Malgun Gothic"/>
               </a:rPr>
-              <a:t>(coarse → fine 2단계)</a:t>
+              <a:t>촬영 모드 OM / SEM 판독</a:t>
             </a:r>
           </a:p>
         </p:txBody>
       </p:sp>
       <p:sp>
         <p:nvSpPr>
-          <p:cNvPr id="20" name="TextBox 19"/>
+          <p:cNvPr id="11" name="Rounded Rectangle 10"/>
+          <p:cNvSpPr/>
+          <p:nvPr/>
+        </p:nvSpPr>
+        <p:spPr>
+          <a:xfrm>
+            <a:off x="571410" y="3936380"/>
+            <a:ext cx="2285640" cy="444430"/>
+          </a:xfrm>
+          <a:prstGeom prst="roundRect">
+            <a:avLst>
+              <a:gd name="adj" fmla="val 50000"/>
+            </a:avLst>
+          </a:prstGeom>
+          <a:solidFill>
+            <a:srgbClr val="DBEAFE"/>
+          </a:solidFill>
+          <a:ln>
+            <a:noFill/>
+          </a:ln>
+          <a:effectLst/>
+        </p:spPr>
+        <p:style>
+          <a:lnRef idx="1">
+            <a:schemeClr val="accent1"/>
+          </a:lnRef>
+          <a:fillRef idx="3">
+            <a:schemeClr val="accent1"/>
+          </a:fillRef>
+          <a:effectRef idx="2">
+            <a:schemeClr val="accent1"/>
+          </a:effectRef>
+          <a:fontRef idx="minor">
+            <a:schemeClr val="lt1"/>
+          </a:fontRef>
+        </p:style>
+        <p:txBody>
+          <a:bodyPr rtlCol="0" anchor="ctr"/>
+          <a:lstStyle/>
+          <a:p>
+            <a:pPr algn="ctr"/>
+          </a:p>
+        </p:txBody>
+      </p:sp>
+      <p:sp>
+        <p:nvSpPr>
+          <p:cNvPr id="12" name="TextBox 11"/>
           <p:cNvSpPr txBox="1"/>
           <p:nvPr/>
         </p:nvSpPr>
         <p:spPr>
           <a:xfrm>
-            <a:off x="1917398" y="2330717"/>
-            <a:ext cx="2186786" cy="159994"/>
+            <a:off x="237135" y="4075423"/>
+            <a:ext cx="2954189" cy="195549"/>
           </a:xfrm>
           <a:prstGeom prst="rect">
             <a:avLst/>
@@ -11435,214 +8894,39 @@
           </a:bodyPr>
           <a:lstStyle/>
           <a:p>
-            <a:pPr algn="l"/>
+            <a:pPr algn="ctr"/>
             <a:r>
-              <a:rPr sz="900" b="0">
-                <a:solidFill>
-                  <a:srgbClr val="1F2937"/>
-                </a:solidFill>
-                <a:latin typeface="Malgun Gothic"/>
-              </a:rPr>
-              <a:t>• 라이브 SEM 화면 영역 검출</a:t>
-            </a:r>
-          </a:p>
-        </p:txBody>
-      </p:sp>
-      <p:sp>
-        <p:nvSpPr>
-          <p:cNvPr id="21" name="TextBox 20"/>
-          <p:cNvSpPr txBox="1"/>
-          <p:nvPr/>
-        </p:nvSpPr>
-        <p:spPr>
-          <a:xfrm>
-            <a:off x="1917398" y="2521187"/>
-            <a:ext cx="2067932" cy="159994"/>
-          </a:xfrm>
-          <a:prstGeom prst="rect">
-            <a:avLst/>
-          </a:prstGeom>
-          <a:noFill/>
-        </p:spPr>
-        <p:txBody>
-          <a:bodyPr wrap="none" lIns="0" rIns="0" tIns="0" bIns="0" anchor="t">
-            <a:spAutoFit/>
-          </a:bodyPr>
-          <a:lstStyle/>
-          <a:p>
-            <a:pPr algn="l"/>
-            <a:r>
-              <a:rPr sz="900" b="0">
-                <a:solidFill>
-                  <a:srgbClr val="1F2937"/>
-                </a:solidFill>
-                <a:latin typeface="Malgun Gothic"/>
-              </a:rPr>
-              <a:t>• 촬영 모드 OM / SEM 판독</a:t>
-            </a:r>
-          </a:p>
-        </p:txBody>
-      </p:sp>
-      <p:sp>
-        <p:nvSpPr>
-          <p:cNvPr id="22" name="TextBox 21"/>
-          <p:cNvSpPr txBox="1"/>
-          <p:nvPr/>
-        </p:nvSpPr>
-        <p:spPr>
-          <a:xfrm>
-            <a:off x="1917398" y="2711657"/>
-            <a:ext cx="2632485" cy="159994"/>
-          </a:xfrm>
-          <a:prstGeom prst="rect">
-            <a:avLst/>
-          </a:prstGeom>
-          <a:noFill/>
-        </p:spPr>
-        <p:txBody>
-          <a:bodyPr wrap="none" lIns="0" rIns="0" tIns="0" bIns="0" anchor="t">
-            <a:spAutoFit/>
-          </a:bodyPr>
-          <a:lstStyle/>
-          <a:p>
-            <a:pPr algn="l"/>
-            <a:r>
-              <a:rPr sz="900" b="0">
-                <a:solidFill>
-                  <a:srgbClr val="1F2937"/>
-                </a:solidFill>
-                <a:latin typeface="Malgun Gothic"/>
-              </a:rPr>
-              <a:t>• 타인 점유 팝업 · 모호 상황 설명</a:t>
-            </a:r>
-          </a:p>
-        </p:txBody>
-      </p:sp>
-      <p:sp>
-        <p:nvSpPr>
-          <p:cNvPr id="23" name="TextBox 22"/>
-          <p:cNvSpPr txBox="1"/>
-          <p:nvPr/>
-        </p:nvSpPr>
-        <p:spPr>
-          <a:xfrm>
-            <a:off x="1917398" y="2902127"/>
-            <a:ext cx="1711372" cy="159994"/>
-          </a:xfrm>
-          <a:prstGeom prst="rect">
-            <a:avLst/>
-          </a:prstGeom>
-          <a:noFill/>
-        </p:spPr>
-        <p:txBody>
-          <a:bodyPr wrap="none" lIns="0" rIns="0" tIns="0" bIns="0" anchor="t">
-            <a:spAutoFit/>
-          </a:bodyPr>
-          <a:lstStyle/>
-          <a:p>
-            <a:pPr algn="l"/>
-            <a:r>
-              <a:rPr sz="900" b="0">
-                <a:solidFill>
-                  <a:srgbClr val="1F2937"/>
-                </a:solidFill>
-                <a:latin typeface="Malgun Gothic"/>
-              </a:rPr>
-              <a:t>• 정렬 후보 영역 식별</a:t>
-            </a:r>
-          </a:p>
-        </p:txBody>
-      </p:sp>
-      <p:sp>
-        <p:nvSpPr>
-          <p:cNvPr id="24" name="TextBox 23"/>
-          <p:cNvSpPr txBox="1"/>
-          <p:nvPr/>
-        </p:nvSpPr>
-        <p:spPr>
-          <a:xfrm>
-            <a:off x="1917398" y="3670674"/>
-            <a:ext cx="2128438" cy="151106"/>
-          </a:xfrm>
-          <a:prstGeom prst="rect">
-            <a:avLst/>
-          </a:prstGeom>
-          <a:noFill/>
-        </p:spPr>
-        <p:txBody>
-          <a:bodyPr wrap="none" lIns="0" rIns="0" tIns="0" bIns="0" anchor="t">
-            <a:spAutoFit/>
-          </a:bodyPr>
-          <a:lstStyle/>
-          <a:p>
-            <a:pPr algn="l"/>
-            <a:r>
-              <a:rPr sz="850" b="0">
+              <a:rPr sz="1100" b="1">
                 <a:solidFill>
                   <a:srgbClr val="1D4ED8"/>
                 </a:solidFill>
                 <a:latin typeface="Malgun Gothic"/>
               </a:rPr>
-              <a:t>사내 HCP 자체 배포 소형 모델</a:t>
+              <a:t>사내 소형 모델 · 외부 API 없음</a:t>
             </a:r>
           </a:p>
         </p:txBody>
       </p:sp>
       <p:sp>
         <p:nvSpPr>
-          <p:cNvPr id="25" name="TextBox 24"/>
-          <p:cNvSpPr txBox="1"/>
-          <p:nvPr/>
-        </p:nvSpPr>
-        <p:spPr>
-          <a:xfrm>
-            <a:off x="1917398" y="3848446"/>
-            <a:ext cx="2058282" cy="151106"/>
-          </a:xfrm>
-          <a:prstGeom prst="rect">
-            <a:avLst/>
-          </a:prstGeom>
-          <a:noFill/>
-        </p:spPr>
-        <p:txBody>
-          <a:bodyPr wrap="none" lIns="0" rIns="0" tIns="0" bIns="0" anchor="t">
-            <a:spAutoFit/>
-          </a:bodyPr>
-          <a:lstStyle/>
-          <a:p>
-            <a:pPr algn="l"/>
-            <a:r>
-              <a:rPr sz="850" b="0">
-                <a:solidFill>
-                  <a:srgbClr val="1D4ED8"/>
-                </a:solidFill>
-                <a:latin typeface="Malgun Gothic"/>
-              </a:rPr>
-              <a:t>(MAI-UI 8B, 외부 API 없음)</a:t>
-            </a:r>
-          </a:p>
-        </p:txBody>
-      </p:sp>
-      <p:sp>
-        <p:nvSpPr>
-          <p:cNvPr id="26" name="Rounded Rectangle 25"/>
+          <p:cNvPr id="13" name="Rounded Rectangle 12"/>
           <p:cNvSpPr/>
           <p:nvPr/>
         </p:nvSpPr>
         <p:spPr>
           <a:xfrm>
-            <a:off x="4342716" y="888860"/>
-            <a:ext cx="2387224" cy="3301480"/>
+            <a:off x="3301480" y="1015840"/>
+            <a:ext cx="2666580" cy="3682420"/>
           </a:xfrm>
           <a:prstGeom prst="roundRect">
             <a:avLst>
-              <a:gd name="adj" fmla="val 3191"/>
+              <a:gd name="adj" fmla="val 3333"/>
             </a:avLst>
           </a:prstGeom>
           <a:solidFill>
             <a:srgbClr val="FFFBEB"/>
           </a:solidFill>
-          <a:ln w="15240">
+          <a:ln w="17780">
             <a:solidFill>
               <a:srgbClr val="D97706"/>
             </a:solidFill>
@@ -11673,18 +8957,18 @@
       </p:sp>
       <p:sp>
         <p:nvSpPr>
-          <p:cNvPr id="27" name="Rounded Rectangle 26"/>
+          <p:cNvPr id="14" name="Rounded Rectangle 13"/>
           <p:cNvSpPr/>
           <p:nvPr/>
         </p:nvSpPr>
         <p:spPr>
           <a:xfrm>
-            <a:off x="4342716" y="888860"/>
-            <a:ext cx="2387224" cy="406336"/>
+            <a:off x="3301480" y="1015840"/>
+            <a:ext cx="2666580" cy="571410"/>
           </a:xfrm>
           <a:prstGeom prst="roundRect">
             <a:avLst>
-              <a:gd name="adj" fmla="val 18750"/>
+              <a:gd name="adj" fmla="val 15555"/>
             </a:avLst>
           </a:prstGeom>
           <a:solidFill>
@@ -11719,14 +9003,14 @@
       </p:sp>
       <p:sp>
         <p:nvSpPr>
-          <p:cNvPr id="28" name="TextBox 27"/>
+          <p:cNvPr id="15" name="TextBox 14"/>
           <p:cNvSpPr txBox="1"/>
           <p:nvPr/>
         </p:nvSpPr>
         <p:spPr>
           <a:xfrm>
-            <a:off x="4649055" y="982190"/>
-            <a:ext cx="1774545" cy="231103"/>
+            <a:off x="3628834" y="1163771"/>
+            <a:ext cx="2011871" cy="302212"/>
           </a:xfrm>
           <a:prstGeom prst="rect">
             <a:avLst/>
@@ -11741,27 +9025,27 @@
           <a:p>
             <a:pPr algn="ctr"/>
             <a:r>
-              <a:rPr sz="1300" b="1">
+              <a:rPr sz="1700" b="1">
                 <a:solidFill>
                   <a:srgbClr val="FFFFFF"/>
                 </a:solidFill>
                 <a:latin typeface="Malgun Gothic"/>
               </a:rPr>
-              <a:t>② OCR  ·  확인</a:t>
+              <a:t>② OCR · 확인</a:t>
             </a:r>
           </a:p>
         </p:txBody>
       </p:sp>
       <p:sp>
         <p:nvSpPr>
-          <p:cNvPr id="29" name="TextBox 28"/>
+          <p:cNvPr id="16" name="TextBox 15"/>
           <p:cNvSpPr txBox="1"/>
           <p:nvPr/>
         </p:nvSpPr>
         <p:spPr>
           <a:xfrm>
-            <a:off x="4451363" y="1383764"/>
-            <a:ext cx="2169929" cy="186660"/>
+            <a:off x="3400524" y="1831686"/>
+            <a:ext cx="2468491" cy="266658"/>
           </a:xfrm>
           <a:prstGeom prst="rect">
             <a:avLst/>
@@ -11776,27 +9060,27 @@
           <a:p>
             <a:pPr algn="ctr"/>
             <a:r>
-              <a:rPr sz="1050" b="1">
+              <a:rPr sz="1500" b="1">
                 <a:solidFill>
                   <a:srgbClr val="92400E"/>
                 </a:solidFill>
                 <a:latin typeface="Malgun Gothic"/>
               </a:rPr>
-              <a:t>"정말 그 버튼이 맞는지"</a:t>
+              <a:t>"정말 그 버튼인지"</a:t>
             </a:r>
           </a:p>
         </p:txBody>
       </p:sp>
       <p:sp>
         <p:nvSpPr>
-          <p:cNvPr id="30" name="TextBox 29"/>
+          <p:cNvPr id="17" name="TextBox 16"/>
           <p:cNvSpPr txBox="1"/>
           <p:nvPr/>
         </p:nvSpPr>
         <p:spPr>
           <a:xfrm>
-            <a:off x="4482394" y="1695817"/>
-            <a:ext cx="2565630" cy="159994"/>
+            <a:off x="3503759" y="2443095"/>
+            <a:ext cx="2262021" cy="213326"/>
           </a:xfrm>
           <a:prstGeom prst="rect">
             <a:avLst/>
@@ -11809,29 +9093,29 @@
           </a:bodyPr>
           <a:lstStyle/>
           <a:p>
-            <a:pPr algn="l"/>
+            <a:pPr algn="ctr"/>
             <a:r>
-              <a:rPr sz="900" b="0">
+              <a:rPr sz="1200" b="0">
                 <a:solidFill>
                   <a:srgbClr val="1F2937"/>
                 </a:solidFill>
                 <a:latin typeface="Malgun Gothic"/>
               </a:rPr>
-              <a:t>• VLM 이 찍은 지점의 라벨을 읽음</a:t>
+              <a:t>찍은 지점의 라벨 읽기</a:t>
             </a:r>
           </a:p>
         </p:txBody>
       </p:sp>
       <p:sp>
         <p:nvSpPr>
-          <p:cNvPr id="31" name="TextBox 30"/>
+          <p:cNvPr id="18" name="TextBox 17"/>
           <p:cNvSpPr txBox="1"/>
           <p:nvPr/>
         </p:nvSpPr>
         <p:spPr>
           <a:xfrm>
-            <a:off x="4482394" y="1886287"/>
-            <a:ext cx="2253641" cy="159994"/>
+            <a:off x="3231387" y="2773243"/>
+            <a:ext cx="2806765" cy="213326"/>
           </a:xfrm>
           <a:prstGeom prst="rect">
             <a:avLst/>
@@ -11844,29 +9128,29 @@
           </a:bodyPr>
           <a:lstStyle/>
           <a:p>
-            <a:pPr algn="l"/>
+            <a:pPr algn="ctr"/>
             <a:r>
-              <a:rPr sz="900" b="0">
+              <a:rPr sz="1200" b="0">
                 <a:solidFill>
                   <a:srgbClr val="1F2937"/>
                 </a:solidFill>
                 <a:latin typeface="Malgun Gothic"/>
               </a:rPr>
-              <a:t>• 의도한 대상 ID·문구와 대조</a:t>
+              <a:t>다른 ID · 취소 문구면 거부</a:t>
             </a:r>
           </a:p>
         </p:txBody>
       </p:sp>
       <p:sp>
         <p:nvSpPr>
-          <p:cNvPr id="32" name="TextBox 31"/>
+          <p:cNvPr id="19" name="TextBox 18"/>
           <p:cNvSpPr txBox="1"/>
           <p:nvPr/>
         </p:nvSpPr>
         <p:spPr>
           <a:xfrm>
-            <a:off x="4482394" y="2140247"/>
-            <a:ext cx="2877620" cy="159994"/>
+            <a:off x="3394810" y="3103391"/>
+            <a:ext cx="2479919" cy="213326"/>
           </a:xfrm>
           <a:prstGeom prst="rect">
             <a:avLst/>
@@ -11879,29 +9163,75 @@
           </a:bodyPr>
           <a:lstStyle/>
           <a:p>
-            <a:pPr algn="l"/>
+            <a:pPr algn="ctr"/>
             <a:r>
-              <a:rPr sz="900" b="0">
+              <a:rPr sz="1200" b="0">
                 <a:solidFill>
                   <a:srgbClr val="1F2937"/>
                 </a:solidFill>
                 <a:latin typeface="Malgun Gothic"/>
               </a:rPr>
-              <a:t>• 다른 장비 ID 가 읽히면 → 클릭 거부</a:t>
+              <a:t>확인 못 하면 클릭 안 함</a:t>
             </a:r>
           </a:p>
         </p:txBody>
       </p:sp>
       <p:sp>
         <p:nvSpPr>
-          <p:cNvPr id="33" name="TextBox 32"/>
+          <p:cNvPr id="20" name="Rounded Rectangle 19"/>
+          <p:cNvSpPr/>
+          <p:nvPr/>
+        </p:nvSpPr>
+        <p:spPr>
+          <a:xfrm>
+            <a:off x="3491950" y="3936380"/>
+            <a:ext cx="2285640" cy="444430"/>
+          </a:xfrm>
+          <a:prstGeom prst="roundRect">
+            <a:avLst>
+              <a:gd name="adj" fmla="val 50000"/>
+            </a:avLst>
+          </a:prstGeom>
+          <a:solidFill>
+            <a:srgbClr val="FEF3C7"/>
+          </a:solidFill>
+          <a:ln>
+            <a:noFill/>
+          </a:ln>
+          <a:effectLst/>
+        </p:spPr>
+        <p:style>
+          <a:lnRef idx="1">
+            <a:schemeClr val="accent1"/>
+          </a:lnRef>
+          <a:fillRef idx="3">
+            <a:schemeClr val="accent1"/>
+          </a:fillRef>
+          <a:effectRef idx="2">
+            <a:schemeClr val="accent1"/>
+          </a:effectRef>
+          <a:fontRef idx="minor">
+            <a:schemeClr val="lt1"/>
+          </a:fontRef>
+        </p:style>
+        <p:txBody>
+          <a:bodyPr rtlCol="0" anchor="ctr"/>
+          <a:lstStyle/>
+          <a:p>
+            <a:pPr algn="ctr"/>
+          </a:p>
+        </p:txBody>
+      </p:sp>
+      <p:sp>
+        <p:nvSpPr>
+          <p:cNvPr id="21" name="TextBox 20"/>
           <p:cNvSpPr txBox="1"/>
           <p:nvPr/>
         </p:nvSpPr>
         <p:spPr>
           <a:xfrm>
-            <a:off x="4482394" y="2330717"/>
-            <a:ext cx="3078185" cy="159994"/>
+            <a:off x="3030568" y="4075423"/>
+            <a:ext cx="3208403" cy="195549"/>
           </a:xfrm>
           <a:prstGeom prst="rect">
             <a:avLst/>
@@ -11914,179 +9244,39 @@
           </a:bodyPr>
           <a:lstStyle/>
           <a:p>
-            <a:pPr algn="l"/>
+            <a:pPr algn="ctr"/>
             <a:r>
-              <a:rPr sz="900" b="0">
-                <a:solidFill>
-                  <a:srgbClr val="1F2937"/>
-                </a:solidFill>
-                <a:latin typeface="Malgun Gothic"/>
-              </a:rPr>
-              <a:t>• 취소·종료 버튼으로 읽히면 → 클릭 거부</a:t>
-            </a:r>
-          </a:p>
-        </p:txBody>
-      </p:sp>
-      <p:sp>
-        <p:nvSpPr>
-          <p:cNvPr id="34" name="TextBox 33"/>
-          <p:cNvSpPr txBox="1"/>
-          <p:nvPr/>
-        </p:nvSpPr>
-        <p:spPr>
-          <a:xfrm>
-            <a:off x="4482394" y="2584677"/>
-            <a:ext cx="2238784" cy="159994"/>
-          </a:xfrm>
-          <a:prstGeom prst="rect">
-            <a:avLst/>
-          </a:prstGeom>
-          <a:noFill/>
-        </p:spPr>
-        <p:txBody>
-          <a:bodyPr wrap="none" lIns="0" rIns="0" tIns="0" bIns="0" anchor="t">
-            <a:spAutoFit/>
-          </a:bodyPr>
-          <a:lstStyle/>
-          <a:p>
-            <a:pPr algn="l"/>
-            <a:r>
-              <a:rPr sz="900" b="0">
-                <a:solidFill>
-                  <a:srgbClr val="1F2937"/>
-                </a:solidFill>
-                <a:latin typeface="Malgun Gothic"/>
-              </a:rPr>
-              <a:t>• 확인 못 하면 클릭하지 않음</a:t>
-            </a:r>
-          </a:p>
-        </p:txBody>
-      </p:sp>
-      <p:sp>
-        <p:nvSpPr>
-          <p:cNvPr id="35" name="TextBox 34"/>
-          <p:cNvSpPr txBox="1"/>
-          <p:nvPr/>
-        </p:nvSpPr>
-        <p:spPr>
-          <a:xfrm>
-            <a:off x="4482394" y="2775147"/>
-            <a:ext cx="1176533" cy="159994"/>
-          </a:xfrm>
-          <a:prstGeom prst="rect">
-            <a:avLst/>
-          </a:prstGeom>
-          <a:noFill/>
-        </p:spPr>
-        <p:txBody>
-          <a:bodyPr wrap="none" lIns="0" rIns="0" tIns="0" bIns="0" anchor="t">
-            <a:spAutoFit/>
-          </a:bodyPr>
-          <a:lstStyle/>
-          <a:p>
-            <a:pPr algn="l"/>
-            <a:r>
-              <a:rPr sz="900" b="0">
-                <a:solidFill>
-                  <a:srgbClr val="1F2937"/>
-                </a:solidFill>
-                <a:latin typeface="Malgun Gothic"/>
-              </a:rPr>
-              <a:t>(fail-closed)</a:t>
-            </a:r>
-          </a:p>
-        </p:txBody>
-      </p:sp>
-      <p:sp>
-        <p:nvSpPr>
-          <p:cNvPr id="36" name="TextBox 35"/>
-          <p:cNvSpPr txBox="1"/>
-          <p:nvPr/>
-        </p:nvSpPr>
-        <p:spPr>
-          <a:xfrm>
-            <a:off x="4482394" y="3670674"/>
-            <a:ext cx="2549377" cy="151106"/>
-          </a:xfrm>
-          <a:prstGeom prst="rect">
-            <a:avLst/>
-          </a:prstGeom>
-          <a:noFill/>
-        </p:spPr>
-        <p:txBody>
-          <a:bodyPr wrap="none" lIns="0" rIns="0" tIns="0" bIns="0" anchor="t">
-            <a:spAutoFit/>
-          </a:bodyPr>
-          <a:lstStyle/>
-          <a:p>
-            <a:pPr algn="l"/>
-            <a:r>
-              <a:rPr sz="850" b="0">
+              <a:rPr sz="1100" b="1">
                 <a:solidFill>
                   <a:srgbClr val="B45309"/>
                 </a:solidFill>
                 <a:latin typeface="Malgun Gothic"/>
               </a:rPr>
-              <a:t>VLM 두 단계는 독립 투표가 아니므로</a:t>
+              <a:t>fail-closed : 미확인 = 클릭 금지</a:t>
             </a:r>
           </a:p>
         </p:txBody>
       </p:sp>
       <p:sp>
         <p:nvSpPr>
-          <p:cNvPr id="37" name="TextBox 36"/>
-          <p:cNvSpPr txBox="1"/>
-          <p:nvPr/>
-        </p:nvSpPr>
-        <p:spPr>
-          <a:xfrm>
-            <a:off x="4482394" y="3848446"/>
-            <a:ext cx="2331892" cy="151106"/>
-          </a:xfrm>
-          <a:prstGeom prst="rect">
-            <a:avLst/>
-          </a:prstGeom>
-          <a:noFill/>
-        </p:spPr>
-        <p:txBody>
-          <a:bodyPr wrap="none" lIns="0" rIns="0" tIns="0" bIns="0" anchor="t">
-            <a:spAutoFit/>
-          </a:bodyPr>
-          <a:lstStyle/>
-          <a:p>
-            <a:pPr algn="l"/>
-            <a:r>
-              <a:rPr sz="850" b="0">
-                <a:solidFill>
-                  <a:srgbClr val="B45309"/>
-                </a:solidFill>
-                <a:latin typeface="Malgun Gothic"/>
-              </a:rPr>
-              <a:t>별도 근거(문자)로 한 번 더 본다</a:t>
-            </a:r>
-          </a:p>
-        </p:txBody>
-      </p:sp>
-      <p:sp>
-        <p:nvSpPr>
-          <p:cNvPr id="38" name="Rounded Rectangle 37"/>
+          <p:cNvPr id="22" name="Rounded Rectangle 21"/>
           <p:cNvSpPr/>
           <p:nvPr/>
         </p:nvSpPr>
         <p:spPr>
           <a:xfrm>
-            <a:off x="6907712" y="888860"/>
-            <a:ext cx="2387224" cy="3301480"/>
+            <a:off x="6222020" y="1015840"/>
+            <a:ext cx="2666580" cy="3682420"/>
           </a:xfrm>
           <a:prstGeom prst="roundRect">
             <a:avLst>
-              <a:gd name="adj" fmla="val 3191"/>
+              <a:gd name="adj" fmla="val 3333"/>
             </a:avLst>
           </a:prstGeom>
           <a:solidFill>
             <a:srgbClr val="ECFDF5"/>
           </a:solidFill>
-          <a:ln w="15240">
+          <a:ln w="17780">
             <a:solidFill>
               <a:srgbClr val="059669"/>
             </a:solidFill>
@@ -12117,18 +9307,18 @@
       </p:sp>
       <p:sp>
         <p:nvSpPr>
-          <p:cNvPr id="39" name="Rounded Rectangle 38"/>
+          <p:cNvPr id="23" name="Rounded Rectangle 22"/>
           <p:cNvSpPr/>
           <p:nvPr/>
         </p:nvSpPr>
         <p:spPr>
           <a:xfrm>
-            <a:off x="6907712" y="888860"/>
-            <a:ext cx="2387224" cy="406336"/>
+            <a:off x="6222020" y="1015840"/>
+            <a:ext cx="2666580" cy="571410"/>
           </a:xfrm>
           <a:prstGeom prst="roundRect">
             <a:avLst>
-              <a:gd name="adj" fmla="val 18750"/>
+              <a:gd name="adj" fmla="val 15555"/>
             </a:avLst>
           </a:prstGeom>
           <a:solidFill>
@@ -12163,14 +9353,14 @@
       </p:sp>
       <p:sp>
         <p:nvSpPr>
-          <p:cNvPr id="40" name="TextBox 39"/>
+          <p:cNvPr id="24" name="TextBox 23"/>
           <p:cNvSpPr txBox="1"/>
           <p:nvPr/>
         </p:nvSpPr>
         <p:spPr>
           <a:xfrm>
-            <a:off x="6725844" y="982190"/>
-            <a:ext cx="2750958" cy="231103"/>
+            <a:off x="6268748" y="1163771"/>
+            <a:ext cx="2573122" cy="302212"/>
           </a:xfrm>
           <a:prstGeom prst="rect">
             <a:avLst/>
@@ -12185,27 +9375,27 @@
           <a:p>
             <a:pPr algn="ctr"/>
             <a:r>
-              <a:rPr sz="1300" b="1">
+              <a:rPr sz="1700" b="1">
                 <a:solidFill>
                   <a:srgbClr val="FFFFFF"/>
                 </a:solidFill>
                 <a:latin typeface="Malgun Gothic"/>
               </a:rPr>
-              <a:t>③ CV 매칭 엔진  ·  정량</a:t>
+              <a:t>③ CV 엔진 · 정량</a:t>
             </a:r>
           </a:p>
         </p:txBody>
       </p:sp>
       <p:sp>
         <p:nvSpPr>
-          <p:cNvPr id="41" name="TextBox 40"/>
+          <p:cNvPr id="25" name="TextBox 24"/>
           <p:cNvSpPr txBox="1"/>
           <p:nvPr/>
         </p:nvSpPr>
         <p:spPr>
           <a:xfrm>
-            <a:off x="7150688" y="1383764"/>
-            <a:ext cx="1901271" cy="186660"/>
+            <a:off x="6197258" y="1831686"/>
+            <a:ext cx="2716102" cy="266658"/>
           </a:xfrm>
           <a:prstGeom prst="rect">
             <a:avLst/>
@@ -12220,7 +9410,7 @@
           <a:p>
             <a:pPr algn="ctr"/>
             <a:r>
-              <a:rPr sz="1050" b="1">
+              <a:rPr sz="1500" b="1">
                 <a:solidFill>
                   <a:srgbClr val="065F46"/>
                 </a:solidFill>
@@ -12233,14 +9423,14 @@
       </p:sp>
       <p:sp>
         <p:nvSpPr>
-          <p:cNvPr id="42" name="TextBox 41"/>
+          <p:cNvPr id="26" name="TextBox 25"/>
           <p:cNvSpPr txBox="1"/>
           <p:nvPr/>
         </p:nvSpPr>
         <p:spPr>
           <a:xfrm>
-            <a:off x="7047390" y="1695817"/>
-            <a:ext cx="3159897" cy="159994"/>
+            <a:off x="6008312" y="2443095"/>
+            <a:ext cx="3093994" cy="213326"/>
           </a:xfrm>
           <a:prstGeom prst="rect">
             <a:avLst/>
@@ -12253,29 +9443,29 @@
           </a:bodyPr>
           <a:lstStyle/>
           <a:p>
-            <a:pPr algn="l"/>
+            <a:pPr algn="ctr"/>
             <a:r>
-              <a:rPr sz="900" b="0">
+              <a:rPr sz="1200" b="0">
                 <a:solidFill>
                   <a:srgbClr val="1F2937"/>
                 </a:solidFill>
                 <a:latin typeface="Malgun Gothic"/>
               </a:rPr>
-              <a:t>• 기준 이미지 vs 라이브 화면 유사도 점수</a:t>
+              <a:t>성공 사례 종합 vs 라이브 화면</a:t>
             </a:r>
           </a:p>
         </p:txBody>
       </p:sp>
       <p:sp>
         <p:nvSpPr>
-          <p:cNvPr id="43" name="TextBox 42"/>
+          <p:cNvPr id="27" name="TextBox 26"/>
           <p:cNvSpPr txBox="1"/>
           <p:nvPr/>
         </p:nvSpPr>
         <p:spPr>
           <a:xfrm>
-            <a:off x="7047390" y="1886287"/>
-            <a:ext cx="2105074" cy="159994"/>
+            <a:off x="6315350" y="2773243"/>
+            <a:ext cx="2479919" cy="213326"/>
           </a:xfrm>
           <a:prstGeom prst="rect">
             <a:avLst/>
@@ -12288,29 +9478,29 @@
           </a:bodyPr>
           <a:lstStyle/>
           <a:p>
-            <a:pPr algn="l"/>
+            <a:pPr algn="ctr"/>
             <a:r>
-              <a:rPr sz="900" b="0">
+              <a:rPr sz="1200" b="0">
                 <a:solidFill>
                   <a:srgbClr val="1F2937"/>
                 </a:solidFill>
                 <a:latin typeface="Malgun Gothic"/>
               </a:rPr>
-              <a:t>• 기준 = 등록 1장이 아니라</a:t>
+              <a:t>여러 매칭 종합 + 재순위</a:t>
             </a:r>
           </a:p>
         </p:txBody>
       </p:sp>
       <p:sp>
         <p:nvSpPr>
-          <p:cNvPr id="44" name="TextBox 43"/>
+          <p:cNvPr id="28" name="TextBox 27"/>
           <p:cNvSpPr txBox="1"/>
           <p:nvPr/>
         </p:nvSpPr>
         <p:spPr>
           <a:xfrm>
-            <a:off x="7047390" y="2076757"/>
-            <a:ext cx="3211895" cy="159994"/>
+            <a:off x="6468869" y="3103391"/>
+            <a:ext cx="2172881" cy="213326"/>
           </a:xfrm>
           <a:prstGeom prst="rect">
             <a:avLst/>
@@ -12323,29 +9513,75 @@
           </a:bodyPr>
           <a:lstStyle/>
           <a:p>
-            <a:pPr algn="l"/>
+            <a:pPr algn="ctr"/>
             <a:r>
-              <a:rPr sz="900" b="0">
+              <a:rPr sz="1200" b="0">
                 <a:solidFill>
                   <a:srgbClr val="1F2937"/>
                 </a:solidFill>
                 <a:latin typeface="Malgun Gothic"/>
               </a:rPr>
-              <a:t>최근 성공 사례 종합(부족하면 등록 이미지)</a:t>
+              <a:t>최종 좌표(픽셀) 산출</a:t>
             </a:r>
           </a:p>
         </p:txBody>
       </p:sp>
       <p:sp>
         <p:nvSpPr>
-          <p:cNvPr id="45" name="TextBox 44"/>
+          <p:cNvPr id="29" name="Rounded Rectangle 28"/>
+          <p:cNvSpPr/>
+          <p:nvPr/>
+        </p:nvSpPr>
+        <p:spPr>
+          <a:xfrm>
+            <a:off x="6412490" y="3936380"/>
+            <a:ext cx="2285640" cy="444430"/>
+          </a:xfrm>
+          <a:prstGeom prst="roundRect">
+            <a:avLst>
+              <a:gd name="adj" fmla="val 50000"/>
+            </a:avLst>
+          </a:prstGeom>
+          <a:solidFill>
+            <a:srgbClr val="D1FAE5"/>
+          </a:solidFill>
+          <a:ln>
+            <a:noFill/>
+          </a:ln>
+          <a:effectLst/>
+        </p:spPr>
+        <p:style>
+          <a:lnRef idx="1">
+            <a:schemeClr val="accent1"/>
+          </a:lnRef>
+          <a:fillRef idx="3">
+            <a:schemeClr val="accent1"/>
+          </a:fillRef>
+          <a:effectRef idx="2">
+            <a:schemeClr val="accent1"/>
+          </a:effectRef>
+          <a:fontRef idx="minor">
+            <a:schemeClr val="lt1"/>
+          </a:fontRef>
+        </p:style>
+        <p:txBody>
+          <a:bodyPr rtlCol="0" anchor="ctr"/>
+          <a:lstStyle/>
+          <a:p>
+            <a:pPr algn="ctr"/>
+          </a:p>
+        </p:txBody>
+      </p:sp>
+      <p:sp>
+        <p:nvSpPr>
+          <p:cNvPr id="30" name="TextBox 29"/>
           <p:cNvSpPr txBox="1"/>
           <p:nvPr/>
         </p:nvSpPr>
         <p:spPr>
           <a:xfrm>
-            <a:off x="7047390" y="2330717"/>
-            <a:ext cx="2929619" cy="159994"/>
+            <a:off x="6459536" y="4075423"/>
+            <a:ext cx="2191547" cy="195549"/>
           </a:xfrm>
           <a:prstGeom prst="rect">
             <a:avLst/>
@@ -12358,179 +9594,39 @@
           </a:bodyPr>
           <a:lstStyle/>
           <a:p>
-            <a:pPr algn="l"/>
+            <a:pPr algn="ctr"/>
             <a:r>
-              <a:rPr sz="900" b="0">
-                <a:solidFill>
-                  <a:srgbClr val="1F2937"/>
-                </a:solidFill>
-                <a:latin typeface="Malgun Gothic"/>
-              </a:rPr>
-              <a:t>• 여러 매칭 방식 종합 + 모드별 재순위</a:t>
-            </a:r>
-          </a:p>
-        </p:txBody>
-      </p:sp>
-      <p:sp>
-        <p:nvSpPr>
-          <p:cNvPr id="46" name="TextBox 45"/>
-          <p:cNvSpPr txBox="1"/>
-          <p:nvPr/>
-        </p:nvSpPr>
-        <p:spPr>
-          <a:xfrm>
-            <a:off x="7047390" y="2521187"/>
-            <a:ext cx="2914762" cy="159994"/>
-          </a:xfrm>
-          <a:prstGeom prst="rect">
-            <a:avLst/>
-          </a:prstGeom>
-          <a:noFill/>
-        </p:spPr>
-        <p:txBody>
-          <a:bodyPr wrap="none" lIns="0" rIns="0" tIns="0" bIns="0" anchor="t">
-            <a:spAutoFit/>
-          </a:bodyPr>
-          <a:lstStyle/>
-          <a:p>
-            <a:pPr algn="l"/>
-            <a:r>
-              <a:rPr sz="900" b="0">
-                <a:solidFill>
-                  <a:srgbClr val="1F2937"/>
-                </a:solidFill>
-                <a:latin typeface="Malgun Gothic"/>
-              </a:rPr>
-              <a:t>• 임계값은 성공/실패 점수 분포로 보정</a:t>
-            </a:r>
-          </a:p>
-        </p:txBody>
-      </p:sp>
-      <p:sp>
-        <p:nvSpPr>
-          <p:cNvPr id="47" name="TextBox 46"/>
-          <p:cNvSpPr txBox="1"/>
-          <p:nvPr/>
-        </p:nvSpPr>
-        <p:spPr>
-          <a:xfrm>
-            <a:off x="7047390" y="2775147"/>
-            <a:ext cx="2320496" cy="159994"/>
-          </a:xfrm>
-          <a:prstGeom prst="rect">
-            <a:avLst/>
-          </a:prstGeom>
-          <a:noFill/>
-        </p:spPr>
-        <p:txBody>
-          <a:bodyPr wrap="none" lIns="0" rIns="0" tIns="0" bIns="0" anchor="t">
-            <a:spAutoFit/>
-          </a:bodyPr>
-          <a:lstStyle/>
-          <a:p>
-            <a:pPr algn="l"/>
-            <a:r>
-              <a:rPr sz="900" b="0">
-                <a:solidFill>
-                  <a:srgbClr val="1F2937"/>
-                </a:solidFill>
-                <a:latin typeface="Malgun Gothic"/>
-              </a:rPr>
-              <a:t>• 최종 재정렬 좌표(픽셀) 산출</a:t>
-            </a:r>
-          </a:p>
-        </p:txBody>
-      </p:sp>
-      <p:sp>
-        <p:nvSpPr>
-          <p:cNvPr id="48" name="TextBox 47"/>
-          <p:cNvSpPr txBox="1"/>
-          <p:nvPr/>
-        </p:nvSpPr>
-        <p:spPr>
-          <a:xfrm>
-            <a:off x="7047390" y="3670674"/>
-            <a:ext cx="2051266" cy="151106"/>
-          </a:xfrm>
-          <a:prstGeom prst="rect">
-            <a:avLst/>
-          </a:prstGeom>
-          <a:noFill/>
-        </p:spPr>
-        <p:txBody>
-          <a:bodyPr wrap="none" lIns="0" rIns="0" tIns="0" bIns="0" anchor="t">
-            <a:spAutoFit/>
-          </a:bodyPr>
-          <a:lstStyle/>
-          <a:p>
-            <a:pPr algn="l"/>
-            <a:r>
-              <a:rPr sz="850" b="0">
+              <a:rPr sz="1100" b="1">
                 <a:solidFill>
                   <a:srgbClr val="047857"/>
                 </a:solidFill>
                 <a:latin typeface="Malgun Gothic"/>
               </a:rPr>
-              <a:t>최종 정렬 좌표는 CV 만 결정</a:t>
+              <a:t>정렬 좌표는 CV 만 결정</a:t>
             </a:r>
           </a:p>
         </p:txBody>
       </p:sp>
       <p:sp>
         <p:nvSpPr>
-          <p:cNvPr id="49" name="TextBox 48"/>
-          <p:cNvSpPr txBox="1"/>
-          <p:nvPr/>
-        </p:nvSpPr>
-        <p:spPr>
-          <a:xfrm>
-            <a:off x="7047390" y="3848446"/>
-            <a:ext cx="3307067" cy="151106"/>
-          </a:xfrm>
-          <a:prstGeom prst="rect">
-            <a:avLst/>
-          </a:prstGeom>
-          <a:noFill/>
-        </p:spPr>
-        <p:txBody>
-          <a:bodyPr wrap="none" lIns="0" rIns="0" tIns="0" bIns="0" anchor="t">
-            <a:spAutoFit/>
-          </a:bodyPr>
-          <a:lstStyle/>
-          <a:p>
-            <a:pPr algn="l"/>
-            <a:r>
-              <a:rPr sz="850" b="0">
-                <a:solidFill>
-                  <a:srgbClr val="047857"/>
-                </a:solidFill>
-                <a:latin typeface="Malgun Gothic"/>
-              </a:rPr>
-              <a:t>오프라인 벤치(Recipe 200개) 검증 변경만 반영</a:t>
-            </a:r>
-          </a:p>
-        </p:txBody>
-      </p:sp>
-      <p:sp>
-        <p:nvSpPr>
-          <p:cNvPr id="50" name="Rounded Rectangle 49"/>
+          <p:cNvPr id="31" name="Rounded Rectangle 30"/>
           <p:cNvSpPr/>
           <p:nvPr/>
         </p:nvSpPr>
         <p:spPr>
           <a:xfrm>
-            <a:off x="9472708" y="888860"/>
-            <a:ext cx="2387224" cy="3301480"/>
+            <a:off x="9142560" y="1015840"/>
+            <a:ext cx="2666580" cy="3682420"/>
           </a:xfrm>
           <a:prstGeom prst="roundRect">
             <a:avLst>
-              <a:gd name="adj" fmla="val 3191"/>
+              <a:gd name="adj" fmla="val 3333"/>
             </a:avLst>
           </a:prstGeom>
           <a:solidFill>
             <a:srgbClr val="FFF7ED"/>
           </a:solidFill>
-          <a:ln w="15240">
+          <a:ln w="17780">
             <a:solidFill>
               <a:srgbClr val="EA580C"/>
             </a:solidFill>
@@ -12561,18 +9657,18 @@
       </p:sp>
       <p:sp>
         <p:nvSpPr>
-          <p:cNvPr id="51" name="Rounded Rectangle 50"/>
+          <p:cNvPr id="32" name="Rounded Rectangle 31"/>
           <p:cNvSpPr/>
           <p:nvPr/>
         </p:nvSpPr>
         <p:spPr>
           <a:xfrm>
-            <a:off x="9472708" y="888860"/>
-            <a:ext cx="2387224" cy="406336"/>
+            <a:off x="9142560" y="1015840"/>
+            <a:ext cx="2666580" cy="571410"/>
           </a:xfrm>
           <a:prstGeom prst="roundRect">
             <a:avLst>
-              <a:gd name="adj" fmla="val 18750"/>
+              <a:gd name="adj" fmla="val 15555"/>
             </a:avLst>
           </a:prstGeom>
           <a:solidFill>
@@ -12607,14 +9703,14 @@
       </p:sp>
       <p:sp>
         <p:nvSpPr>
-          <p:cNvPr id="52" name="TextBox 51"/>
+          <p:cNvPr id="33" name="TextBox 32"/>
           <p:cNvSpPr txBox="1"/>
           <p:nvPr/>
         </p:nvSpPr>
         <p:spPr>
           <a:xfrm>
-            <a:off x="9741492" y="982190"/>
-            <a:ext cx="1849654" cy="231103"/>
+            <a:off x="8922694" y="1163771"/>
+            <a:ext cx="3106311" cy="302212"/>
           </a:xfrm>
           <a:prstGeom prst="rect">
             <a:avLst/>
@@ -12629,27 +9725,27 @@
           <a:p>
             <a:pPr algn="ctr"/>
             <a:r>
-              <a:rPr sz="1300" b="1">
+              <a:rPr sz="1700" b="1">
                 <a:solidFill>
                   <a:srgbClr val="FFFFFF"/>
                 </a:solidFill>
                 <a:latin typeface="Malgun Gothic"/>
               </a:rPr>
-              <a:t>④ 사람  ·  예외</a:t>
+              <a:t>④ 현업 담당자 · 예외</a:t>
             </a:r>
           </a:p>
         </p:txBody>
       </p:sp>
       <p:sp>
         <p:nvSpPr>
-          <p:cNvPr id="53" name="TextBox 52"/>
+          <p:cNvPr id="34" name="TextBox 33"/>
           <p:cNvSpPr txBox="1"/>
           <p:nvPr/>
         </p:nvSpPr>
         <p:spPr>
           <a:xfrm>
-            <a:off x="9785015" y="1383764"/>
-            <a:ext cx="1762609" cy="186660"/>
+            <a:off x="9216843" y="1831686"/>
+            <a:ext cx="2518013" cy="266658"/>
           </a:xfrm>
           <a:prstGeom prst="rect">
             <a:avLst/>
@@ -12664,7 +9760,7 @@
           <a:p>
             <a:pPr algn="ctr"/>
             <a:r>
-              <a:rPr sz="1050" b="1">
+              <a:rPr sz="1500" b="1">
                 <a:solidFill>
                   <a:srgbClr val="9A3412"/>
                 </a:solidFill>
@@ -12677,14 +9773,14 @@
       </p:sp>
       <p:sp>
         <p:nvSpPr>
-          <p:cNvPr id="54" name="TextBox 53"/>
+          <p:cNvPr id="35" name="TextBox 34"/>
           <p:cNvSpPr txBox="1"/>
           <p:nvPr/>
         </p:nvSpPr>
         <p:spPr>
           <a:xfrm>
-            <a:off x="9612386" y="1695817"/>
-            <a:ext cx="2714197" cy="159994"/>
+            <a:off x="9443883" y="2443095"/>
+            <a:ext cx="2063932" cy="213326"/>
           </a:xfrm>
           <a:prstGeom prst="rect">
             <a:avLst/>
@@ -12697,29 +9793,29 @@
           </a:bodyPr>
           <a:lstStyle/>
           <a:p>
-            <a:pPr algn="l"/>
+            <a:pPr algn="ctr"/>
             <a:r>
-              <a:rPr sz="900" b="0">
+              <a:rPr sz="1200" b="0">
                 <a:solidFill>
                   <a:srgbClr val="1F2937"/>
                 </a:solidFill>
                 <a:latin typeface="Malgun Gothic"/>
               </a:rPr>
-              <a:t>• AI 가 진행 못하면 큐브 알림 수신</a:t>
+              <a:t>큐브 알림 받고 판단</a:t>
             </a:r>
           </a:p>
         </p:txBody>
       </p:sp>
       <p:sp>
         <p:nvSpPr>
-          <p:cNvPr id="55" name="TextBox 54"/>
+          <p:cNvPr id="36" name="TextBox 35"/>
           <p:cNvSpPr txBox="1"/>
           <p:nvPr/>
         </p:nvSpPr>
         <p:spPr>
           <a:xfrm>
-            <a:off x="9612386" y="1886287"/>
-            <a:ext cx="2632485" cy="159994"/>
+            <a:off x="9235890" y="2773243"/>
+            <a:ext cx="2479919" cy="213326"/>
           </a:xfrm>
           <a:prstGeom prst="rect">
             <a:avLst/>
@@ -12732,29 +9828,29 @@
           </a:bodyPr>
           <a:lstStyle/>
           <a:p>
-            <a:pPr algn="l"/>
+            <a:pPr algn="ctr"/>
             <a:r>
-              <a:rPr sz="900" b="0">
+              <a:rPr sz="1200" b="0">
                 <a:solidFill>
                   <a:srgbClr val="1F2937"/>
                 </a:solidFill>
                 <a:latin typeface="Malgun Gothic"/>
               </a:rPr>
-              <a:t>모드 불명 · 위치 모호 · 타인 점유</a:t>
+              <a:t>수동 정렬 · 재등록 검토</a:t>
             </a:r>
           </a:p>
         </p:txBody>
       </p:sp>
       <p:sp>
         <p:nvSpPr>
-          <p:cNvPr id="56" name="TextBox 55"/>
+          <p:cNvPr id="37" name="TextBox 36"/>
           <p:cNvSpPr txBox="1"/>
           <p:nvPr/>
         </p:nvSpPr>
         <p:spPr>
           <a:xfrm>
-            <a:off x="9612386" y="2140247"/>
-            <a:ext cx="2944475" cy="159994"/>
+            <a:off x="9731112" y="3103391"/>
+            <a:ext cx="1489475" cy="213326"/>
           </a:xfrm>
           <a:prstGeom prst="rect">
             <a:avLst/>
@@ -12767,29 +9863,75 @@
           </a:bodyPr>
           <a:lstStyle/>
           <a:p>
-            <a:pPr algn="l"/>
+            <a:pPr algn="ctr"/>
             <a:r>
-              <a:rPr sz="900" b="0">
+              <a:rPr sz="1200" b="0">
                 <a:solidFill>
                   <a:srgbClr val="1F2937"/>
                 </a:solidFill>
                 <a:latin typeface="Malgun Gothic"/>
               </a:rPr>
-              <a:t>• 수동 정렬 · 점유 해제 · 재등록 검토</a:t>
+              <a:t>확정(OK) 누름</a:t>
             </a:r>
           </a:p>
         </p:txBody>
       </p:sp>
       <p:sp>
         <p:nvSpPr>
-          <p:cNvPr id="57" name="TextBox 56"/>
+          <p:cNvPr id="38" name="Rounded Rectangle 37"/>
+          <p:cNvSpPr/>
+          <p:nvPr/>
+        </p:nvSpPr>
+        <p:spPr>
+          <a:xfrm>
+            <a:off x="9333030" y="3936380"/>
+            <a:ext cx="2285640" cy="444430"/>
+          </a:xfrm>
+          <a:prstGeom prst="roundRect">
+            <a:avLst>
+              <a:gd name="adj" fmla="val 50000"/>
+            </a:avLst>
+          </a:prstGeom>
+          <a:solidFill>
+            <a:srgbClr val="FFEDD5"/>
+          </a:solidFill>
+          <a:ln>
+            <a:noFill/>
+          </a:ln>
+          <a:effectLst/>
+        </p:spPr>
+        <p:style>
+          <a:lnRef idx="1">
+            <a:schemeClr val="accent1"/>
+          </a:lnRef>
+          <a:fillRef idx="3">
+            <a:schemeClr val="accent1"/>
+          </a:fillRef>
+          <a:effectRef idx="2">
+            <a:schemeClr val="accent1"/>
+          </a:effectRef>
+          <a:fontRef idx="minor">
+            <a:schemeClr val="lt1"/>
+          </a:fontRef>
+        </p:style>
+        <p:txBody>
+          <a:bodyPr rtlCol="0" anchor="ctr"/>
+          <a:lstStyle/>
+          <a:p>
+            <a:pPr algn="ctr"/>
+          </a:p>
+        </p:txBody>
+      </p:sp>
+      <p:sp>
+        <p:nvSpPr>
+          <p:cNvPr id="39" name="TextBox 38"/>
           <p:cNvSpPr txBox="1"/>
           <p:nvPr/>
         </p:nvSpPr>
         <p:spPr>
           <a:xfrm>
-            <a:off x="9612386" y="2330717"/>
-            <a:ext cx="2580487" cy="159994"/>
+            <a:off x="9107703" y="4075423"/>
+            <a:ext cx="2736292" cy="195549"/>
           </a:xfrm>
           <a:prstGeom prst="rect">
             <a:avLst/>
@@ -12802,169 +9944,29 @@
           </a:bodyPr>
           <a:lstStyle/>
           <a:p>
-            <a:pPr algn="l"/>
+            <a:pPr algn="ctr"/>
             <a:r>
-              <a:rPr sz="900" b="0">
-                <a:solidFill>
-                  <a:srgbClr val="1F2937"/>
-                </a:solidFill>
-                <a:latin typeface="Malgun Gothic"/>
-              </a:rPr>
-              <a:t>• 재순위로 안 풀리는 Recipe 판단</a:t>
-            </a:r>
-          </a:p>
-        </p:txBody>
-      </p:sp>
-      <p:sp>
-        <p:nvSpPr>
-          <p:cNvPr id="58" name="TextBox 57"/>
-          <p:cNvSpPr txBox="1"/>
-          <p:nvPr/>
-        </p:nvSpPr>
-        <p:spPr>
-          <a:xfrm>
-            <a:off x="9612386" y="2584677"/>
-            <a:ext cx="2602772" cy="159994"/>
-          </a:xfrm>
-          <a:prstGeom prst="rect">
-            <a:avLst/>
-          </a:prstGeom>
-          <a:noFill/>
-        </p:spPr>
-        <p:txBody>
-          <a:bodyPr wrap="none" lIns="0" rIns="0" tIns="0" bIns="0" anchor="t">
-            <a:spAutoFit/>
-          </a:bodyPr>
-          <a:lstStyle/>
-          <a:p>
-            <a:pPr algn="l"/>
-            <a:r>
-              <a:rPr sz="900" b="0">
-                <a:solidFill>
-                  <a:srgbClr val="1F2937"/>
-                </a:solidFill>
-                <a:latin typeface="Malgun Gothic"/>
-              </a:rPr>
-              <a:t>• 사람이 개입하면 자동화가 물러남</a:t>
-            </a:r>
-          </a:p>
-        </p:txBody>
-      </p:sp>
-      <p:sp>
-        <p:nvSpPr>
-          <p:cNvPr id="59" name="TextBox 58"/>
-          <p:cNvSpPr txBox="1"/>
-          <p:nvPr/>
-        </p:nvSpPr>
-        <p:spPr>
-          <a:xfrm>
-            <a:off x="9612386" y="2775147"/>
-            <a:ext cx="2729054" cy="159994"/>
-          </a:xfrm>
-          <a:prstGeom prst="rect">
-            <a:avLst/>
-          </a:prstGeom>
-          <a:noFill/>
-        </p:spPr>
-        <p:txBody>
-          <a:bodyPr wrap="none" lIns="0" rIns="0" tIns="0" bIns="0" anchor="t">
-            <a:spAutoFit/>
-          </a:bodyPr>
-          <a:lstStyle/>
-          <a:p>
-            <a:pPr algn="l"/>
-            <a:r>
-              <a:rPr sz="900" b="0">
-                <a:solidFill>
-                  <a:srgbClr val="1F2937"/>
-                </a:solidFill>
-                <a:latin typeface="Malgun Gothic"/>
-              </a:rPr>
-              <a:t>• 현 단계: 확정(OK) 도 사람이 누름</a:t>
-            </a:r>
-          </a:p>
-        </p:txBody>
-      </p:sp>
-      <p:sp>
-        <p:nvSpPr>
-          <p:cNvPr id="60" name="TextBox 59"/>
-          <p:cNvSpPr txBox="1"/>
-          <p:nvPr/>
-        </p:nvSpPr>
-        <p:spPr>
-          <a:xfrm>
-            <a:off x="9612386" y="3670674"/>
-            <a:ext cx="2345923" cy="151106"/>
-          </a:xfrm>
-          <a:prstGeom prst="rect">
-            <a:avLst/>
-          </a:prstGeom>
-          <a:noFill/>
-        </p:spPr>
-        <p:txBody>
-          <a:bodyPr wrap="none" lIns="0" rIns="0" tIns="0" bIns="0" anchor="t">
-            <a:spAutoFit/>
-          </a:bodyPr>
-          <a:lstStyle/>
-          <a:p>
-            <a:pPr algn="l"/>
-            <a:r>
-              <a:rPr sz="850" b="0">
+              <a:rPr sz="1100" b="1">
                 <a:solidFill>
                   <a:srgbClr val="C2410C"/>
                 </a:solidFill>
                 <a:latin typeface="Malgun Gothic"/>
               </a:rPr>
-              <a:t>감지~재정렬은 무인. 확정(OK) 은</a:t>
-            </a:r>
-          </a:p>
-        </p:txBody>
-      </p:sp>
-      <p:sp>
-        <p:nvSpPr>
-          <p:cNvPr id="61" name="TextBox 60"/>
-          <p:cNvSpPr txBox="1"/>
-          <p:nvPr/>
-        </p:nvSpPr>
-        <p:spPr>
-          <a:xfrm>
-            <a:off x="9612386" y="3848446"/>
-            <a:ext cx="2514299" cy="151106"/>
-          </a:xfrm>
-          <a:prstGeom prst="rect">
-            <a:avLst/>
-          </a:prstGeom>
-          <a:noFill/>
-        </p:spPr>
-        <p:txBody>
-          <a:bodyPr wrap="none" lIns="0" rIns="0" tIns="0" bIns="0" anchor="t">
-            <a:spAutoFit/>
-          </a:bodyPr>
-          <a:lstStyle/>
-          <a:p>
-            <a:pPr algn="l"/>
-            <a:r>
-              <a:rPr sz="850" b="0">
-                <a:solidFill>
-                  <a:srgbClr val="C2410C"/>
-                </a:solidFill>
-                <a:latin typeface="Malgun Gothic"/>
-              </a:rPr>
-              <a:t>현 단계 사람 → 향후 Agent 로 이관</a:t>
+              <a:t>담당자가 개입하면 AI 는 양보</a:t>
             </a:r>
           </a:p>
         </p:txBody>
       </p:sp>
       <p:cxnSp>
         <p:nvCxnSpPr>
-          <p:cNvPr id="62" name="Connector 61"/>
+          <p:cNvPr id="40" name="Connector 39"/>
           <p:cNvCxnSpPr/>
           <p:nvPr/>
         </p:nvCxnSpPr>
         <p:spPr>
           <a:xfrm>
-            <a:off x="1523760.0" y="2539600.0"/>
-            <a:ext cx="165074.0" cy="0.0"/>
+            <a:off x="3047520.0" y="2984030.0"/>
+            <a:ext cx="126980.0" cy="0.0"/>
           </a:xfrm>
           <a:prstGeom prst="line">
             <a:avLst/>
@@ -12992,14 +9994,14 @@
       </p:cxnSp>
       <p:sp>
         <p:nvSpPr>
-          <p:cNvPr id="63" name="Freeform 62"/>
+          <p:cNvPr id="41" name="Freeform 40"/>
           <p:cNvSpPr/>
           <p:nvPr/>
         </p:nvSpPr>
         <p:spPr>
           <a:xfrm>
-            <a:off x="1663438" y="2482459"/>
-            <a:ext cx="114282" cy="114282"/>
+            <a:off x="3149104" y="2926889"/>
+            <a:ext cx="152376" cy="114282"/>
           </a:xfrm>
           <a:custGeom>
             <a:avLst/>
@@ -13008,12 +10010,12 @@
             <a:cxnLst/>
             <a:rect l="l" t="t" r="r" b="b"/>
             <a:pathLst>
-              <a:path w="18" h="18">
+              <a:path w="24" h="18">
                 <a:moveTo>
                   <a:pt x="0" y="0"/>
                 </a:moveTo>
                 <a:lnTo>
-                  <a:pt x="18" y="9"/>
+                  <a:pt x="24" y="9"/>
                 </a:lnTo>
                 <a:lnTo>
                   <a:pt x="0" y="18"/>
@@ -13054,14 +10056,14 @@
       </p:sp>
       <p:cxnSp>
         <p:nvCxnSpPr>
-          <p:cNvPr id="64" name="Connector 63"/>
+          <p:cNvPr id="42" name="Connector 41"/>
           <p:cNvCxnSpPr/>
           <p:nvPr/>
         </p:nvCxnSpPr>
         <p:spPr>
           <a:xfrm>
-            <a:off x="4164944.0" y="2539600.0"/>
-            <a:ext cx="88886.0" cy="0.0"/>
+            <a:off x="5968060.0" y="2984030.0"/>
+            <a:ext cx="126980.0" cy="0.0"/>
           </a:xfrm>
           <a:prstGeom prst="line">
             <a:avLst/>
@@ -13089,14 +10091,14 @@
       </p:cxnSp>
       <p:sp>
         <p:nvSpPr>
-          <p:cNvPr id="65" name="Freeform 64"/>
+          <p:cNvPr id="43" name="Freeform 42"/>
           <p:cNvSpPr/>
           <p:nvPr/>
         </p:nvSpPr>
         <p:spPr>
           <a:xfrm>
-            <a:off x="4241132" y="2482459"/>
-            <a:ext cx="101584" cy="114282"/>
+            <a:off x="6069644" y="2926889"/>
+            <a:ext cx="152376" cy="114282"/>
           </a:xfrm>
           <a:custGeom>
             <a:avLst/>
@@ -13105,12 +10107,12 @@
             <a:cxnLst/>
             <a:rect l="l" t="t" r="r" b="b"/>
             <a:pathLst>
-              <a:path w="16" h="18">
+              <a:path w="24" h="18">
                 <a:moveTo>
                   <a:pt x="0" y="0"/>
                 </a:moveTo>
                 <a:lnTo>
-                  <a:pt x="16" y="9"/>
+                  <a:pt x="24" y="9"/>
                 </a:lnTo>
                 <a:lnTo>
                   <a:pt x="0" y="18"/>
@@ -13151,14 +10153,14 @@
       </p:sp>
       <p:cxnSp>
         <p:nvCxnSpPr>
-          <p:cNvPr id="66" name="Connector 65"/>
+          <p:cNvPr id="44" name="Connector 43"/>
           <p:cNvCxnSpPr/>
           <p:nvPr/>
         </p:nvCxnSpPr>
         <p:spPr>
           <a:xfrm>
-            <a:off x="6729940.0" y="2539600.0"/>
-            <a:ext cx="88886.0" cy="0.0"/>
+            <a:off x="8888600.0" y="2984030.0"/>
+            <a:ext cx="126980.0" cy="0.0"/>
           </a:xfrm>
           <a:prstGeom prst="line">
             <a:avLst/>
@@ -13186,14 +10188,14 @@
       </p:cxnSp>
       <p:sp>
         <p:nvSpPr>
-          <p:cNvPr id="67" name="Freeform 66"/>
+          <p:cNvPr id="45" name="Freeform 44"/>
           <p:cNvSpPr/>
           <p:nvPr/>
         </p:nvSpPr>
         <p:spPr>
           <a:xfrm>
-            <a:off x="6806128" y="2482459"/>
-            <a:ext cx="101584" cy="114282"/>
+            <a:off x="8990184" y="2926889"/>
+            <a:ext cx="152376" cy="114282"/>
           </a:xfrm>
           <a:custGeom>
             <a:avLst/>
@@ -13202,12 +10204,12 @@
             <a:cxnLst/>
             <a:rect l="l" t="t" r="r" b="b"/>
             <a:pathLst>
-              <a:path w="16" h="18">
+              <a:path w="24" h="18">
                 <a:moveTo>
                   <a:pt x="0" y="0"/>
                 </a:moveTo>
                 <a:lnTo>
-                  <a:pt x="16" y="9"/>
+                  <a:pt x="24" y="9"/>
                 </a:lnTo>
                 <a:lnTo>
                   <a:pt x="0" y="18"/>
@@ -13246,113 +10248,16 @@
           </a:p>
         </p:txBody>
       </p:sp>
-      <p:cxnSp>
-        <p:nvCxnSpPr>
-          <p:cNvPr id="68" name="Connector 67"/>
-          <p:cNvCxnSpPr/>
-          <p:nvPr/>
-        </p:nvCxnSpPr>
-        <p:spPr>
-          <a:xfrm>
-            <a:off x="9294936.0" y="2539600.0"/>
-            <a:ext cx="88886.0" cy="0.0"/>
-          </a:xfrm>
-          <a:prstGeom prst="line">
-            <a:avLst/>
-          </a:prstGeom>
-          <a:ln w="15240">
-            <a:solidFill>
-              <a:srgbClr val="6B7280"/>
-            </a:solidFill>
-          </a:ln>
-        </p:spPr>
-        <p:style>
-          <a:lnRef idx="2">
-            <a:schemeClr val="accent1"/>
-          </a:lnRef>
-          <a:fillRef idx="0">
-            <a:schemeClr val="accent1"/>
-          </a:fillRef>
-          <a:effectRef idx="1">
-            <a:schemeClr val="accent1"/>
-          </a:effectRef>
-          <a:fontRef idx="minor">
-            <a:schemeClr val="tx1"/>
-          </a:fontRef>
-        </p:style>
-      </p:cxnSp>
-      <p:sp>
-        <p:nvSpPr>
-          <p:cNvPr id="69" name="Freeform 68"/>
-          <p:cNvSpPr/>
-          <p:nvPr/>
-        </p:nvSpPr>
-        <p:spPr>
-          <a:xfrm>
-            <a:off x="9371124" y="2482459"/>
-            <a:ext cx="101584" cy="114282"/>
-          </a:xfrm>
-          <a:custGeom>
-            <a:avLst/>
-            <a:gdLst/>
-            <a:ahLst/>
-            <a:cxnLst/>
-            <a:rect l="l" t="t" r="r" b="b"/>
-            <a:pathLst>
-              <a:path w="16" h="18">
-                <a:moveTo>
-                  <a:pt x="0" y="0"/>
-                </a:moveTo>
-                <a:lnTo>
-                  <a:pt x="16" y="9"/>
-                </a:lnTo>
-                <a:lnTo>
-                  <a:pt x="0" y="18"/>
-                </a:lnTo>
-                <a:close/>
-              </a:path>
-            </a:pathLst>
-          </a:custGeom>
-          <a:solidFill>
-            <a:srgbClr val="6B7280"/>
-          </a:solidFill>
-          <a:ln>
-            <a:noFill/>
-          </a:ln>
-          <a:effectLst/>
-        </p:spPr>
-        <p:style>
-          <a:lnRef idx="1">
-            <a:schemeClr val="accent1"/>
-          </a:lnRef>
-          <a:fillRef idx="3">
-            <a:schemeClr val="accent1"/>
-          </a:fillRef>
-          <a:effectRef idx="2">
-            <a:schemeClr val="accent1"/>
-          </a:effectRef>
-          <a:fontRef idx="minor">
-            <a:schemeClr val="lt1"/>
-          </a:fontRef>
-        </p:style>
-        <p:txBody>
-          <a:bodyPr rtlCol="0" anchor="ctr"/>
-          <a:lstStyle/>
-          <a:p>
-            <a:pPr algn="ctr"/>
-          </a:p>
-        </p:txBody>
-      </p:sp>
-      <p:sp>
-        <p:nvSpPr>
-          <p:cNvPr id="70" name="TextBox 69"/>
+      <p:sp>
+        <p:nvSpPr>
+          <p:cNvPr id="46" name="TextBox 45"/>
           <p:cNvSpPr txBox="1"/>
           <p:nvPr/>
         </p:nvSpPr>
         <p:spPr>
           <a:xfrm>
-            <a:off x="9076498" y="2319289"/>
-            <a:ext cx="614646" cy="124440"/>
+            <a:off x="8620449" y="2711657"/>
+            <a:ext cx="790260" cy="159994"/>
           </a:xfrm>
           <a:prstGeom prst="rect">
             <a:avLst/>
@@ -13367,7 +10272,7 @@
           <a:p>
             <a:pPr algn="ctr"/>
             <a:r>
-              <a:rPr sz="700" b="0">
+              <a:rPr sz="900" b="0">
                 <a:solidFill>
                   <a:srgbClr val="7C3AED"/>
                 </a:solidFill>
@@ -13380,18 +10285,18 @@
       </p:sp>
       <p:sp>
         <p:nvSpPr>
-          <p:cNvPr id="71" name="Rounded Rectangle 70"/>
+          <p:cNvPr id="47" name="Rounded Rectangle 46"/>
           <p:cNvSpPr/>
           <p:nvPr/>
         </p:nvSpPr>
         <p:spPr>
           <a:xfrm>
-            <a:off x="253960" y="4444300"/>
-            <a:ext cx="11605972" cy="1333290"/>
+            <a:off x="380940" y="5015710"/>
+            <a:ext cx="11428200" cy="698390"/>
           </a:xfrm>
           <a:prstGeom prst="roundRect">
             <a:avLst>
-              <a:gd name="adj" fmla="val 5714"/>
+              <a:gd name="adj" fmla="val 12727"/>
             </a:avLst>
           </a:prstGeom>
           <a:solidFill>
@@ -13426,14 +10331,14 @@
       </p:sp>
       <p:sp>
         <p:nvSpPr>
-          <p:cNvPr id="72" name="TextBox 71"/>
+          <p:cNvPr id="48" name="TextBox 47"/>
           <p:cNvSpPr txBox="1"/>
           <p:nvPr/>
         </p:nvSpPr>
         <p:spPr>
           <a:xfrm>
-            <a:off x="444430" y="4564296"/>
-            <a:ext cx="3635119" cy="195549"/>
+            <a:off x="4751750" y="5147134"/>
+            <a:ext cx="2686579" cy="231103"/>
           </a:xfrm>
           <a:prstGeom prst="rect">
             <a:avLst/>
@@ -13446,29 +10351,29 @@
           </a:bodyPr>
           <a:lstStyle/>
           <a:p>
-            <a:pPr algn="l"/>
+            <a:pPr algn="ctr"/>
             <a:r>
-              <a:rPr sz="1100" b="1">
+              <a:rPr sz="1300" b="1">
                 <a:solidFill>
                   <a:srgbClr val="F9FAFB"/>
                 </a:solidFill>
                 <a:latin typeface="Malgun Gothic"/>
               </a:rPr>
-              <a:t>설계 원칙 (2026-05 확정, 코드에 고정)</a:t>
+              <a:t>설계 원칙 (코드에 고정)</a:t>
             </a:r>
           </a:p>
         </p:txBody>
       </p:sp>
       <p:sp>
         <p:nvSpPr>
-          <p:cNvPr id="73" name="TextBox 72"/>
+          <p:cNvPr id="49" name="TextBox 48"/>
           <p:cNvSpPr txBox="1"/>
           <p:nvPr/>
         </p:nvSpPr>
         <p:spPr>
           <a:xfrm>
-            <a:off x="444430" y="4856985"/>
-            <a:ext cx="8719081" cy="177772"/>
+            <a:off x="86092" y="5414427"/>
+            <a:ext cx="12017895" cy="213326"/>
           </a:xfrm>
           <a:prstGeom prst="rect">
             <a:avLst/>
@@ -13481,29 +10386,29 @@
           </a:bodyPr>
           <a:lstStyle/>
           <a:p>
-            <a:pPr algn="l"/>
+            <a:pPr algn="ctr"/>
             <a:r>
-              <a:rPr sz="1000" b="0">
+              <a:rPr sz="1200" b="0">
                 <a:solidFill>
                   <a:srgbClr val="E5E7EB"/>
                 </a:solidFill>
                 <a:latin typeface="Malgun Gothic"/>
               </a:rPr>
-              <a:t>①  VLM 의 답이 낮은 CV 점수를 덮어쓰지 못한다. 반복되는 단계 전환은 VLM 이 아니라 CV 점수가 결정한다.</a:t>
+              <a:t>① VLM 의 답이 낮은 CV 점수를 덮지 못한다   ② 확인 안 된 클릭은 나가지 않는다   ③ 되돌릴 수 없는 확정(OK) 은 담당자가</a:t>
             </a:r>
           </a:p>
         </p:txBody>
       </p:sp>
       <p:sp>
         <p:nvSpPr>
-          <p:cNvPr id="74" name="TextBox 73"/>
+          <p:cNvPr id="50" name="TextBox 49"/>
           <p:cNvSpPr txBox="1"/>
           <p:nvPr/>
         </p:nvSpPr>
         <p:spPr>
           <a:xfrm>
-            <a:off x="444430" y="5110945"/>
-            <a:ext cx="12078337" cy="177772"/>
+            <a:off x="1182501" y="5961711"/>
+            <a:ext cx="9825077" cy="177772"/>
           </a:xfrm>
           <a:prstGeom prst="rect">
             <a:avLst/>
@@ -13516,85 +10421,15 @@
           </a:bodyPr>
           <a:lstStyle/>
           <a:p>
-            <a:pPr algn="l"/>
+            <a:pPr algn="ctr"/>
             <a:r>
               <a:rPr sz="1000" b="0">
-                <a:solidFill>
-                  <a:srgbClr val="E5E7EB"/>
-                </a:solidFill>
-                <a:latin typeface="Malgun Gothic"/>
-              </a:rPr>
-              <a:t>②  검증 대상 클릭은 확인 없이 나가지 않는다. 좌표 미검출·라벨 불일치·취소/종료 문구면 클릭 보류. 진행 못 하면 큐브 알림으로 담당자에게 넘긴다.</a:t>
-            </a:r>
-          </a:p>
-        </p:txBody>
-      </p:sp>
-      <p:sp>
-        <p:nvSpPr>
-          <p:cNvPr id="75" name="TextBox 74"/>
-          <p:cNvSpPr txBox="1"/>
-          <p:nvPr/>
-        </p:nvSpPr>
-        <p:spPr>
-          <a:xfrm>
-            <a:off x="444430" y="5364905"/>
-            <a:ext cx="13580511" cy="177772"/>
-          </a:xfrm>
-          <a:prstGeom prst="rect">
-            <a:avLst/>
-          </a:prstGeom>
-          <a:noFill/>
-        </p:spPr>
-        <p:txBody>
-          <a:bodyPr wrap="none" lIns="0" rIns="0" tIns="0" bIns="0" anchor="t">
-            <a:spAutoFit/>
-          </a:bodyPr>
-          <a:lstStyle/>
-          <a:p>
-            <a:pPr algn="l"/>
-            <a:r>
-              <a:rPr sz="1000" b="0">
-                <a:solidFill>
-                  <a:srgbClr val="E5E7EB"/>
-                </a:solidFill>
-                <a:latin typeface="Malgun Gothic"/>
-              </a:rPr>
-              <a:t>③  되돌릴 수 없는 조작(확정 OK)은 현 단계에서 사람이 한다(향후 Agent 이관). 화면 이해는 소형 모델, 정밀 판정은 CV 에 분담해 GPU 1~2장으로 26대를 모니터링한다.</a:t>
-            </a:r>
-          </a:p>
-        </p:txBody>
-      </p:sp>
-      <p:sp>
-        <p:nvSpPr>
-          <p:cNvPr id="76" name="TextBox 75"/>
-          <p:cNvSpPr txBox="1"/>
-          <p:nvPr/>
-        </p:nvSpPr>
-        <p:spPr>
-          <a:xfrm>
-            <a:off x="1547473" y="6102023"/>
-            <a:ext cx="9095132" cy="159994"/>
-          </a:xfrm>
-          <a:prstGeom prst="rect">
-            <a:avLst/>
-          </a:prstGeom>
-          <a:noFill/>
-        </p:spPr>
-        <p:txBody>
-          <a:bodyPr wrap="none" lIns="0" rIns="0" tIns="0" bIns="0" anchor="t">
-            <a:spAutoFit/>
-          </a:bodyPr>
-          <a:lstStyle/>
-          <a:p>
-            <a:pPr algn="ctr"/>
-            <a:r>
-              <a:rPr sz="900" b="0">
                 <a:solidFill>
                   <a:srgbClr val="6B7280"/>
                 </a:solidFill>
                 <a:latin typeface="Malgun Gothic"/>
               </a:rPr>
-              <a:t>외부 API 의존 없음 · VLM 1종 + OCR 1종 상시 운영 · 모델은 벤치 결과로 교체하며 통합 API 뒤에서 바뀌므로 루프는 그대로</a:t>
+              <a:t>VLM 1종 + OCR 1종 상시 운영 · GPU 1~2장으로 26대 모니터링 · 모델은 벤치 결과로 교체 (통합 API 뒤라 루프는 그대로)</a:t>
             </a:r>
           </a:p>
         </p:txBody>

--- a/docs/project_progress/img/07/07_slides.pptx
+++ b/docs/project_progress/img/07/07_slides.pptx
@@ -10460,8 +10460,8 @@
         </p:nvSpPr>
         <p:spPr>
           <a:xfrm>
-            <a:off x="4429633" y="179676"/>
-            <a:ext cx="3330812" cy="302212"/>
+            <a:off x="4233703" y="165708"/>
+            <a:ext cx="3722672" cy="337766"/>
           </a:xfrm>
           <a:prstGeom prst="rect">
             <a:avLst/>
@@ -10476,7 +10476,7 @@
           <a:p>
             <a:pPr algn="ctr"/>
             <a:r>
-              <a:rPr sz="1700" b="1">
+              <a:rPr sz="1900" b="1">
                 <a:solidFill>
                   <a:srgbClr val="111827"/>
                 </a:solidFill>
@@ -10495,8 +10495,8 @@
         </p:nvSpPr>
         <p:spPr>
           <a:xfrm>
-            <a:off x="2156437" y="526967"/>
-            <a:ext cx="7877204" cy="177772"/>
+            <a:off x="1883748" y="551093"/>
+            <a:ext cx="8422583" cy="213326"/>
           </a:xfrm>
           <a:prstGeom prst="rect">
             <a:avLst/>
@@ -10511,13 +10511,13 @@
           <a:p>
             <a:pPr algn="ctr"/>
             <a:r>
-              <a:rPr sz="1000" b="0">
+              <a:rPr sz="1200" b="0">
                 <a:solidFill>
                   <a:srgbClr val="4B5563"/>
                 </a:solidFill>
                 <a:latin typeface="Malgun Gothic"/>
               </a:rPr>
-              <a:t>[검증] = 벤치·테스트·실알람으로 측정한 값        [목표] = 측정값을 주 400건에 적용한 환산값</a:t>
+              <a:t>[검증] = 벤치·테스트·실알람 측정값     [목표] = 측정값을 주 400건에 적용한 환산값</a:t>
             </a:r>
           </a:p>
         </p:txBody>
@@ -10530,8 +10530,8 @@
         </p:nvSpPr>
         <p:spPr>
           <a:xfrm>
-            <a:off x="380940" y="888860"/>
-            <a:ext cx="3682420" cy="5333160"/>
+            <a:off x="380940" y="1015840"/>
+            <a:ext cx="3682420" cy="5079200"/>
           </a:xfrm>
           <a:prstGeom prst="roundRect">
             <a:avLst>
@@ -10578,8 +10578,8 @@
         </p:nvSpPr>
         <p:spPr>
           <a:xfrm>
-            <a:off x="313640" y="1046315"/>
-            <a:ext cx="3817018" cy="213326"/>
+            <a:off x="1249292" y="1210119"/>
+            <a:ext cx="1945714" cy="248880"/>
           </a:xfrm>
           <a:prstGeom prst="rect">
             <a:avLst/>
@@ -10594,13 +10594,13 @@
           <a:p>
             <a:pPr algn="ctr"/>
             <a:r>
-              <a:rPr sz="1200" b="1">
+              <a:rPr sz="1400" b="1">
                 <a:solidFill>
                   <a:srgbClr val="111827"/>
                 </a:solidFill>
                 <a:latin typeface="Malgun Gothic"/>
               </a:rPr>
-              <a:t>1건당 대응 시간 (감지 → 위치 재조정)</a:t>
+              <a:t>1건당 대응 시간</a:t>
             </a:r>
           </a:p>
         </p:txBody>
@@ -10613,8 +10613,8 @@
         </p:nvSpPr>
         <p:spPr>
           <a:xfrm>
-            <a:off x="1936445" y="1333290"/>
-            <a:ext cx="571410" cy="203168"/>
+            <a:off x="1904700" y="1549156"/>
+            <a:ext cx="634900" cy="253960"/>
           </a:xfrm>
           <a:prstGeom prst="roundRect">
             <a:avLst>
@@ -10659,8 +10659,8 @@
         </p:nvSpPr>
         <p:spPr>
           <a:xfrm>
-            <a:off x="1950698" y="1359638"/>
-            <a:ext cx="542902" cy="151106"/>
+            <a:off x="1902795" y="1593599"/>
+            <a:ext cx="638709" cy="177772"/>
           </a:xfrm>
           <a:prstGeom prst="rect">
             <a:avLst/>
@@ -10675,7 +10675,7 @@
           <a:p>
             <a:pPr algn="ctr"/>
             <a:r>
-              <a:rPr sz="850" b="1">
+              <a:rPr sz="1000" b="1">
                 <a:solidFill>
                   <a:srgbClr val="166534"/>
                 </a:solidFill>
@@ -10694,7 +10694,7 @@
         </p:nvCxnSpPr>
         <p:spPr>
           <a:xfrm>
-            <a:off x="634900.0" y="5587120.0"/>
+            <a:off x="634900.0" y="5333160.0"/>
             <a:ext cx="3174500.0" cy="0.0"/>
           </a:xfrm>
           <a:prstGeom prst="line">
@@ -10729,8 +10729,8 @@
         </p:nvSpPr>
         <p:spPr>
           <a:xfrm>
-            <a:off x="857115" y="2412620"/>
-            <a:ext cx="952350" cy="3174500"/>
+            <a:off x="825370" y="2539600"/>
+            <a:ext cx="1015840" cy="2793560"/>
           </a:xfrm>
           <a:prstGeom prst="rect">
             <a:avLst/>
@@ -10773,8 +10773,8 @@
         </p:nvSpPr>
         <p:spPr>
           <a:xfrm>
-            <a:off x="1027014" y="2085011"/>
-            <a:ext cx="612551" cy="284435"/>
+            <a:off x="835591" y="2065964"/>
+            <a:ext cx="995396" cy="462207"/>
           </a:xfrm>
           <a:prstGeom prst="rect">
             <a:avLst/>
@@ -10789,7 +10789,7 @@
           <a:p>
             <a:pPr algn="ctr"/>
             <a:r>
-              <a:rPr sz="1600" b="1">
+              <a:rPr sz="2600" b="1">
                 <a:solidFill>
                   <a:srgbClr val="374151"/>
                 </a:solidFill>
@@ -10808,8 +10808,8 @@
         </p:nvSpPr>
         <p:spPr>
           <a:xfrm>
-            <a:off x="728023" y="5689021"/>
-            <a:ext cx="1210532" cy="168883"/>
+            <a:off x="469699" y="5427125"/>
+            <a:ext cx="1727181" cy="213326"/>
           </a:xfrm>
           <a:prstGeom prst="rect">
             <a:avLst/>
@@ -10824,13 +10824,13 @@
           <a:p>
             <a:pPr algn="ctr"/>
             <a:r>
-              <a:rPr sz="950" b="0">
+              <a:rPr sz="1200" b="0">
                 <a:solidFill>
                   <a:srgbClr val="374151"/>
                 </a:solidFill>
                 <a:latin typeface="Malgun Gothic"/>
               </a:rPr>
-              <a:t>Before · 사람</a:t>
+              <a:t>Before · 담당자</a:t>
             </a:r>
           </a:p>
         </p:txBody>
@@ -10843,8 +10843,8 @@
         </p:nvSpPr>
         <p:spPr>
           <a:xfrm>
-            <a:off x="2634835" y="4952220"/>
-            <a:ext cx="952350" cy="634900"/>
+            <a:off x="2603090" y="4774448"/>
+            <a:ext cx="1015840" cy="558712"/>
           </a:xfrm>
           <a:prstGeom prst="rect">
             <a:avLst/>
@@ -10887,8 +10887,8 @@
         </p:nvSpPr>
         <p:spPr>
           <a:xfrm>
-            <a:off x="2659469" y="4624611"/>
-            <a:ext cx="903081" cy="284435"/>
+            <a:off x="2377256" y="4300812"/>
+            <a:ext cx="1467507" cy="462207"/>
           </a:xfrm>
           <a:prstGeom prst="rect">
             <a:avLst/>
@@ -10903,7 +10903,7 @@
           <a:p>
             <a:pPr algn="ctr"/>
             <a:r>
-              <a:rPr sz="1600" b="1">
+              <a:rPr sz="2600" b="1">
                 <a:solidFill>
                   <a:srgbClr val="1D4ED8"/>
                 </a:solidFill>
@@ -10922,8 +10922,8 @@
         </p:nvSpPr>
         <p:spPr>
           <a:xfrm>
-            <a:off x="2360685" y="5689021"/>
-            <a:ext cx="1500649" cy="168883"/>
+            <a:off x="2163231" y="5427125"/>
+            <a:ext cx="1895557" cy="213326"/>
           </a:xfrm>
           <a:prstGeom prst="rect">
             <a:avLst/>
@@ -10938,7 +10938,7 @@
           <a:p>
             <a:pPr algn="ctr"/>
             <a:r>
-              <a:rPr sz="950" b="0">
+              <a:rPr sz="1200" b="0">
                 <a:solidFill>
                   <a:srgbClr val="1D4ED8"/>
                 </a:solidFill>
@@ -10957,8 +10957,8 @@
         </p:nvSpPr>
         <p:spPr>
           <a:xfrm>
-            <a:off x="-238055" y="5949647"/>
-            <a:ext cx="4920411" cy="159994"/>
+            <a:off x="842194" y="5771241"/>
+            <a:ext cx="2759910" cy="177772"/>
           </a:xfrm>
           <a:prstGeom prst="rect">
             <a:avLst/>
@@ -10973,13 +10973,13 @@
           <a:p>
             <a:pPr algn="ctr"/>
             <a:r>
-              <a:rPr sz="900" b="0">
+              <a:rPr sz="1000" b="0">
                 <a:solidFill>
                   <a:srgbClr val="4B5563"/>
                 </a:solidFill>
                 <a:latin typeface="Malgun Gothic"/>
               </a:rPr>
-              <a:t>감지 → 위치 재조정 구간 · 실알람 3건 · 확정 대기·측정 재개 제외</a:t>
+              <a:t>감지 → 위치 재조정 · 실알람 3건</a:t>
             </a:r>
           </a:p>
         </p:txBody>
@@ -10992,8 +10992,8 @@
         </p:nvSpPr>
         <p:spPr>
           <a:xfrm>
-            <a:off x="4317320" y="888860"/>
-            <a:ext cx="3682420" cy="5333160"/>
+            <a:off x="4317320" y="1015840"/>
+            <a:ext cx="3682420" cy="5079200"/>
           </a:xfrm>
           <a:prstGeom prst="roundRect">
             <a:avLst>
@@ -11040,8 +11040,8 @@
         </p:nvSpPr>
         <p:spPr>
           <a:xfrm>
-            <a:off x="4522392" y="1046315"/>
-            <a:ext cx="3272274" cy="213326"/>
+            <a:off x="4249703" y="1210119"/>
+            <a:ext cx="3817653" cy="248880"/>
           </a:xfrm>
           <a:prstGeom prst="rect">
             <a:avLst/>
@@ -11056,7 +11056,7 @@
           <a:p>
             <a:pPr algn="ctr"/>
             <a:r>
-              <a:rPr sz="1200" b="1">
+              <a:rPr sz="1400" b="1">
                 <a:solidFill>
                   <a:srgbClr val="111827"/>
                 </a:solidFill>
@@ -11075,8 +11075,8 @@
         </p:nvSpPr>
         <p:spPr>
           <a:xfrm>
-            <a:off x="5872825" y="1333290"/>
-            <a:ext cx="571410" cy="203168"/>
+            <a:off x="5841080" y="1549156"/>
+            <a:ext cx="634900" cy="253960"/>
           </a:xfrm>
           <a:prstGeom prst="roundRect">
             <a:avLst>
@@ -11121,8 +11121,8 @@
         </p:nvSpPr>
         <p:spPr>
           <a:xfrm>
-            <a:off x="5887078" y="1359638"/>
-            <a:ext cx="542902" cy="151106"/>
+            <a:off x="5839175" y="1593599"/>
+            <a:ext cx="638709" cy="177772"/>
           </a:xfrm>
           <a:prstGeom prst="rect">
             <a:avLst/>
@@ -11137,7 +11137,7 @@
           <a:p>
             <a:pPr algn="ctr"/>
             <a:r>
-              <a:rPr sz="850" b="1">
+              <a:rPr sz="1000" b="1">
                 <a:solidFill>
                   <a:srgbClr val="166534"/>
                 </a:solidFill>
@@ -11156,7 +11156,7 @@
         </p:nvCxnSpPr>
         <p:spPr>
           <a:xfrm>
-            <a:off x="4571280.0" y="5587120.0"/>
+            <a:off x="4571280.0" y="5333160.0"/>
             <a:ext cx="3174500.0" cy="0.0"/>
           </a:xfrm>
           <a:prstGeom prst="line">
@@ -11183,87 +11183,16 @@
           </a:fontRef>
         </p:style>
       </p:cxnSp>
-      <p:cxnSp>
-        <p:nvCxnSpPr>
-          <p:cNvPr id="21" name="Connector 20"/>
-          <p:cNvCxnSpPr/>
-          <p:nvPr/>
-        </p:nvCxnSpPr>
-        <p:spPr>
-          <a:xfrm>
-            <a:off x="4571280.0" y="2412620.0"/>
-            <a:ext cx="3174500.0" cy="0.0"/>
-          </a:xfrm>
-          <a:prstGeom prst="line">
-            <a:avLst/>
-          </a:prstGeom>
-          <a:ln w="6350">
-            <a:solidFill>
-              <a:srgbClr val="D1D5DB"/>
-            </a:solidFill>
-            <a:prstDash val="dash"/>
-          </a:ln>
-        </p:spPr>
-        <p:style>
-          <a:lnRef idx="2">
-            <a:schemeClr val="accent1"/>
-          </a:lnRef>
-          <a:fillRef idx="0">
-            <a:schemeClr val="accent1"/>
-          </a:fillRef>
-          <a:effectRef idx="1">
-            <a:schemeClr val="accent1"/>
-          </a:effectRef>
-          <a:fontRef idx="minor">
-            <a:schemeClr val="tx1"/>
-          </a:fontRef>
-        </p:style>
-      </p:cxnSp>
-      <p:sp>
-        <p:nvSpPr>
-          <p:cNvPr id="22" name="TextBox 21"/>
-          <p:cNvSpPr txBox="1"/>
-          <p:nvPr/>
-        </p:nvSpPr>
-        <p:spPr>
-          <a:xfrm>
-            <a:off x="4596676" y="2255164"/>
-            <a:ext cx="392114" cy="142217"/>
-          </a:xfrm>
-          <a:prstGeom prst="rect">
-            <a:avLst/>
-          </a:prstGeom>
-          <a:noFill/>
-        </p:spPr>
-        <p:txBody>
-          <a:bodyPr wrap="none" lIns="0" rIns="0" tIns="0" bIns="0" anchor="t">
-            <a:spAutoFit/>
-          </a:bodyPr>
-          <a:lstStyle/>
-          <a:p>
-            <a:pPr algn="l"/>
-            <a:r>
-              <a:rPr sz="800" b="0">
-                <a:solidFill>
-                  <a:srgbClr val="9CA3AF"/>
-                </a:solidFill>
-                <a:latin typeface="Malgun Gothic"/>
-              </a:rPr>
-              <a:t>100%</a:t>
-            </a:r>
-          </a:p>
-        </p:txBody>
-      </p:sp>
-      <p:sp>
-        <p:nvSpPr>
-          <p:cNvPr id="23" name="Rectangle 22"/>
+      <p:sp>
+        <p:nvSpPr>
+          <p:cNvPr id="21" name="Rectangle 20"/>
           <p:cNvSpPr/>
           <p:nvPr/>
         </p:nvSpPr>
         <p:spPr>
           <a:xfrm>
-            <a:off x="4793495" y="4577629"/>
-            <a:ext cx="952350" cy="1009491"/>
+            <a:off x="4761750" y="4444300"/>
+            <a:ext cx="1015840" cy="888860"/>
           </a:xfrm>
           <a:prstGeom prst="rect">
             <a:avLst/>
@@ -11300,14 +11229,14 @@
       </p:sp>
       <p:sp>
         <p:nvSpPr>
-          <p:cNvPr id="24" name="TextBox 23"/>
+          <p:cNvPr id="22" name="TextBox 21"/>
           <p:cNvSpPr txBox="1"/>
           <p:nvPr/>
         </p:nvSpPr>
         <p:spPr>
           <a:xfrm>
-            <a:off x="4804923" y="4250020"/>
-            <a:ext cx="929493" cy="284435"/>
+            <a:off x="4514456" y="3970664"/>
+            <a:ext cx="1510427" cy="462207"/>
           </a:xfrm>
           <a:prstGeom prst="rect">
             <a:avLst/>
@@ -11322,7 +11251,7 @@
           <a:p>
             <a:pPr algn="ctr"/>
             <a:r>
-              <a:rPr sz="1600" b="1">
+              <a:rPr sz="2600" b="1">
                 <a:solidFill>
                   <a:srgbClr val="374151"/>
                 </a:solidFill>
@@ -11335,14 +11264,14 @@
       </p:sp>
       <p:sp>
         <p:nvSpPr>
-          <p:cNvPr id="25" name="TextBox 24"/>
+          <p:cNvPr id="23" name="TextBox 22"/>
           <p:cNvSpPr txBox="1"/>
           <p:nvPr/>
         </p:nvSpPr>
         <p:spPr>
           <a:xfrm>
-            <a:off x="4609516" y="5689021"/>
-            <a:ext cx="1320306" cy="168883"/>
+            <a:off x="4435792" y="5427125"/>
+            <a:ext cx="1667755" cy="213326"/>
           </a:xfrm>
           <a:prstGeom prst="rect">
             <a:avLst/>
@@ -11357,7 +11286,7 @@
           <a:p>
             <a:pPr algn="ctr"/>
             <a:r>
-              <a:rPr sz="950" b="0">
+              <a:rPr sz="1200" b="0">
                 <a:solidFill>
                   <a:srgbClr val="374151"/>
                 </a:solidFill>
@@ -11370,14 +11299,14 @@
       </p:sp>
       <p:sp>
         <p:nvSpPr>
-          <p:cNvPr id="26" name="Rectangle 25"/>
+          <p:cNvPr id="24" name="Rectangle 23"/>
           <p:cNvSpPr/>
           <p:nvPr/>
         </p:nvSpPr>
         <p:spPr>
           <a:xfrm>
-            <a:off x="6571215" y="3161802"/>
-            <a:ext cx="952350" cy="2425318"/>
+            <a:off x="6539470" y="3199896"/>
+            <a:ext cx="1015840" cy="2133264"/>
           </a:xfrm>
           <a:prstGeom prst="rect">
             <a:avLst/>
@@ -11414,14 +11343,14 @@
       </p:sp>
       <p:sp>
         <p:nvSpPr>
-          <p:cNvPr id="27" name="TextBox 26"/>
+          <p:cNvPr id="25" name="TextBox 24"/>
           <p:cNvSpPr txBox="1"/>
           <p:nvPr/>
         </p:nvSpPr>
         <p:spPr>
           <a:xfrm>
-            <a:off x="6582643" y="2834193"/>
-            <a:ext cx="929493" cy="284435"/>
+            <a:off x="6292176" y="2726260"/>
+            <a:ext cx="1510427" cy="462207"/>
           </a:xfrm>
           <a:prstGeom prst="rect">
             <a:avLst/>
@@ -11436,7 +11365,7 @@
           <a:p>
             <a:pPr algn="ctr"/>
             <a:r>
-              <a:rPr sz="1600" b="1">
+              <a:rPr sz="2600" b="1">
                 <a:solidFill>
                   <a:srgbClr val="047857"/>
                 </a:solidFill>
@@ -11449,14 +11378,14 @@
       </p:sp>
       <p:sp>
         <p:nvSpPr>
-          <p:cNvPr id="28" name="TextBox 27"/>
+          <p:cNvPr id="26" name="TextBox 25"/>
           <p:cNvSpPr txBox="1"/>
           <p:nvPr/>
         </p:nvSpPr>
         <p:spPr>
           <a:xfrm>
-            <a:off x="5712909" y="5689021"/>
-            <a:ext cx="2668960" cy="168883"/>
+            <a:off x="6267986" y="5427125"/>
+            <a:ext cx="1558806" cy="213326"/>
           </a:xfrm>
           <a:prstGeom prst="rect">
             <a:avLst/>
@@ -11471,27 +11400,27 @@
           <a:p>
             <a:pPr algn="ctr"/>
             <a:r>
-              <a:rPr sz="950" b="0">
+              <a:rPr sz="1200" b="0">
                 <a:solidFill>
                   <a:srgbClr val="047857"/>
                 </a:solidFill>
                 <a:latin typeface="Malgun Gothic"/>
               </a:rPr>
-              <a:t>최근 성공 사례 취합 (consensus)</a:t>
+              <a:t>성공 사례 종합</a:t>
             </a:r>
           </a:p>
         </p:txBody>
       </p:sp>
       <p:sp>
         <p:nvSpPr>
-          <p:cNvPr id="29" name="Rounded Rectangle 28"/>
+          <p:cNvPr id="27" name="Rounded Rectangle 26"/>
           <p:cNvSpPr/>
           <p:nvPr/>
         </p:nvSpPr>
         <p:spPr>
           <a:xfrm>
-            <a:off x="5809335" y="3682420"/>
-            <a:ext cx="698390" cy="253960"/>
+            <a:off x="5745845" y="3555440"/>
+            <a:ext cx="825370" cy="304752"/>
           </a:xfrm>
           <a:prstGeom prst="roundRect">
             <a:avLst>
@@ -11532,14 +11461,14 @@
       </p:sp>
       <p:sp>
         <p:nvSpPr>
-          <p:cNvPr id="30" name="TextBox 29"/>
+          <p:cNvPr id="28" name="TextBox 27"/>
           <p:cNvSpPr txBox="1"/>
           <p:nvPr/>
         </p:nvSpPr>
         <p:spPr>
           <a:xfrm>
-            <a:off x="5853539" y="3720196"/>
-            <a:ext cx="609980" cy="186660"/>
+            <a:off x="5751876" y="3584645"/>
+            <a:ext cx="813306" cy="248880"/>
           </a:xfrm>
           <a:prstGeom prst="rect">
             <a:avLst/>
@@ -11554,7 +11483,7 @@
           <a:p>
             <a:pPr algn="ctr"/>
             <a:r>
-              <a:rPr sz="1050" b="1">
+              <a:rPr sz="1400" b="1">
                 <a:solidFill>
                   <a:srgbClr val="047857"/>
                 </a:solidFill>
@@ -11567,14 +11496,14 @@
       </p:sp>
       <p:sp>
         <p:nvSpPr>
-          <p:cNvPr id="31" name="TextBox 30"/>
+          <p:cNvPr id="29" name="TextBox 28"/>
           <p:cNvSpPr txBox="1"/>
           <p:nvPr/>
         </p:nvSpPr>
         <p:spPr>
           <a:xfrm>
-            <a:off x="3490331" y="5949647"/>
-            <a:ext cx="5336397" cy="159994"/>
+            <a:off x="4972536" y="5771241"/>
+            <a:ext cx="2371986" cy="177772"/>
           </a:xfrm>
           <a:prstGeom prst="rect">
             <a:avLst/>
@@ -11589,27 +11518,27 @@
           <a:p>
             <a:pPr algn="ctr"/>
             <a:r>
-              <a:rPr sz="900" b="0">
+              <a:rPr sz="1000" b="0">
                 <a:solidFill>
                   <a:srgbClr val="4B5563"/>
                 </a:solidFill>
                 <a:latin typeface="Malgun Gothic"/>
               </a:rPr>
-              <a:t>Recipe 200개 오프라인 평가 · 후보 안에 정답이 든 비율 43.4% → 87.6%</a:t>
+              <a:t>Recipe 200개 오프라인 평가</a:t>
             </a:r>
           </a:p>
         </p:txBody>
       </p:sp>
       <p:sp>
         <p:nvSpPr>
-          <p:cNvPr id="32" name="Rounded Rectangle 31"/>
+          <p:cNvPr id="30" name="Rounded Rectangle 29"/>
           <p:cNvSpPr/>
           <p:nvPr/>
         </p:nvSpPr>
         <p:spPr>
           <a:xfrm>
-            <a:off x="8253700" y="888860"/>
-            <a:ext cx="3682420" cy="5333160"/>
+            <a:off x="8253700" y="1015840"/>
+            <a:ext cx="3682420" cy="5079200"/>
           </a:xfrm>
           <a:prstGeom prst="roundRect">
             <a:avLst>
@@ -11650,14 +11579,14 @@
       </p:sp>
       <p:sp>
         <p:nvSpPr>
-          <p:cNvPr id="33" name="TextBox 32"/>
+          <p:cNvPr id="31" name="TextBox 30"/>
           <p:cNvSpPr txBox="1"/>
           <p:nvPr/>
         </p:nvSpPr>
         <p:spPr>
           <a:xfrm>
-            <a:off x="8364680" y="1046315"/>
-            <a:ext cx="3460458" cy="213326"/>
+            <a:off x="8076308" y="1210119"/>
+            <a:ext cx="4037202" cy="248880"/>
           </a:xfrm>
           <a:prstGeom prst="rect">
             <a:avLst/>
@@ -11672,7 +11601,7 @@
           <a:p>
             <a:pPr algn="ctr"/>
             <a:r>
-              <a:rPr sz="1200" b="1">
+              <a:rPr sz="1400" b="1">
                 <a:solidFill>
                   <a:srgbClr val="111827"/>
                 </a:solidFill>
@@ -11685,14 +11614,14 @@
       </p:sp>
       <p:sp>
         <p:nvSpPr>
-          <p:cNvPr id="34" name="Rounded Rectangle 33"/>
+          <p:cNvPr id="32" name="Rounded Rectangle 31"/>
           <p:cNvSpPr/>
           <p:nvPr/>
         </p:nvSpPr>
         <p:spPr>
           <a:xfrm>
-            <a:off x="9809205" y="1333290"/>
-            <a:ext cx="571410" cy="203168"/>
+            <a:off x="9777460" y="1549156"/>
+            <a:ext cx="634900" cy="253960"/>
           </a:xfrm>
           <a:prstGeom prst="roundRect">
             <a:avLst>
@@ -11731,14 +11660,14 @@
       </p:sp>
       <p:sp>
         <p:nvSpPr>
-          <p:cNvPr id="35" name="TextBox 34"/>
+          <p:cNvPr id="33" name="TextBox 32"/>
           <p:cNvSpPr txBox="1"/>
           <p:nvPr/>
         </p:nvSpPr>
         <p:spPr>
           <a:xfrm>
-            <a:off x="9823458" y="1359638"/>
-            <a:ext cx="542902" cy="151106"/>
+            <a:off x="9775555" y="1593599"/>
+            <a:ext cx="638709" cy="177772"/>
           </a:xfrm>
           <a:prstGeom prst="rect">
             <a:avLst/>
@@ -11753,7 +11682,7 @@
           <a:p>
             <a:pPr algn="ctr"/>
             <a:r>
-              <a:rPr sz="850" b="1">
+              <a:rPr sz="1000" b="1">
                 <a:solidFill>
                   <a:srgbClr val="92400E"/>
                 </a:solidFill>
@@ -11766,13 +11695,13 @@
       </p:sp>
       <p:cxnSp>
         <p:nvCxnSpPr>
-          <p:cNvPr id="36" name="Connector 35"/>
+          <p:cNvPr id="34" name="Connector 33"/>
           <p:cNvCxnSpPr/>
           <p:nvPr/>
         </p:nvCxnSpPr>
         <p:spPr>
           <a:xfrm>
-            <a:off x="8507660.0" y="5587120.0"/>
+            <a:off x="8507660.0" y="5333160.0"/>
             <a:ext cx="3174500.0" cy="0.0"/>
           </a:xfrm>
           <a:prstGeom prst="line">
@@ -11801,14 +11730,14 @@
       </p:cxnSp>
       <p:sp>
         <p:nvSpPr>
-          <p:cNvPr id="37" name="Rectangle 36"/>
+          <p:cNvPr id="35" name="Rectangle 34"/>
           <p:cNvSpPr/>
           <p:nvPr/>
         </p:nvSpPr>
         <p:spPr>
           <a:xfrm>
-            <a:off x="8729875" y="2412620"/>
-            <a:ext cx="952350" cy="3174500"/>
+            <a:off x="8698130" y="2539600"/>
+            <a:ext cx="1015840" cy="2793560"/>
           </a:xfrm>
           <a:prstGeom prst="rect">
             <a:avLst/>
@@ -11845,14 +11774,14 @@
       </p:sp>
       <p:sp>
         <p:nvSpPr>
-          <p:cNvPr id="38" name="TextBox 37"/>
+          <p:cNvPr id="36" name="TextBox 35"/>
           <p:cNvSpPr txBox="1"/>
           <p:nvPr/>
         </p:nvSpPr>
         <p:spPr>
           <a:xfrm>
-            <a:off x="8490390" y="2085011"/>
-            <a:ext cx="1431318" cy="284435"/>
+            <a:off x="8375727" y="2065964"/>
+            <a:ext cx="1660644" cy="462207"/>
           </a:xfrm>
           <a:prstGeom prst="rect">
             <a:avLst/>
@@ -11867,27 +11796,27 @@
           <a:p>
             <a:pPr algn="ctr"/>
             <a:r>
-              <a:rPr sz="1600" b="1">
+              <a:rPr sz="2600" b="1">
                 <a:solidFill>
                   <a:srgbClr val="374151"/>
                 </a:solidFill>
                 <a:latin typeface="Malgun Gothic"/>
               </a:rPr>
-              <a:t>약 33시간</a:t>
+              <a:t>33시간</a:t>
             </a:r>
           </a:p>
         </p:txBody>
       </p:sp>
       <p:sp>
         <p:nvSpPr>
-          <p:cNvPr id="39" name="TextBox 38"/>
+          <p:cNvPr id="37" name="TextBox 36"/>
           <p:cNvSpPr txBox="1"/>
           <p:nvPr/>
         </p:nvSpPr>
         <p:spPr>
           <a:xfrm>
-            <a:off x="8298904" y="5689021"/>
-            <a:ext cx="1814290" cy="168883"/>
+            <a:off x="8159226" y="5427125"/>
+            <a:ext cx="2093646" cy="213326"/>
           </a:xfrm>
           <a:prstGeom prst="rect">
             <a:avLst/>
@@ -11902,27 +11831,27 @@
           <a:p>
             <a:pPr algn="ctr"/>
             <a:r>
-              <a:rPr sz="950" b="0">
+              <a:rPr sz="1200" b="0">
                 <a:solidFill>
                   <a:srgbClr val="374151"/>
                 </a:solidFill>
                 <a:latin typeface="Malgun Gothic"/>
               </a:rPr>
-              <a:t>Before · 400건 × 5분</a:t>
+              <a:t>Before · 5분 × 400</a:t>
             </a:r>
           </a:p>
         </p:txBody>
       </p:sp>
       <p:sp>
         <p:nvSpPr>
-          <p:cNvPr id="40" name="Rectangle 39"/>
+          <p:cNvPr id="38" name="Rectangle 37"/>
           <p:cNvSpPr/>
           <p:nvPr/>
         </p:nvSpPr>
         <p:spPr>
           <a:xfrm>
-            <a:off x="10507595" y="2412620"/>
-            <a:ext cx="952350" cy="2533251"/>
+            <a:off x="10475850" y="2539600"/>
+            <a:ext cx="1015840" cy="2234848"/>
           </a:xfrm>
           <a:prstGeom prst="rect">
             <a:avLst/>
@@ -11962,14 +11891,14 @@
       </p:sp>
       <p:sp>
         <p:nvSpPr>
-          <p:cNvPr id="41" name="Rectangle 40"/>
+          <p:cNvPr id="39" name="Rectangle 38"/>
           <p:cNvSpPr/>
           <p:nvPr/>
         </p:nvSpPr>
         <p:spPr>
           <a:xfrm>
-            <a:off x="10507595" y="4945871"/>
-            <a:ext cx="952350" cy="641249"/>
+            <a:off x="10475850" y="4774448"/>
+            <a:ext cx="1015840" cy="558712"/>
           </a:xfrm>
           <a:prstGeom prst="rect">
             <a:avLst/>
@@ -12006,14 +11935,14 @@
       </p:sp>
       <p:sp>
         <p:nvSpPr>
-          <p:cNvPr id="42" name="TextBox 41"/>
+          <p:cNvPr id="40" name="TextBox 39"/>
           <p:cNvSpPr txBox="1"/>
           <p:nvPr/>
         </p:nvSpPr>
         <p:spPr>
           <a:xfrm>
-            <a:off x="10195478" y="2085011"/>
-            <a:ext cx="1576583" cy="284435"/>
+            <a:off x="10271475" y="2065964"/>
+            <a:ext cx="1424588" cy="462207"/>
           </a:xfrm>
           <a:prstGeom prst="rect">
             <a:avLst/>
@@ -12028,62 +11957,27 @@
           <a:p>
             <a:pPr algn="ctr"/>
             <a:r>
-              <a:rPr sz="1600" b="1">
+              <a:rPr sz="2600" b="1">
                 <a:solidFill>
                   <a:srgbClr val="1D4ED8"/>
                 </a:solidFill>
                 <a:latin typeface="Malgun Gothic"/>
               </a:rPr>
-              <a:t>약 6.7시간</a:t>
+              <a:t>7시간</a:t>
             </a:r>
           </a:p>
         </p:txBody>
       </p:sp>
       <p:sp>
         <p:nvSpPr>
-          <p:cNvPr id="43" name="TextBox 42"/>
+          <p:cNvPr id="41" name="TextBox 40"/>
           <p:cNvSpPr txBox="1"/>
           <p:nvPr/>
         </p:nvSpPr>
         <p:spPr>
           <a:xfrm>
-            <a:off x="10743777" y="3415444"/>
-            <a:ext cx="479984" cy="186660"/>
-          </a:xfrm>
-          <a:prstGeom prst="rect">
-            <a:avLst/>
-          </a:prstGeom>
-          <a:noFill/>
-        </p:spPr>
-        <p:txBody>
-          <a:bodyPr wrap="none" lIns="0" rIns="0" tIns="0" bIns="0" anchor="t">
-            <a:spAutoFit/>
-          </a:bodyPr>
-          <a:lstStyle/>
-          <a:p>
-            <a:pPr algn="ctr"/>
-            <a:r>
-              <a:rPr sz="1050" b="1">
-                <a:solidFill>
-                  <a:srgbClr val="1D4ED8"/>
-                </a:solidFill>
-                <a:latin typeface="Malgun Gothic"/>
-              </a:rPr>
-              <a:t>회수</a:t>
-            </a:r>
-          </a:p>
-        </p:txBody>
-      </p:sp>
-      <p:sp>
-        <p:nvSpPr>
-          <p:cNvPr id="44" name="TextBox 43"/>
-          <p:cNvSpPr txBox="1"/>
-          <p:nvPr/>
-        </p:nvSpPr>
-        <p:spPr>
-          <a:xfrm>
-            <a:off x="10235984" y="3623374"/>
-            <a:ext cx="1495570" cy="231103"/>
+            <a:off x="10402296" y="3420206"/>
+            <a:ext cx="1162946" cy="231103"/>
           </a:xfrm>
           <a:prstGeom prst="rect">
             <a:avLst/>
@@ -12104,21 +11998,21 @@
                 </a:solidFill>
                 <a:latin typeface="Malgun Gothic"/>
               </a:rPr>
-              <a:t>약 27시간/주</a:t>
+              <a:t>27시간/주</a:t>
             </a:r>
           </a:p>
         </p:txBody>
       </p:sp>
       <p:sp>
         <p:nvSpPr>
-          <p:cNvPr id="45" name="TextBox 44"/>
+          <p:cNvPr id="42" name="TextBox 41"/>
           <p:cNvSpPr txBox="1"/>
           <p:nvPr/>
         </p:nvSpPr>
         <p:spPr>
           <a:xfrm>
-            <a:off x="9833553" y="5689021"/>
-            <a:ext cx="2300433" cy="168883"/>
+            <a:off x="10686636" y="3648770"/>
+            <a:ext cx="594266" cy="231103"/>
           </a:xfrm>
           <a:prstGeom prst="rect">
             <a:avLst/>
@@ -12133,27 +12027,27 @@
           <a:p>
             <a:pPr algn="ctr"/>
             <a:r>
-              <a:rPr sz="950" b="0">
+              <a:rPr sz="1300" b="1">
                 <a:solidFill>
                   <a:srgbClr val="1D4ED8"/>
                 </a:solidFill>
                 <a:latin typeface="Malgun Gothic"/>
               </a:rPr>
-              <a:t>After · 400건 × 1분 (가정)</a:t>
+              <a:t>회수</a:t>
             </a:r>
           </a:p>
         </p:txBody>
       </p:sp>
       <p:sp>
         <p:nvSpPr>
-          <p:cNvPr id="46" name="TextBox 45"/>
+          <p:cNvPr id="43" name="TextBox 42"/>
           <p:cNvSpPr txBox="1"/>
           <p:nvPr/>
         </p:nvSpPr>
         <p:spPr>
           <a:xfrm>
-            <a:off x="7207575" y="5949647"/>
-            <a:ext cx="5774669" cy="159994"/>
+            <a:off x="9991421" y="5427125"/>
+            <a:ext cx="1984697" cy="213326"/>
           </a:xfrm>
           <a:prstGeom prst="rect">
             <a:avLst/>
@@ -12168,27 +12062,62 @@
           <a:p>
             <a:pPr algn="ctr"/>
             <a:r>
-              <a:rPr sz="900" b="0">
+              <a:rPr sz="1200" b="0">
+                <a:solidFill>
+                  <a:srgbClr val="1D4ED8"/>
+                </a:solidFill>
+                <a:latin typeface="Malgun Gothic"/>
+              </a:rPr>
+              <a:t>After · 1분 × 400</a:t>
+            </a:r>
+          </a:p>
+        </p:txBody>
+      </p:sp>
+      <p:sp>
+        <p:nvSpPr>
+          <p:cNvPr id="44" name="TextBox 43"/>
+          <p:cNvSpPr txBox="1"/>
+          <p:nvPr/>
+        </p:nvSpPr>
+        <p:spPr>
+          <a:xfrm>
+            <a:off x="8417821" y="5771241"/>
+            <a:ext cx="3354176" cy="177772"/>
+          </a:xfrm>
+          <a:prstGeom prst="rect">
+            <a:avLst/>
+          </a:prstGeom>
+          <a:noFill/>
+        </p:spPr>
+        <p:txBody>
+          <a:bodyPr wrap="none" lIns="0" rIns="0" tIns="0" bIns="0" anchor="t">
+            <a:spAutoFit/>
+          </a:bodyPr>
+          <a:lstStyle/>
+          <a:p>
+            <a:pPr algn="ctr"/>
+            <a:r>
+              <a:rPr sz="1000" b="0">
                 <a:solidFill>
                   <a:srgbClr val="4B5563"/>
                 </a:solidFill>
                 <a:latin typeface="Malgun Gothic"/>
               </a:rPr>
-              <a:t>≈ WAFER 약 100장/주 (장당 15분) · 장비 약 0.2대 = Capex 약 4~5억 원 절감</a:t>
+              <a:t>≈ 웨이퍼 100장/주 · Capex 약 4~5억 원</a:t>
             </a:r>
           </a:p>
         </p:txBody>
       </p:sp>
       <p:sp>
         <p:nvSpPr>
-          <p:cNvPr id="47" name="TextBox 46"/>
+          <p:cNvPr id="45" name="TextBox 44"/>
           <p:cNvSpPr txBox="1"/>
           <p:nvPr/>
         </p:nvSpPr>
         <p:spPr>
           <a:xfrm>
-            <a:off x="1510331" y="6419473"/>
-            <a:ext cx="9169416" cy="159994"/>
+            <a:off x="2478332" y="6342651"/>
+            <a:ext cx="7233415" cy="177772"/>
           </a:xfrm>
           <a:prstGeom prst="rect">
             <a:avLst/>
@@ -12203,13 +12132,13 @@
           <a:p>
             <a:pPr algn="ctr"/>
             <a:r>
-              <a:rPr sz="900" b="0">
+              <a:rPr sz="1000" b="0">
                 <a:solidFill>
                   <a:srgbClr val="6B7280"/>
                 </a:solidFill>
                 <a:latin typeface="Malgun Gothic"/>
               </a:rPr>
-              <a:t>그 외 [검증]: 화면 버튼 인식+클릭 500회 99% · VLM·OCR 5종 비교 → 2종 상시 운영 · 실장비 없이 도는 자동 테스트 1,207개</a:t>
+              <a:t>그 외 [검증] : 화면 버튼 인식+클릭 500회 99% · 실장비 없이 도는 자동 테스트 1,207개</a:t>
             </a:r>
           </a:p>
         </p:txBody>

--- a/docs/project_progress/img/07/07_slides.pptx
+++ b/docs/project_progress/img/07/07_slides.pptx
@@ -5626,8 +5626,8 @@
         </p:nvSpPr>
         <p:spPr>
           <a:xfrm>
-            <a:off x="2293766" y="5160467"/>
-            <a:ext cx="1380526" cy="213326"/>
+            <a:off x="1986729" y="5160467"/>
+            <a:ext cx="1994601" cy="213326"/>
           </a:xfrm>
           <a:prstGeom prst="rect">
             <a:avLst/>
@@ -5648,7 +5648,7 @@
                 </a:solidFill>
                 <a:latin typeface="Malgun Gothic"/>
               </a:rPr>
-              <a:t>AI 가 물러남</a:t>
+              <a:t>AI 가 처리 안될 때</a:t>
             </a:r>
           </a:p>
         </p:txBody>

--- a/docs/project_progress/img/07/07_slides.pptx
+++ b/docs/project_progress/img/07/07_slides.pptx
@@ -4386,11 +4386,11 @@
         <p:spPr>
           <a:xfrm>
             <a:off x="253960" y="3466554"/>
-            <a:ext cx="11682160" cy="2730070"/>
+            <a:ext cx="11682160" cy="2793560"/>
           </a:xfrm>
           <a:prstGeom prst="roundRect">
             <a:avLst>
-              <a:gd name="adj" fmla="val 3720"/>
+              <a:gd name="adj" fmla="val 3636"/>
             </a:avLst>
           </a:prstGeom>
           <a:solidFill>
@@ -6341,8 +6341,8 @@
         </p:nvSpPr>
         <p:spPr>
           <a:xfrm>
-            <a:off x="1474872" y="5859492"/>
-            <a:ext cx="9037166" cy="195549"/>
+            <a:off x="812100" y="5808700"/>
+            <a:ext cx="10362710" cy="195549"/>
           </a:xfrm>
           <a:prstGeom prst="rect">
             <a:avLst/>
@@ -6363,7 +6363,7 @@
                 </a:solidFill>
                 <a:latin typeface="Malgun Gothic"/>
               </a:rPr>
-              <a:t>안전 원칙 : 확인 안 된 클릭은 나가지 않는다 · 담당자가 개입하면 자동화가 양보 · 긴급 중단 단축키</a:t>
+              <a:t>안전 원칙 : 확인 안 되면 VLM 이 확정하지 않고 엔지니어에게 인폼 및 작업 요청 (녹화를 위해 추후 개선 루프 발동)</a:t>
             </a:r>
           </a:p>
         </p:txBody>
@@ -6371,6 +6371,41 @@
       <p:sp>
         <p:nvSpPr>
           <p:cNvPr id="80" name="TextBox 79"/>
+          <p:cNvSpPr txBox="1"/>
+          <p:nvPr/>
+        </p:nvSpPr>
+        <p:spPr>
+          <a:xfrm>
+            <a:off x="3617533" y="5999170"/>
+            <a:ext cx="4751845" cy="195549"/>
+          </a:xfrm>
+          <a:prstGeom prst="rect">
+            <a:avLst/>
+          </a:prstGeom>
+          <a:noFill/>
+        </p:spPr>
+        <p:txBody>
+          <a:bodyPr wrap="none" lIns="0" rIns="0" tIns="0" bIns="0" anchor="t">
+            <a:spAutoFit/>
+          </a:bodyPr>
+          <a:lstStyle/>
+          <a:p>
+            <a:pPr algn="ctr"/>
+            <a:r>
+              <a:rPr sz="1100" b="0">
+                <a:solidFill>
+                  <a:srgbClr val="1E3A8A"/>
+                </a:solidFill>
+                <a:latin typeface="Malgun Gothic"/>
+              </a:rPr>
+              <a:t>담당자가 개입하면 자동화가 양보 · 긴급 중단 단축키</a:t>
+            </a:r>
+          </a:p>
+        </p:txBody>
+      </p:sp>
+      <p:sp>
+        <p:nvSpPr>
+          <p:cNvPr id="81" name="TextBox 80"/>
           <p:cNvSpPr txBox="1"/>
           <p:nvPr/>
         </p:nvSpPr>
@@ -10372,8 +10407,8 @@
         </p:nvSpPr>
         <p:spPr>
           <a:xfrm>
-            <a:off x="86092" y="5414427"/>
-            <a:ext cx="12017895" cy="213326"/>
+            <a:off x="-1439191" y="5414427"/>
+            <a:ext cx="15068462" cy="213326"/>
           </a:xfrm>
           <a:prstGeom prst="rect">
             <a:avLst/>
@@ -10394,7 +10429,7 @@
                 </a:solidFill>
                 <a:latin typeface="Malgun Gothic"/>
               </a:rPr>
-              <a:t>① VLM 의 답이 낮은 CV 점수를 덮지 못한다   ② 확인 안 된 클릭은 나가지 않는다   ③ 되돌릴 수 없는 확정(OK) 은 담당자가</a:t>
+              <a:t>① VLM 의 답이 낮은 CV 점수를 덮지 못한다   ② 확인 안 되면 VLM 이 확정하지 않고 엔지니어에게 인폼·작업 요청   ③ 되돌릴 수 없는 확정(OK) 은 담당자가</a:t>
             </a:r>
           </a:p>
         </p:txBody>

--- a/docs/project_progress/img/07/07_slides.pptx
+++ b/docs/project_progress/img/07/07_slides.pptx
@@ -12225,7 +12225,2670 @@
                 </a:solidFill>
                 <a:latin typeface="Malgun Gothic"/>
               </a:rPr>
-              <a:t>1. 사례 요약</a:t>
+              <a:t>2.2 AI 적용 과정과 구현한 기능</a:t>
+            </a:r>
+          </a:p>
+        </p:txBody>
+      </p:sp>
+      <p:sp>
+        <p:nvSpPr>
+          <p:cNvPr id="3" name="Rectangle 2"/>
+          <p:cNvSpPr/>
+          <p:nvPr/>
+        </p:nvSpPr>
+        <p:spPr>
+          <a:xfrm>
+            <a:off x="457200" y="914400"/>
+            <a:ext cx="11277295" cy="25400"/>
+          </a:xfrm>
+          <a:prstGeom prst="rect">
+            <a:avLst/>
+          </a:prstGeom>
+          <a:solidFill>
+            <a:srgbClr val="1E3A8A"/>
+          </a:solidFill>
+          <a:ln>
+            <a:noFill/>
+          </a:ln>
+          <a:effectLst/>
+        </p:spPr>
+        <p:style>
+          <a:lnRef idx="1">
+            <a:schemeClr val="accent1"/>
+          </a:lnRef>
+          <a:fillRef idx="3">
+            <a:schemeClr val="accent1"/>
+          </a:fillRef>
+          <a:effectRef idx="2">
+            <a:schemeClr val="accent1"/>
+          </a:effectRef>
+          <a:fontRef idx="minor">
+            <a:schemeClr val="lt1"/>
+          </a:fontRef>
+        </p:style>
+        <p:txBody>
+          <a:bodyPr rtlCol="0" anchor="ctr"/>
+          <a:lstStyle/>
+          <a:p>
+            <a:pPr algn="ctr"/>
+          </a:p>
+        </p:txBody>
+      </p:sp>
+      <p:graphicFrame>
+        <p:nvGraphicFramePr>
+          <p:cNvPr id="4" name="Table 3"/>
+          <p:cNvGraphicFramePr>
+            <a:graphicFrameLocks noGrp="1"/>
+          </p:cNvGraphicFramePr>
+          <p:nvPr/>
+        </p:nvGraphicFramePr>
+        <p:xfrm>
+          <a:off x="457200" y="1097280"/>
+          <a:ext cx="11277294" cy="2926080"/>
+        </p:xfrm>
+        <a:graphic>
+          <a:graphicData uri="http://schemas.openxmlformats.org/drawingml/2006/table">
+            <a:tbl>
+              <a:tblPr firstRow="1" bandRow="0">
+                <a:tableStyleId>{5C22544A-7EE6-4342-B048-85BDC9FD1C3A}</a:tableStyleId>
+              </a:tblPr>
+              <a:tblGrid>
+                <a:gridCol w="1879549"/>
+                <a:gridCol w="9397745"/>
+              </a:tblGrid>
+              <a:tr h="365760">
+                <a:tc>
+                  <a:txBody>
+                    <a:bodyPr wrap="square"/>
+                    <a:lstStyle/>
+                    <a:p>
+                      <a:r>
+                        <a:rPr sz="1350" b="1">
+                          <a:solidFill>
+                            <a:srgbClr val="FFFFFF"/>
+                          </a:solidFill>
+                          <a:latin typeface="Malgun Gothic"/>
+                        </a:rPr>
+                        <a:t>기능</a:t>
+                      </a:r>
+                    </a:p>
+                  </a:txBody>
+                  <a:tcPr marL="88900" marR="88900" marT="63500" marB="63500" anchor="ctr">
+                    <a:lnL w="9525" cap="flat" cmpd="sng" algn="ctr">
+                      <a:solidFill>
+                        <a:srgbClr val="D0D7DE"/>
+                      </a:solidFill>
+                      <a:prstDash val="solid"/>
+                    </a:lnL>
+                    <a:lnR w="9525" cap="flat" cmpd="sng" algn="ctr">
+                      <a:solidFill>
+                        <a:srgbClr val="D0D7DE"/>
+                      </a:solidFill>
+                      <a:prstDash val="solid"/>
+                    </a:lnR>
+                    <a:lnT w="9525" cap="flat" cmpd="sng" algn="ctr">
+                      <a:solidFill>
+                        <a:srgbClr val="D0D7DE"/>
+                      </a:solidFill>
+                      <a:prstDash val="solid"/>
+                    </a:lnT>
+                    <a:lnB w="9525" cap="flat" cmpd="sng" algn="ctr">
+                      <a:solidFill>
+                        <a:srgbClr val="D0D7DE"/>
+                      </a:solidFill>
+                      <a:prstDash val="solid"/>
+                    </a:lnB>
+                    <a:solidFill>
+                      <a:srgbClr val="1E3A8A"/>
+                    </a:solidFill>
+                  </a:tcPr>
+                </a:tc>
+                <a:tc>
+                  <a:txBody>
+                    <a:bodyPr wrap="square"/>
+                    <a:lstStyle/>
+                    <a:p>
+                      <a:r>
+                        <a:rPr sz="1350" b="1">
+                          <a:solidFill>
+                            <a:srgbClr val="FFFFFF"/>
+                          </a:solidFill>
+                          <a:latin typeface="Malgun Gothic"/>
+                        </a:rPr>
+                        <a:t>구현 내용</a:t>
+                      </a:r>
+                    </a:p>
+                  </a:txBody>
+                  <a:tcPr marL="88900" marR="88900" marT="63500" marB="63500" anchor="ctr">
+                    <a:lnL w="9525" cap="flat" cmpd="sng" algn="ctr">
+                      <a:solidFill>
+                        <a:srgbClr val="D0D7DE"/>
+                      </a:solidFill>
+                      <a:prstDash val="solid"/>
+                    </a:lnL>
+                    <a:lnR w="9525" cap="flat" cmpd="sng" algn="ctr">
+                      <a:solidFill>
+                        <a:srgbClr val="D0D7DE"/>
+                      </a:solidFill>
+                      <a:prstDash val="solid"/>
+                    </a:lnR>
+                    <a:lnT w="9525" cap="flat" cmpd="sng" algn="ctr">
+                      <a:solidFill>
+                        <a:srgbClr val="D0D7DE"/>
+                      </a:solidFill>
+                      <a:prstDash val="solid"/>
+                    </a:lnT>
+                    <a:lnB w="9525" cap="flat" cmpd="sng" algn="ctr">
+                      <a:solidFill>
+                        <a:srgbClr val="D0D7DE"/>
+                      </a:solidFill>
+                      <a:prstDash val="solid"/>
+                    </a:lnB>
+                    <a:solidFill>
+                      <a:srgbClr val="1E3A8A"/>
+                    </a:solidFill>
+                  </a:tcPr>
+                </a:tc>
+              </a:tr>
+              <a:tr h="365760">
+                <a:tc>
+                  <a:txBody>
+                    <a:bodyPr wrap="square"/>
+                    <a:lstStyle/>
+                    <a:p>
+                      <a:r>
+                        <a:rPr sz="1300" b="0">
+                          <a:solidFill>
+                            <a:srgbClr val="1F2328"/>
+                          </a:solidFill>
+                          <a:latin typeface="Malgun Gothic"/>
+                        </a:rPr>
+                        <a:t>알람 감지·사전 고지</a:t>
+                      </a:r>
+                    </a:p>
+                  </a:txBody>
+                  <a:tcPr marL="88900" marR="88900" marT="63500" marB="63500" anchor="ctr">
+                    <a:lnL w="9525" cap="flat" cmpd="sng" algn="ctr">
+                      <a:solidFill>
+                        <a:srgbClr val="D0D7DE"/>
+                      </a:solidFill>
+                      <a:prstDash val="solid"/>
+                    </a:lnL>
+                    <a:lnR w="9525" cap="flat" cmpd="sng" algn="ctr">
+                      <a:solidFill>
+                        <a:srgbClr val="D0D7DE"/>
+                      </a:solidFill>
+                      <a:prstDash val="solid"/>
+                    </a:lnR>
+                    <a:lnT w="9525" cap="flat" cmpd="sng" algn="ctr">
+                      <a:solidFill>
+                        <a:srgbClr val="D0D7DE"/>
+                      </a:solidFill>
+                      <a:prstDash val="solid"/>
+                    </a:lnT>
+                    <a:lnB w="9525" cap="flat" cmpd="sng" algn="ctr">
+                      <a:solidFill>
+                        <a:srgbClr val="D0D7DE"/>
+                      </a:solidFill>
+                      <a:prstDash val="solid"/>
+                    </a:lnB>
+                    <a:solidFill>
+                      <a:srgbClr val="FFFFFF"/>
+                    </a:solidFill>
+                  </a:tcPr>
+                </a:tc>
+                <a:tc>
+                  <a:txBody>
+                    <a:bodyPr wrap="square"/>
+                    <a:lstStyle/>
+                    <a:p>
+                      <a:r>
+                        <a:rPr sz="1300" b="0">
+                          <a:solidFill>
+                            <a:srgbClr val="1F2328"/>
+                          </a:solidFill>
+                          <a:latin typeface="Malgun Gothic"/>
+                        </a:rPr>
+                        <a:t>10초 주기로 알람을 조회해 Align Fail만 선별, 신규 발생 시 1회 발동. 담당자에게 "AI 가 대응 시작" 큐브 알림</a:t>
+                      </a:r>
+                    </a:p>
+                  </a:txBody>
+                  <a:tcPr marL="88900" marR="88900" marT="63500" marB="63500" anchor="ctr">
+                    <a:lnL w="9525" cap="flat" cmpd="sng" algn="ctr">
+                      <a:solidFill>
+                        <a:srgbClr val="D0D7DE"/>
+                      </a:solidFill>
+                      <a:prstDash val="solid"/>
+                    </a:lnL>
+                    <a:lnR w="9525" cap="flat" cmpd="sng" algn="ctr">
+                      <a:solidFill>
+                        <a:srgbClr val="D0D7DE"/>
+                      </a:solidFill>
+                      <a:prstDash val="solid"/>
+                    </a:lnR>
+                    <a:lnT w="9525" cap="flat" cmpd="sng" algn="ctr">
+                      <a:solidFill>
+                        <a:srgbClr val="D0D7DE"/>
+                      </a:solidFill>
+                      <a:prstDash val="solid"/>
+                    </a:lnT>
+                    <a:lnB w="9525" cap="flat" cmpd="sng" algn="ctr">
+                      <a:solidFill>
+                        <a:srgbClr val="D0D7DE"/>
+                      </a:solidFill>
+                      <a:prstDash val="solid"/>
+                    </a:lnB>
+                    <a:solidFill>
+                      <a:srgbClr val="FFFFFF"/>
+                    </a:solidFill>
+                  </a:tcPr>
+                </a:tc>
+              </a:tr>
+              <a:tr h="365760">
+                <a:tc>
+                  <a:txBody>
+                    <a:bodyPr wrap="square"/>
+                    <a:lstStyle/>
+                    <a:p>
+                      <a:r>
+                        <a:rPr sz="1300" b="0">
+                          <a:solidFill>
+                            <a:srgbClr val="1F2328"/>
+                          </a:solidFill>
+                          <a:latin typeface="Malgun Gothic"/>
+                        </a:rPr>
+                        <a:t>RCS 자동 접속</a:t>
+                      </a:r>
+                    </a:p>
+                  </a:txBody>
+                  <a:tcPr marL="88900" marR="88900" marT="63500" marB="63500" anchor="ctr">
+                    <a:lnL w="9525" cap="flat" cmpd="sng" algn="ctr">
+                      <a:solidFill>
+                        <a:srgbClr val="D0D7DE"/>
+                      </a:solidFill>
+                      <a:prstDash val="solid"/>
+                    </a:lnL>
+                    <a:lnR w="9525" cap="flat" cmpd="sng" algn="ctr">
+                      <a:solidFill>
+                        <a:srgbClr val="D0D7DE"/>
+                      </a:solidFill>
+                      <a:prstDash val="solid"/>
+                    </a:lnR>
+                    <a:lnT w="9525" cap="flat" cmpd="sng" algn="ctr">
+                      <a:solidFill>
+                        <a:srgbClr val="D0D7DE"/>
+                      </a:solidFill>
+                      <a:prstDash val="solid"/>
+                    </a:lnT>
+                    <a:lnB w="9525" cap="flat" cmpd="sng" algn="ctr">
+                      <a:solidFill>
+                        <a:srgbClr val="D0D7DE"/>
+                      </a:solidFill>
+                      <a:prstDash val="solid"/>
+                    </a:lnB>
+                    <a:solidFill>
+                      <a:srgbClr val="F6F8FA"/>
+                    </a:solidFill>
+                  </a:tcPr>
+                </a:tc>
+                <a:tc>
+                  <a:txBody>
+                    <a:bodyPr wrap="square"/>
+                    <a:lstStyle/>
+                    <a:p>
+                      <a:r>
+                        <a:rPr sz="1300" b="0">
+                          <a:solidFill>
+                            <a:srgbClr val="1F2328"/>
+                          </a:solidFill>
+                          <a:latin typeface="Malgun Gothic"/>
+                        </a:rPr>
+                        <a:t>RCS 실행·로그인·장비 목록에서 알람 장비 선택·접속. RCS가 꺼져 있거나 로그아웃 상태면 재실행·재로그인</a:t>
+                      </a:r>
+                    </a:p>
+                  </a:txBody>
+                  <a:tcPr marL="88900" marR="88900" marT="63500" marB="63500" anchor="ctr">
+                    <a:lnL w="9525" cap="flat" cmpd="sng" algn="ctr">
+                      <a:solidFill>
+                        <a:srgbClr val="D0D7DE"/>
+                      </a:solidFill>
+                      <a:prstDash val="solid"/>
+                    </a:lnL>
+                    <a:lnR w="9525" cap="flat" cmpd="sng" algn="ctr">
+                      <a:solidFill>
+                        <a:srgbClr val="D0D7DE"/>
+                      </a:solidFill>
+                      <a:prstDash val="solid"/>
+                    </a:lnR>
+                    <a:lnT w="9525" cap="flat" cmpd="sng" algn="ctr">
+                      <a:solidFill>
+                        <a:srgbClr val="D0D7DE"/>
+                      </a:solidFill>
+                      <a:prstDash val="solid"/>
+                    </a:lnT>
+                    <a:lnB w="9525" cap="flat" cmpd="sng" algn="ctr">
+                      <a:solidFill>
+                        <a:srgbClr val="D0D7DE"/>
+                      </a:solidFill>
+                      <a:prstDash val="solid"/>
+                    </a:lnB>
+                    <a:solidFill>
+                      <a:srgbClr val="F6F8FA"/>
+                    </a:solidFill>
+                  </a:tcPr>
+                </a:tc>
+              </a:tr>
+              <a:tr h="365760">
+                <a:tc>
+                  <a:txBody>
+                    <a:bodyPr wrap="square"/>
+                    <a:lstStyle/>
+                    <a:p>
+                      <a:r>
+                        <a:rPr sz="1300" b="0">
+                          <a:solidFill>
+                            <a:srgbClr val="1F2328"/>
+                          </a:solidFill>
+                          <a:latin typeface="Malgun Gothic"/>
+                        </a:rPr>
+                        <a:t>화면 판독</a:t>
+                      </a:r>
+                    </a:p>
+                  </a:txBody>
+                  <a:tcPr marL="88900" marR="88900" marT="63500" marB="63500" anchor="ctr">
+                    <a:lnL w="9525" cap="flat" cmpd="sng" algn="ctr">
+                      <a:solidFill>
+                        <a:srgbClr val="D0D7DE"/>
+                      </a:solidFill>
+                      <a:prstDash val="solid"/>
+                    </a:lnL>
+                    <a:lnR w="9525" cap="flat" cmpd="sng" algn="ctr">
+                      <a:solidFill>
+                        <a:srgbClr val="D0D7DE"/>
+                      </a:solidFill>
+                      <a:prstDash val="solid"/>
+                    </a:lnR>
+                    <a:lnT w="9525" cap="flat" cmpd="sng" algn="ctr">
+                      <a:solidFill>
+                        <a:srgbClr val="D0D7DE"/>
+                      </a:solidFill>
+                      <a:prstDash val="solid"/>
+                    </a:lnT>
+                    <a:lnB w="9525" cap="flat" cmpd="sng" algn="ctr">
+                      <a:solidFill>
+                        <a:srgbClr val="D0D7DE"/>
+                      </a:solidFill>
+                      <a:prstDash val="solid"/>
+                    </a:lnB>
+                    <a:solidFill>
+                      <a:srgbClr val="FFFFFF"/>
+                    </a:solidFill>
+                  </a:tcPr>
+                </a:tc>
+                <a:tc>
+                  <a:txBody>
+                    <a:bodyPr wrap="square"/>
+                    <a:lstStyle/>
+                    <a:p>
+                      <a:r>
+                        <a:rPr sz="1300" b="0">
+                          <a:solidFill>
+                            <a:srgbClr val="1F2328"/>
+                          </a:solidFill>
+                          <a:latin typeface="Malgun Gothic"/>
+                        </a:rPr>
+                        <a:t>라이브 SEM 영역 검출, 촬영 모드(OM/SEM) 판독, 타인 점유 여부 판별</a:t>
+                      </a:r>
+                    </a:p>
+                  </a:txBody>
+                  <a:tcPr marL="88900" marR="88900" marT="63500" marB="63500" anchor="ctr">
+                    <a:lnL w="9525" cap="flat" cmpd="sng" algn="ctr">
+                      <a:solidFill>
+                        <a:srgbClr val="D0D7DE"/>
+                      </a:solidFill>
+                      <a:prstDash val="solid"/>
+                    </a:lnL>
+                    <a:lnR w="9525" cap="flat" cmpd="sng" algn="ctr">
+                      <a:solidFill>
+                        <a:srgbClr val="D0D7DE"/>
+                      </a:solidFill>
+                      <a:prstDash val="solid"/>
+                    </a:lnR>
+                    <a:lnT w="9525" cap="flat" cmpd="sng" algn="ctr">
+                      <a:solidFill>
+                        <a:srgbClr val="D0D7DE"/>
+                      </a:solidFill>
+                      <a:prstDash val="solid"/>
+                    </a:lnT>
+                    <a:lnB w="9525" cap="flat" cmpd="sng" algn="ctr">
+                      <a:solidFill>
+                        <a:srgbClr val="D0D7DE"/>
+                      </a:solidFill>
+                      <a:prstDash val="solid"/>
+                    </a:lnB>
+                    <a:solidFill>
+                      <a:srgbClr val="FFFFFF"/>
+                    </a:solidFill>
+                  </a:tcPr>
+                </a:tc>
+              </a:tr>
+              <a:tr h="365760">
+                <a:tc>
+                  <a:txBody>
+                    <a:bodyPr wrap="square"/>
+                    <a:lstStyle/>
+                    <a:p>
+                      <a:r>
+                        <a:rPr sz="1300" b="0">
+                          <a:solidFill>
+                            <a:srgbClr val="1F2328"/>
+                          </a:solidFill>
+                          <a:latin typeface="Malgun Gothic"/>
+                        </a:rPr>
+                        <a:t>자동 재정렬</a:t>
+                      </a:r>
+                    </a:p>
+                  </a:txBody>
+                  <a:tcPr marL="88900" marR="88900" marT="63500" marB="63500" anchor="ctr">
+                    <a:lnL w="9525" cap="flat" cmpd="sng" algn="ctr">
+                      <a:solidFill>
+                        <a:srgbClr val="D0D7DE"/>
+                      </a:solidFill>
+                      <a:prstDash val="solid"/>
+                    </a:lnL>
+                    <a:lnR w="9525" cap="flat" cmpd="sng" algn="ctr">
+                      <a:solidFill>
+                        <a:srgbClr val="D0D7DE"/>
+                      </a:solidFill>
+                      <a:prstDash val="solid"/>
+                    </a:lnR>
+                    <a:lnT w="9525" cap="flat" cmpd="sng" algn="ctr">
+                      <a:solidFill>
+                        <a:srgbClr val="D0D7DE"/>
+                      </a:solidFill>
+                      <a:prstDash val="solid"/>
+                    </a:lnT>
+                    <a:lnB w="9525" cap="flat" cmpd="sng" algn="ctr">
+                      <a:solidFill>
+                        <a:srgbClr val="D0D7DE"/>
+                      </a:solidFill>
+                      <a:prstDash val="solid"/>
+                    </a:lnB>
+                    <a:solidFill>
+                      <a:srgbClr val="F6F8FA"/>
+                    </a:solidFill>
+                  </a:tcPr>
+                </a:tc>
+                <a:tc>
+                  <a:txBody>
+                    <a:bodyPr wrap="square"/>
+                    <a:lstStyle/>
+                    <a:p>
+                      <a:r>
+                        <a:rPr sz="1300" b="0">
+                          <a:solidFill>
+                            <a:srgbClr val="1F2328"/>
+                          </a:solidFill>
+                          <a:latin typeface="Malgun Gothic"/>
+                        </a:rPr>
+                        <a:t>모드에 맞는 기준 이미지(성공 사례 종합, 부족하면 등록 이미지)로 CV 매칭 → 재정렬 좌표 산출 → 화면 재조정. 첫 화면에서 못 찾으면 배율을 낮춰 주변을 격자 탐색</a:t>
+                      </a:r>
+                    </a:p>
+                  </a:txBody>
+                  <a:tcPr marL="88900" marR="88900" marT="63500" marB="63500" anchor="ctr">
+                    <a:lnL w="9525" cap="flat" cmpd="sng" algn="ctr">
+                      <a:solidFill>
+                        <a:srgbClr val="D0D7DE"/>
+                      </a:solidFill>
+                      <a:prstDash val="solid"/>
+                    </a:lnL>
+                    <a:lnR w="9525" cap="flat" cmpd="sng" algn="ctr">
+                      <a:solidFill>
+                        <a:srgbClr val="D0D7DE"/>
+                      </a:solidFill>
+                      <a:prstDash val="solid"/>
+                    </a:lnR>
+                    <a:lnT w="9525" cap="flat" cmpd="sng" algn="ctr">
+                      <a:solidFill>
+                        <a:srgbClr val="D0D7DE"/>
+                      </a:solidFill>
+                      <a:prstDash val="solid"/>
+                    </a:lnT>
+                    <a:lnB w="9525" cap="flat" cmpd="sng" algn="ctr">
+                      <a:solidFill>
+                        <a:srgbClr val="D0D7DE"/>
+                      </a:solidFill>
+                      <a:prstDash val="solid"/>
+                    </a:lnB>
+                    <a:solidFill>
+                      <a:srgbClr val="F6F8FA"/>
+                    </a:solidFill>
+                  </a:tcPr>
+                </a:tc>
+              </a:tr>
+              <a:tr h="365760">
+                <a:tc>
+                  <a:txBody>
+                    <a:bodyPr wrap="square"/>
+                    <a:lstStyle/>
+                    <a:p>
+                      <a:r>
+                        <a:rPr sz="1300" b="0">
+                          <a:solidFill>
+                            <a:srgbClr val="1F2328"/>
+                          </a:solidFill>
+                          <a:latin typeface="Malgun Gothic"/>
+                        </a:rPr>
+                        <a:t>확정·완료 감시·종료</a:t>
+                      </a:r>
+                    </a:p>
+                  </a:txBody>
+                  <a:tcPr marL="88900" marR="88900" marT="63500" marB="63500" anchor="ctr">
+                    <a:lnL w="9525" cap="flat" cmpd="sng" algn="ctr">
+                      <a:solidFill>
+                        <a:srgbClr val="D0D7DE"/>
+                      </a:solidFill>
+                      <a:prstDash val="solid"/>
+                    </a:lnL>
+                    <a:lnR w="9525" cap="flat" cmpd="sng" algn="ctr">
+                      <a:solidFill>
+                        <a:srgbClr val="D0D7DE"/>
+                      </a:solidFill>
+                      <a:prstDash val="solid"/>
+                    </a:lnR>
+                    <a:lnT w="9525" cap="flat" cmpd="sng" algn="ctr">
+                      <a:solidFill>
+                        <a:srgbClr val="D0D7DE"/>
+                      </a:solidFill>
+                      <a:prstDash val="solid"/>
+                    </a:lnT>
+                    <a:lnB w="9525" cap="flat" cmpd="sng" algn="ctr">
+                      <a:solidFill>
+                        <a:srgbClr val="D0D7DE"/>
+                      </a:solidFill>
+                      <a:prstDash val="solid"/>
+                    </a:lnB>
+                    <a:solidFill>
+                      <a:srgbClr val="FFFFFF"/>
+                    </a:solidFill>
+                  </a:tcPr>
+                </a:tc>
+                <a:tc>
+                  <a:txBody>
+                    <a:bodyPr wrap="square"/>
+                    <a:lstStyle/>
+                    <a:p>
+                      <a:r>
+                        <a:rPr sz="1300" b="0">
+                          <a:solidFill>
+                            <a:srgbClr val="1F2328"/>
+                          </a:solidFill>
+                          <a:latin typeface="Malgun Gothic"/>
+                        </a:rPr>
+                        <a:t>재조정 결과 확정(현 단계 담당자 OK, 향후 Agent) → 측정 재개 감시 → tool 창 자동 종료</a:t>
+                      </a:r>
+                    </a:p>
+                  </a:txBody>
+                  <a:tcPr marL="88900" marR="88900" marT="63500" marB="63500" anchor="ctr">
+                    <a:lnL w="9525" cap="flat" cmpd="sng" algn="ctr">
+                      <a:solidFill>
+                        <a:srgbClr val="D0D7DE"/>
+                      </a:solidFill>
+                      <a:prstDash val="solid"/>
+                    </a:lnL>
+                    <a:lnR w="9525" cap="flat" cmpd="sng" algn="ctr">
+                      <a:solidFill>
+                        <a:srgbClr val="D0D7DE"/>
+                      </a:solidFill>
+                      <a:prstDash val="solid"/>
+                    </a:lnR>
+                    <a:lnT w="9525" cap="flat" cmpd="sng" algn="ctr">
+                      <a:solidFill>
+                        <a:srgbClr val="D0D7DE"/>
+                      </a:solidFill>
+                      <a:prstDash val="solid"/>
+                    </a:lnT>
+                    <a:lnB w="9525" cap="flat" cmpd="sng" algn="ctr">
+                      <a:solidFill>
+                        <a:srgbClr val="D0D7DE"/>
+                      </a:solidFill>
+                      <a:prstDash val="solid"/>
+                    </a:lnB>
+                    <a:solidFill>
+                      <a:srgbClr val="FFFFFF"/>
+                    </a:solidFill>
+                  </a:tcPr>
+                </a:tc>
+              </a:tr>
+              <a:tr h="365760">
+                <a:tc>
+                  <a:txBody>
+                    <a:bodyPr wrap="square"/>
+                    <a:lstStyle/>
+                    <a:p>
+                      <a:r>
+                        <a:rPr sz="1300" b="0">
+                          <a:solidFill>
+                            <a:srgbClr val="1F2328"/>
+                          </a:solidFill>
+                          <a:latin typeface="Malgun Gothic"/>
+                        </a:rPr>
+                        <a:t>예외 알림</a:t>
+                      </a:r>
+                    </a:p>
+                  </a:txBody>
+                  <a:tcPr marL="88900" marR="88900" marT="63500" marB="63500" anchor="ctr">
+                    <a:lnL w="9525" cap="flat" cmpd="sng" algn="ctr">
+                      <a:solidFill>
+                        <a:srgbClr val="D0D7DE"/>
+                      </a:solidFill>
+                      <a:prstDash val="solid"/>
+                    </a:lnL>
+                    <a:lnR w="9525" cap="flat" cmpd="sng" algn="ctr">
+                      <a:solidFill>
+                        <a:srgbClr val="D0D7DE"/>
+                      </a:solidFill>
+                      <a:prstDash val="solid"/>
+                    </a:lnR>
+                    <a:lnT w="9525" cap="flat" cmpd="sng" algn="ctr">
+                      <a:solidFill>
+                        <a:srgbClr val="D0D7DE"/>
+                      </a:solidFill>
+                      <a:prstDash val="solid"/>
+                    </a:lnT>
+                    <a:lnB w="9525" cap="flat" cmpd="sng" algn="ctr">
+                      <a:solidFill>
+                        <a:srgbClr val="D0D7DE"/>
+                      </a:solidFill>
+                      <a:prstDash val="solid"/>
+                    </a:lnB>
+                    <a:solidFill>
+                      <a:srgbClr val="F6F8FA"/>
+                    </a:solidFill>
+                  </a:tcPr>
+                </a:tc>
+                <a:tc>
+                  <a:txBody>
+                    <a:bodyPr wrap="square"/>
+                    <a:lstStyle/>
+                    <a:p>
+                      <a:r>
+                        <a:rPr sz="1300" b="0">
+                          <a:solidFill>
+                            <a:srgbClr val="1F2328"/>
+                          </a:solidFill>
+                          <a:latin typeface="Malgun Gothic"/>
+                        </a:rPr>
+                        <a:t>보정 불가·모드 불명·위치 모호·타인 점유면 원인·요구 행동·매칭 점수를 담아 큐브 알림. 설정 문제와 Recipe 재등록 검토를 구분해 안내</a:t>
+                      </a:r>
+                    </a:p>
+                  </a:txBody>
+                  <a:tcPr marL="88900" marR="88900" marT="63500" marB="63500" anchor="ctr">
+                    <a:lnL w="9525" cap="flat" cmpd="sng" algn="ctr">
+                      <a:solidFill>
+                        <a:srgbClr val="D0D7DE"/>
+                      </a:solidFill>
+                      <a:prstDash val="solid"/>
+                    </a:lnL>
+                    <a:lnR w="9525" cap="flat" cmpd="sng" algn="ctr">
+                      <a:solidFill>
+                        <a:srgbClr val="D0D7DE"/>
+                      </a:solidFill>
+                      <a:prstDash val="solid"/>
+                    </a:lnR>
+                    <a:lnT w="9525" cap="flat" cmpd="sng" algn="ctr">
+                      <a:solidFill>
+                        <a:srgbClr val="D0D7DE"/>
+                      </a:solidFill>
+                      <a:prstDash val="solid"/>
+                    </a:lnT>
+                    <a:lnB w="9525" cap="flat" cmpd="sng" algn="ctr">
+                      <a:solidFill>
+                        <a:srgbClr val="D0D7DE"/>
+                      </a:solidFill>
+                      <a:prstDash val="solid"/>
+                    </a:lnB>
+                    <a:solidFill>
+                      <a:srgbClr val="F6F8FA"/>
+                    </a:solidFill>
+                  </a:tcPr>
+                </a:tc>
+              </a:tr>
+              <a:tr h="365760">
+                <a:tc>
+                  <a:txBody>
+                    <a:bodyPr wrap="square"/>
+                    <a:lstStyle/>
+                    <a:p>
+                      <a:r>
+                        <a:rPr sz="1300" b="0">
+                          <a:solidFill>
+                            <a:srgbClr val="1F2328"/>
+                          </a:solidFill>
+                          <a:latin typeface="Malgun Gothic"/>
+                        </a:rPr>
+                        <a:t>기록</a:t>
+                      </a:r>
+                    </a:p>
+                  </a:txBody>
+                  <a:tcPr marL="88900" marR="88900" marT="63500" marB="63500" anchor="ctr">
+                    <a:lnL w="9525" cap="flat" cmpd="sng" algn="ctr">
+                      <a:solidFill>
+                        <a:srgbClr val="D0D7DE"/>
+                      </a:solidFill>
+                      <a:prstDash val="solid"/>
+                    </a:lnL>
+                    <a:lnR w="9525" cap="flat" cmpd="sng" algn="ctr">
+                      <a:solidFill>
+                        <a:srgbClr val="D0D7DE"/>
+                      </a:solidFill>
+                      <a:prstDash val="solid"/>
+                    </a:lnR>
+                    <a:lnT w="9525" cap="flat" cmpd="sng" algn="ctr">
+                      <a:solidFill>
+                        <a:srgbClr val="D0D7DE"/>
+                      </a:solidFill>
+                      <a:prstDash val="solid"/>
+                    </a:lnT>
+                    <a:lnB w="9525" cap="flat" cmpd="sng" algn="ctr">
+                      <a:solidFill>
+                        <a:srgbClr val="D0D7DE"/>
+                      </a:solidFill>
+                      <a:prstDash val="solid"/>
+                    </a:lnB>
+                    <a:solidFill>
+                      <a:srgbClr val="FFFFFF"/>
+                    </a:solidFill>
+                  </a:tcPr>
+                </a:tc>
+                <a:tc>
+                  <a:txBody>
+                    <a:bodyPr wrap="square"/>
+                    <a:lstStyle/>
+                    <a:p>
+                      <a:r>
+                        <a:rPr sz="1300" b="0">
+                          <a:solidFill>
+                            <a:srgbClr val="1F2328"/>
+                          </a:solidFill>
+                          <a:latin typeface="Malgun Gothic"/>
+                        </a:rPr>
+                        <a:t>접속 즉시 상시 녹화, 실패 시점 화면 증거, 대응 1건 = 기록 1줄(시도 횟수·판정 근거·결과). 재등록 검토 후보 Recipe 목록 산출</a:t>
+                      </a:r>
+                    </a:p>
+                  </a:txBody>
+                  <a:tcPr marL="88900" marR="88900" marT="63500" marB="63500" anchor="ctr">
+                    <a:lnL w="9525" cap="flat" cmpd="sng" algn="ctr">
+                      <a:solidFill>
+                        <a:srgbClr val="D0D7DE"/>
+                      </a:solidFill>
+                      <a:prstDash val="solid"/>
+                    </a:lnL>
+                    <a:lnR w="9525" cap="flat" cmpd="sng" algn="ctr">
+                      <a:solidFill>
+                        <a:srgbClr val="D0D7DE"/>
+                      </a:solidFill>
+                      <a:prstDash val="solid"/>
+                    </a:lnR>
+                    <a:lnT w="9525" cap="flat" cmpd="sng" algn="ctr">
+                      <a:solidFill>
+                        <a:srgbClr val="D0D7DE"/>
+                      </a:solidFill>
+                      <a:prstDash val="solid"/>
+                    </a:lnT>
+                    <a:lnB w="9525" cap="flat" cmpd="sng" algn="ctr">
+                      <a:solidFill>
+                        <a:srgbClr val="D0D7DE"/>
+                      </a:solidFill>
+                      <a:prstDash val="solid"/>
+                    </a:lnB>
+                    <a:solidFill>
+                      <a:srgbClr val="FFFFFF"/>
+                    </a:solidFill>
+                  </a:tcPr>
+                </a:tc>
+              </a:tr>
+            </a:tbl>
+          </a:graphicData>
+        </a:graphic>
+      </p:graphicFrame>
+    </p:spTree>
+  </p:cSld>
+  <p:clrMapOvr>
+    <a:masterClrMapping/>
+  </p:clrMapOvr>
+</p:sld>
+</file>
+
+<file path=ppt/slides/slide5.xml><?xml version="1.0" encoding="utf-8"?>
+<p:sld xmlns:a="http://schemas.openxmlformats.org/drawingml/2006/main" xmlns:p="http://schemas.openxmlformats.org/presentationml/2006/main" xmlns:r="http://schemas.openxmlformats.org/officeDocument/2006/relationships">
+  <p:cSld>
+    <p:spTree>
+      <p:nvGrpSpPr>
+        <p:cNvPr id="1" name=""/>
+        <p:cNvGrpSpPr/>
+        <p:nvPr/>
+      </p:nvGrpSpPr>
+      <p:grpSpPr/>
+      <p:sp>
+        <p:nvSpPr>
+          <p:cNvPr id="2" name="TextBox 1"/>
+          <p:cNvSpPr txBox="1"/>
+          <p:nvPr/>
+        </p:nvSpPr>
+        <p:spPr>
+          <a:xfrm>
+            <a:off x="457200" y="320040"/>
+            <a:ext cx="11277295" cy="548640"/>
+          </a:xfrm>
+          <a:prstGeom prst="rect">
+            <a:avLst/>
+          </a:prstGeom>
+          <a:noFill/>
+        </p:spPr>
+        <p:txBody>
+          <a:bodyPr wrap="none" lIns="0">
+            <a:spAutoFit/>
+          </a:bodyPr>
+          <a:lstStyle/>
+          <a:p>
+            <a:r>
+              <a:rPr sz="2400" b="1">
+                <a:solidFill>
+                  <a:srgbClr val="1E3A8A"/>
+                </a:solidFill>
+                <a:latin typeface="Malgun Gothic"/>
+              </a:rPr>
+              <a:t>2.3 난이도와 극복</a:t>
+            </a:r>
+          </a:p>
+        </p:txBody>
+      </p:sp>
+      <p:sp>
+        <p:nvSpPr>
+          <p:cNvPr id="3" name="Rectangle 2"/>
+          <p:cNvSpPr/>
+          <p:nvPr/>
+        </p:nvSpPr>
+        <p:spPr>
+          <a:xfrm>
+            <a:off x="457200" y="914400"/>
+            <a:ext cx="11277295" cy="25400"/>
+          </a:xfrm>
+          <a:prstGeom prst="rect">
+            <a:avLst/>
+          </a:prstGeom>
+          <a:solidFill>
+            <a:srgbClr val="1E3A8A"/>
+          </a:solidFill>
+          <a:ln>
+            <a:noFill/>
+          </a:ln>
+          <a:effectLst/>
+        </p:spPr>
+        <p:style>
+          <a:lnRef idx="1">
+            <a:schemeClr val="accent1"/>
+          </a:lnRef>
+          <a:fillRef idx="3">
+            <a:schemeClr val="accent1"/>
+          </a:fillRef>
+          <a:effectRef idx="2">
+            <a:schemeClr val="accent1"/>
+          </a:effectRef>
+          <a:fontRef idx="minor">
+            <a:schemeClr val="lt1"/>
+          </a:fontRef>
+        </p:style>
+        <p:txBody>
+          <a:bodyPr rtlCol="0" anchor="ctr"/>
+          <a:lstStyle/>
+          <a:p>
+            <a:pPr algn="ctr"/>
+          </a:p>
+        </p:txBody>
+      </p:sp>
+      <p:graphicFrame>
+        <p:nvGraphicFramePr>
+          <p:cNvPr id="4" name="Table 3"/>
+          <p:cNvGraphicFramePr>
+            <a:graphicFrameLocks noGrp="1"/>
+          </p:cNvGraphicFramePr>
+          <p:nvPr/>
+        </p:nvGraphicFramePr>
+        <p:xfrm>
+          <a:off x="457200" y="1097280"/>
+          <a:ext cx="11277294" cy="2194560"/>
+        </p:xfrm>
+        <a:graphic>
+          <a:graphicData uri="http://schemas.openxmlformats.org/drawingml/2006/table">
+            <a:tbl>
+              <a:tblPr firstRow="1" bandRow="0">
+                <a:tableStyleId>{5C22544A-7EE6-4342-B048-85BDC9FD1C3A}</a:tableStyleId>
+              </a:tblPr>
+              <a:tblGrid>
+                <a:gridCol w="4833126"/>
+                <a:gridCol w="6444168"/>
+              </a:tblGrid>
+              <a:tr h="365760">
+                <a:tc>
+                  <a:txBody>
+                    <a:bodyPr wrap="square"/>
+                    <a:lstStyle/>
+                    <a:p>
+                      <a:r>
+                        <a:rPr sz="1350" b="1">
+                          <a:solidFill>
+                            <a:srgbClr val="FFFFFF"/>
+                          </a:solidFill>
+                          <a:latin typeface="Malgun Gothic"/>
+                        </a:rPr>
+                        <a:t>난이도</a:t>
+                      </a:r>
+                    </a:p>
+                  </a:txBody>
+                  <a:tcPr marL="88900" marR="88900" marT="63500" marB="63500" anchor="ctr">
+                    <a:lnL w="9525" cap="flat" cmpd="sng" algn="ctr">
+                      <a:solidFill>
+                        <a:srgbClr val="D0D7DE"/>
+                      </a:solidFill>
+                      <a:prstDash val="solid"/>
+                    </a:lnL>
+                    <a:lnR w="9525" cap="flat" cmpd="sng" algn="ctr">
+                      <a:solidFill>
+                        <a:srgbClr val="D0D7DE"/>
+                      </a:solidFill>
+                      <a:prstDash val="solid"/>
+                    </a:lnR>
+                    <a:lnT w="9525" cap="flat" cmpd="sng" algn="ctr">
+                      <a:solidFill>
+                        <a:srgbClr val="D0D7DE"/>
+                      </a:solidFill>
+                      <a:prstDash val="solid"/>
+                    </a:lnT>
+                    <a:lnB w="9525" cap="flat" cmpd="sng" algn="ctr">
+                      <a:solidFill>
+                        <a:srgbClr val="D0D7DE"/>
+                      </a:solidFill>
+                      <a:prstDash val="solid"/>
+                    </a:lnB>
+                    <a:solidFill>
+                      <a:srgbClr val="1E3A8A"/>
+                    </a:solidFill>
+                  </a:tcPr>
+                </a:tc>
+                <a:tc>
+                  <a:txBody>
+                    <a:bodyPr wrap="square"/>
+                    <a:lstStyle/>
+                    <a:p>
+                      <a:r>
+                        <a:rPr sz="1350" b="1">
+                          <a:solidFill>
+                            <a:srgbClr val="FFFFFF"/>
+                          </a:solidFill>
+                          <a:latin typeface="Malgun Gothic"/>
+                        </a:rPr>
+                        <a:t>극복 방식</a:t>
+                      </a:r>
+                    </a:p>
+                  </a:txBody>
+                  <a:tcPr marL="88900" marR="88900" marT="63500" marB="63500" anchor="ctr">
+                    <a:lnL w="9525" cap="flat" cmpd="sng" algn="ctr">
+                      <a:solidFill>
+                        <a:srgbClr val="D0D7DE"/>
+                      </a:solidFill>
+                      <a:prstDash val="solid"/>
+                    </a:lnL>
+                    <a:lnR w="9525" cap="flat" cmpd="sng" algn="ctr">
+                      <a:solidFill>
+                        <a:srgbClr val="D0D7DE"/>
+                      </a:solidFill>
+                      <a:prstDash val="solid"/>
+                    </a:lnR>
+                    <a:lnT w="9525" cap="flat" cmpd="sng" algn="ctr">
+                      <a:solidFill>
+                        <a:srgbClr val="D0D7DE"/>
+                      </a:solidFill>
+                      <a:prstDash val="solid"/>
+                    </a:lnT>
+                    <a:lnB w="9525" cap="flat" cmpd="sng" algn="ctr">
+                      <a:solidFill>
+                        <a:srgbClr val="D0D7DE"/>
+                      </a:solidFill>
+                      <a:prstDash val="solid"/>
+                    </a:lnB>
+                    <a:solidFill>
+                      <a:srgbClr val="1E3A8A"/>
+                    </a:solidFill>
+                  </a:tcPr>
+                </a:tc>
+              </a:tr>
+              <a:tr h="365760">
+                <a:tc>
+                  <a:txBody>
+                    <a:bodyPr wrap="square"/>
+                    <a:lstStyle/>
+                    <a:p>
+                      <a:r>
+                        <a:rPr sz="1300" b="0">
+                          <a:solidFill>
+                            <a:srgbClr val="1F2328"/>
+                          </a:solidFill>
+                          <a:latin typeface="Malgun Gothic"/>
+                        </a:rPr>
+                        <a:t>계측 클라이언트가 표준 UI가 아니라 기존 자동화 도구가 버튼을 인식하지 못함</a:t>
+                      </a:r>
+                    </a:p>
+                  </a:txBody>
+                  <a:tcPr marL="88900" marR="88900" marT="63500" marB="63500" anchor="ctr">
+                    <a:lnL w="9525" cap="flat" cmpd="sng" algn="ctr">
+                      <a:solidFill>
+                        <a:srgbClr val="D0D7DE"/>
+                      </a:solidFill>
+                      <a:prstDash val="solid"/>
+                    </a:lnL>
+                    <a:lnR w="9525" cap="flat" cmpd="sng" algn="ctr">
+                      <a:solidFill>
+                        <a:srgbClr val="D0D7DE"/>
+                      </a:solidFill>
+                      <a:prstDash val="solid"/>
+                    </a:lnR>
+                    <a:lnT w="9525" cap="flat" cmpd="sng" algn="ctr">
+                      <a:solidFill>
+                        <a:srgbClr val="D0D7DE"/>
+                      </a:solidFill>
+                      <a:prstDash val="solid"/>
+                    </a:lnT>
+                    <a:lnB w="9525" cap="flat" cmpd="sng" algn="ctr">
+                      <a:solidFill>
+                        <a:srgbClr val="D0D7DE"/>
+                      </a:solidFill>
+                      <a:prstDash val="solid"/>
+                    </a:lnB>
+                    <a:solidFill>
+                      <a:srgbClr val="FFFFFF"/>
+                    </a:solidFill>
+                  </a:tcPr>
+                </a:tc>
+                <a:tc>
+                  <a:txBody>
+                    <a:bodyPr wrap="square"/>
+                    <a:lstStyle/>
+                    <a:p>
+                      <a:r>
+                        <a:rPr sz="1300" b="0">
+                          <a:solidFill>
+                            <a:srgbClr val="1F2328"/>
+                          </a:solidFill>
+                          <a:latin typeface="Malgun Gothic"/>
+                        </a:rPr>
+                        <a:t>화면 이미지를 보고 위치를 찾는 VLM 으로 전환. coarse → fine 2단계 + OCR 확인으로 클릭 신뢰도 99%</a:t>
+                      </a:r>
+                    </a:p>
+                  </a:txBody>
+                  <a:tcPr marL="88900" marR="88900" marT="63500" marB="63500" anchor="ctr">
+                    <a:lnL w="9525" cap="flat" cmpd="sng" algn="ctr">
+                      <a:solidFill>
+                        <a:srgbClr val="D0D7DE"/>
+                      </a:solidFill>
+                      <a:prstDash val="solid"/>
+                    </a:lnL>
+                    <a:lnR w="9525" cap="flat" cmpd="sng" algn="ctr">
+                      <a:solidFill>
+                        <a:srgbClr val="D0D7DE"/>
+                      </a:solidFill>
+                      <a:prstDash val="solid"/>
+                    </a:lnR>
+                    <a:lnT w="9525" cap="flat" cmpd="sng" algn="ctr">
+                      <a:solidFill>
+                        <a:srgbClr val="D0D7DE"/>
+                      </a:solidFill>
+                      <a:prstDash val="solid"/>
+                    </a:lnT>
+                    <a:lnB w="9525" cap="flat" cmpd="sng" algn="ctr">
+                      <a:solidFill>
+                        <a:srgbClr val="D0D7DE"/>
+                      </a:solidFill>
+                      <a:prstDash val="solid"/>
+                    </a:lnB>
+                    <a:solidFill>
+                      <a:srgbClr val="FFFFFF"/>
+                    </a:solidFill>
+                  </a:tcPr>
+                </a:tc>
+              </a:tr>
+              <a:tr h="365760">
+                <a:tc>
+                  <a:txBody>
+                    <a:bodyPr wrap="square"/>
+                    <a:lstStyle/>
+                    <a:p>
+                      <a:r>
+                        <a:rPr sz="1300" b="0">
+                          <a:solidFill>
+                            <a:srgbClr val="1F2328"/>
+                          </a:solidFill>
+                          <a:latin typeface="Malgun Gothic"/>
+                        </a:rPr>
+                        <a:t>Align Key가 공정 변동으로 매번 조금씩 달라 픽셀 동일성을 가정할 수 없음</a:t>
+                      </a:r>
+                    </a:p>
+                  </a:txBody>
+                  <a:tcPr marL="88900" marR="88900" marT="63500" marB="63500" anchor="ctr">
+                    <a:lnL w="9525" cap="flat" cmpd="sng" algn="ctr">
+                      <a:solidFill>
+                        <a:srgbClr val="D0D7DE"/>
+                      </a:solidFill>
+                      <a:prstDash val="solid"/>
+                    </a:lnL>
+                    <a:lnR w="9525" cap="flat" cmpd="sng" algn="ctr">
+                      <a:solidFill>
+                        <a:srgbClr val="D0D7DE"/>
+                      </a:solidFill>
+                      <a:prstDash val="solid"/>
+                    </a:lnR>
+                    <a:lnT w="9525" cap="flat" cmpd="sng" algn="ctr">
+                      <a:solidFill>
+                        <a:srgbClr val="D0D7DE"/>
+                      </a:solidFill>
+                      <a:prstDash val="solid"/>
+                    </a:lnT>
+                    <a:lnB w="9525" cap="flat" cmpd="sng" algn="ctr">
+                      <a:solidFill>
+                        <a:srgbClr val="D0D7DE"/>
+                      </a:solidFill>
+                      <a:prstDash val="solid"/>
+                    </a:lnB>
+                    <a:solidFill>
+                      <a:srgbClr val="F6F8FA"/>
+                    </a:solidFill>
+                  </a:tcPr>
+                </a:tc>
+                <a:tc>
+                  <a:txBody>
+                    <a:bodyPr wrap="square"/>
+                    <a:lstStyle/>
+                    <a:p>
+                      <a:r>
+                        <a:rPr sz="1300" b="0">
+                          <a:solidFill>
+                            <a:srgbClr val="1F2328"/>
+                          </a:solidFill>
+                          <a:latin typeface="Malgun Gothic"/>
+                        </a:rPr>
+                        <a:t>구조·기하 기반 매칭에 여러 매칭 방식을 종합하고, 기준 이미지를 최근 성공 사례 종합으로 바꿔 지금의 웨이퍼 외관을 따라감</a:t>
+                      </a:r>
+                    </a:p>
+                  </a:txBody>
+                  <a:tcPr marL="88900" marR="88900" marT="63500" marB="63500" anchor="ctr">
+                    <a:lnL w="9525" cap="flat" cmpd="sng" algn="ctr">
+                      <a:solidFill>
+                        <a:srgbClr val="D0D7DE"/>
+                      </a:solidFill>
+                      <a:prstDash val="solid"/>
+                    </a:lnL>
+                    <a:lnR w="9525" cap="flat" cmpd="sng" algn="ctr">
+                      <a:solidFill>
+                        <a:srgbClr val="D0D7DE"/>
+                      </a:solidFill>
+                      <a:prstDash val="solid"/>
+                    </a:lnR>
+                    <a:lnT w="9525" cap="flat" cmpd="sng" algn="ctr">
+                      <a:solidFill>
+                        <a:srgbClr val="D0D7DE"/>
+                      </a:solidFill>
+                      <a:prstDash val="solid"/>
+                    </a:lnT>
+                    <a:lnB w="9525" cap="flat" cmpd="sng" algn="ctr">
+                      <a:solidFill>
+                        <a:srgbClr val="D0D7DE"/>
+                      </a:solidFill>
+                      <a:prstDash val="solid"/>
+                    </a:lnB>
+                    <a:solidFill>
+                      <a:srgbClr val="F6F8FA"/>
+                    </a:solidFill>
+                  </a:tcPr>
+                </a:tc>
+              </a:tr>
+              <a:tr h="365760">
+                <a:tc>
+                  <a:txBody>
+                    <a:bodyPr wrap="square"/>
+                    <a:lstStyle/>
+                    <a:p>
+                      <a:r>
+                        <a:rPr sz="1300" b="0">
+                          <a:solidFill>
+                            <a:srgbClr val="1F2328"/>
+                          </a:solidFill>
+                          <a:latin typeface="Malgun Gothic"/>
+                        </a:rPr>
+                        <a:t>고배율 SEM 화면은 대부분 반복 패턴이라 가짜 후보가 많음</a:t>
+                      </a:r>
+                    </a:p>
+                  </a:txBody>
+                  <a:tcPr marL="88900" marR="88900" marT="63500" marB="63500" anchor="ctr">
+                    <a:lnL w="9525" cap="flat" cmpd="sng" algn="ctr">
+                      <a:solidFill>
+                        <a:srgbClr val="D0D7DE"/>
+                      </a:solidFill>
+                      <a:prstDash val="solid"/>
+                    </a:lnL>
+                    <a:lnR w="9525" cap="flat" cmpd="sng" algn="ctr">
+                      <a:solidFill>
+                        <a:srgbClr val="D0D7DE"/>
+                      </a:solidFill>
+                      <a:prstDash val="solid"/>
+                    </a:lnR>
+                    <a:lnT w="9525" cap="flat" cmpd="sng" algn="ctr">
+                      <a:solidFill>
+                        <a:srgbClr val="D0D7DE"/>
+                      </a:solidFill>
+                      <a:prstDash val="solid"/>
+                    </a:lnT>
+                    <a:lnB w="9525" cap="flat" cmpd="sng" algn="ctr">
+                      <a:solidFill>
+                        <a:srgbClr val="D0D7DE"/>
+                      </a:solidFill>
+                      <a:prstDash val="solid"/>
+                    </a:lnB>
+                    <a:solidFill>
+                      <a:srgbClr val="FFFFFF"/>
+                    </a:solidFill>
+                  </a:tcPr>
+                </a:tc>
+                <a:tc>
+                  <a:txBody>
+                    <a:bodyPr wrap="square"/>
+                    <a:lstStyle/>
+                    <a:p>
+                      <a:r>
+                        <a:rPr sz="1300" b="0">
+                          <a:solidFill>
+                            <a:srgbClr val="1F2328"/>
+                          </a:solidFill>
+                          <a:latin typeface="Malgun Gothic"/>
+                        </a:rPr>
+                        <a:t>촬영 모드를 화면에서 읽어 모드별로 기준 이미지와 후보 평가 방식을 바꿈. 그래도 남는 실패의 약 87%는 정답이 후보에 없는 유형이라 Align Key 재등록 권고 목록으로 현업과 검토</a:t>
+                      </a:r>
+                    </a:p>
+                  </a:txBody>
+                  <a:tcPr marL="88900" marR="88900" marT="63500" marB="63500" anchor="ctr">
+                    <a:lnL w="9525" cap="flat" cmpd="sng" algn="ctr">
+                      <a:solidFill>
+                        <a:srgbClr val="D0D7DE"/>
+                      </a:solidFill>
+                      <a:prstDash val="solid"/>
+                    </a:lnL>
+                    <a:lnR w="9525" cap="flat" cmpd="sng" algn="ctr">
+                      <a:solidFill>
+                        <a:srgbClr val="D0D7DE"/>
+                      </a:solidFill>
+                      <a:prstDash val="solid"/>
+                    </a:lnR>
+                    <a:lnT w="9525" cap="flat" cmpd="sng" algn="ctr">
+                      <a:solidFill>
+                        <a:srgbClr val="D0D7DE"/>
+                      </a:solidFill>
+                      <a:prstDash val="solid"/>
+                    </a:lnT>
+                    <a:lnB w="9525" cap="flat" cmpd="sng" algn="ctr">
+                      <a:solidFill>
+                        <a:srgbClr val="D0D7DE"/>
+                      </a:solidFill>
+                      <a:prstDash val="solid"/>
+                    </a:lnB>
+                    <a:solidFill>
+                      <a:srgbClr val="FFFFFF"/>
+                    </a:solidFill>
+                  </a:tcPr>
+                </a:tc>
+              </a:tr>
+              <a:tr h="365760">
+                <a:tc>
+                  <a:txBody>
+                    <a:bodyPr wrap="square"/>
+                    <a:lstStyle/>
+                    <a:p>
+                      <a:r>
+                        <a:rPr sz="1300" b="0">
+                          <a:solidFill>
+                            <a:srgbClr val="1F2328"/>
+                          </a:solidFill>
+                          <a:latin typeface="Malgun Gothic"/>
+                        </a:rPr>
+                        <a:t>라이브 영상이 계속 바뀌는 화면에서 AI가 오해 없이 정확히 눌러야 함</a:t>
+                      </a:r>
+                    </a:p>
+                  </a:txBody>
+                  <a:tcPr marL="88900" marR="88900" marT="63500" marB="63500" anchor="ctr">
+                    <a:lnL w="9525" cap="flat" cmpd="sng" algn="ctr">
+                      <a:solidFill>
+                        <a:srgbClr val="D0D7DE"/>
+                      </a:solidFill>
+                      <a:prstDash val="solid"/>
+                    </a:lnL>
+                    <a:lnR w="9525" cap="flat" cmpd="sng" algn="ctr">
+                      <a:solidFill>
+                        <a:srgbClr val="D0D7DE"/>
+                      </a:solidFill>
+                      <a:prstDash val="solid"/>
+                    </a:lnR>
+                    <a:lnT w="9525" cap="flat" cmpd="sng" algn="ctr">
+                      <a:solidFill>
+                        <a:srgbClr val="D0D7DE"/>
+                      </a:solidFill>
+                      <a:prstDash val="solid"/>
+                    </a:lnT>
+                    <a:lnB w="9525" cap="flat" cmpd="sng" algn="ctr">
+                      <a:solidFill>
+                        <a:srgbClr val="D0D7DE"/>
+                      </a:solidFill>
+                      <a:prstDash val="solid"/>
+                    </a:lnB>
+                    <a:solidFill>
+                      <a:srgbClr val="F6F8FA"/>
+                    </a:solidFill>
+                  </a:tcPr>
+                </a:tc>
+                <a:tc>
+                  <a:txBody>
+                    <a:bodyPr wrap="square"/>
+                    <a:lstStyle/>
+                    <a:p>
+                      <a:r>
+                        <a:rPr sz="1300" b="0">
+                          <a:solidFill>
+                            <a:srgbClr val="1F2328"/>
+                          </a:solidFill>
+                          <a:latin typeface="Malgun Gothic"/>
+                        </a:rPr>
+                        <a:t>VLM이 UI 요소와 라이브 영상 영역을 먼저 구분하고 CV가 그 안에서만 위치·이동량을 계산하는 역할 순서</a:t>
+                      </a:r>
+                    </a:p>
+                  </a:txBody>
+                  <a:tcPr marL="88900" marR="88900" marT="63500" marB="63500" anchor="ctr">
+                    <a:lnL w="9525" cap="flat" cmpd="sng" algn="ctr">
+                      <a:solidFill>
+                        <a:srgbClr val="D0D7DE"/>
+                      </a:solidFill>
+                      <a:prstDash val="solid"/>
+                    </a:lnL>
+                    <a:lnR w="9525" cap="flat" cmpd="sng" algn="ctr">
+                      <a:solidFill>
+                        <a:srgbClr val="D0D7DE"/>
+                      </a:solidFill>
+                      <a:prstDash val="solid"/>
+                    </a:lnR>
+                    <a:lnT w="9525" cap="flat" cmpd="sng" algn="ctr">
+                      <a:solidFill>
+                        <a:srgbClr val="D0D7DE"/>
+                      </a:solidFill>
+                      <a:prstDash val="solid"/>
+                    </a:lnT>
+                    <a:lnB w="9525" cap="flat" cmpd="sng" algn="ctr">
+                      <a:solidFill>
+                        <a:srgbClr val="D0D7DE"/>
+                      </a:solidFill>
+                      <a:prstDash val="solid"/>
+                    </a:lnB>
+                    <a:solidFill>
+                      <a:srgbClr val="F6F8FA"/>
+                    </a:solidFill>
+                  </a:tcPr>
+                </a:tc>
+              </a:tr>
+              <a:tr h="365760">
+                <a:tc>
+                  <a:txBody>
+                    <a:bodyPr wrap="square"/>
+                    <a:lstStyle/>
+                    <a:p>
+                      <a:r>
+                        <a:rPr sz="1300" b="0">
+                          <a:solidFill>
+                            <a:srgbClr val="1F2328"/>
+                          </a:solidFill>
+                          <a:latin typeface="Malgun Gothic"/>
+                        </a:rPr>
+                        <a:t>실장비 클릭은 오동작 시 측정에 영향</a:t>
+                      </a:r>
+                    </a:p>
+                  </a:txBody>
+                  <a:tcPr marL="88900" marR="88900" marT="63500" marB="63500" anchor="ctr">
+                    <a:lnL w="9525" cap="flat" cmpd="sng" algn="ctr">
+                      <a:solidFill>
+                        <a:srgbClr val="D0D7DE"/>
+                      </a:solidFill>
+                      <a:prstDash val="solid"/>
+                    </a:lnL>
+                    <a:lnR w="9525" cap="flat" cmpd="sng" algn="ctr">
+                      <a:solidFill>
+                        <a:srgbClr val="D0D7DE"/>
+                      </a:solidFill>
+                      <a:prstDash val="solid"/>
+                    </a:lnR>
+                    <a:lnT w="9525" cap="flat" cmpd="sng" algn="ctr">
+                      <a:solidFill>
+                        <a:srgbClr val="D0D7DE"/>
+                      </a:solidFill>
+                      <a:prstDash val="solid"/>
+                    </a:lnT>
+                    <a:lnB w="9525" cap="flat" cmpd="sng" algn="ctr">
+                      <a:solidFill>
+                        <a:srgbClr val="D0D7DE"/>
+                      </a:solidFill>
+                      <a:prstDash val="solid"/>
+                    </a:lnB>
+                    <a:solidFill>
+                      <a:srgbClr val="FFFFFF"/>
+                    </a:solidFill>
+                  </a:tcPr>
+                </a:tc>
+                <a:tc>
+                  <a:txBody>
+                    <a:bodyPr wrap="square"/>
+                    <a:lstStyle/>
+                    <a:p>
+                      <a:r>
+                        <a:rPr sz="1300" b="0">
+                          <a:solidFill>
+                            <a:srgbClr val="1F2328"/>
+                          </a:solidFill>
+                          <a:latin typeface="Malgun Gothic"/>
+                        </a:rPr>
+                        <a:t>확인 안 된 클릭은 나가지 않는 fail-closed, 모드 불명이면 보정 보류, 잘못 열린 창은 닫고 재시도. 점검 모드(비파괴) → 반자동 → 현업 합동 시험 → 26대 배치의 단계적 게이트</a:t>
+                      </a:r>
+                    </a:p>
+                  </a:txBody>
+                  <a:tcPr marL="88900" marR="88900" marT="63500" marB="63500" anchor="ctr">
+                    <a:lnL w="9525" cap="flat" cmpd="sng" algn="ctr">
+                      <a:solidFill>
+                        <a:srgbClr val="D0D7DE"/>
+                      </a:solidFill>
+                      <a:prstDash val="solid"/>
+                    </a:lnL>
+                    <a:lnR w="9525" cap="flat" cmpd="sng" algn="ctr">
+                      <a:solidFill>
+                        <a:srgbClr val="D0D7DE"/>
+                      </a:solidFill>
+                      <a:prstDash val="solid"/>
+                    </a:lnR>
+                    <a:lnT w="9525" cap="flat" cmpd="sng" algn="ctr">
+                      <a:solidFill>
+                        <a:srgbClr val="D0D7DE"/>
+                      </a:solidFill>
+                      <a:prstDash val="solid"/>
+                    </a:lnT>
+                    <a:lnB w="9525" cap="flat" cmpd="sng" algn="ctr">
+                      <a:solidFill>
+                        <a:srgbClr val="D0D7DE"/>
+                      </a:solidFill>
+                      <a:prstDash val="solid"/>
+                    </a:lnB>
+                    <a:solidFill>
+                      <a:srgbClr val="FFFFFF"/>
+                    </a:solidFill>
+                  </a:tcPr>
+                </a:tc>
+              </a:tr>
+            </a:tbl>
+          </a:graphicData>
+        </a:graphic>
+      </p:graphicFrame>
+    </p:spTree>
+  </p:cSld>
+  <p:clrMapOvr>
+    <a:masterClrMapping/>
+  </p:clrMapOvr>
+</p:sld>
+</file>
+
+<file path=ppt/slides/slide6.xml><?xml version="1.0" encoding="utf-8"?>
+<p:sld xmlns:a="http://schemas.openxmlformats.org/drawingml/2006/main" xmlns:p="http://schemas.openxmlformats.org/presentationml/2006/main" xmlns:r="http://schemas.openxmlformats.org/officeDocument/2006/relationships">
+  <p:cSld>
+    <p:spTree>
+      <p:nvGrpSpPr>
+        <p:cNvPr id="1" name=""/>
+        <p:cNvGrpSpPr/>
+        <p:nvPr/>
+      </p:nvGrpSpPr>
+      <p:grpSpPr/>
+      <p:sp>
+        <p:nvSpPr>
+          <p:cNvPr id="2" name="TextBox 1"/>
+          <p:cNvSpPr txBox="1"/>
+          <p:nvPr/>
+        </p:nvSpPr>
+        <p:spPr>
+          <a:xfrm>
+            <a:off x="457200" y="320040"/>
+            <a:ext cx="11277295" cy="548640"/>
+          </a:xfrm>
+          <a:prstGeom prst="rect">
+            <a:avLst/>
+          </a:prstGeom>
+          <a:noFill/>
+        </p:spPr>
+        <p:txBody>
+          <a:bodyPr wrap="none" lIns="0">
+            <a:spAutoFit/>
+          </a:bodyPr>
+          <a:lstStyle/>
+          <a:p>
+            <a:r>
+              <a:rPr sz="2400" b="1">
+                <a:solidFill>
+                  <a:srgbClr val="1E3A8A"/>
+                </a:solidFill>
+                <a:latin typeface="Malgun Gothic"/>
+              </a:rPr>
+              <a:t>2.4 소요 기간·조직 영향·확산 가능성</a:t>
+            </a:r>
+          </a:p>
+        </p:txBody>
+      </p:sp>
+      <p:sp>
+        <p:nvSpPr>
+          <p:cNvPr id="3" name="Rectangle 2"/>
+          <p:cNvSpPr/>
+          <p:nvPr/>
+        </p:nvSpPr>
+        <p:spPr>
+          <a:xfrm>
+            <a:off x="457200" y="914400"/>
+            <a:ext cx="11277295" cy="25400"/>
+          </a:xfrm>
+          <a:prstGeom prst="rect">
+            <a:avLst/>
+          </a:prstGeom>
+          <a:solidFill>
+            <a:srgbClr val="1E3A8A"/>
+          </a:solidFill>
+          <a:ln>
+            <a:noFill/>
+          </a:ln>
+          <a:effectLst/>
+        </p:spPr>
+        <p:style>
+          <a:lnRef idx="1">
+            <a:schemeClr val="accent1"/>
+          </a:lnRef>
+          <a:fillRef idx="3">
+            <a:schemeClr val="accent1"/>
+          </a:fillRef>
+          <a:effectRef idx="2">
+            <a:schemeClr val="accent1"/>
+          </a:effectRef>
+          <a:fontRef idx="minor">
+            <a:schemeClr val="lt1"/>
+          </a:fontRef>
+        </p:style>
+        <p:txBody>
+          <a:bodyPr rtlCol="0" anchor="ctr"/>
+          <a:lstStyle/>
+          <a:p>
+            <a:pPr algn="ctr"/>
+          </a:p>
+        </p:txBody>
+      </p:sp>
+      <p:graphicFrame>
+        <p:nvGraphicFramePr>
+          <p:cNvPr id="4" name="Table 3"/>
+          <p:cNvGraphicFramePr>
+            <a:graphicFrameLocks noGrp="1"/>
+          </p:cNvGraphicFramePr>
+          <p:nvPr/>
+        </p:nvGraphicFramePr>
+        <p:xfrm>
+          <a:off x="457200" y="1097280"/>
+          <a:ext cx="11277293" cy="2560320"/>
+        </p:xfrm>
+        <a:graphic>
+          <a:graphicData uri="http://schemas.openxmlformats.org/drawingml/2006/table">
+            <a:tbl>
+              <a:tblPr firstRow="1" bandRow="0">
+                <a:tableStyleId>{5C22544A-7EE6-4342-B048-85BDC9FD1C3A}</a:tableStyleId>
+              </a:tblPr>
+              <a:tblGrid>
+                <a:gridCol w="1713006"/>
+                <a:gridCol w="1998507"/>
+                <a:gridCol w="7565780"/>
+              </a:tblGrid>
+              <a:tr h="365760">
+                <a:tc>
+                  <a:txBody>
+                    <a:bodyPr wrap="square"/>
+                    <a:lstStyle/>
+                    <a:p>
+                      <a:r>
+                        <a:rPr sz="1350" b="1">
+                          <a:solidFill>
+                            <a:srgbClr val="FFFFFF"/>
+                          </a:solidFill>
+                          <a:latin typeface="Malgun Gothic"/>
+                        </a:rPr>
+                        <a:t>시기</a:t>
+                      </a:r>
+                    </a:p>
+                  </a:txBody>
+                  <a:tcPr marL="88900" marR="88900" marT="63500" marB="63500" anchor="ctr">
+                    <a:lnL w="9525" cap="flat" cmpd="sng" algn="ctr">
+                      <a:solidFill>
+                        <a:srgbClr val="D0D7DE"/>
+                      </a:solidFill>
+                      <a:prstDash val="solid"/>
+                    </a:lnL>
+                    <a:lnR w="9525" cap="flat" cmpd="sng" algn="ctr">
+                      <a:solidFill>
+                        <a:srgbClr val="D0D7DE"/>
+                      </a:solidFill>
+                      <a:prstDash val="solid"/>
+                    </a:lnR>
+                    <a:lnT w="9525" cap="flat" cmpd="sng" algn="ctr">
+                      <a:solidFill>
+                        <a:srgbClr val="D0D7DE"/>
+                      </a:solidFill>
+                      <a:prstDash val="solid"/>
+                    </a:lnT>
+                    <a:lnB w="9525" cap="flat" cmpd="sng" algn="ctr">
+                      <a:solidFill>
+                        <a:srgbClr val="D0D7DE"/>
+                      </a:solidFill>
+                      <a:prstDash val="solid"/>
+                    </a:lnB>
+                    <a:solidFill>
+                      <a:srgbClr val="1E3A8A"/>
+                    </a:solidFill>
+                  </a:tcPr>
+                </a:tc>
+                <a:tc>
+                  <a:txBody>
+                    <a:bodyPr wrap="square"/>
+                    <a:lstStyle/>
+                    <a:p>
+                      <a:r>
+                        <a:rPr sz="1350" b="1">
+                          <a:solidFill>
+                            <a:srgbClr val="FFFFFF"/>
+                          </a:solidFill>
+                          <a:latin typeface="Malgun Gothic"/>
+                        </a:rPr>
+                        <a:t>단계</a:t>
+                      </a:r>
+                    </a:p>
+                  </a:txBody>
+                  <a:tcPr marL="88900" marR="88900" marT="63500" marB="63500" anchor="ctr">
+                    <a:lnL w="9525" cap="flat" cmpd="sng" algn="ctr">
+                      <a:solidFill>
+                        <a:srgbClr val="D0D7DE"/>
+                      </a:solidFill>
+                      <a:prstDash val="solid"/>
+                    </a:lnL>
+                    <a:lnR w="9525" cap="flat" cmpd="sng" algn="ctr">
+                      <a:solidFill>
+                        <a:srgbClr val="D0D7DE"/>
+                      </a:solidFill>
+                      <a:prstDash val="solid"/>
+                    </a:lnR>
+                    <a:lnT w="9525" cap="flat" cmpd="sng" algn="ctr">
+                      <a:solidFill>
+                        <a:srgbClr val="D0D7DE"/>
+                      </a:solidFill>
+                      <a:prstDash val="solid"/>
+                    </a:lnT>
+                    <a:lnB w="9525" cap="flat" cmpd="sng" algn="ctr">
+                      <a:solidFill>
+                        <a:srgbClr val="D0D7DE"/>
+                      </a:solidFill>
+                      <a:prstDash val="solid"/>
+                    </a:lnB>
+                    <a:solidFill>
+                      <a:srgbClr val="1E3A8A"/>
+                    </a:solidFill>
+                  </a:tcPr>
+                </a:tc>
+                <a:tc>
+                  <a:txBody>
+                    <a:bodyPr wrap="square"/>
+                    <a:lstStyle/>
+                    <a:p>
+                      <a:r>
+                        <a:rPr sz="1350" b="1">
+                          <a:solidFill>
+                            <a:srgbClr val="FFFFFF"/>
+                          </a:solidFill>
+                          <a:latin typeface="Malgun Gothic"/>
+                        </a:rPr>
+                        <a:t>산출</a:t>
+                      </a:r>
+                    </a:p>
+                  </a:txBody>
+                  <a:tcPr marL="88900" marR="88900" marT="63500" marB="63500" anchor="ctr">
+                    <a:lnL w="9525" cap="flat" cmpd="sng" algn="ctr">
+                      <a:solidFill>
+                        <a:srgbClr val="D0D7DE"/>
+                      </a:solidFill>
+                      <a:prstDash val="solid"/>
+                    </a:lnL>
+                    <a:lnR w="9525" cap="flat" cmpd="sng" algn="ctr">
+                      <a:solidFill>
+                        <a:srgbClr val="D0D7DE"/>
+                      </a:solidFill>
+                      <a:prstDash val="solid"/>
+                    </a:lnR>
+                    <a:lnT w="9525" cap="flat" cmpd="sng" algn="ctr">
+                      <a:solidFill>
+                        <a:srgbClr val="D0D7DE"/>
+                      </a:solidFill>
+                      <a:prstDash val="solid"/>
+                    </a:lnT>
+                    <a:lnB w="9525" cap="flat" cmpd="sng" algn="ctr">
+                      <a:solidFill>
+                        <a:srgbClr val="D0D7DE"/>
+                      </a:solidFill>
+                      <a:prstDash val="solid"/>
+                    </a:lnB>
+                    <a:solidFill>
+                      <a:srgbClr val="1E3A8A"/>
+                    </a:solidFill>
+                  </a:tcPr>
+                </a:tc>
+              </a:tr>
+              <a:tr h="365760">
+                <a:tc>
+                  <a:txBody>
+                    <a:bodyPr wrap="square"/>
+                    <a:lstStyle/>
+                    <a:p>
+                      <a:r>
+                        <a:rPr sz="1300" b="0">
+                          <a:solidFill>
+                            <a:srgbClr val="1F2328"/>
+                          </a:solidFill>
+                          <a:latin typeface="Malgun Gothic"/>
+                        </a:rPr>
+                        <a:t>2026-01</a:t>
+                      </a:r>
+                    </a:p>
+                  </a:txBody>
+                  <a:tcPr marL="88900" marR="88900" marT="63500" marB="63500" anchor="ctr">
+                    <a:lnL w="9525" cap="flat" cmpd="sng" algn="ctr">
+                      <a:solidFill>
+                        <a:srgbClr val="D0D7DE"/>
+                      </a:solidFill>
+                      <a:prstDash val="solid"/>
+                    </a:lnL>
+                    <a:lnR w="9525" cap="flat" cmpd="sng" algn="ctr">
+                      <a:solidFill>
+                        <a:srgbClr val="D0D7DE"/>
+                      </a:solidFill>
+                      <a:prstDash val="solid"/>
+                    </a:lnR>
+                    <a:lnT w="9525" cap="flat" cmpd="sng" algn="ctr">
+                      <a:solidFill>
+                        <a:srgbClr val="D0D7DE"/>
+                      </a:solidFill>
+                      <a:prstDash val="solid"/>
+                    </a:lnT>
+                    <a:lnB w="9525" cap="flat" cmpd="sng" algn="ctr">
+                      <a:solidFill>
+                        <a:srgbClr val="D0D7DE"/>
+                      </a:solidFill>
+                      <a:prstDash val="solid"/>
+                    </a:lnB>
+                    <a:solidFill>
+                      <a:srgbClr val="FFFFFF"/>
+                    </a:solidFill>
+                  </a:tcPr>
+                </a:tc>
+                <a:tc>
+                  <a:txBody>
+                    <a:bodyPr wrap="square"/>
+                    <a:lstStyle/>
+                    <a:p>
+                      <a:r>
+                        <a:rPr sz="1300" b="0">
+                          <a:solidFill>
+                            <a:srgbClr val="1F2328"/>
+                          </a:solidFill>
+                          <a:latin typeface="Malgun Gothic"/>
+                        </a:rPr>
+                        <a:t>요구사항 정의</a:t>
+                      </a:r>
+                    </a:p>
+                  </a:txBody>
+                  <a:tcPr marL="88900" marR="88900" marT="63500" marB="63500" anchor="ctr">
+                    <a:lnL w="9525" cap="flat" cmpd="sng" algn="ctr">
+                      <a:solidFill>
+                        <a:srgbClr val="D0D7DE"/>
+                      </a:solidFill>
+                      <a:prstDash val="solid"/>
+                    </a:lnL>
+                    <a:lnR w="9525" cap="flat" cmpd="sng" algn="ctr">
+                      <a:solidFill>
+                        <a:srgbClr val="D0D7DE"/>
+                      </a:solidFill>
+                      <a:prstDash val="solid"/>
+                    </a:lnR>
+                    <a:lnT w="9525" cap="flat" cmpd="sng" algn="ctr">
+                      <a:solidFill>
+                        <a:srgbClr val="D0D7DE"/>
+                      </a:solidFill>
+                      <a:prstDash val="solid"/>
+                    </a:lnT>
+                    <a:lnB w="9525" cap="flat" cmpd="sng" algn="ctr">
+                      <a:solidFill>
+                        <a:srgbClr val="D0D7DE"/>
+                      </a:solidFill>
+                      <a:prstDash val="solid"/>
+                    </a:lnB>
+                    <a:solidFill>
+                      <a:srgbClr val="FFFFFF"/>
+                    </a:solidFill>
+                  </a:tcPr>
+                </a:tc>
+                <a:tc>
+                  <a:txBody>
+                    <a:bodyPr wrap="square"/>
+                    <a:lstStyle/>
+                    <a:p>
+                      <a:r>
+                        <a:rPr sz="1300" b="0">
+                          <a:solidFill>
+                            <a:srgbClr val="1F2328"/>
+                          </a:solidFill>
+                          <a:latin typeface="Malgun Gothic"/>
+                        </a:rPr>
+                        <a:t>범위·제약·평가 지표 확정</a:t>
+                      </a:r>
+                    </a:p>
+                  </a:txBody>
+                  <a:tcPr marL="88900" marR="88900" marT="63500" marB="63500" anchor="ctr">
+                    <a:lnL w="9525" cap="flat" cmpd="sng" algn="ctr">
+                      <a:solidFill>
+                        <a:srgbClr val="D0D7DE"/>
+                      </a:solidFill>
+                      <a:prstDash val="solid"/>
+                    </a:lnL>
+                    <a:lnR w="9525" cap="flat" cmpd="sng" algn="ctr">
+                      <a:solidFill>
+                        <a:srgbClr val="D0D7DE"/>
+                      </a:solidFill>
+                      <a:prstDash val="solid"/>
+                    </a:lnR>
+                    <a:lnT w="9525" cap="flat" cmpd="sng" algn="ctr">
+                      <a:solidFill>
+                        <a:srgbClr val="D0D7DE"/>
+                      </a:solidFill>
+                      <a:prstDash val="solid"/>
+                    </a:lnT>
+                    <a:lnB w="9525" cap="flat" cmpd="sng" algn="ctr">
+                      <a:solidFill>
+                        <a:srgbClr val="D0D7DE"/>
+                      </a:solidFill>
+                      <a:prstDash val="solid"/>
+                    </a:lnB>
+                    <a:solidFill>
+                      <a:srgbClr val="FFFFFF"/>
+                    </a:solidFill>
+                  </a:tcPr>
+                </a:tc>
+              </a:tr>
+              <a:tr h="365760">
+                <a:tc>
+                  <a:txBody>
+                    <a:bodyPr wrap="square"/>
+                    <a:lstStyle/>
+                    <a:p>
+                      <a:r>
+                        <a:rPr sz="1300" b="0">
+                          <a:solidFill>
+                            <a:srgbClr val="1F2328"/>
+                          </a:solidFill>
+                          <a:latin typeface="Malgun Gothic"/>
+                        </a:rPr>
+                        <a:t>02~03</a:t>
+                      </a:r>
+                    </a:p>
+                  </a:txBody>
+                  <a:tcPr marL="88900" marR="88900" marT="63500" marB="63500" anchor="ctr">
+                    <a:lnL w="9525" cap="flat" cmpd="sng" algn="ctr">
+                      <a:solidFill>
+                        <a:srgbClr val="D0D7DE"/>
+                      </a:solidFill>
+                      <a:prstDash val="solid"/>
+                    </a:lnL>
+                    <a:lnR w="9525" cap="flat" cmpd="sng" algn="ctr">
+                      <a:solidFill>
+                        <a:srgbClr val="D0D7DE"/>
+                      </a:solidFill>
+                      <a:prstDash val="solid"/>
+                    </a:lnR>
+                    <a:lnT w="9525" cap="flat" cmpd="sng" algn="ctr">
+                      <a:solidFill>
+                        <a:srgbClr val="D0D7DE"/>
+                      </a:solidFill>
+                      <a:prstDash val="solid"/>
+                    </a:lnT>
+                    <a:lnB w="9525" cap="flat" cmpd="sng" algn="ctr">
+                      <a:solidFill>
+                        <a:srgbClr val="D0D7DE"/>
+                      </a:solidFill>
+                      <a:prstDash val="solid"/>
+                    </a:lnB>
+                    <a:solidFill>
+                      <a:srgbClr val="F6F8FA"/>
+                    </a:solidFill>
+                  </a:tcPr>
+                </a:tc>
+                <a:tc>
+                  <a:txBody>
+                    <a:bodyPr wrap="square"/>
+                    <a:lstStyle/>
+                    <a:p>
+                      <a:r>
+                        <a:rPr sz="1300" b="0">
+                          <a:solidFill>
+                            <a:srgbClr val="1F2328"/>
+                          </a:solidFill>
+                          <a:latin typeface="Malgun Gothic"/>
+                        </a:rPr>
+                        <a:t>VLM 인프라</a:t>
+                      </a:r>
+                    </a:p>
+                  </a:txBody>
+                  <a:tcPr marL="88900" marR="88900" marT="63500" marB="63500" anchor="ctr">
+                    <a:lnL w="9525" cap="flat" cmpd="sng" algn="ctr">
+                      <a:solidFill>
+                        <a:srgbClr val="D0D7DE"/>
+                      </a:solidFill>
+                      <a:prstDash val="solid"/>
+                    </a:lnL>
+                    <a:lnR w="9525" cap="flat" cmpd="sng" algn="ctr">
+                      <a:solidFill>
+                        <a:srgbClr val="D0D7DE"/>
+                      </a:solidFill>
+                      <a:prstDash val="solid"/>
+                    </a:lnR>
+                    <a:lnT w="9525" cap="flat" cmpd="sng" algn="ctr">
+                      <a:solidFill>
+                        <a:srgbClr val="D0D7DE"/>
+                      </a:solidFill>
+                      <a:prstDash val="solid"/>
+                    </a:lnT>
+                    <a:lnB w="9525" cap="flat" cmpd="sng" algn="ctr">
+                      <a:solidFill>
+                        <a:srgbClr val="D0D7DE"/>
+                      </a:solidFill>
+                      <a:prstDash val="solid"/>
+                    </a:lnB>
+                    <a:solidFill>
+                      <a:srgbClr val="F6F8FA"/>
+                    </a:solidFill>
+                  </a:tcPr>
+                </a:tc>
+                <a:tc>
+                  <a:txBody>
+                    <a:bodyPr wrap="square"/>
+                    <a:lstStyle/>
+                    <a:p>
+                      <a:r>
+                        <a:rPr sz="1300" b="0">
+                          <a:solidFill>
+                            <a:srgbClr val="1F2328"/>
+                          </a:solidFill>
+                          <a:latin typeface="Malgun Gothic"/>
+                        </a:rPr>
+                        <a:t>HCP 배포, VLM·OCR 5종 설치·비교, 통합 API</a:t>
+                      </a:r>
+                    </a:p>
+                  </a:txBody>
+                  <a:tcPr marL="88900" marR="88900" marT="63500" marB="63500" anchor="ctr">
+                    <a:lnL w="9525" cap="flat" cmpd="sng" algn="ctr">
+                      <a:solidFill>
+                        <a:srgbClr val="D0D7DE"/>
+                      </a:solidFill>
+                      <a:prstDash val="solid"/>
+                    </a:lnL>
+                    <a:lnR w="9525" cap="flat" cmpd="sng" algn="ctr">
+                      <a:solidFill>
+                        <a:srgbClr val="D0D7DE"/>
+                      </a:solidFill>
+                      <a:prstDash val="solid"/>
+                    </a:lnR>
+                    <a:lnT w="9525" cap="flat" cmpd="sng" algn="ctr">
+                      <a:solidFill>
+                        <a:srgbClr val="D0D7DE"/>
+                      </a:solidFill>
+                      <a:prstDash val="solid"/>
+                    </a:lnT>
+                    <a:lnB w="9525" cap="flat" cmpd="sng" algn="ctr">
+                      <a:solidFill>
+                        <a:srgbClr val="D0D7DE"/>
+                      </a:solidFill>
+                      <a:prstDash val="solid"/>
+                    </a:lnB>
+                    <a:solidFill>
+                      <a:srgbClr val="F6F8FA"/>
+                    </a:solidFill>
+                  </a:tcPr>
+                </a:tc>
+              </a:tr>
+              <a:tr h="365760">
+                <a:tc>
+                  <a:txBody>
+                    <a:bodyPr wrap="square"/>
+                    <a:lstStyle/>
+                    <a:p>
+                      <a:r>
+                        <a:rPr sz="1300" b="0">
+                          <a:solidFill>
+                            <a:srgbClr val="1F2328"/>
+                          </a:solidFill>
+                          <a:latin typeface="Malgun Gothic"/>
+                        </a:rPr>
+                        <a:t>03~05</a:t>
+                      </a:r>
+                    </a:p>
+                  </a:txBody>
+                  <a:tcPr marL="88900" marR="88900" marT="63500" marB="63500" anchor="ctr">
+                    <a:lnL w="9525" cap="flat" cmpd="sng" algn="ctr">
+                      <a:solidFill>
+                        <a:srgbClr val="D0D7DE"/>
+                      </a:solidFill>
+                      <a:prstDash val="solid"/>
+                    </a:lnL>
+                    <a:lnR w="9525" cap="flat" cmpd="sng" algn="ctr">
+                      <a:solidFill>
+                        <a:srgbClr val="D0D7DE"/>
+                      </a:solidFill>
+                      <a:prstDash val="solid"/>
+                    </a:lnR>
+                    <a:lnT w="9525" cap="flat" cmpd="sng" algn="ctr">
+                      <a:solidFill>
+                        <a:srgbClr val="D0D7DE"/>
+                      </a:solidFill>
+                      <a:prstDash val="solid"/>
+                    </a:lnT>
+                    <a:lnB w="9525" cap="flat" cmpd="sng" algn="ctr">
+                      <a:solidFill>
+                        <a:srgbClr val="D0D7DE"/>
+                      </a:solidFill>
+                      <a:prstDash val="solid"/>
+                    </a:lnB>
+                    <a:solidFill>
+                      <a:srgbClr val="FFFFFF"/>
+                    </a:solidFill>
+                  </a:tcPr>
+                </a:tc>
+                <a:tc>
+                  <a:txBody>
+                    <a:bodyPr wrap="square"/>
+                    <a:lstStyle/>
+                    <a:p>
+                      <a:r>
+                        <a:rPr sz="1300" b="0">
+                          <a:solidFill>
+                            <a:srgbClr val="1F2328"/>
+                          </a:solidFill>
+                          <a:latin typeface="Malgun Gothic"/>
+                        </a:rPr>
+                        <a:t>RCS 자동화 PoC</a:t>
+                      </a:r>
+                    </a:p>
+                  </a:txBody>
+                  <a:tcPr marL="88900" marR="88900" marT="63500" marB="63500" anchor="ctr">
+                    <a:lnL w="9525" cap="flat" cmpd="sng" algn="ctr">
+                      <a:solidFill>
+                        <a:srgbClr val="D0D7DE"/>
+                      </a:solidFill>
+                      <a:prstDash val="solid"/>
+                    </a:lnL>
+                    <a:lnR w="9525" cap="flat" cmpd="sng" algn="ctr">
+                      <a:solidFill>
+                        <a:srgbClr val="D0D7DE"/>
+                      </a:solidFill>
+                      <a:prstDash val="solid"/>
+                    </a:lnR>
+                    <a:lnT w="9525" cap="flat" cmpd="sng" algn="ctr">
+                      <a:solidFill>
+                        <a:srgbClr val="D0D7DE"/>
+                      </a:solidFill>
+                      <a:prstDash val="solid"/>
+                    </a:lnT>
+                    <a:lnB w="9525" cap="flat" cmpd="sng" algn="ctr">
+                      <a:solidFill>
+                        <a:srgbClr val="D0D7DE"/>
+                      </a:solidFill>
+                      <a:prstDash val="solid"/>
+                    </a:lnB>
+                    <a:solidFill>
+                      <a:srgbClr val="FFFFFF"/>
+                    </a:solidFill>
+                  </a:tcPr>
+                </a:tc>
+                <a:tc>
+                  <a:txBody>
+                    <a:bodyPr wrap="square"/>
+                    <a:lstStyle/>
+                    <a:p>
+                      <a:r>
+                        <a:rPr sz="1300" b="0">
+                          <a:solidFill>
+                            <a:srgbClr val="1F2328"/>
+                          </a:solidFill>
+                          <a:latin typeface="Malgun Gothic"/>
+                        </a:rPr>
+                        <a:t>coarse→fine→confirm, RCS 로그인~장비 선택 오피스 검증</a:t>
+                      </a:r>
+                    </a:p>
+                  </a:txBody>
+                  <a:tcPr marL="88900" marR="88900" marT="63500" marB="63500" anchor="ctr">
+                    <a:lnL w="9525" cap="flat" cmpd="sng" algn="ctr">
+                      <a:solidFill>
+                        <a:srgbClr val="D0D7DE"/>
+                      </a:solidFill>
+                      <a:prstDash val="solid"/>
+                    </a:lnL>
+                    <a:lnR w="9525" cap="flat" cmpd="sng" algn="ctr">
+                      <a:solidFill>
+                        <a:srgbClr val="D0D7DE"/>
+                      </a:solidFill>
+                      <a:prstDash val="solid"/>
+                    </a:lnR>
+                    <a:lnT w="9525" cap="flat" cmpd="sng" algn="ctr">
+                      <a:solidFill>
+                        <a:srgbClr val="D0D7DE"/>
+                      </a:solidFill>
+                      <a:prstDash val="solid"/>
+                    </a:lnT>
+                    <a:lnB w="9525" cap="flat" cmpd="sng" algn="ctr">
+                      <a:solidFill>
+                        <a:srgbClr val="D0D7DE"/>
+                      </a:solidFill>
+                      <a:prstDash val="solid"/>
+                    </a:lnB>
+                    <a:solidFill>
+                      <a:srgbClr val="FFFFFF"/>
+                    </a:solidFill>
+                  </a:tcPr>
+                </a:tc>
+              </a:tr>
+              <a:tr h="365760">
+                <a:tc>
+                  <a:txBody>
+                    <a:bodyPr wrap="square"/>
+                    <a:lstStyle/>
+                    <a:p>
+                      <a:r>
+                        <a:rPr sz="1300" b="0">
+                          <a:solidFill>
+                            <a:srgbClr val="1F2328"/>
+                          </a:solidFill>
+                          <a:latin typeface="Malgun Gothic"/>
+                        </a:rPr>
+                        <a:t>05~07</a:t>
+                      </a:r>
+                    </a:p>
+                  </a:txBody>
+                  <a:tcPr marL="88900" marR="88900" marT="63500" marB="63500" anchor="ctr">
+                    <a:lnL w="9525" cap="flat" cmpd="sng" algn="ctr">
+                      <a:solidFill>
+                        <a:srgbClr val="D0D7DE"/>
+                      </a:solidFill>
+                      <a:prstDash val="solid"/>
+                    </a:lnL>
+                    <a:lnR w="9525" cap="flat" cmpd="sng" algn="ctr">
+                      <a:solidFill>
+                        <a:srgbClr val="D0D7DE"/>
+                      </a:solidFill>
+                      <a:prstDash val="solid"/>
+                    </a:lnR>
+                    <a:lnT w="9525" cap="flat" cmpd="sng" algn="ctr">
+                      <a:solidFill>
+                        <a:srgbClr val="D0D7DE"/>
+                      </a:solidFill>
+                      <a:prstDash val="solid"/>
+                    </a:lnT>
+                    <a:lnB w="9525" cap="flat" cmpd="sng" algn="ctr">
+                      <a:solidFill>
+                        <a:srgbClr val="D0D7DE"/>
+                      </a:solidFill>
+                      <a:prstDash val="solid"/>
+                    </a:lnB>
+                    <a:solidFill>
+                      <a:srgbClr val="F6F8FA"/>
+                    </a:solidFill>
+                  </a:tcPr>
+                </a:tc>
+                <a:tc>
+                  <a:txBody>
+                    <a:bodyPr wrap="square"/>
+                    <a:lstStyle/>
+                    <a:p>
+                      <a:r>
+                        <a:rPr sz="1300" b="0">
+                          <a:solidFill>
+                            <a:srgbClr val="1F2328"/>
+                          </a:solidFill>
+                          <a:latin typeface="Malgun Gothic"/>
+                        </a:rPr>
+                        <a:t>CV 정확도 벤치</a:t>
+                      </a:r>
+                    </a:p>
+                  </a:txBody>
+                  <a:tcPr marL="88900" marR="88900" marT="63500" marB="63500" anchor="ctr">
+                    <a:lnL w="9525" cap="flat" cmpd="sng" algn="ctr">
+                      <a:solidFill>
+                        <a:srgbClr val="D0D7DE"/>
+                      </a:solidFill>
+                      <a:prstDash val="solid"/>
+                    </a:lnL>
+                    <a:lnR w="9525" cap="flat" cmpd="sng" algn="ctr">
+                      <a:solidFill>
+                        <a:srgbClr val="D0D7DE"/>
+                      </a:solidFill>
+                      <a:prstDash val="solid"/>
+                    </a:lnR>
+                    <a:lnT w="9525" cap="flat" cmpd="sng" algn="ctr">
+                      <a:solidFill>
+                        <a:srgbClr val="D0D7DE"/>
+                      </a:solidFill>
+                      <a:prstDash val="solid"/>
+                    </a:lnT>
+                    <a:lnB w="9525" cap="flat" cmpd="sng" algn="ctr">
+                      <a:solidFill>
+                        <a:srgbClr val="D0D7DE"/>
+                      </a:solidFill>
+                      <a:prstDash val="solid"/>
+                    </a:lnB>
+                    <a:solidFill>
+                      <a:srgbClr val="F6F8FA"/>
+                    </a:solidFill>
+                  </a:tcPr>
+                </a:tc>
+                <a:tc>
+                  <a:txBody>
+                    <a:bodyPr wrap="square"/>
+                    <a:lstStyle/>
+                    <a:p>
+                      <a:r>
+                        <a:rPr sz="1300" b="0">
+                          <a:solidFill>
+                            <a:srgbClr val="1F2328"/>
+                          </a:solidFill>
+                          <a:latin typeface="Malgun Gothic"/>
+                        </a:rPr>
+                        <a:t>rank-1 31.8% → 76.4%, 촬영 모드별 재평가 채택</a:t>
+                      </a:r>
+                    </a:p>
+                  </a:txBody>
+                  <a:tcPr marL="88900" marR="88900" marT="63500" marB="63500" anchor="ctr">
+                    <a:lnL w="9525" cap="flat" cmpd="sng" algn="ctr">
+                      <a:solidFill>
+                        <a:srgbClr val="D0D7DE"/>
+                      </a:solidFill>
+                      <a:prstDash val="solid"/>
+                    </a:lnL>
+                    <a:lnR w="9525" cap="flat" cmpd="sng" algn="ctr">
+                      <a:solidFill>
+                        <a:srgbClr val="D0D7DE"/>
+                      </a:solidFill>
+                      <a:prstDash val="solid"/>
+                    </a:lnR>
+                    <a:lnT w="9525" cap="flat" cmpd="sng" algn="ctr">
+                      <a:solidFill>
+                        <a:srgbClr val="D0D7DE"/>
+                      </a:solidFill>
+                      <a:prstDash val="solid"/>
+                    </a:lnT>
+                    <a:lnB w="9525" cap="flat" cmpd="sng" algn="ctr">
+                      <a:solidFill>
+                        <a:srgbClr val="D0D7DE"/>
+                      </a:solidFill>
+                      <a:prstDash val="solid"/>
+                    </a:lnB>
+                    <a:solidFill>
+                      <a:srgbClr val="F6F8FA"/>
+                    </a:solidFill>
+                  </a:tcPr>
+                </a:tc>
+              </a:tr>
+              <a:tr h="365760">
+                <a:tc>
+                  <a:txBody>
+                    <a:bodyPr wrap="square"/>
+                    <a:lstStyle/>
+                    <a:p>
+                      <a:r>
+                        <a:rPr sz="1300" b="0">
+                          <a:solidFill>
+                            <a:srgbClr val="1F2328"/>
+                          </a:solidFill>
+                          <a:latin typeface="Malgun Gothic"/>
+                        </a:rPr>
+                        <a:t>06~08</a:t>
+                      </a:r>
+                    </a:p>
+                  </a:txBody>
+                  <a:tcPr marL="88900" marR="88900" marT="63500" marB="63500" anchor="ctr">
+                    <a:lnL w="9525" cap="flat" cmpd="sng" algn="ctr">
+                      <a:solidFill>
+                        <a:srgbClr val="D0D7DE"/>
+                      </a:solidFill>
+                      <a:prstDash val="solid"/>
+                    </a:lnL>
+                    <a:lnR w="9525" cap="flat" cmpd="sng" algn="ctr">
+                      <a:solidFill>
+                        <a:srgbClr val="D0D7DE"/>
+                      </a:solidFill>
+                      <a:prstDash val="solid"/>
+                    </a:lnR>
+                    <a:lnT w="9525" cap="flat" cmpd="sng" algn="ctr">
+                      <a:solidFill>
+                        <a:srgbClr val="D0D7DE"/>
+                      </a:solidFill>
+                      <a:prstDash val="solid"/>
+                    </a:lnT>
+                    <a:lnB w="9525" cap="flat" cmpd="sng" algn="ctr">
+                      <a:solidFill>
+                        <a:srgbClr val="D0D7DE"/>
+                      </a:solidFill>
+                      <a:prstDash val="solid"/>
+                    </a:lnB>
+                    <a:solidFill>
+                      <a:srgbClr val="FFFFFF"/>
+                    </a:solidFill>
+                  </a:tcPr>
+                </a:tc>
+                <a:tc>
+                  <a:txBody>
+                    <a:bodyPr wrap="square"/>
+                    <a:lstStyle/>
+                    <a:p>
+                      <a:r>
+                        <a:rPr sz="1300" b="0">
+                          <a:solidFill>
+                            <a:srgbClr val="1F2328"/>
+                          </a:solidFill>
+                          <a:latin typeface="Malgun Gothic"/>
+                        </a:rPr>
+                        <a:t>실시간 루프</a:t>
+                      </a:r>
+                    </a:p>
+                  </a:txBody>
+                  <a:tcPr marL="88900" marR="88900" marT="63500" marB="63500" anchor="ctr">
+                    <a:lnL w="9525" cap="flat" cmpd="sng" algn="ctr">
+                      <a:solidFill>
+                        <a:srgbClr val="D0D7DE"/>
+                      </a:solidFill>
+                      <a:prstDash val="solid"/>
+                    </a:lnL>
+                    <a:lnR w="9525" cap="flat" cmpd="sng" algn="ctr">
+                      <a:solidFill>
+                        <a:srgbClr val="D0D7DE"/>
+                      </a:solidFill>
+                      <a:prstDash val="solid"/>
+                    </a:lnR>
+                    <a:lnT w="9525" cap="flat" cmpd="sng" algn="ctr">
+                      <a:solidFill>
+                        <a:srgbClr val="D0D7DE"/>
+                      </a:solidFill>
+                      <a:prstDash val="solid"/>
+                    </a:lnT>
+                    <a:lnB w="9525" cap="flat" cmpd="sng" algn="ctr">
+                      <a:solidFill>
+                        <a:srgbClr val="D0D7DE"/>
+                      </a:solidFill>
+                      <a:prstDash val="solid"/>
+                    </a:lnB>
+                    <a:solidFill>
+                      <a:srgbClr val="FFFFFF"/>
+                    </a:solidFill>
+                  </a:tcPr>
+                </a:tc>
+                <a:tc>
+                  <a:txBody>
+                    <a:bodyPr wrap="square"/>
+                    <a:lstStyle/>
+                    <a:p>
+                      <a:r>
+                        <a:rPr sz="1300" b="0">
+                          <a:solidFill>
+                            <a:srgbClr val="1F2328"/>
+                          </a:solidFill>
+                          <a:latin typeface="Malgun Gothic"/>
+                        </a:rPr>
+                        <a:t>알람 10초 수신, 감지~기록 end-to-end, 실장비 보정 개통(08-12)</a:t>
+                      </a:r>
+                    </a:p>
+                  </a:txBody>
+                  <a:tcPr marL="88900" marR="88900" marT="63500" marB="63500" anchor="ctr">
+                    <a:lnL w="9525" cap="flat" cmpd="sng" algn="ctr">
+                      <a:solidFill>
+                        <a:srgbClr val="D0D7DE"/>
+                      </a:solidFill>
+                      <a:prstDash val="solid"/>
+                    </a:lnL>
+                    <a:lnR w="9525" cap="flat" cmpd="sng" algn="ctr">
+                      <a:solidFill>
+                        <a:srgbClr val="D0D7DE"/>
+                      </a:solidFill>
+                      <a:prstDash val="solid"/>
+                    </a:lnR>
+                    <a:lnT w="9525" cap="flat" cmpd="sng" algn="ctr">
+                      <a:solidFill>
+                        <a:srgbClr val="D0D7DE"/>
+                      </a:solidFill>
+                      <a:prstDash val="solid"/>
+                    </a:lnT>
+                    <a:lnB w="9525" cap="flat" cmpd="sng" algn="ctr">
+                      <a:solidFill>
+                        <a:srgbClr val="D0D7DE"/>
+                      </a:solidFill>
+                      <a:prstDash val="solid"/>
+                    </a:lnB>
+                    <a:solidFill>
+                      <a:srgbClr val="FFFFFF"/>
+                    </a:solidFill>
+                  </a:tcPr>
+                </a:tc>
+              </a:tr>
+              <a:tr h="365760">
+                <a:tc>
+                  <a:txBody>
+                    <a:bodyPr wrap="square"/>
+                    <a:lstStyle/>
+                    <a:p>
+                      <a:r>
+                        <a:rPr sz="1300" b="0">
+                          <a:solidFill>
+                            <a:srgbClr val="1F2328"/>
+                          </a:solidFill>
+                          <a:latin typeface="Malgun Gothic"/>
+                        </a:rPr>
+                        <a:t>08~09</a:t>
+                      </a:r>
+                    </a:p>
+                  </a:txBody>
+                  <a:tcPr marL="88900" marR="88900" marT="63500" marB="63500" anchor="ctr">
+                    <a:lnL w="9525" cap="flat" cmpd="sng" algn="ctr">
+                      <a:solidFill>
+                        <a:srgbClr val="D0D7DE"/>
+                      </a:solidFill>
+                      <a:prstDash val="solid"/>
+                    </a:lnL>
+                    <a:lnR w="9525" cap="flat" cmpd="sng" algn="ctr">
+                      <a:solidFill>
+                        <a:srgbClr val="D0D7DE"/>
+                      </a:solidFill>
+                      <a:prstDash val="solid"/>
+                    </a:lnR>
+                    <a:lnT w="9525" cap="flat" cmpd="sng" algn="ctr">
+                      <a:solidFill>
+                        <a:srgbClr val="D0D7DE"/>
+                      </a:solidFill>
+                      <a:prstDash val="solid"/>
+                    </a:lnT>
+                    <a:lnB w="9525" cap="flat" cmpd="sng" algn="ctr">
+                      <a:solidFill>
+                        <a:srgbClr val="D0D7DE"/>
+                      </a:solidFill>
+                      <a:prstDash val="solid"/>
+                    </a:lnB>
+                    <a:solidFill>
+                      <a:srgbClr val="F6F8FA"/>
+                    </a:solidFill>
+                  </a:tcPr>
+                </a:tc>
+                <a:tc>
+                  <a:txBody>
+                    <a:bodyPr wrap="square"/>
+                    <a:lstStyle/>
+                    <a:p>
+                      <a:r>
+                        <a:rPr sz="1300" b="0">
+                          <a:solidFill>
+                            <a:srgbClr val="1F2328"/>
+                          </a:solidFill>
+                          <a:latin typeface="Malgun Gothic"/>
+                        </a:rPr>
+                        <a:t>기록 계층 + 실알람 완주</a:t>
+                      </a:r>
+                    </a:p>
+                  </a:txBody>
+                  <a:tcPr marL="88900" marR="88900" marT="63500" marB="63500" anchor="ctr">
+                    <a:lnL w="9525" cap="flat" cmpd="sng" algn="ctr">
+                      <a:solidFill>
+                        <a:srgbClr val="D0D7DE"/>
+                      </a:solidFill>
+                      <a:prstDash val="solid"/>
+                    </a:lnL>
+                    <a:lnR w="9525" cap="flat" cmpd="sng" algn="ctr">
+                      <a:solidFill>
+                        <a:srgbClr val="D0D7DE"/>
+                      </a:solidFill>
+                      <a:prstDash val="solid"/>
+                    </a:lnR>
+                    <a:lnT w="9525" cap="flat" cmpd="sng" algn="ctr">
+                      <a:solidFill>
+                        <a:srgbClr val="D0D7DE"/>
+                      </a:solidFill>
+                      <a:prstDash val="solid"/>
+                    </a:lnT>
+                    <a:lnB w="9525" cap="flat" cmpd="sng" algn="ctr">
+                      <a:solidFill>
+                        <a:srgbClr val="D0D7DE"/>
+                      </a:solidFill>
+                      <a:prstDash val="solid"/>
+                    </a:lnB>
+                    <a:solidFill>
+                      <a:srgbClr val="F6F8FA"/>
+                    </a:solidFill>
+                  </a:tcPr>
+                </a:tc>
+                <a:tc>
+                  <a:txBody>
+                    <a:bodyPr wrap="square"/>
+                    <a:lstStyle/>
+                    <a:p>
+                      <a:r>
+                        <a:rPr sz="1300" b="0">
+                          <a:solidFill>
+                            <a:srgbClr val="1F2328"/>
+                          </a:solidFill>
+                          <a:latin typeface="Malgun Gothic"/>
+                        </a:rPr>
+                        <a:t>Recovery Episode, 실알람 3건 1분 미만 실측, 전용 PC 확보·26대 배치 준비</a:t>
+                      </a:r>
+                    </a:p>
+                  </a:txBody>
+                  <a:tcPr marL="88900" marR="88900" marT="63500" marB="63500" anchor="ctr">
+                    <a:lnL w="9525" cap="flat" cmpd="sng" algn="ctr">
+                      <a:solidFill>
+                        <a:srgbClr val="D0D7DE"/>
+                      </a:solidFill>
+                      <a:prstDash val="solid"/>
+                    </a:lnL>
+                    <a:lnR w="9525" cap="flat" cmpd="sng" algn="ctr">
+                      <a:solidFill>
+                        <a:srgbClr val="D0D7DE"/>
+                      </a:solidFill>
+                      <a:prstDash val="solid"/>
+                    </a:lnR>
+                    <a:lnT w="9525" cap="flat" cmpd="sng" algn="ctr">
+                      <a:solidFill>
+                        <a:srgbClr val="D0D7DE"/>
+                      </a:solidFill>
+                      <a:prstDash val="solid"/>
+                    </a:lnT>
+                    <a:lnB w="9525" cap="flat" cmpd="sng" algn="ctr">
+                      <a:solidFill>
+                        <a:srgbClr val="D0D7DE"/>
+                      </a:solidFill>
+                      <a:prstDash val="solid"/>
+                    </a:lnB>
+                    <a:solidFill>
+                      <a:srgbClr val="F6F8FA"/>
+                    </a:solidFill>
+                  </a:tcPr>
+                </a:tc>
+              </a:tr>
+            </a:tbl>
+          </a:graphicData>
+        </a:graphic>
+      </p:graphicFrame>
+    </p:spTree>
+  </p:cSld>
+  <p:clrMapOvr>
+    <a:masterClrMapping/>
+  </p:clrMapOvr>
+</p:sld>
+</file>
+
+<file path=ppt/slides/slide7.xml><?xml version="1.0" encoding="utf-8"?>
+<p:sld xmlns:a="http://schemas.openxmlformats.org/drawingml/2006/main" xmlns:p="http://schemas.openxmlformats.org/presentationml/2006/main" xmlns:r="http://schemas.openxmlformats.org/officeDocument/2006/relationships">
+  <p:cSld>
+    <p:spTree>
+      <p:nvGrpSpPr>
+        <p:cNvPr id="1" name=""/>
+        <p:cNvGrpSpPr/>
+        <p:nvPr/>
+      </p:nvGrpSpPr>
+      <p:grpSpPr/>
+      <p:sp>
+        <p:nvSpPr>
+          <p:cNvPr id="2" name="TextBox 1"/>
+          <p:cNvSpPr txBox="1"/>
+          <p:nvPr/>
+        </p:nvSpPr>
+        <p:spPr>
+          <a:xfrm>
+            <a:off x="457200" y="320040"/>
+            <a:ext cx="11277295" cy="548640"/>
+          </a:xfrm>
+          <a:prstGeom prst="rect">
+            <a:avLst/>
+          </a:prstGeom>
+          <a:noFill/>
+        </p:spPr>
+        <p:txBody>
+          <a:bodyPr wrap="none" lIns="0">
+            <a:spAutoFit/>
+          </a:bodyPr>
+          <a:lstStyle/>
+          <a:p>
+            <a:r>
+              <a:rPr sz="2400" b="1">
+                <a:solidFill>
+                  <a:srgbClr val="1E3A8A"/>
+                </a:solidFill>
+                <a:latin typeface="Malgun Gothic"/>
+              </a:rPr>
+              <a:t>2.5 Before / After 요약</a:t>
             </a:r>
           </a:p>
         </p:txBody>
@@ -13205,2669 +15868,6 @@
                     </a:lnB>
                     <a:solidFill>
                       <a:srgbClr val="FFFFFF"/>
-                    </a:solidFill>
-                  </a:tcPr>
-                </a:tc>
-              </a:tr>
-            </a:tbl>
-          </a:graphicData>
-        </a:graphic>
-      </p:graphicFrame>
-    </p:spTree>
-  </p:cSld>
-  <p:clrMapOvr>
-    <a:masterClrMapping/>
-  </p:clrMapOvr>
-</p:sld>
-</file>
-
-<file path=ppt/slides/slide5.xml><?xml version="1.0" encoding="utf-8"?>
-<p:sld xmlns:a="http://schemas.openxmlformats.org/drawingml/2006/main" xmlns:p="http://schemas.openxmlformats.org/presentationml/2006/main" xmlns:r="http://schemas.openxmlformats.org/officeDocument/2006/relationships">
-  <p:cSld>
-    <p:spTree>
-      <p:nvGrpSpPr>
-        <p:cNvPr id="1" name=""/>
-        <p:cNvGrpSpPr/>
-        <p:nvPr/>
-      </p:nvGrpSpPr>
-      <p:grpSpPr/>
-      <p:sp>
-        <p:nvSpPr>
-          <p:cNvPr id="2" name="TextBox 1"/>
-          <p:cNvSpPr txBox="1"/>
-          <p:nvPr/>
-        </p:nvSpPr>
-        <p:spPr>
-          <a:xfrm>
-            <a:off x="457200" y="320040"/>
-            <a:ext cx="11277295" cy="548640"/>
-          </a:xfrm>
-          <a:prstGeom prst="rect">
-            <a:avLst/>
-          </a:prstGeom>
-          <a:noFill/>
-        </p:spPr>
-        <p:txBody>
-          <a:bodyPr wrap="none" lIns="0">
-            <a:spAutoFit/>
-          </a:bodyPr>
-          <a:lstStyle/>
-          <a:p>
-            <a:r>
-              <a:rPr sz="2400" b="1">
-                <a:solidFill>
-                  <a:srgbClr val="1E3A8A"/>
-                </a:solidFill>
-                <a:latin typeface="Malgun Gothic"/>
-              </a:rPr>
-              <a:t>2.2 AI 적용 과정과 구현한 기능</a:t>
-            </a:r>
-          </a:p>
-        </p:txBody>
-      </p:sp>
-      <p:sp>
-        <p:nvSpPr>
-          <p:cNvPr id="3" name="Rectangle 2"/>
-          <p:cNvSpPr/>
-          <p:nvPr/>
-        </p:nvSpPr>
-        <p:spPr>
-          <a:xfrm>
-            <a:off x="457200" y="914400"/>
-            <a:ext cx="11277295" cy="25400"/>
-          </a:xfrm>
-          <a:prstGeom prst="rect">
-            <a:avLst/>
-          </a:prstGeom>
-          <a:solidFill>
-            <a:srgbClr val="1E3A8A"/>
-          </a:solidFill>
-          <a:ln>
-            <a:noFill/>
-          </a:ln>
-          <a:effectLst/>
-        </p:spPr>
-        <p:style>
-          <a:lnRef idx="1">
-            <a:schemeClr val="accent1"/>
-          </a:lnRef>
-          <a:fillRef idx="3">
-            <a:schemeClr val="accent1"/>
-          </a:fillRef>
-          <a:effectRef idx="2">
-            <a:schemeClr val="accent1"/>
-          </a:effectRef>
-          <a:fontRef idx="minor">
-            <a:schemeClr val="lt1"/>
-          </a:fontRef>
-        </p:style>
-        <p:txBody>
-          <a:bodyPr rtlCol="0" anchor="ctr"/>
-          <a:lstStyle/>
-          <a:p>
-            <a:pPr algn="ctr"/>
-          </a:p>
-        </p:txBody>
-      </p:sp>
-      <p:graphicFrame>
-        <p:nvGraphicFramePr>
-          <p:cNvPr id="4" name="Table 3"/>
-          <p:cNvGraphicFramePr>
-            <a:graphicFrameLocks noGrp="1"/>
-          </p:cNvGraphicFramePr>
-          <p:nvPr/>
-        </p:nvGraphicFramePr>
-        <p:xfrm>
-          <a:off x="457200" y="1097280"/>
-          <a:ext cx="11277294" cy="2926080"/>
-        </p:xfrm>
-        <a:graphic>
-          <a:graphicData uri="http://schemas.openxmlformats.org/drawingml/2006/table">
-            <a:tbl>
-              <a:tblPr firstRow="1" bandRow="0">
-                <a:tableStyleId>{5C22544A-7EE6-4342-B048-85BDC9FD1C3A}</a:tableStyleId>
-              </a:tblPr>
-              <a:tblGrid>
-                <a:gridCol w="1879549"/>
-                <a:gridCol w="9397745"/>
-              </a:tblGrid>
-              <a:tr h="365760">
-                <a:tc>
-                  <a:txBody>
-                    <a:bodyPr wrap="square"/>
-                    <a:lstStyle/>
-                    <a:p>
-                      <a:r>
-                        <a:rPr sz="1350" b="1">
-                          <a:solidFill>
-                            <a:srgbClr val="FFFFFF"/>
-                          </a:solidFill>
-                          <a:latin typeface="Malgun Gothic"/>
-                        </a:rPr>
-                        <a:t>기능</a:t>
-                      </a:r>
-                    </a:p>
-                  </a:txBody>
-                  <a:tcPr marL="88900" marR="88900" marT="63500" marB="63500" anchor="ctr">
-                    <a:lnL w="9525" cap="flat" cmpd="sng" algn="ctr">
-                      <a:solidFill>
-                        <a:srgbClr val="D0D7DE"/>
-                      </a:solidFill>
-                      <a:prstDash val="solid"/>
-                    </a:lnL>
-                    <a:lnR w="9525" cap="flat" cmpd="sng" algn="ctr">
-                      <a:solidFill>
-                        <a:srgbClr val="D0D7DE"/>
-                      </a:solidFill>
-                      <a:prstDash val="solid"/>
-                    </a:lnR>
-                    <a:lnT w="9525" cap="flat" cmpd="sng" algn="ctr">
-                      <a:solidFill>
-                        <a:srgbClr val="D0D7DE"/>
-                      </a:solidFill>
-                      <a:prstDash val="solid"/>
-                    </a:lnT>
-                    <a:lnB w="9525" cap="flat" cmpd="sng" algn="ctr">
-                      <a:solidFill>
-                        <a:srgbClr val="D0D7DE"/>
-                      </a:solidFill>
-                      <a:prstDash val="solid"/>
-                    </a:lnB>
-                    <a:solidFill>
-                      <a:srgbClr val="1E3A8A"/>
-                    </a:solidFill>
-                  </a:tcPr>
-                </a:tc>
-                <a:tc>
-                  <a:txBody>
-                    <a:bodyPr wrap="square"/>
-                    <a:lstStyle/>
-                    <a:p>
-                      <a:r>
-                        <a:rPr sz="1350" b="1">
-                          <a:solidFill>
-                            <a:srgbClr val="FFFFFF"/>
-                          </a:solidFill>
-                          <a:latin typeface="Malgun Gothic"/>
-                        </a:rPr>
-                        <a:t>구현 내용</a:t>
-                      </a:r>
-                    </a:p>
-                  </a:txBody>
-                  <a:tcPr marL="88900" marR="88900" marT="63500" marB="63500" anchor="ctr">
-                    <a:lnL w="9525" cap="flat" cmpd="sng" algn="ctr">
-                      <a:solidFill>
-                        <a:srgbClr val="D0D7DE"/>
-                      </a:solidFill>
-                      <a:prstDash val="solid"/>
-                    </a:lnL>
-                    <a:lnR w="9525" cap="flat" cmpd="sng" algn="ctr">
-                      <a:solidFill>
-                        <a:srgbClr val="D0D7DE"/>
-                      </a:solidFill>
-                      <a:prstDash val="solid"/>
-                    </a:lnR>
-                    <a:lnT w="9525" cap="flat" cmpd="sng" algn="ctr">
-                      <a:solidFill>
-                        <a:srgbClr val="D0D7DE"/>
-                      </a:solidFill>
-                      <a:prstDash val="solid"/>
-                    </a:lnT>
-                    <a:lnB w="9525" cap="flat" cmpd="sng" algn="ctr">
-                      <a:solidFill>
-                        <a:srgbClr val="D0D7DE"/>
-                      </a:solidFill>
-                      <a:prstDash val="solid"/>
-                    </a:lnB>
-                    <a:solidFill>
-                      <a:srgbClr val="1E3A8A"/>
-                    </a:solidFill>
-                  </a:tcPr>
-                </a:tc>
-              </a:tr>
-              <a:tr h="365760">
-                <a:tc>
-                  <a:txBody>
-                    <a:bodyPr wrap="square"/>
-                    <a:lstStyle/>
-                    <a:p>
-                      <a:r>
-                        <a:rPr sz="1300" b="0">
-                          <a:solidFill>
-                            <a:srgbClr val="1F2328"/>
-                          </a:solidFill>
-                          <a:latin typeface="Malgun Gothic"/>
-                        </a:rPr>
-                        <a:t>알람 감지·사전 고지</a:t>
-                      </a:r>
-                    </a:p>
-                  </a:txBody>
-                  <a:tcPr marL="88900" marR="88900" marT="63500" marB="63500" anchor="ctr">
-                    <a:lnL w="9525" cap="flat" cmpd="sng" algn="ctr">
-                      <a:solidFill>
-                        <a:srgbClr val="D0D7DE"/>
-                      </a:solidFill>
-                      <a:prstDash val="solid"/>
-                    </a:lnL>
-                    <a:lnR w="9525" cap="flat" cmpd="sng" algn="ctr">
-                      <a:solidFill>
-                        <a:srgbClr val="D0D7DE"/>
-                      </a:solidFill>
-                      <a:prstDash val="solid"/>
-                    </a:lnR>
-                    <a:lnT w="9525" cap="flat" cmpd="sng" algn="ctr">
-                      <a:solidFill>
-                        <a:srgbClr val="D0D7DE"/>
-                      </a:solidFill>
-                      <a:prstDash val="solid"/>
-                    </a:lnT>
-                    <a:lnB w="9525" cap="flat" cmpd="sng" algn="ctr">
-                      <a:solidFill>
-                        <a:srgbClr val="D0D7DE"/>
-                      </a:solidFill>
-                      <a:prstDash val="solid"/>
-                    </a:lnB>
-                    <a:solidFill>
-                      <a:srgbClr val="FFFFFF"/>
-                    </a:solidFill>
-                  </a:tcPr>
-                </a:tc>
-                <a:tc>
-                  <a:txBody>
-                    <a:bodyPr wrap="square"/>
-                    <a:lstStyle/>
-                    <a:p>
-                      <a:r>
-                        <a:rPr sz="1300" b="0">
-                          <a:solidFill>
-                            <a:srgbClr val="1F2328"/>
-                          </a:solidFill>
-                          <a:latin typeface="Malgun Gothic"/>
-                        </a:rPr>
-                        <a:t>10초 주기로 알람을 조회해 Align Fail만 선별, 신규 발생 시 1회 발동. 담당자에게 "AI 가 대응 시작" 큐브 알림</a:t>
-                      </a:r>
-                    </a:p>
-                  </a:txBody>
-                  <a:tcPr marL="88900" marR="88900" marT="63500" marB="63500" anchor="ctr">
-                    <a:lnL w="9525" cap="flat" cmpd="sng" algn="ctr">
-                      <a:solidFill>
-                        <a:srgbClr val="D0D7DE"/>
-                      </a:solidFill>
-                      <a:prstDash val="solid"/>
-                    </a:lnL>
-                    <a:lnR w="9525" cap="flat" cmpd="sng" algn="ctr">
-                      <a:solidFill>
-                        <a:srgbClr val="D0D7DE"/>
-                      </a:solidFill>
-                      <a:prstDash val="solid"/>
-                    </a:lnR>
-                    <a:lnT w="9525" cap="flat" cmpd="sng" algn="ctr">
-                      <a:solidFill>
-                        <a:srgbClr val="D0D7DE"/>
-                      </a:solidFill>
-                      <a:prstDash val="solid"/>
-                    </a:lnT>
-                    <a:lnB w="9525" cap="flat" cmpd="sng" algn="ctr">
-                      <a:solidFill>
-                        <a:srgbClr val="D0D7DE"/>
-                      </a:solidFill>
-                      <a:prstDash val="solid"/>
-                    </a:lnB>
-                    <a:solidFill>
-                      <a:srgbClr val="FFFFFF"/>
-                    </a:solidFill>
-                  </a:tcPr>
-                </a:tc>
-              </a:tr>
-              <a:tr h="365760">
-                <a:tc>
-                  <a:txBody>
-                    <a:bodyPr wrap="square"/>
-                    <a:lstStyle/>
-                    <a:p>
-                      <a:r>
-                        <a:rPr sz="1300" b="0">
-                          <a:solidFill>
-                            <a:srgbClr val="1F2328"/>
-                          </a:solidFill>
-                          <a:latin typeface="Malgun Gothic"/>
-                        </a:rPr>
-                        <a:t>RCS 자동 접속</a:t>
-                      </a:r>
-                    </a:p>
-                  </a:txBody>
-                  <a:tcPr marL="88900" marR="88900" marT="63500" marB="63500" anchor="ctr">
-                    <a:lnL w="9525" cap="flat" cmpd="sng" algn="ctr">
-                      <a:solidFill>
-                        <a:srgbClr val="D0D7DE"/>
-                      </a:solidFill>
-                      <a:prstDash val="solid"/>
-                    </a:lnL>
-                    <a:lnR w="9525" cap="flat" cmpd="sng" algn="ctr">
-                      <a:solidFill>
-                        <a:srgbClr val="D0D7DE"/>
-                      </a:solidFill>
-                      <a:prstDash val="solid"/>
-                    </a:lnR>
-                    <a:lnT w="9525" cap="flat" cmpd="sng" algn="ctr">
-                      <a:solidFill>
-                        <a:srgbClr val="D0D7DE"/>
-                      </a:solidFill>
-                      <a:prstDash val="solid"/>
-                    </a:lnT>
-                    <a:lnB w="9525" cap="flat" cmpd="sng" algn="ctr">
-                      <a:solidFill>
-                        <a:srgbClr val="D0D7DE"/>
-                      </a:solidFill>
-                      <a:prstDash val="solid"/>
-                    </a:lnB>
-                    <a:solidFill>
-                      <a:srgbClr val="F6F8FA"/>
-                    </a:solidFill>
-                  </a:tcPr>
-                </a:tc>
-                <a:tc>
-                  <a:txBody>
-                    <a:bodyPr wrap="square"/>
-                    <a:lstStyle/>
-                    <a:p>
-                      <a:r>
-                        <a:rPr sz="1300" b="0">
-                          <a:solidFill>
-                            <a:srgbClr val="1F2328"/>
-                          </a:solidFill>
-                          <a:latin typeface="Malgun Gothic"/>
-                        </a:rPr>
-                        <a:t>RCS 실행·로그인·장비 목록에서 알람 장비 선택·접속. RCS가 꺼져 있거나 로그아웃 상태면 재실행·재로그인</a:t>
-                      </a:r>
-                    </a:p>
-                  </a:txBody>
-                  <a:tcPr marL="88900" marR="88900" marT="63500" marB="63500" anchor="ctr">
-                    <a:lnL w="9525" cap="flat" cmpd="sng" algn="ctr">
-                      <a:solidFill>
-                        <a:srgbClr val="D0D7DE"/>
-                      </a:solidFill>
-                      <a:prstDash val="solid"/>
-                    </a:lnL>
-                    <a:lnR w="9525" cap="flat" cmpd="sng" algn="ctr">
-                      <a:solidFill>
-                        <a:srgbClr val="D0D7DE"/>
-                      </a:solidFill>
-                      <a:prstDash val="solid"/>
-                    </a:lnR>
-                    <a:lnT w="9525" cap="flat" cmpd="sng" algn="ctr">
-                      <a:solidFill>
-                        <a:srgbClr val="D0D7DE"/>
-                      </a:solidFill>
-                      <a:prstDash val="solid"/>
-                    </a:lnT>
-                    <a:lnB w="9525" cap="flat" cmpd="sng" algn="ctr">
-                      <a:solidFill>
-                        <a:srgbClr val="D0D7DE"/>
-                      </a:solidFill>
-                      <a:prstDash val="solid"/>
-                    </a:lnB>
-                    <a:solidFill>
-                      <a:srgbClr val="F6F8FA"/>
-                    </a:solidFill>
-                  </a:tcPr>
-                </a:tc>
-              </a:tr>
-              <a:tr h="365760">
-                <a:tc>
-                  <a:txBody>
-                    <a:bodyPr wrap="square"/>
-                    <a:lstStyle/>
-                    <a:p>
-                      <a:r>
-                        <a:rPr sz="1300" b="0">
-                          <a:solidFill>
-                            <a:srgbClr val="1F2328"/>
-                          </a:solidFill>
-                          <a:latin typeface="Malgun Gothic"/>
-                        </a:rPr>
-                        <a:t>화면 판독</a:t>
-                      </a:r>
-                    </a:p>
-                  </a:txBody>
-                  <a:tcPr marL="88900" marR="88900" marT="63500" marB="63500" anchor="ctr">
-                    <a:lnL w="9525" cap="flat" cmpd="sng" algn="ctr">
-                      <a:solidFill>
-                        <a:srgbClr val="D0D7DE"/>
-                      </a:solidFill>
-                      <a:prstDash val="solid"/>
-                    </a:lnL>
-                    <a:lnR w="9525" cap="flat" cmpd="sng" algn="ctr">
-                      <a:solidFill>
-                        <a:srgbClr val="D0D7DE"/>
-                      </a:solidFill>
-                      <a:prstDash val="solid"/>
-                    </a:lnR>
-                    <a:lnT w="9525" cap="flat" cmpd="sng" algn="ctr">
-                      <a:solidFill>
-                        <a:srgbClr val="D0D7DE"/>
-                      </a:solidFill>
-                      <a:prstDash val="solid"/>
-                    </a:lnT>
-                    <a:lnB w="9525" cap="flat" cmpd="sng" algn="ctr">
-                      <a:solidFill>
-                        <a:srgbClr val="D0D7DE"/>
-                      </a:solidFill>
-                      <a:prstDash val="solid"/>
-                    </a:lnB>
-                    <a:solidFill>
-                      <a:srgbClr val="FFFFFF"/>
-                    </a:solidFill>
-                  </a:tcPr>
-                </a:tc>
-                <a:tc>
-                  <a:txBody>
-                    <a:bodyPr wrap="square"/>
-                    <a:lstStyle/>
-                    <a:p>
-                      <a:r>
-                        <a:rPr sz="1300" b="0">
-                          <a:solidFill>
-                            <a:srgbClr val="1F2328"/>
-                          </a:solidFill>
-                          <a:latin typeface="Malgun Gothic"/>
-                        </a:rPr>
-                        <a:t>라이브 SEM 영역 검출, 촬영 모드(OM/SEM) 판독, 타인 점유 여부 판별</a:t>
-                      </a:r>
-                    </a:p>
-                  </a:txBody>
-                  <a:tcPr marL="88900" marR="88900" marT="63500" marB="63500" anchor="ctr">
-                    <a:lnL w="9525" cap="flat" cmpd="sng" algn="ctr">
-                      <a:solidFill>
-                        <a:srgbClr val="D0D7DE"/>
-                      </a:solidFill>
-                      <a:prstDash val="solid"/>
-                    </a:lnL>
-                    <a:lnR w="9525" cap="flat" cmpd="sng" algn="ctr">
-                      <a:solidFill>
-                        <a:srgbClr val="D0D7DE"/>
-                      </a:solidFill>
-                      <a:prstDash val="solid"/>
-                    </a:lnR>
-                    <a:lnT w="9525" cap="flat" cmpd="sng" algn="ctr">
-                      <a:solidFill>
-                        <a:srgbClr val="D0D7DE"/>
-                      </a:solidFill>
-                      <a:prstDash val="solid"/>
-                    </a:lnT>
-                    <a:lnB w="9525" cap="flat" cmpd="sng" algn="ctr">
-                      <a:solidFill>
-                        <a:srgbClr val="D0D7DE"/>
-                      </a:solidFill>
-                      <a:prstDash val="solid"/>
-                    </a:lnB>
-                    <a:solidFill>
-                      <a:srgbClr val="FFFFFF"/>
-                    </a:solidFill>
-                  </a:tcPr>
-                </a:tc>
-              </a:tr>
-              <a:tr h="365760">
-                <a:tc>
-                  <a:txBody>
-                    <a:bodyPr wrap="square"/>
-                    <a:lstStyle/>
-                    <a:p>
-                      <a:r>
-                        <a:rPr sz="1300" b="0">
-                          <a:solidFill>
-                            <a:srgbClr val="1F2328"/>
-                          </a:solidFill>
-                          <a:latin typeface="Malgun Gothic"/>
-                        </a:rPr>
-                        <a:t>자동 재정렬</a:t>
-                      </a:r>
-                    </a:p>
-                  </a:txBody>
-                  <a:tcPr marL="88900" marR="88900" marT="63500" marB="63500" anchor="ctr">
-                    <a:lnL w="9525" cap="flat" cmpd="sng" algn="ctr">
-                      <a:solidFill>
-                        <a:srgbClr val="D0D7DE"/>
-                      </a:solidFill>
-                      <a:prstDash val="solid"/>
-                    </a:lnL>
-                    <a:lnR w="9525" cap="flat" cmpd="sng" algn="ctr">
-                      <a:solidFill>
-                        <a:srgbClr val="D0D7DE"/>
-                      </a:solidFill>
-                      <a:prstDash val="solid"/>
-                    </a:lnR>
-                    <a:lnT w="9525" cap="flat" cmpd="sng" algn="ctr">
-                      <a:solidFill>
-                        <a:srgbClr val="D0D7DE"/>
-                      </a:solidFill>
-                      <a:prstDash val="solid"/>
-                    </a:lnT>
-                    <a:lnB w="9525" cap="flat" cmpd="sng" algn="ctr">
-                      <a:solidFill>
-                        <a:srgbClr val="D0D7DE"/>
-                      </a:solidFill>
-                      <a:prstDash val="solid"/>
-                    </a:lnB>
-                    <a:solidFill>
-                      <a:srgbClr val="F6F8FA"/>
-                    </a:solidFill>
-                  </a:tcPr>
-                </a:tc>
-                <a:tc>
-                  <a:txBody>
-                    <a:bodyPr wrap="square"/>
-                    <a:lstStyle/>
-                    <a:p>
-                      <a:r>
-                        <a:rPr sz="1300" b="0">
-                          <a:solidFill>
-                            <a:srgbClr val="1F2328"/>
-                          </a:solidFill>
-                          <a:latin typeface="Malgun Gothic"/>
-                        </a:rPr>
-                        <a:t>모드에 맞는 기준 이미지(성공 사례 종합, 부족하면 등록 이미지)로 CV 매칭 → 재정렬 좌표 산출 → 화면 재조정. 첫 화면에서 못 찾으면 배율을 낮춰 주변을 격자 탐색</a:t>
-                      </a:r>
-                    </a:p>
-                  </a:txBody>
-                  <a:tcPr marL="88900" marR="88900" marT="63500" marB="63500" anchor="ctr">
-                    <a:lnL w="9525" cap="flat" cmpd="sng" algn="ctr">
-                      <a:solidFill>
-                        <a:srgbClr val="D0D7DE"/>
-                      </a:solidFill>
-                      <a:prstDash val="solid"/>
-                    </a:lnL>
-                    <a:lnR w="9525" cap="flat" cmpd="sng" algn="ctr">
-                      <a:solidFill>
-                        <a:srgbClr val="D0D7DE"/>
-                      </a:solidFill>
-                      <a:prstDash val="solid"/>
-                    </a:lnR>
-                    <a:lnT w="9525" cap="flat" cmpd="sng" algn="ctr">
-                      <a:solidFill>
-                        <a:srgbClr val="D0D7DE"/>
-                      </a:solidFill>
-                      <a:prstDash val="solid"/>
-                    </a:lnT>
-                    <a:lnB w="9525" cap="flat" cmpd="sng" algn="ctr">
-                      <a:solidFill>
-                        <a:srgbClr val="D0D7DE"/>
-                      </a:solidFill>
-                      <a:prstDash val="solid"/>
-                    </a:lnB>
-                    <a:solidFill>
-                      <a:srgbClr val="F6F8FA"/>
-                    </a:solidFill>
-                  </a:tcPr>
-                </a:tc>
-              </a:tr>
-              <a:tr h="365760">
-                <a:tc>
-                  <a:txBody>
-                    <a:bodyPr wrap="square"/>
-                    <a:lstStyle/>
-                    <a:p>
-                      <a:r>
-                        <a:rPr sz="1300" b="0">
-                          <a:solidFill>
-                            <a:srgbClr val="1F2328"/>
-                          </a:solidFill>
-                          <a:latin typeface="Malgun Gothic"/>
-                        </a:rPr>
-                        <a:t>확정·완료 감시·종료</a:t>
-                      </a:r>
-                    </a:p>
-                  </a:txBody>
-                  <a:tcPr marL="88900" marR="88900" marT="63500" marB="63500" anchor="ctr">
-                    <a:lnL w="9525" cap="flat" cmpd="sng" algn="ctr">
-                      <a:solidFill>
-                        <a:srgbClr val="D0D7DE"/>
-                      </a:solidFill>
-                      <a:prstDash val="solid"/>
-                    </a:lnL>
-                    <a:lnR w="9525" cap="flat" cmpd="sng" algn="ctr">
-                      <a:solidFill>
-                        <a:srgbClr val="D0D7DE"/>
-                      </a:solidFill>
-                      <a:prstDash val="solid"/>
-                    </a:lnR>
-                    <a:lnT w="9525" cap="flat" cmpd="sng" algn="ctr">
-                      <a:solidFill>
-                        <a:srgbClr val="D0D7DE"/>
-                      </a:solidFill>
-                      <a:prstDash val="solid"/>
-                    </a:lnT>
-                    <a:lnB w="9525" cap="flat" cmpd="sng" algn="ctr">
-                      <a:solidFill>
-                        <a:srgbClr val="D0D7DE"/>
-                      </a:solidFill>
-                      <a:prstDash val="solid"/>
-                    </a:lnB>
-                    <a:solidFill>
-                      <a:srgbClr val="FFFFFF"/>
-                    </a:solidFill>
-                  </a:tcPr>
-                </a:tc>
-                <a:tc>
-                  <a:txBody>
-                    <a:bodyPr wrap="square"/>
-                    <a:lstStyle/>
-                    <a:p>
-                      <a:r>
-                        <a:rPr sz="1300" b="0">
-                          <a:solidFill>
-                            <a:srgbClr val="1F2328"/>
-                          </a:solidFill>
-                          <a:latin typeface="Malgun Gothic"/>
-                        </a:rPr>
-                        <a:t>재조정 결과 확정(현 단계 담당자 OK, 향후 Agent) → 측정 재개 감시 → tool 창 자동 종료</a:t>
-                      </a:r>
-                    </a:p>
-                  </a:txBody>
-                  <a:tcPr marL="88900" marR="88900" marT="63500" marB="63500" anchor="ctr">
-                    <a:lnL w="9525" cap="flat" cmpd="sng" algn="ctr">
-                      <a:solidFill>
-                        <a:srgbClr val="D0D7DE"/>
-                      </a:solidFill>
-                      <a:prstDash val="solid"/>
-                    </a:lnL>
-                    <a:lnR w="9525" cap="flat" cmpd="sng" algn="ctr">
-                      <a:solidFill>
-                        <a:srgbClr val="D0D7DE"/>
-                      </a:solidFill>
-                      <a:prstDash val="solid"/>
-                    </a:lnR>
-                    <a:lnT w="9525" cap="flat" cmpd="sng" algn="ctr">
-                      <a:solidFill>
-                        <a:srgbClr val="D0D7DE"/>
-                      </a:solidFill>
-                      <a:prstDash val="solid"/>
-                    </a:lnT>
-                    <a:lnB w="9525" cap="flat" cmpd="sng" algn="ctr">
-                      <a:solidFill>
-                        <a:srgbClr val="D0D7DE"/>
-                      </a:solidFill>
-                      <a:prstDash val="solid"/>
-                    </a:lnB>
-                    <a:solidFill>
-                      <a:srgbClr val="FFFFFF"/>
-                    </a:solidFill>
-                  </a:tcPr>
-                </a:tc>
-              </a:tr>
-              <a:tr h="365760">
-                <a:tc>
-                  <a:txBody>
-                    <a:bodyPr wrap="square"/>
-                    <a:lstStyle/>
-                    <a:p>
-                      <a:r>
-                        <a:rPr sz="1300" b="0">
-                          <a:solidFill>
-                            <a:srgbClr val="1F2328"/>
-                          </a:solidFill>
-                          <a:latin typeface="Malgun Gothic"/>
-                        </a:rPr>
-                        <a:t>예외 알림</a:t>
-                      </a:r>
-                    </a:p>
-                  </a:txBody>
-                  <a:tcPr marL="88900" marR="88900" marT="63500" marB="63500" anchor="ctr">
-                    <a:lnL w="9525" cap="flat" cmpd="sng" algn="ctr">
-                      <a:solidFill>
-                        <a:srgbClr val="D0D7DE"/>
-                      </a:solidFill>
-                      <a:prstDash val="solid"/>
-                    </a:lnL>
-                    <a:lnR w="9525" cap="flat" cmpd="sng" algn="ctr">
-                      <a:solidFill>
-                        <a:srgbClr val="D0D7DE"/>
-                      </a:solidFill>
-                      <a:prstDash val="solid"/>
-                    </a:lnR>
-                    <a:lnT w="9525" cap="flat" cmpd="sng" algn="ctr">
-                      <a:solidFill>
-                        <a:srgbClr val="D0D7DE"/>
-                      </a:solidFill>
-                      <a:prstDash val="solid"/>
-                    </a:lnT>
-                    <a:lnB w="9525" cap="flat" cmpd="sng" algn="ctr">
-                      <a:solidFill>
-                        <a:srgbClr val="D0D7DE"/>
-                      </a:solidFill>
-                      <a:prstDash val="solid"/>
-                    </a:lnB>
-                    <a:solidFill>
-                      <a:srgbClr val="F6F8FA"/>
-                    </a:solidFill>
-                  </a:tcPr>
-                </a:tc>
-                <a:tc>
-                  <a:txBody>
-                    <a:bodyPr wrap="square"/>
-                    <a:lstStyle/>
-                    <a:p>
-                      <a:r>
-                        <a:rPr sz="1300" b="0">
-                          <a:solidFill>
-                            <a:srgbClr val="1F2328"/>
-                          </a:solidFill>
-                          <a:latin typeface="Malgun Gothic"/>
-                        </a:rPr>
-                        <a:t>보정 불가·모드 불명·위치 모호·타인 점유면 원인·요구 행동·매칭 점수를 담아 큐브 알림. 설정 문제와 Recipe 재등록 검토를 구분해 안내</a:t>
-                      </a:r>
-                    </a:p>
-                  </a:txBody>
-                  <a:tcPr marL="88900" marR="88900" marT="63500" marB="63500" anchor="ctr">
-                    <a:lnL w="9525" cap="flat" cmpd="sng" algn="ctr">
-                      <a:solidFill>
-                        <a:srgbClr val="D0D7DE"/>
-                      </a:solidFill>
-                      <a:prstDash val="solid"/>
-                    </a:lnL>
-                    <a:lnR w="9525" cap="flat" cmpd="sng" algn="ctr">
-                      <a:solidFill>
-                        <a:srgbClr val="D0D7DE"/>
-                      </a:solidFill>
-                      <a:prstDash val="solid"/>
-                    </a:lnR>
-                    <a:lnT w="9525" cap="flat" cmpd="sng" algn="ctr">
-                      <a:solidFill>
-                        <a:srgbClr val="D0D7DE"/>
-                      </a:solidFill>
-                      <a:prstDash val="solid"/>
-                    </a:lnT>
-                    <a:lnB w="9525" cap="flat" cmpd="sng" algn="ctr">
-                      <a:solidFill>
-                        <a:srgbClr val="D0D7DE"/>
-                      </a:solidFill>
-                      <a:prstDash val="solid"/>
-                    </a:lnB>
-                    <a:solidFill>
-                      <a:srgbClr val="F6F8FA"/>
-                    </a:solidFill>
-                  </a:tcPr>
-                </a:tc>
-              </a:tr>
-              <a:tr h="365760">
-                <a:tc>
-                  <a:txBody>
-                    <a:bodyPr wrap="square"/>
-                    <a:lstStyle/>
-                    <a:p>
-                      <a:r>
-                        <a:rPr sz="1300" b="0">
-                          <a:solidFill>
-                            <a:srgbClr val="1F2328"/>
-                          </a:solidFill>
-                          <a:latin typeface="Malgun Gothic"/>
-                        </a:rPr>
-                        <a:t>기록</a:t>
-                      </a:r>
-                    </a:p>
-                  </a:txBody>
-                  <a:tcPr marL="88900" marR="88900" marT="63500" marB="63500" anchor="ctr">
-                    <a:lnL w="9525" cap="flat" cmpd="sng" algn="ctr">
-                      <a:solidFill>
-                        <a:srgbClr val="D0D7DE"/>
-                      </a:solidFill>
-                      <a:prstDash val="solid"/>
-                    </a:lnL>
-                    <a:lnR w="9525" cap="flat" cmpd="sng" algn="ctr">
-                      <a:solidFill>
-                        <a:srgbClr val="D0D7DE"/>
-                      </a:solidFill>
-                      <a:prstDash val="solid"/>
-                    </a:lnR>
-                    <a:lnT w="9525" cap="flat" cmpd="sng" algn="ctr">
-                      <a:solidFill>
-                        <a:srgbClr val="D0D7DE"/>
-                      </a:solidFill>
-                      <a:prstDash val="solid"/>
-                    </a:lnT>
-                    <a:lnB w="9525" cap="flat" cmpd="sng" algn="ctr">
-                      <a:solidFill>
-                        <a:srgbClr val="D0D7DE"/>
-                      </a:solidFill>
-                      <a:prstDash val="solid"/>
-                    </a:lnB>
-                    <a:solidFill>
-                      <a:srgbClr val="FFFFFF"/>
-                    </a:solidFill>
-                  </a:tcPr>
-                </a:tc>
-                <a:tc>
-                  <a:txBody>
-                    <a:bodyPr wrap="square"/>
-                    <a:lstStyle/>
-                    <a:p>
-                      <a:r>
-                        <a:rPr sz="1300" b="0">
-                          <a:solidFill>
-                            <a:srgbClr val="1F2328"/>
-                          </a:solidFill>
-                          <a:latin typeface="Malgun Gothic"/>
-                        </a:rPr>
-                        <a:t>접속 즉시 상시 녹화, 실패 시점 화면 증거, 대응 1건 = 기록 1줄(시도 횟수·판정 근거·결과). 재등록 검토 후보 Recipe 목록 산출</a:t>
-                      </a:r>
-                    </a:p>
-                  </a:txBody>
-                  <a:tcPr marL="88900" marR="88900" marT="63500" marB="63500" anchor="ctr">
-                    <a:lnL w="9525" cap="flat" cmpd="sng" algn="ctr">
-                      <a:solidFill>
-                        <a:srgbClr val="D0D7DE"/>
-                      </a:solidFill>
-                      <a:prstDash val="solid"/>
-                    </a:lnL>
-                    <a:lnR w="9525" cap="flat" cmpd="sng" algn="ctr">
-                      <a:solidFill>
-                        <a:srgbClr val="D0D7DE"/>
-                      </a:solidFill>
-                      <a:prstDash val="solid"/>
-                    </a:lnR>
-                    <a:lnT w="9525" cap="flat" cmpd="sng" algn="ctr">
-                      <a:solidFill>
-                        <a:srgbClr val="D0D7DE"/>
-                      </a:solidFill>
-                      <a:prstDash val="solid"/>
-                    </a:lnT>
-                    <a:lnB w="9525" cap="flat" cmpd="sng" algn="ctr">
-                      <a:solidFill>
-                        <a:srgbClr val="D0D7DE"/>
-                      </a:solidFill>
-                      <a:prstDash val="solid"/>
-                    </a:lnB>
-                    <a:solidFill>
-                      <a:srgbClr val="FFFFFF"/>
-                    </a:solidFill>
-                  </a:tcPr>
-                </a:tc>
-              </a:tr>
-            </a:tbl>
-          </a:graphicData>
-        </a:graphic>
-      </p:graphicFrame>
-    </p:spTree>
-  </p:cSld>
-  <p:clrMapOvr>
-    <a:masterClrMapping/>
-  </p:clrMapOvr>
-</p:sld>
-</file>
-
-<file path=ppt/slides/slide6.xml><?xml version="1.0" encoding="utf-8"?>
-<p:sld xmlns:a="http://schemas.openxmlformats.org/drawingml/2006/main" xmlns:p="http://schemas.openxmlformats.org/presentationml/2006/main" xmlns:r="http://schemas.openxmlformats.org/officeDocument/2006/relationships">
-  <p:cSld>
-    <p:spTree>
-      <p:nvGrpSpPr>
-        <p:cNvPr id="1" name=""/>
-        <p:cNvGrpSpPr/>
-        <p:nvPr/>
-      </p:nvGrpSpPr>
-      <p:grpSpPr/>
-      <p:sp>
-        <p:nvSpPr>
-          <p:cNvPr id="2" name="TextBox 1"/>
-          <p:cNvSpPr txBox="1"/>
-          <p:nvPr/>
-        </p:nvSpPr>
-        <p:spPr>
-          <a:xfrm>
-            <a:off x="457200" y="320040"/>
-            <a:ext cx="11277295" cy="548640"/>
-          </a:xfrm>
-          <a:prstGeom prst="rect">
-            <a:avLst/>
-          </a:prstGeom>
-          <a:noFill/>
-        </p:spPr>
-        <p:txBody>
-          <a:bodyPr wrap="none" lIns="0">
-            <a:spAutoFit/>
-          </a:bodyPr>
-          <a:lstStyle/>
-          <a:p>
-            <a:r>
-              <a:rPr sz="2400" b="1">
-                <a:solidFill>
-                  <a:srgbClr val="1E3A8A"/>
-                </a:solidFill>
-                <a:latin typeface="Malgun Gothic"/>
-              </a:rPr>
-              <a:t>2.3 난이도와 극복</a:t>
-            </a:r>
-          </a:p>
-        </p:txBody>
-      </p:sp>
-      <p:sp>
-        <p:nvSpPr>
-          <p:cNvPr id="3" name="Rectangle 2"/>
-          <p:cNvSpPr/>
-          <p:nvPr/>
-        </p:nvSpPr>
-        <p:spPr>
-          <a:xfrm>
-            <a:off x="457200" y="914400"/>
-            <a:ext cx="11277295" cy="25400"/>
-          </a:xfrm>
-          <a:prstGeom prst="rect">
-            <a:avLst/>
-          </a:prstGeom>
-          <a:solidFill>
-            <a:srgbClr val="1E3A8A"/>
-          </a:solidFill>
-          <a:ln>
-            <a:noFill/>
-          </a:ln>
-          <a:effectLst/>
-        </p:spPr>
-        <p:style>
-          <a:lnRef idx="1">
-            <a:schemeClr val="accent1"/>
-          </a:lnRef>
-          <a:fillRef idx="3">
-            <a:schemeClr val="accent1"/>
-          </a:fillRef>
-          <a:effectRef idx="2">
-            <a:schemeClr val="accent1"/>
-          </a:effectRef>
-          <a:fontRef idx="minor">
-            <a:schemeClr val="lt1"/>
-          </a:fontRef>
-        </p:style>
-        <p:txBody>
-          <a:bodyPr rtlCol="0" anchor="ctr"/>
-          <a:lstStyle/>
-          <a:p>
-            <a:pPr algn="ctr"/>
-          </a:p>
-        </p:txBody>
-      </p:sp>
-      <p:graphicFrame>
-        <p:nvGraphicFramePr>
-          <p:cNvPr id="4" name="Table 3"/>
-          <p:cNvGraphicFramePr>
-            <a:graphicFrameLocks noGrp="1"/>
-          </p:cNvGraphicFramePr>
-          <p:nvPr/>
-        </p:nvGraphicFramePr>
-        <p:xfrm>
-          <a:off x="457200" y="1097280"/>
-          <a:ext cx="11277294" cy="2194560"/>
-        </p:xfrm>
-        <a:graphic>
-          <a:graphicData uri="http://schemas.openxmlformats.org/drawingml/2006/table">
-            <a:tbl>
-              <a:tblPr firstRow="1" bandRow="0">
-                <a:tableStyleId>{5C22544A-7EE6-4342-B048-85BDC9FD1C3A}</a:tableStyleId>
-              </a:tblPr>
-              <a:tblGrid>
-                <a:gridCol w="4833126"/>
-                <a:gridCol w="6444168"/>
-              </a:tblGrid>
-              <a:tr h="365760">
-                <a:tc>
-                  <a:txBody>
-                    <a:bodyPr wrap="square"/>
-                    <a:lstStyle/>
-                    <a:p>
-                      <a:r>
-                        <a:rPr sz="1350" b="1">
-                          <a:solidFill>
-                            <a:srgbClr val="FFFFFF"/>
-                          </a:solidFill>
-                          <a:latin typeface="Malgun Gothic"/>
-                        </a:rPr>
-                        <a:t>난이도</a:t>
-                      </a:r>
-                    </a:p>
-                  </a:txBody>
-                  <a:tcPr marL="88900" marR="88900" marT="63500" marB="63500" anchor="ctr">
-                    <a:lnL w="9525" cap="flat" cmpd="sng" algn="ctr">
-                      <a:solidFill>
-                        <a:srgbClr val="D0D7DE"/>
-                      </a:solidFill>
-                      <a:prstDash val="solid"/>
-                    </a:lnL>
-                    <a:lnR w="9525" cap="flat" cmpd="sng" algn="ctr">
-                      <a:solidFill>
-                        <a:srgbClr val="D0D7DE"/>
-                      </a:solidFill>
-                      <a:prstDash val="solid"/>
-                    </a:lnR>
-                    <a:lnT w="9525" cap="flat" cmpd="sng" algn="ctr">
-                      <a:solidFill>
-                        <a:srgbClr val="D0D7DE"/>
-                      </a:solidFill>
-                      <a:prstDash val="solid"/>
-                    </a:lnT>
-                    <a:lnB w="9525" cap="flat" cmpd="sng" algn="ctr">
-                      <a:solidFill>
-                        <a:srgbClr val="D0D7DE"/>
-                      </a:solidFill>
-                      <a:prstDash val="solid"/>
-                    </a:lnB>
-                    <a:solidFill>
-                      <a:srgbClr val="1E3A8A"/>
-                    </a:solidFill>
-                  </a:tcPr>
-                </a:tc>
-                <a:tc>
-                  <a:txBody>
-                    <a:bodyPr wrap="square"/>
-                    <a:lstStyle/>
-                    <a:p>
-                      <a:r>
-                        <a:rPr sz="1350" b="1">
-                          <a:solidFill>
-                            <a:srgbClr val="FFFFFF"/>
-                          </a:solidFill>
-                          <a:latin typeface="Malgun Gothic"/>
-                        </a:rPr>
-                        <a:t>극복 방식</a:t>
-                      </a:r>
-                    </a:p>
-                  </a:txBody>
-                  <a:tcPr marL="88900" marR="88900" marT="63500" marB="63500" anchor="ctr">
-                    <a:lnL w="9525" cap="flat" cmpd="sng" algn="ctr">
-                      <a:solidFill>
-                        <a:srgbClr val="D0D7DE"/>
-                      </a:solidFill>
-                      <a:prstDash val="solid"/>
-                    </a:lnL>
-                    <a:lnR w="9525" cap="flat" cmpd="sng" algn="ctr">
-                      <a:solidFill>
-                        <a:srgbClr val="D0D7DE"/>
-                      </a:solidFill>
-                      <a:prstDash val="solid"/>
-                    </a:lnR>
-                    <a:lnT w="9525" cap="flat" cmpd="sng" algn="ctr">
-                      <a:solidFill>
-                        <a:srgbClr val="D0D7DE"/>
-                      </a:solidFill>
-                      <a:prstDash val="solid"/>
-                    </a:lnT>
-                    <a:lnB w="9525" cap="flat" cmpd="sng" algn="ctr">
-                      <a:solidFill>
-                        <a:srgbClr val="D0D7DE"/>
-                      </a:solidFill>
-                      <a:prstDash val="solid"/>
-                    </a:lnB>
-                    <a:solidFill>
-                      <a:srgbClr val="1E3A8A"/>
-                    </a:solidFill>
-                  </a:tcPr>
-                </a:tc>
-              </a:tr>
-              <a:tr h="365760">
-                <a:tc>
-                  <a:txBody>
-                    <a:bodyPr wrap="square"/>
-                    <a:lstStyle/>
-                    <a:p>
-                      <a:r>
-                        <a:rPr sz="1300" b="0">
-                          <a:solidFill>
-                            <a:srgbClr val="1F2328"/>
-                          </a:solidFill>
-                          <a:latin typeface="Malgun Gothic"/>
-                        </a:rPr>
-                        <a:t>계측 클라이언트가 표준 UI가 아니라 기존 자동화 도구가 버튼을 인식하지 못함</a:t>
-                      </a:r>
-                    </a:p>
-                  </a:txBody>
-                  <a:tcPr marL="88900" marR="88900" marT="63500" marB="63500" anchor="ctr">
-                    <a:lnL w="9525" cap="flat" cmpd="sng" algn="ctr">
-                      <a:solidFill>
-                        <a:srgbClr val="D0D7DE"/>
-                      </a:solidFill>
-                      <a:prstDash val="solid"/>
-                    </a:lnL>
-                    <a:lnR w="9525" cap="flat" cmpd="sng" algn="ctr">
-                      <a:solidFill>
-                        <a:srgbClr val="D0D7DE"/>
-                      </a:solidFill>
-                      <a:prstDash val="solid"/>
-                    </a:lnR>
-                    <a:lnT w="9525" cap="flat" cmpd="sng" algn="ctr">
-                      <a:solidFill>
-                        <a:srgbClr val="D0D7DE"/>
-                      </a:solidFill>
-                      <a:prstDash val="solid"/>
-                    </a:lnT>
-                    <a:lnB w="9525" cap="flat" cmpd="sng" algn="ctr">
-                      <a:solidFill>
-                        <a:srgbClr val="D0D7DE"/>
-                      </a:solidFill>
-                      <a:prstDash val="solid"/>
-                    </a:lnB>
-                    <a:solidFill>
-                      <a:srgbClr val="FFFFFF"/>
-                    </a:solidFill>
-                  </a:tcPr>
-                </a:tc>
-                <a:tc>
-                  <a:txBody>
-                    <a:bodyPr wrap="square"/>
-                    <a:lstStyle/>
-                    <a:p>
-                      <a:r>
-                        <a:rPr sz="1300" b="0">
-                          <a:solidFill>
-                            <a:srgbClr val="1F2328"/>
-                          </a:solidFill>
-                          <a:latin typeface="Malgun Gothic"/>
-                        </a:rPr>
-                        <a:t>화면 이미지를 보고 위치를 찾는 VLM 으로 전환. coarse → fine 2단계 + OCR 확인으로 클릭 신뢰도 99%</a:t>
-                      </a:r>
-                    </a:p>
-                  </a:txBody>
-                  <a:tcPr marL="88900" marR="88900" marT="63500" marB="63500" anchor="ctr">
-                    <a:lnL w="9525" cap="flat" cmpd="sng" algn="ctr">
-                      <a:solidFill>
-                        <a:srgbClr val="D0D7DE"/>
-                      </a:solidFill>
-                      <a:prstDash val="solid"/>
-                    </a:lnL>
-                    <a:lnR w="9525" cap="flat" cmpd="sng" algn="ctr">
-                      <a:solidFill>
-                        <a:srgbClr val="D0D7DE"/>
-                      </a:solidFill>
-                      <a:prstDash val="solid"/>
-                    </a:lnR>
-                    <a:lnT w="9525" cap="flat" cmpd="sng" algn="ctr">
-                      <a:solidFill>
-                        <a:srgbClr val="D0D7DE"/>
-                      </a:solidFill>
-                      <a:prstDash val="solid"/>
-                    </a:lnT>
-                    <a:lnB w="9525" cap="flat" cmpd="sng" algn="ctr">
-                      <a:solidFill>
-                        <a:srgbClr val="D0D7DE"/>
-                      </a:solidFill>
-                      <a:prstDash val="solid"/>
-                    </a:lnB>
-                    <a:solidFill>
-                      <a:srgbClr val="FFFFFF"/>
-                    </a:solidFill>
-                  </a:tcPr>
-                </a:tc>
-              </a:tr>
-              <a:tr h="365760">
-                <a:tc>
-                  <a:txBody>
-                    <a:bodyPr wrap="square"/>
-                    <a:lstStyle/>
-                    <a:p>
-                      <a:r>
-                        <a:rPr sz="1300" b="0">
-                          <a:solidFill>
-                            <a:srgbClr val="1F2328"/>
-                          </a:solidFill>
-                          <a:latin typeface="Malgun Gothic"/>
-                        </a:rPr>
-                        <a:t>Align Key가 공정 변동으로 매번 조금씩 달라 픽셀 동일성을 가정할 수 없음</a:t>
-                      </a:r>
-                    </a:p>
-                  </a:txBody>
-                  <a:tcPr marL="88900" marR="88900" marT="63500" marB="63500" anchor="ctr">
-                    <a:lnL w="9525" cap="flat" cmpd="sng" algn="ctr">
-                      <a:solidFill>
-                        <a:srgbClr val="D0D7DE"/>
-                      </a:solidFill>
-                      <a:prstDash val="solid"/>
-                    </a:lnL>
-                    <a:lnR w="9525" cap="flat" cmpd="sng" algn="ctr">
-                      <a:solidFill>
-                        <a:srgbClr val="D0D7DE"/>
-                      </a:solidFill>
-                      <a:prstDash val="solid"/>
-                    </a:lnR>
-                    <a:lnT w="9525" cap="flat" cmpd="sng" algn="ctr">
-                      <a:solidFill>
-                        <a:srgbClr val="D0D7DE"/>
-                      </a:solidFill>
-                      <a:prstDash val="solid"/>
-                    </a:lnT>
-                    <a:lnB w="9525" cap="flat" cmpd="sng" algn="ctr">
-                      <a:solidFill>
-                        <a:srgbClr val="D0D7DE"/>
-                      </a:solidFill>
-                      <a:prstDash val="solid"/>
-                    </a:lnB>
-                    <a:solidFill>
-                      <a:srgbClr val="F6F8FA"/>
-                    </a:solidFill>
-                  </a:tcPr>
-                </a:tc>
-                <a:tc>
-                  <a:txBody>
-                    <a:bodyPr wrap="square"/>
-                    <a:lstStyle/>
-                    <a:p>
-                      <a:r>
-                        <a:rPr sz="1300" b="0">
-                          <a:solidFill>
-                            <a:srgbClr val="1F2328"/>
-                          </a:solidFill>
-                          <a:latin typeface="Malgun Gothic"/>
-                        </a:rPr>
-                        <a:t>구조·기하 기반 매칭에 여러 매칭 방식을 종합하고, 기준 이미지를 최근 성공 사례 종합으로 바꿔 지금의 웨이퍼 외관을 따라감</a:t>
-                      </a:r>
-                    </a:p>
-                  </a:txBody>
-                  <a:tcPr marL="88900" marR="88900" marT="63500" marB="63500" anchor="ctr">
-                    <a:lnL w="9525" cap="flat" cmpd="sng" algn="ctr">
-                      <a:solidFill>
-                        <a:srgbClr val="D0D7DE"/>
-                      </a:solidFill>
-                      <a:prstDash val="solid"/>
-                    </a:lnL>
-                    <a:lnR w="9525" cap="flat" cmpd="sng" algn="ctr">
-                      <a:solidFill>
-                        <a:srgbClr val="D0D7DE"/>
-                      </a:solidFill>
-                      <a:prstDash val="solid"/>
-                    </a:lnR>
-                    <a:lnT w="9525" cap="flat" cmpd="sng" algn="ctr">
-                      <a:solidFill>
-                        <a:srgbClr val="D0D7DE"/>
-                      </a:solidFill>
-                      <a:prstDash val="solid"/>
-                    </a:lnT>
-                    <a:lnB w="9525" cap="flat" cmpd="sng" algn="ctr">
-                      <a:solidFill>
-                        <a:srgbClr val="D0D7DE"/>
-                      </a:solidFill>
-                      <a:prstDash val="solid"/>
-                    </a:lnB>
-                    <a:solidFill>
-                      <a:srgbClr val="F6F8FA"/>
-                    </a:solidFill>
-                  </a:tcPr>
-                </a:tc>
-              </a:tr>
-              <a:tr h="365760">
-                <a:tc>
-                  <a:txBody>
-                    <a:bodyPr wrap="square"/>
-                    <a:lstStyle/>
-                    <a:p>
-                      <a:r>
-                        <a:rPr sz="1300" b="0">
-                          <a:solidFill>
-                            <a:srgbClr val="1F2328"/>
-                          </a:solidFill>
-                          <a:latin typeface="Malgun Gothic"/>
-                        </a:rPr>
-                        <a:t>고배율 SEM 화면은 대부분 반복 패턴이라 가짜 후보가 많음</a:t>
-                      </a:r>
-                    </a:p>
-                  </a:txBody>
-                  <a:tcPr marL="88900" marR="88900" marT="63500" marB="63500" anchor="ctr">
-                    <a:lnL w="9525" cap="flat" cmpd="sng" algn="ctr">
-                      <a:solidFill>
-                        <a:srgbClr val="D0D7DE"/>
-                      </a:solidFill>
-                      <a:prstDash val="solid"/>
-                    </a:lnL>
-                    <a:lnR w="9525" cap="flat" cmpd="sng" algn="ctr">
-                      <a:solidFill>
-                        <a:srgbClr val="D0D7DE"/>
-                      </a:solidFill>
-                      <a:prstDash val="solid"/>
-                    </a:lnR>
-                    <a:lnT w="9525" cap="flat" cmpd="sng" algn="ctr">
-                      <a:solidFill>
-                        <a:srgbClr val="D0D7DE"/>
-                      </a:solidFill>
-                      <a:prstDash val="solid"/>
-                    </a:lnT>
-                    <a:lnB w="9525" cap="flat" cmpd="sng" algn="ctr">
-                      <a:solidFill>
-                        <a:srgbClr val="D0D7DE"/>
-                      </a:solidFill>
-                      <a:prstDash val="solid"/>
-                    </a:lnB>
-                    <a:solidFill>
-                      <a:srgbClr val="FFFFFF"/>
-                    </a:solidFill>
-                  </a:tcPr>
-                </a:tc>
-                <a:tc>
-                  <a:txBody>
-                    <a:bodyPr wrap="square"/>
-                    <a:lstStyle/>
-                    <a:p>
-                      <a:r>
-                        <a:rPr sz="1300" b="0">
-                          <a:solidFill>
-                            <a:srgbClr val="1F2328"/>
-                          </a:solidFill>
-                          <a:latin typeface="Malgun Gothic"/>
-                        </a:rPr>
-                        <a:t>촬영 모드를 화면에서 읽어 모드별로 기준 이미지와 후보 평가 방식을 바꿈. 그래도 남는 실패의 약 87%는 정답이 후보에 없는 유형이라 Align Key 재등록 권고 목록으로 현업과 검토</a:t>
-                      </a:r>
-                    </a:p>
-                  </a:txBody>
-                  <a:tcPr marL="88900" marR="88900" marT="63500" marB="63500" anchor="ctr">
-                    <a:lnL w="9525" cap="flat" cmpd="sng" algn="ctr">
-                      <a:solidFill>
-                        <a:srgbClr val="D0D7DE"/>
-                      </a:solidFill>
-                      <a:prstDash val="solid"/>
-                    </a:lnL>
-                    <a:lnR w="9525" cap="flat" cmpd="sng" algn="ctr">
-                      <a:solidFill>
-                        <a:srgbClr val="D0D7DE"/>
-                      </a:solidFill>
-                      <a:prstDash val="solid"/>
-                    </a:lnR>
-                    <a:lnT w="9525" cap="flat" cmpd="sng" algn="ctr">
-                      <a:solidFill>
-                        <a:srgbClr val="D0D7DE"/>
-                      </a:solidFill>
-                      <a:prstDash val="solid"/>
-                    </a:lnT>
-                    <a:lnB w="9525" cap="flat" cmpd="sng" algn="ctr">
-                      <a:solidFill>
-                        <a:srgbClr val="D0D7DE"/>
-                      </a:solidFill>
-                      <a:prstDash val="solid"/>
-                    </a:lnB>
-                    <a:solidFill>
-                      <a:srgbClr val="FFFFFF"/>
-                    </a:solidFill>
-                  </a:tcPr>
-                </a:tc>
-              </a:tr>
-              <a:tr h="365760">
-                <a:tc>
-                  <a:txBody>
-                    <a:bodyPr wrap="square"/>
-                    <a:lstStyle/>
-                    <a:p>
-                      <a:r>
-                        <a:rPr sz="1300" b="0">
-                          <a:solidFill>
-                            <a:srgbClr val="1F2328"/>
-                          </a:solidFill>
-                          <a:latin typeface="Malgun Gothic"/>
-                        </a:rPr>
-                        <a:t>라이브 영상이 계속 바뀌는 화면에서 AI가 오해 없이 정확히 눌러야 함</a:t>
-                      </a:r>
-                    </a:p>
-                  </a:txBody>
-                  <a:tcPr marL="88900" marR="88900" marT="63500" marB="63500" anchor="ctr">
-                    <a:lnL w="9525" cap="flat" cmpd="sng" algn="ctr">
-                      <a:solidFill>
-                        <a:srgbClr val="D0D7DE"/>
-                      </a:solidFill>
-                      <a:prstDash val="solid"/>
-                    </a:lnL>
-                    <a:lnR w="9525" cap="flat" cmpd="sng" algn="ctr">
-                      <a:solidFill>
-                        <a:srgbClr val="D0D7DE"/>
-                      </a:solidFill>
-                      <a:prstDash val="solid"/>
-                    </a:lnR>
-                    <a:lnT w="9525" cap="flat" cmpd="sng" algn="ctr">
-                      <a:solidFill>
-                        <a:srgbClr val="D0D7DE"/>
-                      </a:solidFill>
-                      <a:prstDash val="solid"/>
-                    </a:lnT>
-                    <a:lnB w="9525" cap="flat" cmpd="sng" algn="ctr">
-                      <a:solidFill>
-                        <a:srgbClr val="D0D7DE"/>
-                      </a:solidFill>
-                      <a:prstDash val="solid"/>
-                    </a:lnB>
-                    <a:solidFill>
-                      <a:srgbClr val="F6F8FA"/>
-                    </a:solidFill>
-                  </a:tcPr>
-                </a:tc>
-                <a:tc>
-                  <a:txBody>
-                    <a:bodyPr wrap="square"/>
-                    <a:lstStyle/>
-                    <a:p>
-                      <a:r>
-                        <a:rPr sz="1300" b="0">
-                          <a:solidFill>
-                            <a:srgbClr val="1F2328"/>
-                          </a:solidFill>
-                          <a:latin typeface="Malgun Gothic"/>
-                        </a:rPr>
-                        <a:t>VLM이 UI 요소와 라이브 영상 영역을 먼저 구분하고 CV가 그 안에서만 위치·이동량을 계산하는 역할 순서</a:t>
-                      </a:r>
-                    </a:p>
-                  </a:txBody>
-                  <a:tcPr marL="88900" marR="88900" marT="63500" marB="63500" anchor="ctr">
-                    <a:lnL w="9525" cap="flat" cmpd="sng" algn="ctr">
-                      <a:solidFill>
-                        <a:srgbClr val="D0D7DE"/>
-                      </a:solidFill>
-                      <a:prstDash val="solid"/>
-                    </a:lnL>
-                    <a:lnR w="9525" cap="flat" cmpd="sng" algn="ctr">
-                      <a:solidFill>
-                        <a:srgbClr val="D0D7DE"/>
-                      </a:solidFill>
-                      <a:prstDash val="solid"/>
-                    </a:lnR>
-                    <a:lnT w="9525" cap="flat" cmpd="sng" algn="ctr">
-                      <a:solidFill>
-                        <a:srgbClr val="D0D7DE"/>
-                      </a:solidFill>
-                      <a:prstDash val="solid"/>
-                    </a:lnT>
-                    <a:lnB w="9525" cap="flat" cmpd="sng" algn="ctr">
-                      <a:solidFill>
-                        <a:srgbClr val="D0D7DE"/>
-                      </a:solidFill>
-                      <a:prstDash val="solid"/>
-                    </a:lnB>
-                    <a:solidFill>
-                      <a:srgbClr val="F6F8FA"/>
-                    </a:solidFill>
-                  </a:tcPr>
-                </a:tc>
-              </a:tr>
-              <a:tr h="365760">
-                <a:tc>
-                  <a:txBody>
-                    <a:bodyPr wrap="square"/>
-                    <a:lstStyle/>
-                    <a:p>
-                      <a:r>
-                        <a:rPr sz="1300" b="0">
-                          <a:solidFill>
-                            <a:srgbClr val="1F2328"/>
-                          </a:solidFill>
-                          <a:latin typeface="Malgun Gothic"/>
-                        </a:rPr>
-                        <a:t>실장비 클릭은 오동작 시 측정에 영향</a:t>
-                      </a:r>
-                    </a:p>
-                  </a:txBody>
-                  <a:tcPr marL="88900" marR="88900" marT="63500" marB="63500" anchor="ctr">
-                    <a:lnL w="9525" cap="flat" cmpd="sng" algn="ctr">
-                      <a:solidFill>
-                        <a:srgbClr val="D0D7DE"/>
-                      </a:solidFill>
-                      <a:prstDash val="solid"/>
-                    </a:lnL>
-                    <a:lnR w="9525" cap="flat" cmpd="sng" algn="ctr">
-                      <a:solidFill>
-                        <a:srgbClr val="D0D7DE"/>
-                      </a:solidFill>
-                      <a:prstDash val="solid"/>
-                    </a:lnR>
-                    <a:lnT w="9525" cap="flat" cmpd="sng" algn="ctr">
-                      <a:solidFill>
-                        <a:srgbClr val="D0D7DE"/>
-                      </a:solidFill>
-                      <a:prstDash val="solid"/>
-                    </a:lnT>
-                    <a:lnB w="9525" cap="flat" cmpd="sng" algn="ctr">
-                      <a:solidFill>
-                        <a:srgbClr val="D0D7DE"/>
-                      </a:solidFill>
-                      <a:prstDash val="solid"/>
-                    </a:lnB>
-                    <a:solidFill>
-                      <a:srgbClr val="FFFFFF"/>
-                    </a:solidFill>
-                  </a:tcPr>
-                </a:tc>
-                <a:tc>
-                  <a:txBody>
-                    <a:bodyPr wrap="square"/>
-                    <a:lstStyle/>
-                    <a:p>
-                      <a:r>
-                        <a:rPr sz="1300" b="0">
-                          <a:solidFill>
-                            <a:srgbClr val="1F2328"/>
-                          </a:solidFill>
-                          <a:latin typeface="Malgun Gothic"/>
-                        </a:rPr>
-                        <a:t>확인 안 된 클릭은 나가지 않는 fail-closed, 모드 불명이면 보정 보류, 잘못 열린 창은 닫고 재시도. 점검 모드(비파괴) → 반자동 → 현업 합동 시험 → 26대 배치의 단계적 게이트</a:t>
-                      </a:r>
-                    </a:p>
-                  </a:txBody>
-                  <a:tcPr marL="88900" marR="88900" marT="63500" marB="63500" anchor="ctr">
-                    <a:lnL w="9525" cap="flat" cmpd="sng" algn="ctr">
-                      <a:solidFill>
-                        <a:srgbClr val="D0D7DE"/>
-                      </a:solidFill>
-                      <a:prstDash val="solid"/>
-                    </a:lnL>
-                    <a:lnR w="9525" cap="flat" cmpd="sng" algn="ctr">
-                      <a:solidFill>
-                        <a:srgbClr val="D0D7DE"/>
-                      </a:solidFill>
-                      <a:prstDash val="solid"/>
-                    </a:lnR>
-                    <a:lnT w="9525" cap="flat" cmpd="sng" algn="ctr">
-                      <a:solidFill>
-                        <a:srgbClr val="D0D7DE"/>
-                      </a:solidFill>
-                      <a:prstDash val="solid"/>
-                    </a:lnT>
-                    <a:lnB w="9525" cap="flat" cmpd="sng" algn="ctr">
-                      <a:solidFill>
-                        <a:srgbClr val="D0D7DE"/>
-                      </a:solidFill>
-                      <a:prstDash val="solid"/>
-                    </a:lnB>
-                    <a:solidFill>
-                      <a:srgbClr val="FFFFFF"/>
-                    </a:solidFill>
-                  </a:tcPr>
-                </a:tc>
-              </a:tr>
-            </a:tbl>
-          </a:graphicData>
-        </a:graphic>
-      </p:graphicFrame>
-    </p:spTree>
-  </p:cSld>
-  <p:clrMapOvr>
-    <a:masterClrMapping/>
-  </p:clrMapOvr>
-</p:sld>
-</file>
-
-<file path=ppt/slides/slide7.xml><?xml version="1.0" encoding="utf-8"?>
-<p:sld xmlns:a="http://schemas.openxmlformats.org/drawingml/2006/main" xmlns:p="http://schemas.openxmlformats.org/presentationml/2006/main" xmlns:r="http://schemas.openxmlformats.org/officeDocument/2006/relationships">
-  <p:cSld>
-    <p:spTree>
-      <p:nvGrpSpPr>
-        <p:cNvPr id="1" name=""/>
-        <p:cNvGrpSpPr/>
-        <p:nvPr/>
-      </p:nvGrpSpPr>
-      <p:grpSpPr/>
-      <p:sp>
-        <p:nvSpPr>
-          <p:cNvPr id="2" name="TextBox 1"/>
-          <p:cNvSpPr txBox="1"/>
-          <p:nvPr/>
-        </p:nvSpPr>
-        <p:spPr>
-          <a:xfrm>
-            <a:off x="457200" y="320040"/>
-            <a:ext cx="11277295" cy="548640"/>
-          </a:xfrm>
-          <a:prstGeom prst="rect">
-            <a:avLst/>
-          </a:prstGeom>
-          <a:noFill/>
-        </p:spPr>
-        <p:txBody>
-          <a:bodyPr wrap="none" lIns="0">
-            <a:spAutoFit/>
-          </a:bodyPr>
-          <a:lstStyle/>
-          <a:p>
-            <a:r>
-              <a:rPr sz="2400" b="1">
-                <a:solidFill>
-                  <a:srgbClr val="1E3A8A"/>
-                </a:solidFill>
-                <a:latin typeface="Malgun Gothic"/>
-              </a:rPr>
-              <a:t>2.4 소요 기간·조직 영향·확산 가능성</a:t>
-            </a:r>
-          </a:p>
-        </p:txBody>
-      </p:sp>
-      <p:sp>
-        <p:nvSpPr>
-          <p:cNvPr id="3" name="Rectangle 2"/>
-          <p:cNvSpPr/>
-          <p:nvPr/>
-        </p:nvSpPr>
-        <p:spPr>
-          <a:xfrm>
-            <a:off x="457200" y="914400"/>
-            <a:ext cx="11277295" cy="25400"/>
-          </a:xfrm>
-          <a:prstGeom prst="rect">
-            <a:avLst/>
-          </a:prstGeom>
-          <a:solidFill>
-            <a:srgbClr val="1E3A8A"/>
-          </a:solidFill>
-          <a:ln>
-            <a:noFill/>
-          </a:ln>
-          <a:effectLst/>
-        </p:spPr>
-        <p:style>
-          <a:lnRef idx="1">
-            <a:schemeClr val="accent1"/>
-          </a:lnRef>
-          <a:fillRef idx="3">
-            <a:schemeClr val="accent1"/>
-          </a:fillRef>
-          <a:effectRef idx="2">
-            <a:schemeClr val="accent1"/>
-          </a:effectRef>
-          <a:fontRef idx="minor">
-            <a:schemeClr val="lt1"/>
-          </a:fontRef>
-        </p:style>
-        <p:txBody>
-          <a:bodyPr rtlCol="0" anchor="ctr"/>
-          <a:lstStyle/>
-          <a:p>
-            <a:pPr algn="ctr"/>
-          </a:p>
-        </p:txBody>
-      </p:sp>
-      <p:graphicFrame>
-        <p:nvGraphicFramePr>
-          <p:cNvPr id="4" name="Table 3"/>
-          <p:cNvGraphicFramePr>
-            <a:graphicFrameLocks noGrp="1"/>
-          </p:cNvGraphicFramePr>
-          <p:nvPr/>
-        </p:nvGraphicFramePr>
-        <p:xfrm>
-          <a:off x="457200" y="1097280"/>
-          <a:ext cx="11277293" cy="2560320"/>
-        </p:xfrm>
-        <a:graphic>
-          <a:graphicData uri="http://schemas.openxmlformats.org/drawingml/2006/table">
-            <a:tbl>
-              <a:tblPr firstRow="1" bandRow="0">
-                <a:tableStyleId>{5C22544A-7EE6-4342-B048-85BDC9FD1C3A}</a:tableStyleId>
-              </a:tblPr>
-              <a:tblGrid>
-                <a:gridCol w="1713006"/>
-                <a:gridCol w="1998507"/>
-                <a:gridCol w="7565780"/>
-              </a:tblGrid>
-              <a:tr h="365760">
-                <a:tc>
-                  <a:txBody>
-                    <a:bodyPr wrap="square"/>
-                    <a:lstStyle/>
-                    <a:p>
-                      <a:r>
-                        <a:rPr sz="1350" b="1">
-                          <a:solidFill>
-                            <a:srgbClr val="FFFFFF"/>
-                          </a:solidFill>
-                          <a:latin typeface="Malgun Gothic"/>
-                        </a:rPr>
-                        <a:t>시기</a:t>
-                      </a:r>
-                    </a:p>
-                  </a:txBody>
-                  <a:tcPr marL="88900" marR="88900" marT="63500" marB="63500" anchor="ctr">
-                    <a:lnL w="9525" cap="flat" cmpd="sng" algn="ctr">
-                      <a:solidFill>
-                        <a:srgbClr val="D0D7DE"/>
-                      </a:solidFill>
-                      <a:prstDash val="solid"/>
-                    </a:lnL>
-                    <a:lnR w="9525" cap="flat" cmpd="sng" algn="ctr">
-                      <a:solidFill>
-                        <a:srgbClr val="D0D7DE"/>
-                      </a:solidFill>
-                      <a:prstDash val="solid"/>
-                    </a:lnR>
-                    <a:lnT w="9525" cap="flat" cmpd="sng" algn="ctr">
-                      <a:solidFill>
-                        <a:srgbClr val="D0D7DE"/>
-                      </a:solidFill>
-                      <a:prstDash val="solid"/>
-                    </a:lnT>
-                    <a:lnB w="9525" cap="flat" cmpd="sng" algn="ctr">
-                      <a:solidFill>
-                        <a:srgbClr val="D0D7DE"/>
-                      </a:solidFill>
-                      <a:prstDash val="solid"/>
-                    </a:lnB>
-                    <a:solidFill>
-                      <a:srgbClr val="1E3A8A"/>
-                    </a:solidFill>
-                  </a:tcPr>
-                </a:tc>
-                <a:tc>
-                  <a:txBody>
-                    <a:bodyPr wrap="square"/>
-                    <a:lstStyle/>
-                    <a:p>
-                      <a:r>
-                        <a:rPr sz="1350" b="1">
-                          <a:solidFill>
-                            <a:srgbClr val="FFFFFF"/>
-                          </a:solidFill>
-                          <a:latin typeface="Malgun Gothic"/>
-                        </a:rPr>
-                        <a:t>단계</a:t>
-                      </a:r>
-                    </a:p>
-                  </a:txBody>
-                  <a:tcPr marL="88900" marR="88900" marT="63500" marB="63500" anchor="ctr">
-                    <a:lnL w="9525" cap="flat" cmpd="sng" algn="ctr">
-                      <a:solidFill>
-                        <a:srgbClr val="D0D7DE"/>
-                      </a:solidFill>
-                      <a:prstDash val="solid"/>
-                    </a:lnL>
-                    <a:lnR w="9525" cap="flat" cmpd="sng" algn="ctr">
-                      <a:solidFill>
-                        <a:srgbClr val="D0D7DE"/>
-                      </a:solidFill>
-                      <a:prstDash val="solid"/>
-                    </a:lnR>
-                    <a:lnT w="9525" cap="flat" cmpd="sng" algn="ctr">
-                      <a:solidFill>
-                        <a:srgbClr val="D0D7DE"/>
-                      </a:solidFill>
-                      <a:prstDash val="solid"/>
-                    </a:lnT>
-                    <a:lnB w="9525" cap="flat" cmpd="sng" algn="ctr">
-                      <a:solidFill>
-                        <a:srgbClr val="D0D7DE"/>
-                      </a:solidFill>
-                      <a:prstDash val="solid"/>
-                    </a:lnB>
-                    <a:solidFill>
-                      <a:srgbClr val="1E3A8A"/>
-                    </a:solidFill>
-                  </a:tcPr>
-                </a:tc>
-                <a:tc>
-                  <a:txBody>
-                    <a:bodyPr wrap="square"/>
-                    <a:lstStyle/>
-                    <a:p>
-                      <a:r>
-                        <a:rPr sz="1350" b="1">
-                          <a:solidFill>
-                            <a:srgbClr val="FFFFFF"/>
-                          </a:solidFill>
-                          <a:latin typeface="Malgun Gothic"/>
-                        </a:rPr>
-                        <a:t>산출</a:t>
-                      </a:r>
-                    </a:p>
-                  </a:txBody>
-                  <a:tcPr marL="88900" marR="88900" marT="63500" marB="63500" anchor="ctr">
-                    <a:lnL w="9525" cap="flat" cmpd="sng" algn="ctr">
-                      <a:solidFill>
-                        <a:srgbClr val="D0D7DE"/>
-                      </a:solidFill>
-                      <a:prstDash val="solid"/>
-                    </a:lnL>
-                    <a:lnR w="9525" cap="flat" cmpd="sng" algn="ctr">
-                      <a:solidFill>
-                        <a:srgbClr val="D0D7DE"/>
-                      </a:solidFill>
-                      <a:prstDash val="solid"/>
-                    </a:lnR>
-                    <a:lnT w="9525" cap="flat" cmpd="sng" algn="ctr">
-                      <a:solidFill>
-                        <a:srgbClr val="D0D7DE"/>
-                      </a:solidFill>
-                      <a:prstDash val="solid"/>
-                    </a:lnT>
-                    <a:lnB w="9525" cap="flat" cmpd="sng" algn="ctr">
-                      <a:solidFill>
-                        <a:srgbClr val="D0D7DE"/>
-                      </a:solidFill>
-                      <a:prstDash val="solid"/>
-                    </a:lnB>
-                    <a:solidFill>
-                      <a:srgbClr val="1E3A8A"/>
-                    </a:solidFill>
-                  </a:tcPr>
-                </a:tc>
-              </a:tr>
-              <a:tr h="365760">
-                <a:tc>
-                  <a:txBody>
-                    <a:bodyPr wrap="square"/>
-                    <a:lstStyle/>
-                    <a:p>
-                      <a:r>
-                        <a:rPr sz="1300" b="0">
-                          <a:solidFill>
-                            <a:srgbClr val="1F2328"/>
-                          </a:solidFill>
-                          <a:latin typeface="Malgun Gothic"/>
-                        </a:rPr>
-                        <a:t>2026-01</a:t>
-                      </a:r>
-                    </a:p>
-                  </a:txBody>
-                  <a:tcPr marL="88900" marR="88900" marT="63500" marB="63500" anchor="ctr">
-                    <a:lnL w="9525" cap="flat" cmpd="sng" algn="ctr">
-                      <a:solidFill>
-                        <a:srgbClr val="D0D7DE"/>
-                      </a:solidFill>
-                      <a:prstDash val="solid"/>
-                    </a:lnL>
-                    <a:lnR w="9525" cap="flat" cmpd="sng" algn="ctr">
-                      <a:solidFill>
-                        <a:srgbClr val="D0D7DE"/>
-                      </a:solidFill>
-                      <a:prstDash val="solid"/>
-                    </a:lnR>
-                    <a:lnT w="9525" cap="flat" cmpd="sng" algn="ctr">
-                      <a:solidFill>
-                        <a:srgbClr val="D0D7DE"/>
-                      </a:solidFill>
-                      <a:prstDash val="solid"/>
-                    </a:lnT>
-                    <a:lnB w="9525" cap="flat" cmpd="sng" algn="ctr">
-                      <a:solidFill>
-                        <a:srgbClr val="D0D7DE"/>
-                      </a:solidFill>
-                      <a:prstDash val="solid"/>
-                    </a:lnB>
-                    <a:solidFill>
-                      <a:srgbClr val="FFFFFF"/>
-                    </a:solidFill>
-                  </a:tcPr>
-                </a:tc>
-                <a:tc>
-                  <a:txBody>
-                    <a:bodyPr wrap="square"/>
-                    <a:lstStyle/>
-                    <a:p>
-                      <a:r>
-                        <a:rPr sz="1300" b="0">
-                          <a:solidFill>
-                            <a:srgbClr val="1F2328"/>
-                          </a:solidFill>
-                          <a:latin typeface="Malgun Gothic"/>
-                        </a:rPr>
-                        <a:t>요구사항 정의</a:t>
-                      </a:r>
-                    </a:p>
-                  </a:txBody>
-                  <a:tcPr marL="88900" marR="88900" marT="63500" marB="63500" anchor="ctr">
-                    <a:lnL w="9525" cap="flat" cmpd="sng" algn="ctr">
-                      <a:solidFill>
-                        <a:srgbClr val="D0D7DE"/>
-                      </a:solidFill>
-                      <a:prstDash val="solid"/>
-                    </a:lnL>
-                    <a:lnR w="9525" cap="flat" cmpd="sng" algn="ctr">
-                      <a:solidFill>
-                        <a:srgbClr val="D0D7DE"/>
-                      </a:solidFill>
-                      <a:prstDash val="solid"/>
-                    </a:lnR>
-                    <a:lnT w="9525" cap="flat" cmpd="sng" algn="ctr">
-                      <a:solidFill>
-                        <a:srgbClr val="D0D7DE"/>
-                      </a:solidFill>
-                      <a:prstDash val="solid"/>
-                    </a:lnT>
-                    <a:lnB w="9525" cap="flat" cmpd="sng" algn="ctr">
-                      <a:solidFill>
-                        <a:srgbClr val="D0D7DE"/>
-                      </a:solidFill>
-                      <a:prstDash val="solid"/>
-                    </a:lnB>
-                    <a:solidFill>
-                      <a:srgbClr val="FFFFFF"/>
-                    </a:solidFill>
-                  </a:tcPr>
-                </a:tc>
-                <a:tc>
-                  <a:txBody>
-                    <a:bodyPr wrap="square"/>
-                    <a:lstStyle/>
-                    <a:p>
-                      <a:r>
-                        <a:rPr sz="1300" b="0">
-                          <a:solidFill>
-                            <a:srgbClr val="1F2328"/>
-                          </a:solidFill>
-                          <a:latin typeface="Malgun Gothic"/>
-                        </a:rPr>
-                        <a:t>범위·제약·평가 지표 확정</a:t>
-                      </a:r>
-                    </a:p>
-                  </a:txBody>
-                  <a:tcPr marL="88900" marR="88900" marT="63500" marB="63500" anchor="ctr">
-                    <a:lnL w="9525" cap="flat" cmpd="sng" algn="ctr">
-                      <a:solidFill>
-                        <a:srgbClr val="D0D7DE"/>
-                      </a:solidFill>
-                      <a:prstDash val="solid"/>
-                    </a:lnL>
-                    <a:lnR w="9525" cap="flat" cmpd="sng" algn="ctr">
-                      <a:solidFill>
-                        <a:srgbClr val="D0D7DE"/>
-                      </a:solidFill>
-                      <a:prstDash val="solid"/>
-                    </a:lnR>
-                    <a:lnT w="9525" cap="flat" cmpd="sng" algn="ctr">
-                      <a:solidFill>
-                        <a:srgbClr val="D0D7DE"/>
-                      </a:solidFill>
-                      <a:prstDash val="solid"/>
-                    </a:lnT>
-                    <a:lnB w="9525" cap="flat" cmpd="sng" algn="ctr">
-                      <a:solidFill>
-                        <a:srgbClr val="D0D7DE"/>
-                      </a:solidFill>
-                      <a:prstDash val="solid"/>
-                    </a:lnB>
-                    <a:solidFill>
-                      <a:srgbClr val="FFFFFF"/>
-                    </a:solidFill>
-                  </a:tcPr>
-                </a:tc>
-              </a:tr>
-              <a:tr h="365760">
-                <a:tc>
-                  <a:txBody>
-                    <a:bodyPr wrap="square"/>
-                    <a:lstStyle/>
-                    <a:p>
-                      <a:r>
-                        <a:rPr sz="1300" b="0">
-                          <a:solidFill>
-                            <a:srgbClr val="1F2328"/>
-                          </a:solidFill>
-                          <a:latin typeface="Malgun Gothic"/>
-                        </a:rPr>
-                        <a:t>02~03</a:t>
-                      </a:r>
-                    </a:p>
-                  </a:txBody>
-                  <a:tcPr marL="88900" marR="88900" marT="63500" marB="63500" anchor="ctr">
-                    <a:lnL w="9525" cap="flat" cmpd="sng" algn="ctr">
-                      <a:solidFill>
-                        <a:srgbClr val="D0D7DE"/>
-                      </a:solidFill>
-                      <a:prstDash val="solid"/>
-                    </a:lnL>
-                    <a:lnR w="9525" cap="flat" cmpd="sng" algn="ctr">
-                      <a:solidFill>
-                        <a:srgbClr val="D0D7DE"/>
-                      </a:solidFill>
-                      <a:prstDash val="solid"/>
-                    </a:lnR>
-                    <a:lnT w="9525" cap="flat" cmpd="sng" algn="ctr">
-                      <a:solidFill>
-                        <a:srgbClr val="D0D7DE"/>
-                      </a:solidFill>
-                      <a:prstDash val="solid"/>
-                    </a:lnT>
-                    <a:lnB w="9525" cap="flat" cmpd="sng" algn="ctr">
-                      <a:solidFill>
-                        <a:srgbClr val="D0D7DE"/>
-                      </a:solidFill>
-                      <a:prstDash val="solid"/>
-                    </a:lnB>
-                    <a:solidFill>
-                      <a:srgbClr val="F6F8FA"/>
-                    </a:solidFill>
-                  </a:tcPr>
-                </a:tc>
-                <a:tc>
-                  <a:txBody>
-                    <a:bodyPr wrap="square"/>
-                    <a:lstStyle/>
-                    <a:p>
-                      <a:r>
-                        <a:rPr sz="1300" b="0">
-                          <a:solidFill>
-                            <a:srgbClr val="1F2328"/>
-                          </a:solidFill>
-                          <a:latin typeface="Malgun Gothic"/>
-                        </a:rPr>
-                        <a:t>VLM 인프라</a:t>
-                      </a:r>
-                    </a:p>
-                  </a:txBody>
-                  <a:tcPr marL="88900" marR="88900" marT="63500" marB="63500" anchor="ctr">
-                    <a:lnL w="9525" cap="flat" cmpd="sng" algn="ctr">
-                      <a:solidFill>
-                        <a:srgbClr val="D0D7DE"/>
-                      </a:solidFill>
-                      <a:prstDash val="solid"/>
-                    </a:lnL>
-                    <a:lnR w="9525" cap="flat" cmpd="sng" algn="ctr">
-                      <a:solidFill>
-                        <a:srgbClr val="D0D7DE"/>
-                      </a:solidFill>
-                      <a:prstDash val="solid"/>
-                    </a:lnR>
-                    <a:lnT w="9525" cap="flat" cmpd="sng" algn="ctr">
-                      <a:solidFill>
-                        <a:srgbClr val="D0D7DE"/>
-                      </a:solidFill>
-                      <a:prstDash val="solid"/>
-                    </a:lnT>
-                    <a:lnB w="9525" cap="flat" cmpd="sng" algn="ctr">
-                      <a:solidFill>
-                        <a:srgbClr val="D0D7DE"/>
-                      </a:solidFill>
-                      <a:prstDash val="solid"/>
-                    </a:lnB>
-                    <a:solidFill>
-                      <a:srgbClr val="F6F8FA"/>
-                    </a:solidFill>
-                  </a:tcPr>
-                </a:tc>
-                <a:tc>
-                  <a:txBody>
-                    <a:bodyPr wrap="square"/>
-                    <a:lstStyle/>
-                    <a:p>
-                      <a:r>
-                        <a:rPr sz="1300" b="0">
-                          <a:solidFill>
-                            <a:srgbClr val="1F2328"/>
-                          </a:solidFill>
-                          <a:latin typeface="Malgun Gothic"/>
-                        </a:rPr>
-                        <a:t>HCP 배포, VLM·OCR 5종 설치·비교, 통합 API</a:t>
-                      </a:r>
-                    </a:p>
-                  </a:txBody>
-                  <a:tcPr marL="88900" marR="88900" marT="63500" marB="63500" anchor="ctr">
-                    <a:lnL w="9525" cap="flat" cmpd="sng" algn="ctr">
-                      <a:solidFill>
-                        <a:srgbClr val="D0D7DE"/>
-                      </a:solidFill>
-                      <a:prstDash val="solid"/>
-                    </a:lnL>
-                    <a:lnR w="9525" cap="flat" cmpd="sng" algn="ctr">
-                      <a:solidFill>
-                        <a:srgbClr val="D0D7DE"/>
-                      </a:solidFill>
-                      <a:prstDash val="solid"/>
-                    </a:lnR>
-                    <a:lnT w="9525" cap="flat" cmpd="sng" algn="ctr">
-                      <a:solidFill>
-                        <a:srgbClr val="D0D7DE"/>
-                      </a:solidFill>
-                      <a:prstDash val="solid"/>
-                    </a:lnT>
-                    <a:lnB w="9525" cap="flat" cmpd="sng" algn="ctr">
-                      <a:solidFill>
-                        <a:srgbClr val="D0D7DE"/>
-                      </a:solidFill>
-                      <a:prstDash val="solid"/>
-                    </a:lnB>
-                    <a:solidFill>
-                      <a:srgbClr val="F6F8FA"/>
-                    </a:solidFill>
-                  </a:tcPr>
-                </a:tc>
-              </a:tr>
-              <a:tr h="365760">
-                <a:tc>
-                  <a:txBody>
-                    <a:bodyPr wrap="square"/>
-                    <a:lstStyle/>
-                    <a:p>
-                      <a:r>
-                        <a:rPr sz="1300" b="0">
-                          <a:solidFill>
-                            <a:srgbClr val="1F2328"/>
-                          </a:solidFill>
-                          <a:latin typeface="Malgun Gothic"/>
-                        </a:rPr>
-                        <a:t>03~05</a:t>
-                      </a:r>
-                    </a:p>
-                  </a:txBody>
-                  <a:tcPr marL="88900" marR="88900" marT="63500" marB="63500" anchor="ctr">
-                    <a:lnL w="9525" cap="flat" cmpd="sng" algn="ctr">
-                      <a:solidFill>
-                        <a:srgbClr val="D0D7DE"/>
-                      </a:solidFill>
-                      <a:prstDash val="solid"/>
-                    </a:lnL>
-                    <a:lnR w="9525" cap="flat" cmpd="sng" algn="ctr">
-                      <a:solidFill>
-                        <a:srgbClr val="D0D7DE"/>
-                      </a:solidFill>
-                      <a:prstDash val="solid"/>
-                    </a:lnR>
-                    <a:lnT w="9525" cap="flat" cmpd="sng" algn="ctr">
-                      <a:solidFill>
-                        <a:srgbClr val="D0D7DE"/>
-                      </a:solidFill>
-                      <a:prstDash val="solid"/>
-                    </a:lnT>
-                    <a:lnB w="9525" cap="flat" cmpd="sng" algn="ctr">
-                      <a:solidFill>
-                        <a:srgbClr val="D0D7DE"/>
-                      </a:solidFill>
-                      <a:prstDash val="solid"/>
-                    </a:lnB>
-                    <a:solidFill>
-                      <a:srgbClr val="FFFFFF"/>
-                    </a:solidFill>
-                  </a:tcPr>
-                </a:tc>
-                <a:tc>
-                  <a:txBody>
-                    <a:bodyPr wrap="square"/>
-                    <a:lstStyle/>
-                    <a:p>
-                      <a:r>
-                        <a:rPr sz="1300" b="0">
-                          <a:solidFill>
-                            <a:srgbClr val="1F2328"/>
-                          </a:solidFill>
-                          <a:latin typeface="Malgun Gothic"/>
-                        </a:rPr>
-                        <a:t>RCS 자동화 PoC</a:t>
-                      </a:r>
-                    </a:p>
-                  </a:txBody>
-                  <a:tcPr marL="88900" marR="88900" marT="63500" marB="63500" anchor="ctr">
-                    <a:lnL w="9525" cap="flat" cmpd="sng" algn="ctr">
-                      <a:solidFill>
-                        <a:srgbClr val="D0D7DE"/>
-                      </a:solidFill>
-                      <a:prstDash val="solid"/>
-                    </a:lnL>
-                    <a:lnR w="9525" cap="flat" cmpd="sng" algn="ctr">
-                      <a:solidFill>
-                        <a:srgbClr val="D0D7DE"/>
-                      </a:solidFill>
-                      <a:prstDash val="solid"/>
-                    </a:lnR>
-                    <a:lnT w="9525" cap="flat" cmpd="sng" algn="ctr">
-                      <a:solidFill>
-                        <a:srgbClr val="D0D7DE"/>
-                      </a:solidFill>
-                      <a:prstDash val="solid"/>
-                    </a:lnT>
-                    <a:lnB w="9525" cap="flat" cmpd="sng" algn="ctr">
-                      <a:solidFill>
-                        <a:srgbClr val="D0D7DE"/>
-                      </a:solidFill>
-                      <a:prstDash val="solid"/>
-                    </a:lnB>
-                    <a:solidFill>
-                      <a:srgbClr val="FFFFFF"/>
-                    </a:solidFill>
-                  </a:tcPr>
-                </a:tc>
-                <a:tc>
-                  <a:txBody>
-                    <a:bodyPr wrap="square"/>
-                    <a:lstStyle/>
-                    <a:p>
-                      <a:r>
-                        <a:rPr sz="1300" b="0">
-                          <a:solidFill>
-                            <a:srgbClr val="1F2328"/>
-                          </a:solidFill>
-                          <a:latin typeface="Malgun Gothic"/>
-                        </a:rPr>
-                        <a:t>coarse→fine→confirm, RCS 로그인~장비 선택 오피스 검증</a:t>
-                      </a:r>
-                    </a:p>
-                  </a:txBody>
-                  <a:tcPr marL="88900" marR="88900" marT="63500" marB="63500" anchor="ctr">
-                    <a:lnL w="9525" cap="flat" cmpd="sng" algn="ctr">
-                      <a:solidFill>
-                        <a:srgbClr val="D0D7DE"/>
-                      </a:solidFill>
-                      <a:prstDash val="solid"/>
-                    </a:lnL>
-                    <a:lnR w="9525" cap="flat" cmpd="sng" algn="ctr">
-                      <a:solidFill>
-                        <a:srgbClr val="D0D7DE"/>
-                      </a:solidFill>
-                      <a:prstDash val="solid"/>
-                    </a:lnR>
-                    <a:lnT w="9525" cap="flat" cmpd="sng" algn="ctr">
-                      <a:solidFill>
-                        <a:srgbClr val="D0D7DE"/>
-                      </a:solidFill>
-                      <a:prstDash val="solid"/>
-                    </a:lnT>
-                    <a:lnB w="9525" cap="flat" cmpd="sng" algn="ctr">
-                      <a:solidFill>
-                        <a:srgbClr val="D0D7DE"/>
-                      </a:solidFill>
-                      <a:prstDash val="solid"/>
-                    </a:lnB>
-                    <a:solidFill>
-                      <a:srgbClr val="FFFFFF"/>
-                    </a:solidFill>
-                  </a:tcPr>
-                </a:tc>
-              </a:tr>
-              <a:tr h="365760">
-                <a:tc>
-                  <a:txBody>
-                    <a:bodyPr wrap="square"/>
-                    <a:lstStyle/>
-                    <a:p>
-                      <a:r>
-                        <a:rPr sz="1300" b="0">
-                          <a:solidFill>
-                            <a:srgbClr val="1F2328"/>
-                          </a:solidFill>
-                          <a:latin typeface="Malgun Gothic"/>
-                        </a:rPr>
-                        <a:t>05~07</a:t>
-                      </a:r>
-                    </a:p>
-                  </a:txBody>
-                  <a:tcPr marL="88900" marR="88900" marT="63500" marB="63500" anchor="ctr">
-                    <a:lnL w="9525" cap="flat" cmpd="sng" algn="ctr">
-                      <a:solidFill>
-                        <a:srgbClr val="D0D7DE"/>
-                      </a:solidFill>
-                      <a:prstDash val="solid"/>
-                    </a:lnL>
-                    <a:lnR w="9525" cap="flat" cmpd="sng" algn="ctr">
-                      <a:solidFill>
-                        <a:srgbClr val="D0D7DE"/>
-                      </a:solidFill>
-                      <a:prstDash val="solid"/>
-                    </a:lnR>
-                    <a:lnT w="9525" cap="flat" cmpd="sng" algn="ctr">
-                      <a:solidFill>
-                        <a:srgbClr val="D0D7DE"/>
-                      </a:solidFill>
-                      <a:prstDash val="solid"/>
-                    </a:lnT>
-                    <a:lnB w="9525" cap="flat" cmpd="sng" algn="ctr">
-                      <a:solidFill>
-                        <a:srgbClr val="D0D7DE"/>
-                      </a:solidFill>
-                      <a:prstDash val="solid"/>
-                    </a:lnB>
-                    <a:solidFill>
-                      <a:srgbClr val="F6F8FA"/>
-                    </a:solidFill>
-                  </a:tcPr>
-                </a:tc>
-                <a:tc>
-                  <a:txBody>
-                    <a:bodyPr wrap="square"/>
-                    <a:lstStyle/>
-                    <a:p>
-                      <a:r>
-                        <a:rPr sz="1300" b="0">
-                          <a:solidFill>
-                            <a:srgbClr val="1F2328"/>
-                          </a:solidFill>
-                          <a:latin typeface="Malgun Gothic"/>
-                        </a:rPr>
-                        <a:t>CV 정확도 벤치</a:t>
-                      </a:r>
-                    </a:p>
-                  </a:txBody>
-                  <a:tcPr marL="88900" marR="88900" marT="63500" marB="63500" anchor="ctr">
-                    <a:lnL w="9525" cap="flat" cmpd="sng" algn="ctr">
-                      <a:solidFill>
-                        <a:srgbClr val="D0D7DE"/>
-                      </a:solidFill>
-                      <a:prstDash val="solid"/>
-                    </a:lnL>
-                    <a:lnR w="9525" cap="flat" cmpd="sng" algn="ctr">
-                      <a:solidFill>
-                        <a:srgbClr val="D0D7DE"/>
-                      </a:solidFill>
-                      <a:prstDash val="solid"/>
-                    </a:lnR>
-                    <a:lnT w="9525" cap="flat" cmpd="sng" algn="ctr">
-                      <a:solidFill>
-                        <a:srgbClr val="D0D7DE"/>
-                      </a:solidFill>
-                      <a:prstDash val="solid"/>
-                    </a:lnT>
-                    <a:lnB w="9525" cap="flat" cmpd="sng" algn="ctr">
-                      <a:solidFill>
-                        <a:srgbClr val="D0D7DE"/>
-                      </a:solidFill>
-                      <a:prstDash val="solid"/>
-                    </a:lnB>
-                    <a:solidFill>
-                      <a:srgbClr val="F6F8FA"/>
-                    </a:solidFill>
-                  </a:tcPr>
-                </a:tc>
-                <a:tc>
-                  <a:txBody>
-                    <a:bodyPr wrap="square"/>
-                    <a:lstStyle/>
-                    <a:p>
-                      <a:r>
-                        <a:rPr sz="1300" b="0">
-                          <a:solidFill>
-                            <a:srgbClr val="1F2328"/>
-                          </a:solidFill>
-                          <a:latin typeface="Malgun Gothic"/>
-                        </a:rPr>
-                        <a:t>rank-1 31.8% → 76.4%, 촬영 모드별 재평가 채택</a:t>
-                      </a:r>
-                    </a:p>
-                  </a:txBody>
-                  <a:tcPr marL="88900" marR="88900" marT="63500" marB="63500" anchor="ctr">
-                    <a:lnL w="9525" cap="flat" cmpd="sng" algn="ctr">
-                      <a:solidFill>
-                        <a:srgbClr val="D0D7DE"/>
-                      </a:solidFill>
-                      <a:prstDash val="solid"/>
-                    </a:lnL>
-                    <a:lnR w="9525" cap="flat" cmpd="sng" algn="ctr">
-                      <a:solidFill>
-                        <a:srgbClr val="D0D7DE"/>
-                      </a:solidFill>
-                      <a:prstDash val="solid"/>
-                    </a:lnR>
-                    <a:lnT w="9525" cap="flat" cmpd="sng" algn="ctr">
-                      <a:solidFill>
-                        <a:srgbClr val="D0D7DE"/>
-                      </a:solidFill>
-                      <a:prstDash val="solid"/>
-                    </a:lnT>
-                    <a:lnB w="9525" cap="flat" cmpd="sng" algn="ctr">
-                      <a:solidFill>
-                        <a:srgbClr val="D0D7DE"/>
-                      </a:solidFill>
-                      <a:prstDash val="solid"/>
-                    </a:lnB>
-                    <a:solidFill>
-                      <a:srgbClr val="F6F8FA"/>
-                    </a:solidFill>
-                  </a:tcPr>
-                </a:tc>
-              </a:tr>
-              <a:tr h="365760">
-                <a:tc>
-                  <a:txBody>
-                    <a:bodyPr wrap="square"/>
-                    <a:lstStyle/>
-                    <a:p>
-                      <a:r>
-                        <a:rPr sz="1300" b="0">
-                          <a:solidFill>
-                            <a:srgbClr val="1F2328"/>
-                          </a:solidFill>
-                          <a:latin typeface="Malgun Gothic"/>
-                        </a:rPr>
-                        <a:t>06~08</a:t>
-                      </a:r>
-                    </a:p>
-                  </a:txBody>
-                  <a:tcPr marL="88900" marR="88900" marT="63500" marB="63500" anchor="ctr">
-                    <a:lnL w="9525" cap="flat" cmpd="sng" algn="ctr">
-                      <a:solidFill>
-                        <a:srgbClr val="D0D7DE"/>
-                      </a:solidFill>
-                      <a:prstDash val="solid"/>
-                    </a:lnL>
-                    <a:lnR w="9525" cap="flat" cmpd="sng" algn="ctr">
-                      <a:solidFill>
-                        <a:srgbClr val="D0D7DE"/>
-                      </a:solidFill>
-                      <a:prstDash val="solid"/>
-                    </a:lnR>
-                    <a:lnT w="9525" cap="flat" cmpd="sng" algn="ctr">
-                      <a:solidFill>
-                        <a:srgbClr val="D0D7DE"/>
-                      </a:solidFill>
-                      <a:prstDash val="solid"/>
-                    </a:lnT>
-                    <a:lnB w="9525" cap="flat" cmpd="sng" algn="ctr">
-                      <a:solidFill>
-                        <a:srgbClr val="D0D7DE"/>
-                      </a:solidFill>
-                      <a:prstDash val="solid"/>
-                    </a:lnB>
-                    <a:solidFill>
-                      <a:srgbClr val="FFFFFF"/>
-                    </a:solidFill>
-                  </a:tcPr>
-                </a:tc>
-                <a:tc>
-                  <a:txBody>
-                    <a:bodyPr wrap="square"/>
-                    <a:lstStyle/>
-                    <a:p>
-                      <a:r>
-                        <a:rPr sz="1300" b="0">
-                          <a:solidFill>
-                            <a:srgbClr val="1F2328"/>
-                          </a:solidFill>
-                          <a:latin typeface="Malgun Gothic"/>
-                        </a:rPr>
-                        <a:t>실시간 루프</a:t>
-                      </a:r>
-                    </a:p>
-                  </a:txBody>
-                  <a:tcPr marL="88900" marR="88900" marT="63500" marB="63500" anchor="ctr">
-                    <a:lnL w="9525" cap="flat" cmpd="sng" algn="ctr">
-                      <a:solidFill>
-                        <a:srgbClr val="D0D7DE"/>
-                      </a:solidFill>
-                      <a:prstDash val="solid"/>
-                    </a:lnL>
-                    <a:lnR w="9525" cap="flat" cmpd="sng" algn="ctr">
-                      <a:solidFill>
-                        <a:srgbClr val="D0D7DE"/>
-                      </a:solidFill>
-                      <a:prstDash val="solid"/>
-                    </a:lnR>
-                    <a:lnT w="9525" cap="flat" cmpd="sng" algn="ctr">
-                      <a:solidFill>
-                        <a:srgbClr val="D0D7DE"/>
-                      </a:solidFill>
-                      <a:prstDash val="solid"/>
-                    </a:lnT>
-                    <a:lnB w="9525" cap="flat" cmpd="sng" algn="ctr">
-                      <a:solidFill>
-                        <a:srgbClr val="D0D7DE"/>
-                      </a:solidFill>
-                      <a:prstDash val="solid"/>
-                    </a:lnB>
-                    <a:solidFill>
-                      <a:srgbClr val="FFFFFF"/>
-                    </a:solidFill>
-                  </a:tcPr>
-                </a:tc>
-                <a:tc>
-                  <a:txBody>
-                    <a:bodyPr wrap="square"/>
-                    <a:lstStyle/>
-                    <a:p>
-                      <a:r>
-                        <a:rPr sz="1300" b="0">
-                          <a:solidFill>
-                            <a:srgbClr val="1F2328"/>
-                          </a:solidFill>
-                          <a:latin typeface="Malgun Gothic"/>
-                        </a:rPr>
-                        <a:t>알람 10초 수신, 감지~기록 end-to-end, 실장비 보정 개통(08-12)</a:t>
-                      </a:r>
-                    </a:p>
-                  </a:txBody>
-                  <a:tcPr marL="88900" marR="88900" marT="63500" marB="63500" anchor="ctr">
-                    <a:lnL w="9525" cap="flat" cmpd="sng" algn="ctr">
-                      <a:solidFill>
-                        <a:srgbClr val="D0D7DE"/>
-                      </a:solidFill>
-                      <a:prstDash val="solid"/>
-                    </a:lnL>
-                    <a:lnR w="9525" cap="flat" cmpd="sng" algn="ctr">
-                      <a:solidFill>
-                        <a:srgbClr val="D0D7DE"/>
-                      </a:solidFill>
-                      <a:prstDash val="solid"/>
-                    </a:lnR>
-                    <a:lnT w="9525" cap="flat" cmpd="sng" algn="ctr">
-                      <a:solidFill>
-                        <a:srgbClr val="D0D7DE"/>
-                      </a:solidFill>
-                      <a:prstDash val="solid"/>
-                    </a:lnT>
-                    <a:lnB w="9525" cap="flat" cmpd="sng" algn="ctr">
-                      <a:solidFill>
-                        <a:srgbClr val="D0D7DE"/>
-                      </a:solidFill>
-                      <a:prstDash val="solid"/>
-                    </a:lnB>
-                    <a:solidFill>
-                      <a:srgbClr val="FFFFFF"/>
-                    </a:solidFill>
-                  </a:tcPr>
-                </a:tc>
-              </a:tr>
-              <a:tr h="365760">
-                <a:tc>
-                  <a:txBody>
-                    <a:bodyPr wrap="square"/>
-                    <a:lstStyle/>
-                    <a:p>
-                      <a:r>
-                        <a:rPr sz="1300" b="0">
-                          <a:solidFill>
-                            <a:srgbClr val="1F2328"/>
-                          </a:solidFill>
-                          <a:latin typeface="Malgun Gothic"/>
-                        </a:rPr>
-                        <a:t>08~09</a:t>
-                      </a:r>
-                    </a:p>
-                  </a:txBody>
-                  <a:tcPr marL="88900" marR="88900" marT="63500" marB="63500" anchor="ctr">
-                    <a:lnL w="9525" cap="flat" cmpd="sng" algn="ctr">
-                      <a:solidFill>
-                        <a:srgbClr val="D0D7DE"/>
-                      </a:solidFill>
-                      <a:prstDash val="solid"/>
-                    </a:lnL>
-                    <a:lnR w="9525" cap="flat" cmpd="sng" algn="ctr">
-                      <a:solidFill>
-                        <a:srgbClr val="D0D7DE"/>
-                      </a:solidFill>
-                      <a:prstDash val="solid"/>
-                    </a:lnR>
-                    <a:lnT w="9525" cap="flat" cmpd="sng" algn="ctr">
-                      <a:solidFill>
-                        <a:srgbClr val="D0D7DE"/>
-                      </a:solidFill>
-                      <a:prstDash val="solid"/>
-                    </a:lnT>
-                    <a:lnB w="9525" cap="flat" cmpd="sng" algn="ctr">
-                      <a:solidFill>
-                        <a:srgbClr val="D0D7DE"/>
-                      </a:solidFill>
-                      <a:prstDash val="solid"/>
-                    </a:lnB>
-                    <a:solidFill>
-                      <a:srgbClr val="F6F8FA"/>
-                    </a:solidFill>
-                  </a:tcPr>
-                </a:tc>
-                <a:tc>
-                  <a:txBody>
-                    <a:bodyPr wrap="square"/>
-                    <a:lstStyle/>
-                    <a:p>
-                      <a:r>
-                        <a:rPr sz="1300" b="0">
-                          <a:solidFill>
-                            <a:srgbClr val="1F2328"/>
-                          </a:solidFill>
-                          <a:latin typeface="Malgun Gothic"/>
-                        </a:rPr>
-                        <a:t>기록 계층 + 실알람 완주</a:t>
-                      </a:r>
-                    </a:p>
-                  </a:txBody>
-                  <a:tcPr marL="88900" marR="88900" marT="63500" marB="63500" anchor="ctr">
-                    <a:lnL w="9525" cap="flat" cmpd="sng" algn="ctr">
-                      <a:solidFill>
-                        <a:srgbClr val="D0D7DE"/>
-                      </a:solidFill>
-                      <a:prstDash val="solid"/>
-                    </a:lnL>
-                    <a:lnR w="9525" cap="flat" cmpd="sng" algn="ctr">
-                      <a:solidFill>
-                        <a:srgbClr val="D0D7DE"/>
-                      </a:solidFill>
-                      <a:prstDash val="solid"/>
-                    </a:lnR>
-                    <a:lnT w="9525" cap="flat" cmpd="sng" algn="ctr">
-                      <a:solidFill>
-                        <a:srgbClr val="D0D7DE"/>
-                      </a:solidFill>
-                      <a:prstDash val="solid"/>
-                    </a:lnT>
-                    <a:lnB w="9525" cap="flat" cmpd="sng" algn="ctr">
-                      <a:solidFill>
-                        <a:srgbClr val="D0D7DE"/>
-                      </a:solidFill>
-                      <a:prstDash val="solid"/>
-                    </a:lnB>
-                    <a:solidFill>
-                      <a:srgbClr val="F6F8FA"/>
-                    </a:solidFill>
-                  </a:tcPr>
-                </a:tc>
-                <a:tc>
-                  <a:txBody>
-                    <a:bodyPr wrap="square"/>
-                    <a:lstStyle/>
-                    <a:p>
-                      <a:r>
-                        <a:rPr sz="1300" b="0">
-                          <a:solidFill>
-                            <a:srgbClr val="1F2328"/>
-                          </a:solidFill>
-                          <a:latin typeface="Malgun Gothic"/>
-                        </a:rPr>
-                        <a:t>Recovery Episode, 실알람 3건 1분 미만 실측, 전용 PC 확보·26대 배치 준비</a:t>
-                      </a:r>
-                    </a:p>
-                  </a:txBody>
-                  <a:tcPr marL="88900" marR="88900" marT="63500" marB="63500" anchor="ctr">
-                    <a:lnL w="9525" cap="flat" cmpd="sng" algn="ctr">
-                      <a:solidFill>
-                        <a:srgbClr val="D0D7DE"/>
-                      </a:solidFill>
-                      <a:prstDash val="solid"/>
-                    </a:lnL>
-                    <a:lnR w="9525" cap="flat" cmpd="sng" algn="ctr">
-                      <a:solidFill>
-                        <a:srgbClr val="D0D7DE"/>
-                      </a:solidFill>
-                      <a:prstDash val="solid"/>
-                    </a:lnR>
-                    <a:lnT w="9525" cap="flat" cmpd="sng" algn="ctr">
-                      <a:solidFill>
-                        <a:srgbClr val="D0D7DE"/>
-                      </a:solidFill>
-                      <a:prstDash val="solid"/>
-                    </a:lnT>
-                    <a:lnB w="9525" cap="flat" cmpd="sng" algn="ctr">
-                      <a:solidFill>
-                        <a:srgbClr val="D0D7DE"/>
-                      </a:solidFill>
-                      <a:prstDash val="solid"/>
-                    </a:lnB>
-                    <a:solidFill>
-                      <a:srgbClr val="F6F8FA"/>
                     </a:solidFill>
                   </a:tcPr>
                 </a:tc>

--- a/docs/project_progress/img/07/07_slides.pptx
+++ b/docs/project_progress/img/07/07_slides.pptx
@@ -15,7 +15,6 @@
     <p:sldId id="263" r:id="rId14"/>
     <p:sldId id="264" r:id="rId15"/>
     <p:sldId id="265" r:id="rId16"/>
-    <p:sldId id="266" r:id="rId17"/>
   </p:sldIdLst>
   <p:sldSz cx="12191695" cy="6858000" type="screen4x3"/>
   <p:notesSz cx="6858000" cy="9144000"/>
@@ -6485,969 +6484,6 @@
                 </a:solidFill>
                 <a:latin typeface="Malgun Gothic"/>
               </a:rPr>
-              <a:t>3.3 정성 성과</a:t>
-            </a:r>
-          </a:p>
-        </p:txBody>
-      </p:sp>
-      <p:sp>
-        <p:nvSpPr>
-          <p:cNvPr id="3" name="Rectangle 2"/>
-          <p:cNvSpPr/>
-          <p:nvPr/>
-        </p:nvSpPr>
-        <p:spPr>
-          <a:xfrm>
-            <a:off x="457200" y="914400"/>
-            <a:ext cx="11277295" cy="25400"/>
-          </a:xfrm>
-          <a:prstGeom prst="rect">
-            <a:avLst/>
-          </a:prstGeom>
-          <a:solidFill>
-            <a:srgbClr val="1E3A8A"/>
-          </a:solidFill>
-          <a:ln>
-            <a:noFill/>
-          </a:ln>
-          <a:effectLst/>
-        </p:spPr>
-        <p:style>
-          <a:lnRef idx="1">
-            <a:schemeClr val="accent1"/>
-          </a:lnRef>
-          <a:fillRef idx="3">
-            <a:schemeClr val="accent1"/>
-          </a:fillRef>
-          <a:effectRef idx="2">
-            <a:schemeClr val="accent1"/>
-          </a:effectRef>
-          <a:fontRef idx="minor">
-            <a:schemeClr val="lt1"/>
-          </a:fontRef>
-        </p:style>
-        <p:txBody>
-          <a:bodyPr rtlCol="0" anchor="ctr"/>
-          <a:lstStyle/>
-          <a:p>
-            <a:pPr algn="ctr"/>
-          </a:p>
-        </p:txBody>
-      </p:sp>
-      <p:graphicFrame>
-        <p:nvGraphicFramePr>
-          <p:cNvPr id="4" name="Table 3"/>
-          <p:cNvGraphicFramePr>
-            <a:graphicFrameLocks noGrp="1"/>
-          </p:cNvGraphicFramePr>
-          <p:nvPr/>
-        </p:nvGraphicFramePr>
-        <p:xfrm>
-          <a:off x="457200" y="1097280"/>
-          <a:ext cx="11277294" cy="2194560"/>
-        </p:xfrm>
-        <a:graphic>
-          <a:graphicData uri="http://schemas.openxmlformats.org/drawingml/2006/table">
-            <a:tbl>
-              <a:tblPr firstRow="1" bandRow="0">
-                <a:tableStyleId>{5C22544A-7EE6-4342-B048-85BDC9FD1C3A}</a:tableStyleId>
-              </a:tblPr>
-              <a:tblGrid>
-                <a:gridCol w="1339876"/>
-                <a:gridCol w="3238035"/>
-                <a:gridCol w="6699383"/>
-              </a:tblGrid>
-              <a:tr h="365760">
-                <a:tc>
-                  <a:txBody>
-                    <a:bodyPr wrap="square"/>
-                    <a:lstStyle/>
-                    <a:p>
-                      <a:r>
-                        <a:rPr sz="1450" b="1">
-                          <a:solidFill>
-                            <a:srgbClr val="FFFFFF"/>
-                          </a:solidFill>
-                          <a:latin typeface="Malgun Gothic"/>
-                        </a:rPr>
-                        <a:t>항목</a:t>
-                      </a:r>
-                    </a:p>
-                  </a:txBody>
-                  <a:tcPr marL="88900" marR="88900" marT="63500" marB="63500" anchor="ctr">
-                    <a:lnL w="9525" cap="flat" cmpd="sng" algn="ctr">
-                      <a:solidFill>
-                        <a:srgbClr val="D0D7DE"/>
-                      </a:solidFill>
-                      <a:prstDash val="solid"/>
-                    </a:lnL>
-                    <a:lnR w="9525" cap="flat" cmpd="sng" algn="ctr">
-                      <a:solidFill>
-                        <a:srgbClr val="D0D7DE"/>
-                      </a:solidFill>
-                      <a:prstDash val="solid"/>
-                    </a:lnR>
-                    <a:lnT w="9525" cap="flat" cmpd="sng" algn="ctr">
-                      <a:solidFill>
-                        <a:srgbClr val="D0D7DE"/>
-                      </a:solidFill>
-                      <a:prstDash val="solid"/>
-                    </a:lnT>
-                    <a:lnB w="9525" cap="flat" cmpd="sng" algn="ctr">
-                      <a:solidFill>
-                        <a:srgbClr val="D0D7DE"/>
-                      </a:solidFill>
-                      <a:prstDash val="solid"/>
-                    </a:lnB>
-                    <a:solidFill>
-                      <a:srgbClr val="1E3A8A"/>
-                    </a:solidFill>
-                  </a:tcPr>
-                </a:tc>
-                <a:tc>
-                  <a:txBody>
-                    <a:bodyPr wrap="square"/>
-                    <a:lstStyle/>
-                    <a:p>
-                      <a:r>
-                        <a:rPr sz="1450" b="1">
-                          <a:solidFill>
-                            <a:srgbClr val="FFFFFF"/>
-                          </a:solidFill>
-                          <a:latin typeface="Malgun Gothic"/>
-                        </a:rPr>
-                        <a:t>Before</a:t>
-                      </a:r>
-                    </a:p>
-                  </a:txBody>
-                  <a:tcPr marL="88900" marR="88900" marT="63500" marB="63500" anchor="ctr">
-                    <a:lnL w="9525" cap="flat" cmpd="sng" algn="ctr">
-                      <a:solidFill>
-                        <a:srgbClr val="D0D7DE"/>
-                      </a:solidFill>
-                      <a:prstDash val="solid"/>
-                    </a:lnL>
-                    <a:lnR w="9525" cap="flat" cmpd="sng" algn="ctr">
-                      <a:solidFill>
-                        <a:srgbClr val="D0D7DE"/>
-                      </a:solidFill>
-                      <a:prstDash val="solid"/>
-                    </a:lnR>
-                    <a:lnT w="9525" cap="flat" cmpd="sng" algn="ctr">
-                      <a:solidFill>
-                        <a:srgbClr val="D0D7DE"/>
-                      </a:solidFill>
-                      <a:prstDash val="solid"/>
-                    </a:lnT>
-                    <a:lnB w="9525" cap="flat" cmpd="sng" algn="ctr">
-                      <a:solidFill>
-                        <a:srgbClr val="D0D7DE"/>
-                      </a:solidFill>
-                      <a:prstDash val="solid"/>
-                    </a:lnB>
-                    <a:solidFill>
-                      <a:srgbClr val="1E3A8A"/>
-                    </a:solidFill>
-                  </a:tcPr>
-                </a:tc>
-                <a:tc>
-                  <a:txBody>
-                    <a:bodyPr wrap="square"/>
-                    <a:lstStyle/>
-                    <a:p>
-                      <a:r>
-                        <a:rPr sz="1450" b="1">
-                          <a:solidFill>
-                            <a:srgbClr val="FFFFFF"/>
-                          </a:solidFill>
-                          <a:latin typeface="Malgun Gothic"/>
-                        </a:rPr>
-                        <a:t>After</a:t>
-                      </a:r>
-                    </a:p>
-                  </a:txBody>
-                  <a:tcPr marL="88900" marR="88900" marT="63500" marB="63500" anchor="ctr">
-                    <a:lnL w="9525" cap="flat" cmpd="sng" algn="ctr">
-                      <a:solidFill>
-                        <a:srgbClr val="D0D7DE"/>
-                      </a:solidFill>
-                      <a:prstDash val="solid"/>
-                    </a:lnL>
-                    <a:lnR w="9525" cap="flat" cmpd="sng" algn="ctr">
-                      <a:solidFill>
-                        <a:srgbClr val="D0D7DE"/>
-                      </a:solidFill>
-                      <a:prstDash val="solid"/>
-                    </a:lnR>
-                    <a:lnT w="9525" cap="flat" cmpd="sng" algn="ctr">
-                      <a:solidFill>
-                        <a:srgbClr val="D0D7DE"/>
-                      </a:solidFill>
-                      <a:prstDash val="solid"/>
-                    </a:lnT>
-                    <a:lnB w="9525" cap="flat" cmpd="sng" algn="ctr">
-                      <a:solidFill>
-                        <a:srgbClr val="D0D7DE"/>
-                      </a:solidFill>
-                      <a:prstDash val="solid"/>
-                    </a:lnB>
-                    <a:solidFill>
-                      <a:srgbClr val="1E3A8A"/>
-                    </a:solidFill>
-                  </a:tcPr>
-                </a:tc>
-              </a:tr>
-              <a:tr h="365760">
-                <a:tc>
-                  <a:txBody>
-                    <a:bodyPr wrap="square"/>
-                    <a:lstStyle/>
-                    <a:p>
-                      <a:r>
-                        <a:rPr sz="1400" b="0">
-                          <a:solidFill>
-                            <a:srgbClr val="1F2328"/>
-                          </a:solidFill>
-                          <a:latin typeface="Malgun Gothic"/>
-                        </a:rPr>
-                        <a:t>24시간 대응 체계</a:t>
-                      </a:r>
-                    </a:p>
-                  </a:txBody>
-                  <a:tcPr marL="88900" marR="88900" marT="63500" marB="63500" anchor="ctr">
-                    <a:lnL w="9525" cap="flat" cmpd="sng" algn="ctr">
-                      <a:solidFill>
-                        <a:srgbClr val="D0D7DE"/>
-                      </a:solidFill>
-                      <a:prstDash val="solid"/>
-                    </a:lnL>
-                    <a:lnR w="9525" cap="flat" cmpd="sng" algn="ctr">
-                      <a:solidFill>
-                        <a:srgbClr val="D0D7DE"/>
-                      </a:solidFill>
-                      <a:prstDash val="solid"/>
-                    </a:lnR>
-                    <a:lnT w="9525" cap="flat" cmpd="sng" algn="ctr">
-                      <a:solidFill>
-                        <a:srgbClr val="D0D7DE"/>
-                      </a:solidFill>
-                      <a:prstDash val="solid"/>
-                    </a:lnT>
-                    <a:lnB w="9525" cap="flat" cmpd="sng" algn="ctr">
-                      <a:solidFill>
-                        <a:srgbClr val="D0D7DE"/>
-                      </a:solidFill>
-                      <a:prstDash val="solid"/>
-                    </a:lnB>
-                    <a:solidFill>
-                      <a:srgbClr val="FFFFFF"/>
-                    </a:solidFill>
-                  </a:tcPr>
-                </a:tc>
-                <a:tc>
-                  <a:txBody>
-                    <a:bodyPr wrap="square"/>
-                    <a:lstStyle/>
-                    <a:p>
-                      <a:r>
-                        <a:rPr sz="1400" b="0">
-                          <a:solidFill>
-                            <a:srgbClr val="1F2328"/>
-                          </a:solidFill>
-                          <a:latin typeface="Malgun Gothic"/>
-                        </a:rPr>
-                        <a:t>인라인·엔지니어가 교대로 모니터 감시·접속·육안 탐색</a:t>
-                      </a:r>
-                    </a:p>
-                  </a:txBody>
-                  <a:tcPr marL="88900" marR="88900" marT="63500" marB="63500" anchor="ctr">
-                    <a:lnL w="9525" cap="flat" cmpd="sng" algn="ctr">
-                      <a:solidFill>
-                        <a:srgbClr val="D0D7DE"/>
-                      </a:solidFill>
-                      <a:prstDash val="solid"/>
-                    </a:lnL>
-                    <a:lnR w="9525" cap="flat" cmpd="sng" algn="ctr">
-                      <a:solidFill>
-                        <a:srgbClr val="D0D7DE"/>
-                      </a:solidFill>
-                      <a:prstDash val="solid"/>
-                    </a:lnR>
-                    <a:lnT w="9525" cap="flat" cmpd="sng" algn="ctr">
-                      <a:solidFill>
-                        <a:srgbClr val="D0D7DE"/>
-                      </a:solidFill>
-                      <a:prstDash val="solid"/>
-                    </a:lnT>
-                    <a:lnB w="9525" cap="flat" cmpd="sng" algn="ctr">
-                      <a:solidFill>
-                        <a:srgbClr val="D0D7DE"/>
-                      </a:solidFill>
-                      <a:prstDash val="solid"/>
-                    </a:lnB>
-                    <a:solidFill>
-                      <a:srgbClr val="FFFFFF"/>
-                    </a:solidFill>
-                  </a:tcPr>
-                </a:tc>
-                <a:tc>
-                  <a:txBody>
-                    <a:bodyPr wrap="square"/>
-                    <a:lstStyle/>
-                    <a:p>
-                      <a:r>
-                        <a:rPr sz="1400" b="0">
-                          <a:solidFill>
-                            <a:srgbClr val="1F2328"/>
-                          </a:solidFill>
-                          <a:latin typeface="Malgun Gothic"/>
-                        </a:rPr>
-                        <a:t>감지·접속·재조정 자동, 담당자는 예외 판단</a:t>
-                      </a:r>
-                    </a:p>
-                  </a:txBody>
-                  <a:tcPr marL="88900" marR="88900" marT="63500" marB="63500" anchor="ctr">
-                    <a:lnL w="9525" cap="flat" cmpd="sng" algn="ctr">
-                      <a:solidFill>
-                        <a:srgbClr val="D0D7DE"/>
-                      </a:solidFill>
-                      <a:prstDash val="solid"/>
-                    </a:lnL>
-                    <a:lnR w="9525" cap="flat" cmpd="sng" algn="ctr">
-                      <a:solidFill>
-                        <a:srgbClr val="D0D7DE"/>
-                      </a:solidFill>
-                      <a:prstDash val="solid"/>
-                    </a:lnR>
-                    <a:lnT w="9525" cap="flat" cmpd="sng" algn="ctr">
-                      <a:solidFill>
-                        <a:srgbClr val="D0D7DE"/>
-                      </a:solidFill>
-                      <a:prstDash val="solid"/>
-                    </a:lnT>
-                    <a:lnB w="9525" cap="flat" cmpd="sng" algn="ctr">
-                      <a:solidFill>
-                        <a:srgbClr val="D0D7DE"/>
-                      </a:solidFill>
-                      <a:prstDash val="solid"/>
-                    </a:lnB>
-                    <a:solidFill>
-                      <a:srgbClr val="FFFFFF"/>
-                    </a:solidFill>
-                  </a:tcPr>
-                </a:tc>
-              </a:tr>
-              <a:tr h="365760">
-                <a:tc>
-                  <a:txBody>
-                    <a:bodyPr wrap="square"/>
-                    <a:lstStyle/>
-                    <a:p>
-                      <a:r>
-                        <a:rPr sz="1400" b="0">
-                          <a:solidFill>
-                            <a:srgbClr val="1F2328"/>
-                          </a:solidFill>
-                          <a:latin typeface="Malgun Gothic"/>
-                        </a:rPr>
-                        <a:t>실패 원인 기록</a:t>
-                      </a:r>
-                    </a:p>
-                  </a:txBody>
-                  <a:tcPr marL="88900" marR="88900" marT="63500" marB="63500" anchor="ctr">
-                    <a:lnL w="9525" cap="flat" cmpd="sng" algn="ctr">
-                      <a:solidFill>
-                        <a:srgbClr val="D0D7DE"/>
-                      </a:solidFill>
-                      <a:prstDash val="solid"/>
-                    </a:lnL>
-                    <a:lnR w="9525" cap="flat" cmpd="sng" algn="ctr">
-                      <a:solidFill>
-                        <a:srgbClr val="D0D7DE"/>
-                      </a:solidFill>
-                      <a:prstDash val="solid"/>
-                    </a:lnR>
-                    <a:lnT w="9525" cap="flat" cmpd="sng" algn="ctr">
-                      <a:solidFill>
-                        <a:srgbClr val="D0D7DE"/>
-                      </a:solidFill>
-                      <a:prstDash val="solid"/>
-                    </a:lnT>
-                    <a:lnB w="9525" cap="flat" cmpd="sng" algn="ctr">
-                      <a:solidFill>
-                        <a:srgbClr val="D0D7DE"/>
-                      </a:solidFill>
-                      <a:prstDash val="solid"/>
-                    </a:lnB>
-                    <a:solidFill>
-                      <a:srgbClr val="F6F8FA"/>
-                    </a:solidFill>
-                  </a:tcPr>
-                </a:tc>
-                <a:tc>
-                  <a:txBody>
-                    <a:bodyPr wrap="square"/>
-                    <a:lstStyle/>
-                    <a:p>
-                      <a:r>
-                        <a:rPr sz="1400" b="0">
-                          <a:solidFill>
-                            <a:srgbClr val="1F2328"/>
-                          </a:solidFill>
-                          <a:latin typeface="Malgun Gothic"/>
-                        </a:rPr>
-                        <a:t>없음</a:t>
-                      </a:r>
-                    </a:p>
-                  </a:txBody>
-                  <a:tcPr marL="88900" marR="88900" marT="63500" marB="63500" anchor="ctr">
-                    <a:lnL w="9525" cap="flat" cmpd="sng" algn="ctr">
-                      <a:solidFill>
-                        <a:srgbClr val="D0D7DE"/>
-                      </a:solidFill>
-                      <a:prstDash val="solid"/>
-                    </a:lnL>
-                    <a:lnR w="9525" cap="flat" cmpd="sng" algn="ctr">
-                      <a:solidFill>
-                        <a:srgbClr val="D0D7DE"/>
-                      </a:solidFill>
-                      <a:prstDash val="solid"/>
-                    </a:lnR>
-                    <a:lnT w="9525" cap="flat" cmpd="sng" algn="ctr">
-                      <a:solidFill>
-                        <a:srgbClr val="D0D7DE"/>
-                      </a:solidFill>
-                      <a:prstDash val="solid"/>
-                    </a:lnT>
-                    <a:lnB w="9525" cap="flat" cmpd="sng" algn="ctr">
-                      <a:solidFill>
-                        <a:srgbClr val="D0D7DE"/>
-                      </a:solidFill>
-                      <a:prstDash val="solid"/>
-                    </a:lnB>
-                    <a:solidFill>
-                      <a:srgbClr val="F6F8FA"/>
-                    </a:solidFill>
-                  </a:tcPr>
-                </a:tc>
-                <a:tc>
-                  <a:txBody>
-                    <a:bodyPr wrap="square"/>
-                    <a:lstStyle/>
-                    <a:p>
-                      <a:r>
-                        <a:rPr sz="1400" b="0">
-                          <a:solidFill>
-                            <a:srgbClr val="1F2328"/>
-                          </a:solidFill>
-                          <a:latin typeface="Malgun Gothic"/>
-                        </a:rPr>
-                        <a:t>실패 화면 + 전 구간 녹화 + 대응 1건 = 기록 1줄</a:t>
-                      </a:r>
-                    </a:p>
-                  </a:txBody>
-                  <a:tcPr marL="88900" marR="88900" marT="63500" marB="63500" anchor="ctr">
-                    <a:lnL w="9525" cap="flat" cmpd="sng" algn="ctr">
-                      <a:solidFill>
-                        <a:srgbClr val="D0D7DE"/>
-                      </a:solidFill>
-                      <a:prstDash val="solid"/>
-                    </a:lnL>
-                    <a:lnR w="9525" cap="flat" cmpd="sng" algn="ctr">
-                      <a:solidFill>
-                        <a:srgbClr val="D0D7DE"/>
-                      </a:solidFill>
-                      <a:prstDash val="solid"/>
-                    </a:lnR>
-                    <a:lnT w="9525" cap="flat" cmpd="sng" algn="ctr">
-                      <a:solidFill>
-                        <a:srgbClr val="D0D7DE"/>
-                      </a:solidFill>
-                      <a:prstDash val="solid"/>
-                    </a:lnT>
-                    <a:lnB w="9525" cap="flat" cmpd="sng" algn="ctr">
-                      <a:solidFill>
-                        <a:srgbClr val="D0D7DE"/>
-                      </a:solidFill>
-                      <a:prstDash val="solid"/>
-                    </a:lnB>
-                    <a:solidFill>
-                      <a:srgbClr val="F6F8FA"/>
-                    </a:solidFill>
-                  </a:tcPr>
-                </a:tc>
-              </a:tr>
-              <a:tr h="365760">
-                <a:tc>
-                  <a:txBody>
-                    <a:bodyPr wrap="square"/>
-                    <a:lstStyle/>
-                    <a:p>
-                      <a:r>
-                        <a:rPr sz="1400" b="0">
-                          <a:solidFill>
-                            <a:srgbClr val="1F2328"/>
-                          </a:solidFill>
-                          <a:latin typeface="Malgun Gothic"/>
-                        </a:rPr>
-                        <a:t>재등록 필요성 판단</a:t>
-                      </a:r>
-                    </a:p>
-                  </a:txBody>
-                  <a:tcPr marL="88900" marR="88900" marT="63500" marB="63500" anchor="ctr">
-                    <a:lnL w="9525" cap="flat" cmpd="sng" algn="ctr">
-                      <a:solidFill>
-                        <a:srgbClr val="D0D7DE"/>
-                      </a:solidFill>
-                      <a:prstDash val="solid"/>
-                    </a:lnL>
-                    <a:lnR w="9525" cap="flat" cmpd="sng" algn="ctr">
-                      <a:solidFill>
-                        <a:srgbClr val="D0D7DE"/>
-                      </a:solidFill>
-                      <a:prstDash val="solid"/>
-                    </a:lnR>
-                    <a:lnT w="9525" cap="flat" cmpd="sng" algn="ctr">
-                      <a:solidFill>
-                        <a:srgbClr val="D0D7DE"/>
-                      </a:solidFill>
-                      <a:prstDash val="solid"/>
-                    </a:lnT>
-                    <a:lnB w="9525" cap="flat" cmpd="sng" algn="ctr">
-                      <a:solidFill>
-                        <a:srgbClr val="D0D7DE"/>
-                      </a:solidFill>
-                      <a:prstDash val="solid"/>
-                    </a:lnB>
-                    <a:solidFill>
-                      <a:srgbClr val="FFFFFF"/>
-                    </a:solidFill>
-                  </a:tcPr>
-                </a:tc>
-                <a:tc>
-                  <a:txBody>
-                    <a:bodyPr wrap="square"/>
-                    <a:lstStyle/>
-                    <a:p>
-                      <a:r>
-                        <a:rPr sz="1400" b="0">
-                          <a:solidFill>
-                            <a:srgbClr val="1F2328"/>
-                          </a:solidFill>
-                          <a:latin typeface="Malgun Gothic"/>
-                        </a:rPr>
-                        <a:t>화면 근거 없음, 경험에 의존</a:t>
-                      </a:r>
-                    </a:p>
-                  </a:txBody>
-                  <a:tcPr marL="88900" marR="88900" marT="63500" marB="63500" anchor="ctr">
-                    <a:lnL w="9525" cap="flat" cmpd="sng" algn="ctr">
-                      <a:solidFill>
-                        <a:srgbClr val="D0D7DE"/>
-                      </a:solidFill>
-                      <a:prstDash val="solid"/>
-                    </a:lnL>
-                    <a:lnR w="9525" cap="flat" cmpd="sng" algn="ctr">
-                      <a:solidFill>
-                        <a:srgbClr val="D0D7DE"/>
-                      </a:solidFill>
-                      <a:prstDash val="solid"/>
-                    </a:lnR>
-                    <a:lnT w="9525" cap="flat" cmpd="sng" algn="ctr">
-                      <a:solidFill>
-                        <a:srgbClr val="D0D7DE"/>
-                      </a:solidFill>
-                      <a:prstDash val="solid"/>
-                    </a:lnT>
-                    <a:lnB w="9525" cap="flat" cmpd="sng" algn="ctr">
-                      <a:solidFill>
-                        <a:srgbClr val="D0D7DE"/>
-                      </a:solidFill>
-                      <a:prstDash val="solid"/>
-                    </a:lnB>
-                    <a:solidFill>
-                      <a:srgbClr val="FFFFFF"/>
-                    </a:solidFill>
-                  </a:tcPr>
-                </a:tc>
-                <a:tc>
-                  <a:txBody>
-                    <a:bodyPr wrap="square"/>
-                    <a:lstStyle/>
-                    <a:p>
-                      <a:r>
-                        <a:rPr sz="1400" b="0">
-                          <a:solidFill>
-                            <a:srgbClr val="1F2328"/>
-                          </a:solidFill>
-                          <a:latin typeface="Malgun Gothic"/>
-                        </a:rPr>
-                        <a:t>헷갈리는 Align Key Recipe 목록을 자동 산출(SEM Recipe 104개 중 84개), 현업 대조 중</a:t>
-                      </a:r>
-                    </a:p>
-                  </a:txBody>
-                  <a:tcPr marL="88900" marR="88900" marT="63500" marB="63500" anchor="ctr">
-                    <a:lnL w="9525" cap="flat" cmpd="sng" algn="ctr">
-                      <a:solidFill>
-                        <a:srgbClr val="D0D7DE"/>
-                      </a:solidFill>
-                      <a:prstDash val="solid"/>
-                    </a:lnL>
-                    <a:lnR w="9525" cap="flat" cmpd="sng" algn="ctr">
-                      <a:solidFill>
-                        <a:srgbClr val="D0D7DE"/>
-                      </a:solidFill>
-                      <a:prstDash val="solid"/>
-                    </a:lnR>
-                    <a:lnT w="9525" cap="flat" cmpd="sng" algn="ctr">
-                      <a:solidFill>
-                        <a:srgbClr val="D0D7DE"/>
-                      </a:solidFill>
-                      <a:prstDash val="solid"/>
-                    </a:lnT>
-                    <a:lnB w="9525" cap="flat" cmpd="sng" algn="ctr">
-                      <a:solidFill>
-                        <a:srgbClr val="D0D7DE"/>
-                      </a:solidFill>
-                      <a:prstDash val="solid"/>
-                    </a:lnB>
-                    <a:solidFill>
-                      <a:srgbClr val="FFFFFF"/>
-                    </a:solidFill>
-                  </a:tcPr>
-                </a:tc>
-              </a:tr>
-              <a:tr h="365760">
-                <a:tc>
-                  <a:txBody>
-                    <a:bodyPr wrap="square"/>
-                    <a:lstStyle/>
-                    <a:p>
-                      <a:r>
-                        <a:rPr sz="1400" b="0">
-                          <a:solidFill>
-                            <a:srgbClr val="1F2328"/>
-                          </a:solidFill>
-                          <a:latin typeface="Malgun Gothic"/>
-                        </a:rPr>
-                        <a:t>보정 불가 알림</a:t>
-                      </a:r>
-                    </a:p>
-                  </a:txBody>
-                  <a:tcPr marL="88900" marR="88900" marT="63500" marB="63500" anchor="ctr">
-                    <a:lnL w="9525" cap="flat" cmpd="sng" algn="ctr">
-                      <a:solidFill>
-                        <a:srgbClr val="D0D7DE"/>
-                      </a:solidFill>
-                      <a:prstDash val="solid"/>
-                    </a:lnL>
-                    <a:lnR w="9525" cap="flat" cmpd="sng" algn="ctr">
-                      <a:solidFill>
-                        <a:srgbClr val="D0D7DE"/>
-                      </a:solidFill>
-                      <a:prstDash val="solid"/>
-                    </a:lnR>
-                    <a:lnT w="9525" cap="flat" cmpd="sng" algn="ctr">
-                      <a:solidFill>
-                        <a:srgbClr val="D0D7DE"/>
-                      </a:solidFill>
-                      <a:prstDash val="solid"/>
-                    </a:lnT>
-                    <a:lnB w="9525" cap="flat" cmpd="sng" algn="ctr">
-                      <a:solidFill>
-                        <a:srgbClr val="D0D7DE"/>
-                      </a:solidFill>
-                      <a:prstDash val="solid"/>
-                    </a:lnB>
-                    <a:solidFill>
-                      <a:srgbClr val="F6F8FA"/>
-                    </a:solidFill>
-                  </a:tcPr>
-                </a:tc>
-                <a:tc>
-                  <a:txBody>
-                    <a:bodyPr wrap="square"/>
-                    <a:lstStyle/>
-                    <a:p>
-                      <a:r>
-                        <a:rPr sz="1400" b="0">
-                          <a:solidFill>
-                            <a:srgbClr val="1F2328"/>
-                          </a:solidFill>
-                          <a:latin typeface="Malgun Gothic"/>
-                        </a:rPr>
-                        <a:t>상태 코드 한 줄</a:t>
-                      </a:r>
-                    </a:p>
-                  </a:txBody>
-                  <a:tcPr marL="88900" marR="88900" marT="63500" marB="63500" anchor="ctr">
-                    <a:lnL w="9525" cap="flat" cmpd="sng" algn="ctr">
-                      <a:solidFill>
-                        <a:srgbClr val="D0D7DE"/>
-                      </a:solidFill>
-                      <a:prstDash val="solid"/>
-                    </a:lnL>
-                    <a:lnR w="9525" cap="flat" cmpd="sng" algn="ctr">
-                      <a:solidFill>
-                        <a:srgbClr val="D0D7DE"/>
-                      </a:solidFill>
-                      <a:prstDash val="solid"/>
-                    </a:lnR>
-                    <a:lnT w="9525" cap="flat" cmpd="sng" algn="ctr">
-                      <a:solidFill>
-                        <a:srgbClr val="D0D7DE"/>
-                      </a:solidFill>
-                      <a:prstDash val="solid"/>
-                    </a:lnT>
-                    <a:lnB w="9525" cap="flat" cmpd="sng" algn="ctr">
-                      <a:solidFill>
-                        <a:srgbClr val="D0D7DE"/>
-                      </a:solidFill>
-                      <a:prstDash val="solid"/>
-                    </a:lnB>
-                    <a:solidFill>
-                      <a:srgbClr val="F6F8FA"/>
-                    </a:solidFill>
-                  </a:tcPr>
-                </a:tc>
-                <a:tc>
-                  <a:txBody>
-                    <a:bodyPr wrap="square"/>
-                    <a:lstStyle/>
-                    <a:p>
-                      <a:r>
-                        <a:rPr sz="1400" b="0">
-                          <a:solidFill>
-                            <a:srgbClr val="1F2328"/>
-                          </a:solidFill>
-                          <a:latin typeface="Malgun Gothic"/>
-                        </a:rPr>
-                        <a:t>원인·요구 행동을 담아 담당자에게 큐브 알림. 설정 문제와 재등록 검토를 구분</a:t>
-                      </a:r>
-                    </a:p>
-                  </a:txBody>
-                  <a:tcPr marL="88900" marR="88900" marT="63500" marB="63500" anchor="ctr">
-                    <a:lnL w="9525" cap="flat" cmpd="sng" algn="ctr">
-                      <a:solidFill>
-                        <a:srgbClr val="D0D7DE"/>
-                      </a:solidFill>
-                      <a:prstDash val="solid"/>
-                    </a:lnL>
-                    <a:lnR w="9525" cap="flat" cmpd="sng" algn="ctr">
-                      <a:solidFill>
-                        <a:srgbClr val="D0D7DE"/>
-                      </a:solidFill>
-                      <a:prstDash val="solid"/>
-                    </a:lnR>
-                    <a:lnT w="9525" cap="flat" cmpd="sng" algn="ctr">
-                      <a:solidFill>
-                        <a:srgbClr val="D0D7DE"/>
-                      </a:solidFill>
-                      <a:prstDash val="solid"/>
-                    </a:lnT>
-                    <a:lnB w="9525" cap="flat" cmpd="sng" algn="ctr">
-                      <a:solidFill>
-                        <a:srgbClr val="D0D7DE"/>
-                      </a:solidFill>
-                      <a:prstDash val="solid"/>
-                    </a:lnB>
-                    <a:solidFill>
-                      <a:srgbClr val="F6F8FA"/>
-                    </a:solidFill>
-                  </a:tcPr>
-                </a:tc>
-              </a:tr>
-              <a:tr h="365760">
-                <a:tc>
-                  <a:txBody>
-                    <a:bodyPr wrap="square"/>
-                    <a:lstStyle/>
-                    <a:p>
-                      <a:r>
-                        <a:rPr sz="1400" b="0">
-                          <a:solidFill>
-                            <a:srgbClr val="1F2328"/>
-                          </a:solidFill>
-                          <a:latin typeface="Malgun Gothic"/>
-                        </a:rPr>
-                        <a:t>엔지니어 조작 지식</a:t>
-                      </a:r>
-                    </a:p>
-                  </a:txBody>
-                  <a:tcPr marL="88900" marR="88900" marT="63500" marB="63500" anchor="ctr">
-                    <a:lnL w="9525" cap="flat" cmpd="sng" algn="ctr">
-                      <a:solidFill>
-                        <a:srgbClr val="D0D7DE"/>
-                      </a:solidFill>
-                      <a:prstDash val="solid"/>
-                    </a:lnL>
-                    <a:lnR w="9525" cap="flat" cmpd="sng" algn="ctr">
-                      <a:solidFill>
-                        <a:srgbClr val="D0D7DE"/>
-                      </a:solidFill>
-                      <a:prstDash val="solid"/>
-                    </a:lnR>
-                    <a:lnT w="9525" cap="flat" cmpd="sng" algn="ctr">
-                      <a:solidFill>
-                        <a:srgbClr val="D0D7DE"/>
-                      </a:solidFill>
-                      <a:prstDash val="solid"/>
-                    </a:lnT>
-                    <a:lnB w="9525" cap="flat" cmpd="sng" algn="ctr">
-                      <a:solidFill>
-                        <a:srgbClr val="D0D7DE"/>
-                      </a:solidFill>
-                      <a:prstDash val="solid"/>
-                    </a:lnB>
-                    <a:solidFill>
-                      <a:srgbClr val="FFFFFF"/>
-                    </a:solidFill>
-                  </a:tcPr>
-                </a:tc>
-                <a:tc>
-                  <a:txBody>
-                    <a:bodyPr wrap="square"/>
-                    <a:lstStyle/>
-                    <a:p>
-                      <a:r>
-                        <a:rPr sz="1400" b="0">
-                          <a:solidFill>
-                            <a:srgbClr val="1F2328"/>
-                          </a:solidFill>
-                          <a:latin typeface="Malgun Gothic"/>
-                        </a:rPr>
-                        <a:t>개인 암묵지</a:t>
-                      </a:r>
-                    </a:p>
-                  </a:txBody>
-                  <a:tcPr marL="88900" marR="88900" marT="63500" marB="63500" anchor="ctr">
-                    <a:lnL w="9525" cap="flat" cmpd="sng" algn="ctr">
-                      <a:solidFill>
-                        <a:srgbClr val="D0D7DE"/>
-                      </a:solidFill>
-                      <a:prstDash val="solid"/>
-                    </a:lnL>
-                    <a:lnR w="9525" cap="flat" cmpd="sng" algn="ctr">
-                      <a:solidFill>
-                        <a:srgbClr val="D0D7DE"/>
-                      </a:solidFill>
-                      <a:prstDash val="solid"/>
-                    </a:lnR>
-                    <a:lnT w="9525" cap="flat" cmpd="sng" algn="ctr">
-                      <a:solidFill>
-                        <a:srgbClr val="D0D7DE"/>
-                      </a:solidFill>
-                      <a:prstDash val="solid"/>
-                    </a:lnT>
-                    <a:lnB w="9525" cap="flat" cmpd="sng" algn="ctr">
-                      <a:solidFill>
-                        <a:srgbClr val="D0D7DE"/>
-                      </a:solidFill>
-                      <a:prstDash val="solid"/>
-                    </a:lnB>
-                    <a:solidFill>
-                      <a:srgbClr val="FFFFFF"/>
-                    </a:solidFill>
-                  </a:tcPr>
-                </a:tc>
-                <a:tc>
-                  <a:txBody>
-                    <a:bodyPr wrap="square"/>
-                    <a:lstStyle/>
-                    <a:p>
-                      <a:r>
-                        <a:rPr sz="1400" b="0">
-                          <a:solidFill>
-                            <a:srgbClr val="1F2328"/>
-                          </a:solidFill>
-                          <a:latin typeface="Malgun Gothic"/>
-                        </a:rPr>
-                        <a:t>녹화 → 조작 타임라인 → 절차서 변환 경로 확보</a:t>
-                      </a:r>
-                    </a:p>
-                  </a:txBody>
-                  <a:tcPr marL="88900" marR="88900" marT="63500" marB="63500" anchor="ctr">
-                    <a:lnL w="9525" cap="flat" cmpd="sng" algn="ctr">
-                      <a:solidFill>
-                        <a:srgbClr val="D0D7DE"/>
-                      </a:solidFill>
-                      <a:prstDash val="solid"/>
-                    </a:lnL>
-                    <a:lnR w="9525" cap="flat" cmpd="sng" algn="ctr">
-                      <a:solidFill>
-                        <a:srgbClr val="D0D7DE"/>
-                      </a:solidFill>
-                      <a:prstDash val="solid"/>
-                    </a:lnR>
-                    <a:lnT w="9525" cap="flat" cmpd="sng" algn="ctr">
-                      <a:solidFill>
-                        <a:srgbClr val="D0D7DE"/>
-                      </a:solidFill>
-                      <a:prstDash val="solid"/>
-                    </a:lnT>
-                    <a:lnB w="9525" cap="flat" cmpd="sng" algn="ctr">
-                      <a:solidFill>
-                        <a:srgbClr val="D0D7DE"/>
-                      </a:solidFill>
-                      <a:prstDash val="solid"/>
-                    </a:lnB>
-                    <a:solidFill>
-                      <a:srgbClr val="FFFFFF"/>
-                    </a:solidFill>
-                  </a:tcPr>
-                </a:tc>
-              </a:tr>
-            </a:tbl>
-          </a:graphicData>
-        </a:graphic>
-      </p:graphicFrame>
-    </p:spTree>
-  </p:cSld>
-  <p:clrMapOvr>
-    <a:masterClrMapping/>
-  </p:clrMapOvr>
-</p:sld>
-</file>
-
-<file path=ppt/slides/slide11.xml><?xml version="1.0" encoding="utf-8"?>
-<p:sld xmlns:a="http://schemas.openxmlformats.org/drawingml/2006/main" xmlns:p="http://schemas.openxmlformats.org/presentationml/2006/main" xmlns:r="http://schemas.openxmlformats.org/officeDocument/2006/relationships">
-  <p:cSld>
-    <p:spTree>
-      <p:nvGrpSpPr>
-        <p:cNvPr id="1" name=""/>
-        <p:cNvGrpSpPr/>
-        <p:nvPr/>
-      </p:nvGrpSpPr>
-      <p:grpSpPr/>
-      <p:sp>
-        <p:nvSpPr>
-          <p:cNvPr id="2" name="TextBox 1"/>
-          <p:cNvSpPr txBox="1"/>
-          <p:nvPr/>
-        </p:nvSpPr>
-        <p:spPr>
-          <a:xfrm>
-            <a:off x="457200" y="320040"/>
-            <a:ext cx="11277295" cy="548640"/>
-          </a:xfrm>
-          <a:prstGeom prst="rect">
-            <a:avLst/>
-          </a:prstGeom>
-          <a:noFill/>
-        </p:spPr>
-        <p:txBody>
-          <a:bodyPr wrap="none" lIns="0">
-            <a:spAutoFit/>
-          </a:bodyPr>
-          <a:lstStyle/>
-          <a:p>
-            <a:r>
-              <a:rPr sz="2400" b="1">
-                <a:solidFill>
-                  <a:srgbClr val="1E3A8A"/>
-                </a:solidFill>
-                <a:latin typeface="Malgun Gothic"/>
-              </a:rPr>
               <a:t>4.3 Operation Improvement with AI</a:t>
             </a:r>
           </a:p>
@@ -13158,7 +12194,7 @@
         </p:nvGraphicFramePr>
         <p:xfrm>
           <a:off x="457200" y="1097280"/>
-          <a:ext cx="11277294" cy="2194560"/>
+          <a:ext cx="11277294" cy="1828800"/>
         </p:xfrm>
         <a:graphic>
           <a:graphicData uri="http://schemas.openxmlformats.org/drawingml/2006/table">
@@ -13167,8 +12203,8 @@
                 <a:tableStyleId>{5C22544A-7EE6-4342-B048-85BDC9FD1C3A}</a:tableStyleId>
               </a:tblPr>
               <a:tblGrid>
-                <a:gridCol w="4833126"/>
-                <a:gridCol w="6444168"/>
+                <a:gridCol w="4556482"/>
+                <a:gridCol w="6720812"/>
               </a:tblGrid>
               <a:tr h="365760">
                 <a:tc>
@@ -13177,7 +12213,7 @@
                     <a:lstStyle/>
                     <a:p>
                       <a:r>
-                        <a:rPr sz="1350" b="1">
+                        <a:rPr sz="1450" b="1">
                           <a:solidFill>
                             <a:srgbClr val="FFFFFF"/>
                           </a:solidFill>
@@ -13223,7 +12259,7 @@
                     <a:lstStyle/>
                     <a:p>
                       <a:r>
-                        <a:rPr sz="1350" b="1">
+                        <a:rPr sz="1450" b="1">
                           <a:solidFill>
                             <a:srgbClr val="FFFFFF"/>
                           </a:solidFill>
@@ -13271,13 +12307,13 @@
                     <a:lstStyle/>
                     <a:p>
                       <a:r>
-                        <a:rPr sz="1300" b="0">
+                        <a:rPr sz="1400" b="0">
                           <a:solidFill>
                             <a:srgbClr val="1F2328"/>
                           </a:solidFill>
                           <a:latin typeface="Malgun Gothic"/>
                         </a:rPr>
-                        <a:t>계측 클라이언트가 표준 UI가 아니라 기존 자동화 도구가 버튼을 인식하지 못함</a:t>
+                        <a:t>계측 화면이 표준 UI가 아니라 기존 자동화 도구가 버튼을 인식하지 못함</a:t>
                       </a:r>
                     </a:p>
                   </a:txBody>
@@ -13317,13 +12353,13 @@
                     <a:lstStyle/>
                     <a:p>
                       <a:r>
-                        <a:rPr sz="1300" b="0">
+                        <a:rPr sz="1400" b="0">
                           <a:solidFill>
                             <a:srgbClr val="1F2328"/>
                           </a:solidFill>
                           <a:latin typeface="Malgun Gothic"/>
                         </a:rPr>
-                        <a:t>화면 이미지를 보고 위치를 찾는 VLM 으로 전환. coarse → fine 2단계 + OCR 확인으로 클릭 신뢰도 99%</a:t>
+                        <a:t>화면 이미지로 위치를 찾는 VLM + OCR 확인. 클릭 성공률 99%</a:t>
                       </a:r>
                     </a:p>
                   </a:txBody>
@@ -13365,13 +12401,13 @@
                     <a:lstStyle/>
                     <a:p>
                       <a:r>
-                        <a:rPr sz="1300" b="0">
+                        <a:rPr sz="1400" b="0">
                           <a:solidFill>
                             <a:srgbClr val="1F2328"/>
                           </a:solidFill>
                           <a:latin typeface="Malgun Gothic"/>
                         </a:rPr>
-                        <a:t>Align Key가 공정 변동으로 매번 조금씩 달라 픽셀 동일성을 가정할 수 없음</a:t>
+                        <a:t>Align Key가 공정 변동으로 매번 달라 고정 템플릿으로 풀리지 않음</a:t>
                       </a:r>
                     </a:p>
                   </a:txBody>
@@ -13411,13 +12447,13 @@
                     <a:lstStyle/>
                     <a:p>
                       <a:r>
-                        <a:rPr sz="1300" b="0">
+                        <a:rPr sz="1400" b="0">
                           <a:solidFill>
                             <a:srgbClr val="1F2328"/>
                           </a:solidFill>
                           <a:latin typeface="Malgun Gothic"/>
                         </a:rPr>
-                        <a:t>구조·기하 기반 매칭에 여러 매칭 방식을 종합하고, 기준 이미지를 최근 성공 사례 종합으로 바꿔 지금의 웨이퍼 외관을 따라감</a:t>
+                        <a:t>여러 매칭 방식 종합 + 기준 이미지를 최근 성공 사례 종합으로 교체</a:t>
                       </a:r>
                     </a:p>
                   </a:txBody>
@@ -13459,13 +12495,13 @@
                     <a:lstStyle/>
                     <a:p>
                       <a:r>
-                        <a:rPr sz="1300" b="0">
+                        <a:rPr sz="1400" b="0">
                           <a:solidFill>
                             <a:srgbClr val="1F2328"/>
                           </a:solidFill>
                           <a:latin typeface="Malgun Gothic"/>
                         </a:rPr>
-                        <a:t>고배율 SEM 화면은 대부분 반복 패턴이라 가짜 후보가 많음</a:t>
+                        <a:t>고배율 SEM 화면은 반복 패턴이라 가짜 후보가 많음</a:t>
                       </a:r>
                     </a:p>
                   </a:txBody>
@@ -13505,13 +12541,13 @@
                     <a:lstStyle/>
                     <a:p>
                       <a:r>
-                        <a:rPr sz="1300" b="0">
+                        <a:rPr sz="1400" b="0">
                           <a:solidFill>
                             <a:srgbClr val="1F2328"/>
                           </a:solidFill>
                           <a:latin typeface="Malgun Gothic"/>
                         </a:rPr>
-                        <a:t>촬영 모드를 화면에서 읽어 모드별로 기준 이미지와 후보 평가 방식을 바꿈. 그래도 남는 실패의 약 87%는 정답이 후보에 없는 유형이라 Align Key 재등록 권고 목록으로 현업과 검토</a:t>
+                        <a:t>촬영 모드별로 기준 이미지·평가 방식을 분리. 남는 실패는 Align Key 재등록 과제로 현업과 검토</a:t>
                       </a:r>
                     </a:p>
                   </a:txBody>
@@ -13553,13 +12589,13 @@
                     <a:lstStyle/>
                     <a:p>
                       <a:r>
-                        <a:rPr sz="1300" b="0">
+                        <a:rPr sz="1400" b="0">
                           <a:solidFill>
                             <a:srgbClr val="1F2328"/>
                           </a:solidFill>
                           <a:latin typeface="Malgun Gothic"/>
                         </a:rPr>
-                        <a:t>라이브 영상이 계속 바뀌는 화면에서 AI가 오해 없이 정확히 눌러야 함</a:t>
+                        <a:t>실장비 클릭은 오동작 시 측정에 영향</a:t>
                       </a:r>
                     </a:p>
                   </a:txBody>
@@ -13599,1210 +12635,13 @@
                     <a:lstStyle/>
                     <a:p>
                       <a:r>
-                        <a:rPr sz="1300" b="0">
+                        <a:rPr sz="1400" b="0">
                           <a:solidFill>
                             <a:srgbClr val="1F2328"/>
                           </a:solidFill>
                           <a:latin typeface="Malgun Gothic"/>
                         </a:rPr>
-                        <a:t>VLM이 UI 요소와 라이브 영상 영역을 먼저 구분하고 CV가 그 안에서만 위치·이동량을 계산하는 역할 순서</a:t>
-                      </a:r>
-                    </a:p>
-                  </a:txBody>
-                  <a:tcPr marL="88900" marR="88900" marT="63500" marB="63500" anchor="ctr">
-                    <a:lnL w="9525" cap="flat" cmpd="sng" algn="ctr">
-                      <a:solidFill>
-                        <a:srgbClr val="D0D7DE"/>
-                      </a:solidFill>
-                      <a:prstDash val="solid"/>
-                    </a:lnL>
-                    <a:lnR w="9525" cap="flat" cmpd="sng" algn="ctr">
-                      <a:solidFill>
-                        <a:srgbClr val="D0D7DE"/>
-                      </a:solidFill>
-                      <a:prstDash val="solid"/>
-                    </a:lnR>
-                    <a:lnT w="9525" cap="flat" cmpd="sng" algn="ctr">
-                      <a:solidFill>
-                        <a:srgbClr val="D0D7DE"/>
-                      </a:solidFill>
-                      <a:prstDash val="solid"/>
-                    </a:lnT>
-                    <a:lnB w="9525" cap="flat" cmpd="sng" algn="ctr">
-                      <a:solidFill>
-                        <a:srgbClr val="D0D7DE"/>
-                      </a:solidFill>
-                      <a:prstDash val="solid"/>
-                    </a:lnB>
-                    <a:solidFill>
-                      <a:srgbClr val="F6F8FA"/>
-                    </a:solidFill>
-                  </a:tcPr>
-                </a:tc>
-              </a:tr>
-              <a:tr h="365760">
-                <a:tc>
-                  <a:txBody>
-                    <a:bodyPr wrap="square"/>
-                    <a:lstStyle/>
-                    <a:p>
-                      <a:r>
-                        <a:rPr sz="1300" b="0">
-                          <a:solidFill>
-                            <a:srgbClr val="1F2328"/>
-                          </a:solidFill>
-                          <a:latin typeface="Malgun Gothic"/>
-                        </a:rPr>
-                        <a:t>실장비 클릭은 오동작 시 측정에 영향</a:t>
-                      </a:r>
-                    </a:p>
-                  </a:txBody>
-                  <a:tcPr marL="88900" marR="88900" marT="63500" marB="63500" anchor="ctr">
-                    <a:lnL w="9525" cap="flat" cmpd="sng" algn="ctr">
-                      <a:solidFill>
-                        <a:srgbClr val="D0D7DE"/>
-                      </a:solidFill>
-                      <a:prstDash val="solid"/>
-                    </a:lnL>
-                    <a:lnR w="9525" cap="flat" cmpd="sng" algn="ctr">
-                      <a:solidFill>
-                        <a:srgbClr val="D0D7DE"/>
-                      </a:solidFill>
-                      <a:prstDash val="solid"/>
-                    </a:lnR>
-                    <a:lnT w="9525" cap="flat" cmpd="sng" algn="ctr">
-                      <a:solidFill>
-                        <a:srgbClr val="D0D7DE"/>
-                      </a:solidFill>
-                      <a:prstDash val="solid"/>
-                    </a:lnT>
-                    <a:lnB w="9525" cap="flat" cmpd="sng" algn="ctr">
-                      <a:solidFill>
-                        <a:srgbClr val="D0D7DE"/>
-                      </a:solidFill>
-                      <a:prstDash val="solid"/>
-                    </a:lnB>
-                    <a:solidFill>
-                      <a:srgbClr val="FFFFFF"/>
-                    </a:solidFill>
-                  </a:tcPr>
-                </a:tc>
-                <a:tc>
-                  <a:txBody>
-                    <a:bodyPr wrap="square"/>
-                    <a:lstStyle/>
-                    <a:p>
-                      <a:r>
-                        <a:rPr sz="1300" b="0">
-                          <a:solidFill>
-                            <a:srgbClr val="1F2328"/>
-                          </a:solidFill>
-                          <a:latin typeface="Malgun Gothic"/>
-                        </a:rPr>
-                        <a:t>확인 안 된 클릭은 나가지 않는 fail-closed, 모드 불명이면 보정 보류, 잘못 열린 창은 닫고 재시도. 점검 모드(비파괴) → 반자동 → 현업 합동 시험 → 26대 배치의 단계적 게이트</a:t>
-                      </a:r>
-                    </a:p>
-                  </a:txBody>
-                  <a:tcPr marL="88900" marR="88900" marT="63500" marB="63500" anchor="ctr">
-                    <a:lnL w="9525" cap="flat" cmpd="sng" algn="ctr">
-                      <a:solidFill>
-                        <a:srgbClr val="D0D7DE"/>
-                      </a:solidFill>
-                      <a:prstDash val="solid"/>
-                    </a:lnL>
-                    <a:lnR w="9525" cap="flat" cmpd="sng" algn="ctr">
-                      <a:solidFill>
-                        <a:srgbClr val="D0D7DE"/>
-                      </a:solidFill>
-                      <a:prstDash val="solid"/>
-                    </a:lnR>
-                    <a:lnT w="9525" cap="flat" cmpd="sng" algn="ctr">
-                      <a:solidFill>
-                        <a:srgbClr val="D0D7DE"/>
-                      </a:solidFill>
-                      <a:prstDash val="solid"/>
-                    </a:lnT>
-                    <a:lnB w="9525" cap="flat" cmpd="sng" algn="ctr">
-                      <a:solidFill>
-                        <a:srgbClr val="D0D7DE"/>
-                      </a:solidFill>
-                      <a:prstDash val="solid"/>
-                    </a:lnB>
-                    <a:solidFill>
-                      <a:srgbClr val="FFFFFF"/>
-                    </a:solidFill>
-                  </a:tcPr>
-                </a:tc>
-              </a:tr>
-            </a:tbl>
-          </a:graphicData>
-        </a:graphic>
-      </p:graphicFrame>
-    </p:spTree>
-  </p:cSld>
-  <p:clrMapOvr>
-    <a:masterClrMapping/>
-  </p:clrMapOvr>
-</p:sld>
-</file>
-
-<file path=ppt/slides/slide6.xml><?xml version="1.0" encoding="utf-8"?>
-<p:sld xmlns:a="http://schemas.openxmlformats.org/drawingml/2006/main" xmlns:p="http://schemas.openxmlformats.org/presentationml/2006/main" xmlns:r="http://schemas.openxmlformats.org/officeDocument/2006/relationships">
-  <p:cSld>
-    <p:spTree>
-      <p:nvGrpSpPr>
-        <p:cNvPr id="1" name=""/>
-        <p:cNvGrpSpPr/>
-        <p:nvPr/>
-      </p:nvGrpSpPr>
-      <p:grpSpPr/>
-      <p:sp>
-        <p:nvSpPr>
-          <p:cNvPr id="2" name="TextBox 1"/>
-          <p:cNvSpPr txBox="1"/>
-          <p:nvPr/>
-        </p:nvSpPr>
-        <p:spPr>
-          <a:xfrm>
-            <a:off x="457200" y="320040"/>
-            <a:ext cx="11277295" cy="548640"/>
-          </a:xfrm>
-          <a:prstGeom prst="rect">
-            <a:avLst/>
-          </a:prstGeom>
-          <a:noFill/>
-        </p:spPr>
-        <p:txBody>
-          <a:bodyPr wrap="none" lIns="0">
-            <a:spAutoFit/>
-          </a:bodyPr>
-          <a:lstStyle/>
-          <a:p>
-            <a:r>
-              <a:rPr sz="2400" b="1">
-                <a:solidFill>
-                  <a:srgbClr val="1E3A8A"/>
-                </a:solidFill>
-                <a:latin typeface="Malgun Gothic"/>
-              </a:rPr>
-              <a:t>2.4 소요 기간·조직 영향·확산 가능성</a:t>
-            </a:r>
-          </a:p>
-        </p:txBody>
-      </p:sp>
-      <p:sp>
-        <p:nvSpPr>
-          <p:cNvPr id="3" name="Rectangle 2"/>
-          <p:cNvSpPr/>
-          <p:nvPr/>
-        </p:nvSpPr>
-        <p:spPr>
-          <a:xfrm>
-            <a:off x="457200" y="914400"/>
-            <a:ext cx="11277295" cy="25400"/>
-          </a:xfrm>
-          <a:prstGeom prst="rect">
-            <a:avLst/>
-          </a:prstGeom>
-          <a:solidFill>
-            <a:srgbClr val="1E3A8A"/>
-          </a:solidFill>
-          <a:ln>
-            <a:noFill/>
-          </a:ln>
-          <a:effectLst/>
-        </p:spPr>
-        <p:style>
-          <a:lnRef idx="1">
-            <a:schemeClr val="accent1"/>
-          </a:lnRef>
-          <a:fillRef idx="3">
-            <a:schemeClr val="accent1"/>
-          </a:fillRef>
-          <a:effectRef idx="2">
-            <a:schemeClr val="accent1"/>
-          </a:effectRef>
-          <a:fontRef idx="minor">
-            <a:schemeClr val="lt1"/>
-          </a:fontRef>
-        </p:style>
-        <p:txBody>
-          <a:bodyPr rtlCol="0" anchor="ctr"/>
-          <a:lstStyle/>
-          <a:p>
-            <a:pPr algn="ctr"/>
-          </a:p>
-        </p:txBody>
-      </p:sp>
-      <p:graphicFrame>
-        <p:nvGraphicFramePr>
-          <p:cNvPr id="4" name="Table 3"/>
-          <p:cNvGraphicFramePr>
-            <a:graphicFrameLocks noGrp="1"/>
-          </p:cNvGraphicFramePr>
-          <p:nvPr/>
-        </p:nvGraphicFramePr>
-        <p:xfrm>
-          <a:off x="457200" y="1097280"/>
-          <a:ext cx="11277293" cy="2560320"/>
-        </p:xfrm>
-        <a:graphic>
-          <a:graphicData uri="http://schemas.openxmlformats.org/drawingml/2006/table">
-            <a:tbl>
-              <a:tblPr firstRow="1" bandRow="0">
-                <a:tableStyleId>{5C22544A-7EE6-4342-B048-85BDC9FD1C3A}</a:tableStyleId>
-              </a:tblPr>
-              <a:tblGrid>
-                <a:gridCol w="1713006"/>
-                <a:gridCol w="1998507"/>
-                <a:gridCol w="7565780"/>
-              </a:tblGrid>
-              <a:tr h="365760">
-                <a:tc>
-                  <a:txBody>
-                    <a:bodyPr wrap="square"/>
-                    <a:lstStyle/>
-                    <a:p>
-                      <a:r>
-                        <a:rPr sz="1350" b="1">
-                          <a:solidFill>
-                            <a:srgbClr val="FFFFFF"/>
-                          </a:solidFill>
-                          <a:latin typeface="Malgun Gothic"/>
-                        </a:rPr>
-                        <a:t>시기</a:t>
-                      </a:r>
-                    </a:p>
-                  </a:txBody>
-                  <a:tcPr marL="88900" marR="88900" marT="63500" marB="63500" anchor="ctr">
-                    <a:lnL w="9525" cap="flat" cmpd="sng" algn="ctr">
-                      <a:solidFill>
-                        <a:srgbClr val="D0D7DE"/>
-                      </a:solidFill>
-                      <a:prstDash val="solid"/>
-                    </a:lnL>
-                    <a:lnR w="9525" cap="flat" cmpd="sng" algn="ctr">
-                      <a:solidFill>
-                        <a:srgbClr val="D0D7DE"/>
-                      </a:solidFill>
-                      <a:prstDash val="solid"/>
-                    </a:lnR>
-                    <a:lnT w="9525" cap="flat" cmpd="sng" algn="ctr">
-                      <a:solidFill>
-                        <a:srgbClr val="D0D7DE"/>
-                      </a:solidFill>
-                      <a:prstDash val="solid"/>
-                    </a:lnT>
-                    <a:lnB w="9525" cap="flat" cmpd="sng" algn="ctr">
-                      <a:solidFill>
-                        <a:srgbClr val="D0D7DE"/>
-                      </a:solidFill>
-                      <a:prstDash val="solid"/>
-                    </a:lnB>
-                    <a:solidFill>
-                      <a:srgbClr val="1E3A8A"/>
-                    </a:solidFill>
-                  </a:tcPr>
-                </a:tc>
-                <a:tc>
-                  <a:txBody>
-                    <a:bodyPr wrap="square"/>
-                    <a:lstStyle/>
-                    <a:p>
-                      <a:r>
-                        <a:rPr sz="1350" b="1">
-                          <a:solidFill>
-                            <a:srgbClr val="FFFFFF"/>
-                          </a:solidFill>
-                          <a:latin typeface="Malgun Gothic"/>
-                        </a:rPr>
-                        <a:t>단계</a:t>
-                      </a:r>
-                    </a:p>
-                  </a:txBody>
-                  <a:tcPr marL="88900" marR="88900" marT="63500" marB="63500" anchor="ctr">
-                    <a:lnL w="9525" cap="flat" cmpd="sng" algn="ctr">
-                      <a:solidFill>
-                        <a:srgbClr val="D0D7DE"/>
-                      </a:solidFill>
-                      <a:prstDash val="solid"/>
-                    </a:lnL>
-                    <a:lnR w="9525" cap="flat" cmpd="sng" algn="ctr">
-                      <a:solidFill>
-                        <a:srgbClr val="D0D7DE"/>
-                      </a:solidFill>
-                      <a:prstDash val="solid"/>
-                    </a:lnR>
-                    <a:lnT w="9525" cap="flat" cmpd="sng" algn="ctr">
-                      <a:solidFill>
-                        <a:srgbClr val="D0D7DE"/>
-                      </a:solidFill>
-                      <a:prstDash val="solid"/>
-                    </a:lnT>
-                    <a:lnB w="9525" cap="flat" cmpd="sng" algn="ctr">
-                      <a:solidFill>
-                        <a:srgbClr val="D0D7DE"/>
-                      </a:solidFill>
-                      <a:prstDash val="solid"/>
-                    </a:lnB>
-                    <a:solidFill>
-                      <a:srgbClr val="1E3A8A"/>
-                    </a:solidFill>
-                  </a:tcPr>
-                </a:tc>
-                <a:tc>
-                  <a:txBody>
-                    <a:bodyPr wrap="square"/>
-                    <a:lstStyle/>
-                    <a:p>
-                      <a:r>
-                        <a:rPr sz="1350" b="1">
-                          <a:solidFill>
-                            <a:srgbClr val="FFFFFF"/>
-                          </a:solidFill>
-                          <a:latin typeface="Malgun Gothic"/>
-                        </a:rPr>
-                        <a:t>산출</a:t>
-                      </a:r>
-                    </a:p>
-                  </a:txBody>
-                  <a:tcPr marL="88900" marR="88900" marT="63500" marB="63500" anchor="ctr">
-                    <a:lnL w="9525" cap="flat" cmpd="sng" algn="ctr">
-                      <a:solidFill>
-                        <a:srgbClr val="D0D7DE"/>
-                      </a:solidFill>
-                      <a:prstDash val="solid"/>
-                    </a:lnL>
-                    <a:lnR w="9525" cap="flat" cmpd="sng" algn="ctr">
-                      <a:solidFill>
-                        <a:srgbClr val="D0D7DE"/>
-                      </a:solidFill>
-                      <a:prstDash val="solid"/>
-                    </a:lnR>
-                    <a:lnT w="9525" cap="flat" cmpd="sng" algn="ctr">
-                      <a:solidFill>
-                        <a:srgbClr val="D0D7DE"/>
-                      </a:solidFill>
-                      <a:prstDash val="solid"/>
-                    </a:lnT>
-                    <a:lnB w="9525" cap="flat" cmpd="sng" algn="ctr">
-                      <a:solidFill>
-                        <a:srgbClr val="D0D7DE"/>
-                      </a:solidFill>
-                      <a:prstDash val="solid"/>
-                    </a:lnB>
-                    <a:solidFill>
-                      <a:srgbClr val="1E3A8A"/>
-                    </a:solidFill>
-                  </a:tcPr>
-                </a:tc>
-              </a:tr>
-              <a:tr h="365760">
-                <a:tc>
-                  <a:txBody>
-                    <a:bodyPr wrap="square"/>
-                    <a:lstStyle/>
-                    <a:p>
-                      <a:r>
-                        <a:rPr sz="1300" b="0">
-                          <a:solidFill>
-                            <a:srgbClr val="1F2328"/>
-                          </a:solidFill>
-                          <a:latin typeface="Malgun Gothic"/>
-                        </a:rPr>
-                        <a:t>2026-01</a:t>
-                      </a:r>
-                    </a:p>
-                  </a:txBody>
-                  <a:tcPr marL="88900" marR="88900" marT="63500" marB="63500" anchor="ctr">
-                    <a:lnL w="9525" cap="flat" cmpd="sng" algn="ctr">
-                      <a:solidFill>
-                        <a:srgbClr val="D0D7DE"/>
-                      </a:solidFill>
-                      <a:prstDash val="solid"/>
-                    </a:lnL>
-                    <a:lnR w="9525" cap="flat" cmpd="sng" algn="ctr">
-                      <a:solidFill>
-                        <a:srgbClr val="D0D7DE"/>
-                      </a:solidFill>
-                      <a:prstDash val="solid"/>
-                    </a:lnR>
-                    <a:lnT w="9525" cap="flat" cmpd="sng" algn="ctr">
-                      <a:solidFill>
-                        <a:srgbClr val="D0D7DE"/>
-                      </a:solidFill>
-                      <a:prstDash val="solid"/>
-                    </a:lnT>
-                    <a:lnB w="9525" cap="flat" cmpd="sng" algn="ctr">
-                      <a:solidFill>
-                        <a:srgbClr val="D0D7DE"/>
-                      </a:solidFill>
-                      <a:prstDash val="solid"/>
-                    </a:lnB>
-                    <a:solidFill>
-                      <a:srgbClr val="FFFFFF"/>
-                    </a:solidFill>
-                  </a:tcPr>
-                </a:tc>
-                <a:tc>
-                  <a:txBody>
-                    <a:bodyPr wrap="square"/>
-                    <a:lstStyle/>
-                    <a:p>
-                      <a:r>
-                        <a:rPr sz="1300" b="0">
-                          <a:solidFill>
-                            <a:srgbClr val="1F2328"/>
-                          </a:solidFill>
-                          <a:latin typeface="Malgun Gothic"/>
-                        </a:rPr>
-                        <a:t>요구사항 정의</a:t>
-                      </a:r>
-                    </a:p>
-                  </a:txBody>
-                  <a:tcPr marL="88900" marR="88900" marT="63500" marB="63500" anchor="ctr">
-                    <a:lnL w="9525" cap="flat" cmpd="sng" algn="ctr">
-                      <a:solidFill>
-                        <a:srgbClr val="D0D7DE"/>
-                      </a:solidFill>
-                      <a:prstDash val="solid"/>
-                    </a:lnL>
-                    <a:lnR w="9525" cap="flat" cmpd="sng" algn="ctr">
-                      <a:solidFill>
-                        <a:srgbClr val="D0D7DE"/>
-                      </a:solidFill>
-                      <a:prstDash val="solid"/>
-                    </a:lnR>
-                    <a:lnT w="9525" cap="flat" cmpd="sng" algn="ctr">
-                      <a:solidFill>
-                        <a:srgbClr val="D0D7DE"/>
-                      </a:solidFill>
-                      <a:prstDash val="solid"/>
-                    </a:lnT>
-                    <a:lnB w="9525" cap="flat" cmpd="sng" algn="ctr">
-                      <a:solidFill>
-                        <a:srgbClr val="D0D7DE"/>
-                      </a:solidFill>
-                      <a:prstDash val="solid"/>
-                    </a:lnB>
-                    <a:solidFill>
-                      <a:srgbClr val="FFFFFF"/>
-                    </a:solidFill>
-                  </a:tcPr>
-                </a:tc>
-                <a:tc>
-                  <a:txBody>
-                    <a:bodyPr wrap="square"/>
-                    <a:lstStyle/>
-                    <a:p>
-                      <a:r>
-                        <a:rPr sz="1300" b="0">
-                          <a:solidFill>
-                            <a:srgbClr val="1F2328"/>
-                          </a:solidFill>
-                          <a:latin typeface="Malgun Gothic"/>
-                        </a:rPr>
-                        <a:t>범위·제약·평가 지표 확정</a:t>
-                      </a:r>
-                    </a:p>
-                  </a:txBody>
-                  <a:tcPr marL="88900" marR="88900" marT="63500" marB="63500" anchor="ctr">
-                    <a:lnL w="9525" cap="flat" cmpd="sng" algn="ctr">
-                      <a:solidFill>
-                        <a:srgbClr val="D0D7DE"/>
-                      </a:solidFill>
-                      <a:prstDash val="solid"/>
-                    </a:lnL>
-                    <a:lnR w="9525" cap="flat" cmpd="sng" algn="ctr">
-                      <a:solidFill>
-                        <a:srgbClr val="D0D7DE"/>
-                      </a:solidFill>
-                      <a:prstDash val="solid"/>
-                    </a:lnR>
-                    <a:lnT w="9525" cap="flat" cmpd="sng" algn="ctr">
-                      <a:solidFill>
-                        <a:srgbClr val="D0D7DE"/>
-                      </a:solidFill>
-                      <a:prstDash val="solid"/>
-                    </a:lnT>
-                    <a:lnB w="9525" cap="flat" cmpd="sng" algn="ctr">
-                      <a:solidFill>
-                        <a:srgbClr val="D0D7DE"/>
-                      </a:solidFill>
-                      <a:prstDash val="solid"/>
-                    </a:lnB>
-                    <a:solidFill>
-                      <a:srgbClr val="FFFFFF"/>
-                    </a:solidFill>
-                  </a:tcPr>
-                </a:tc>
-              </a:tr>
-              <a:tr h="365760">
-                <a:tc>
-                  <a:txBody>
-                    <a:bodyPr wrap="square"/>
-                    <a:lstStyle/>
-                    <a:p>
-                      <a:r>
-                        <a:rPr sz="1300" b="0">
-                          <a:solidFill>
-                            <a:srgbClr val="1F2328"/>
-                          </a:solidFill>
-                          <a:latin typeface="Malgun Gothic"/>
-                        </a:rPr>
-                        <a:t>02~03</a:t>
-                      </a:r>
-                    </a:p>
-                  </a:txBody>
-                  <a:tcPr marL="88900" marR="88900" marT="63500" marB="63500" anchor="ctr">
-                    <a:lnL w="9525" cap="flat" cmpd="sng" algn="ctr">
-                      <a:solidFill>
-                        <a:srgbClr val="D0D7DE"/>
-                      </a:solidFill>
-                      <a:prstDash val="solid"/>
-                    </a:lnL>
-                    <a:lnR w="9525" cap="flat" cmpd="sng" algn="ctr">
-                      <a:solidFill>
-                        <a:srgbClr val="D0D7DE"/>
-                      </a:solidFill>
-                      <a:prstDash val="solid"/>
-                    </a:lnR>
-                    <a:lnT w="9525" cap="flat" cmpd="sng" algn="ctr">
-                      <a:solidFill>
-                        <a:srgbClr val="D0D7DE"/>
-                      </a:solidFill>
-                      <a:prstDash val="solid"/>
-                    </a:lnT>
-                    <a:lnB w="9525" cap="flat" cmpd="sng" algn="ctr">
-                      <a:solidFill>
-                        <a:srgbClr val="D0D7DE"/>
-                      </a:solidFill>
-                      <a:prstDash val="solid"/>
-                    </a:lnB>
-                    <a:solidFill>
-                      <a:srgbClr val="F6F8FA"/>
-                    </a:solidFill>
-                  </a:tcPr>
-                </a:tc>
-                <a:tc>
-                  <a:txBody>
-                    <a:bodyPr wrap="square"/>
-                    <a:lstStyle/>
-                    <a:p>
-                      <a:r>
-                        <a:rPr sz="1300" b="0">
-                          <a:solidFill>
-                            <a:srgbClr val="1F2328"/>
-                          </a:solidFill>
-                          <a:latin typeface="Malgun Gothic"/>
-                        </a:rPr>
-                        <a:t>VLM 인프라</a:t>
-                      </a:r>
-                    </a:p>
-                  </a:txBody>
-                  <a:tcPr marL="88900" marR="88900" marT="63500" marB="63500" anchor="ctr">
-                    <a:lnL w="9525" cap="flat" cmpd="sng" algn="ctr">
-                      <a:solidFill>
-                        <a:srgbClr val="D0D7DE"/>
-                      </a:solidFill>
-                      <a:prstDash val="solid"/>
-                    </a:lnL>
-                    <a:lnR w="9525" cap="flat" cmpd="sng" algn="ctr">
-                      <a:solidFill>
-                        <a:srgbClr val="D0D7DE"/>
-                      </a:solidFill>
-                      <a:prstDash val="solid"/>
-                    </a:lnR>
-                    <a:lnT w="9525" cap="flat" cmpd="sng" algn="ctr">
-                      <a:solidFill>
-                        <a:srgbClr val="D0D7DE"/>
-                      </a:solidFill>
-                      <a:prstDash val="solid"/>
-                    </a:lnT>
-                    <a:lnB w="9525" cap="flat" cmpd="sng" algn="ctr">
-                      <a:solidFill>
-                        <a:srgbClr val="D0D7DE"/>
-                      </a:solidFill>
-                      <a:prstDash val="solid"/>
-                    </a:lnB>
-                    <a:solidFill>
-                      <a:srgbClr val="F6F8FA"/>
-                    </a:solidFill>
-                  </a:tcPr>
-                </a:tc>
-                <a:tc>
-                  <a:txBody>
-                    <a:bodyPr wrap="square"/>
-                    <a:lstStyle/>
-                    <a:p>
-                      <a:r>
-                        <a:rPr sz="1300" b="0">
-                          <a:solidFill>
-                            <a:srgbClr val="1F2328"/>
-                          </a:solidFill>
-                          <a:latin typeface="Malgun Gothic"/>
-                        </a:rPr>
-                        <a:t>HCP 배포, VLM·OCR 5종 설치·비교, 통합 API</a:t>
-                      </a:r>
-                    </a:p>
-                  </a:txBody>
-                  <a:tcPr marL="88900" marR="88900" marT="63500" marB="63500" anchor="ctr">
-                    <a:lnL w="9525" cap="flat" cmpd="sng" algn="ctr">
-                      <a:solidFill>
-                        <a:srgbClr val="D0D7DE"/>
-                      </a:solidFill>
-                      <a:prstDash val="solid"/>
-                    </a:lnL>
-                    <a:lnR w="9525" cap="flat" cmpd="sng" algn="ctr">
-                      <a:solidFill>
-                        <a:srgbClr val="D0D7DE"/>
-                      </a:solidFill>
-                      <a:prstDash val="solid"/>
-                    </a:lnR>
-                    <a:lnT w="9525" cap="flat" cmpd="sng" algn="ctr">
-                      <a:solidFill>
-                        <a:srgbClr val="D0D7DE"/>
-                      </a:solidFill>
-                      <a:prstDash val="solid"/>
-                    </a:lnT>
-                    <a:lnB w="9525" cap="flat" cmpd="sng" algn="ctr">
-                      <a:solidFill>
-                        <a:srgbClr val="D0D7DE"/>
-                      </a:solidFill>
-                      <a:prstDash val="solid"/>
-                    </a:lnB>
-                    <a:solidFill>
-                      <a:srgbClr val="F6F8FA"/>
-                    </a:solidFill>
-                  </a:tcPr>
-                </a:tc>
-              </a:tr>
-              <a:tr h="365760">
-                <a:tc>
-                  <a:txBody>
-                    <a:bodyPr wrap="square"/>
-                    <a:lstStyle/>
-                    <a:p>
-                      <a:r>
-                        <a:rPr sz="1300" b="0">
-                          <a:solidFill>
-                            <a:srgbClr val="1F2328"/>
-                          </a:solidFill>
-                          <a:latin typeface="Malgun Gothic"/>
-                        </a:rPr>
-                        <a:t>03~05</a:t>
-                      </a:r>
-                    </a:p>
-                  </a:txBody>
-                  <a:tcPr marL="88900" marR="88900" marT="63500" marB="63500" anchor="ctr">
-                    <a:lnL w="9525" cap="flat" cmpd="sng" algn="ctr">
-                      <a:solidFill>
-                        <a:srgbClr val="D0D7DE"/>
-                      </a:solidFill>
-                      <a:prstDash val="solid"/>
-                    </a:lnL>
-                    <a:lnR w="9525" cap="flat" cmpd="sng" algn="ctr">
-                      <a:solidFill>
-                        <a:srgbClr val="D0D7DE"/>
-                      </a:solidFill>
-                      <a:prstDash val="solid"/>
-                    </a:lnR>
-                    <a:lnT w="9525" cap="flat" cmpd="sng" algn="ctr">
-                      <a:solidFill>
-                        <a:srgbClr val="D0D7DE"/>
-                      </a:solidFill>
-                      <a:prstDash val="solid"/>
-                    </a:lnT>
-                    <a:lnB w="9525" cap="flat" cmpd="sng" algn="ctr">
-                      <a:solidFill>
-                        <a:srgbClr val="D0D7DE"/>
-                      </a:solidFill>
-                      <a:prstDash val="solid"/>
-                    </a:lnB>
-                    <a:solidFill>
-                      <a:srgbClr val="FFFFFF"/>
-                    </a:solidFill>
-                  </a:tcPr>
-                </a:tc>
-                <a:tc>
-                  <a:txBody>
-                    <a:bodyPr wrap="square"/>
-                    <a:lstStyle/>
-                    <a:p>
-                      <a:r>
-                        <a:rPr sz="1300" b="0">
-                          <a:solidFill>
-                            <a:srgbClr val="1F2328"/>
-                          </a:solidFill>
-                          <a:latin typeface="Malgun Gothic"/>
-                        </a:rPr>
-                        <a:t>RCS 자동화 PoC</a:t>
-                      </a:r>
-                    </a:p>
-                  </a:txBody>
-                  <a:tcPr marL="88900" marR="88900" marT="63500" marB="63500" anchor="ctr">
-                    <a:lnL w="9525" cap="flat" cmpd="sng" algn="ctr">
-                      <a:solidFill>
-                        <a:srgbClr val="D0D7DE"/>
-                      </a:solidFill>
-                      <a:prstDash val="solid"/>
-                    </a:lnL>
-                    <a:lnR w="9525" cap="flat" cmpd="sng" algn="ctr">
-                      <a:solidFill>
-                        <a:srgbClr val="D0D7DE"/>
-                      </a:solidFill>
-                      <a:prstDash val="solid"/>
-                    </a:lnR>
-                    <a:lnT w="9525" cap="flat" cmpd="sng" algn="ctr">
-                      <a:solidFill>
-                        <a:srgbClr val="D0D7DE"/>
-                      </a:solidFill>
-                      <a:prstDash val="solid"/>
-                    </a:lnT>
-                    <a:lnB w="9525" cap="flat" cmpd="sng" algn="ctr">
-                      <a:solidFill>
-                        <a:srgbClr val="D0D7DE"/>
-                      </a:solidFill>
-                      <a:prstDash val="solid"/>
-                    </a:lnB>
-                    <a:solidFill>
-                      <a:srgbClr val="FFFFFF"/>
-                    </a:solidFill>
-                  </a:tcPr>
-                </a:tc>
-                <a:tc>
-                  <a:txBody>
-                    <a:bodyPr wrap="square"/>
-                    <a:lstStyle/>
-                    <a:p>
-                      <a:r>
-                        <a:rPr sz="1300" b="0">
-                          <a:solidFill>
-                            <a:srgbClr val="1F2328"/>
-                          </a:solidFill>
-                          <a:latin typeface="Malgun Gothic"/>
-                        </a:rPr>
-                        <a:t>coarse→fine→confirm, RCS 로그인~장비 선택 오피스 검증</a:t>
-                      </a:r>
-                    </a:p>
-                  </a:txBody>
-                  <a:tcPr marL="88900" marR="88900" marT="63500" marB="63500" anchor="ctr">
-                    <a:lnL w="9525" cap="flat" cmpd="sng" algn="ctr">
-                      <a:solidFill>
-                        <a:srgbClr val="D0D7DE"/>
-                      </a:solidFill>
-                      <a:prstDash val="solid"/>
-                    </a:lnL>
-                    <a:lnR w="9525" cap="flat" cmpd="sng" algn="ctr">
-                      <a:solidFill>
-                        <a:srgbClr val="D0D7DE"/>
-                      </a:solidFill>
-                      <a:prstDash val="solid"/>
-                    </a:lnR>
-                    <a:lnT w="9525" cap="flat" cmpd="sng" algn="ctr">
-                      <a:solidFill>
-                        <a:srgbClr val="D0D7DE"/>
-                      </a:solidFill>
-                      <a:prstDash val="solid"/>
-                    </a:lnT>
-                    <a:lnB w="9525" cap="flat" cmpd="sng" algn="ctr">
-                      <a:solidFill>
-                        <a:srgbClr val="D0D7DE"/>
-                      </a:solidFill>
-                      <a:prstDash val="solid"/>
-                    </a:lnB>
-                    <a:solidFill>
-                      <a:srgbClr val="FFFFFF"/>
-                    </a:solidFill>
-                  </a:tcPr>
-                </a:tc>
-              </a:tr>
-              <a:tr h="365760">
-                <a:tc>
-                  <a:txBody>
-                    <a:bodyPr wrap="square"/>
-                    <a:lstStyle/>
-                    <a:p>
-                      <a:r>
-                        <a:rPr sz="1300" b="0">
-                          <a:solidFill>
-                            <a:srgbClr val="1F2328"/>
-                          </a:solidFill>
-                          <a:latin typeface="Malgun Gothic"/>
-                        </a:rPr>
-                        <a:t>05~07</a:t>
-                      </a:r>
-                    </a:p>
-                  </a:txBody>
-                  <a:tcPr marL="88900" marR="88900" marT="63500" marB="63500" anchor="ctr">
-                    <a:lnL w="9525" cap="flat" cmpd="sng" algn="ctr">
-                      <a:solidFill>
-                        <a:srgbClr val="D0D7DE"/>
-                      </a:solidFill>
-                      <a:prstDash val="solid"/>
-                    </a:lnL>
-                    <a:lnR w="9525" cap="flat" cmpd="sng" algn="ctr">
-                      <a:solidFill>
-                        <a:srgbClr val="D0D7DE"/>
-                      </a:solidFill>
-                      <a:prstDash val="solid"/>
-                    </a:lnR>
-                    <a:lnT w="9525" cap="flat" cmpd="sng" algn="ctr">
-                      <a:solidFill>
-                        <a:srgbClr val="D0D7DE"/>
-                      </a:solidFill>
-                      <a:prstDash val="solid"/>
-                    </a:lnT>
-                    <a:lnB w="9525" cap="flat" cmpd="sng" algn="ctr">
-                      <a:solidFill>
-                        <a:srgbClr val="D0D7DE"/>
-                      </a:solidFill>
-                      <a:prstDash val="solid"/>
-                    </a:lnB>
-                    <a:solidFill>
-                      <a:srgbClr val="F6F8FA"/>
-                    </a:solidFill>
-                  </a:tcPr>
-                </a:tc>
-                <a:tc>
-                  <a:txBody>
-                    <a:bodyPr wrap="square"/>
-                    <a:lstStyle/>
-                    <a:p>
-                      <a:r>
-                        <a:rPr sz="1300" b="0">
-                          <a:solidFill>
-                            <a:srgbClr val="1F2328"/>
-                          </a:solidFill>
-                          <a:latin typeface="Malgun Gothic"/>
-                        </a:rPr>
-                        <a:t>CV 정확도 벤치</a:t>
-                      </a:r>
-                    </a:p>
-                  </a:txBody>
-                  <a:tcPr marL="88900" marR="88900" marT="63500" marB="63500" anchor="ctr">
-                    <a:lnL w="9525" cap="flat" cmpd="sng" algn="ctr">
-                      <a:solidFill>
-                        <a:srgbClr val="D0D7DE"/>
-                      </a:solidFill>
-                      <a:prstDash val="solid"/>
-                    </a:lnL>
-                    <a:lnR w="9525" cap="flat" cmpd="sng" algn="ctr">
-                      <a:solidFill>
-                        <a:srgbClr val="D0D7DE"/>
-                      </a:solidFill>
-                      <a:prstDash val="solid"/>
-                    </a:lnR>
-                    <a:lnT w="9525" cap="flat" cmpd="sng" algn="ctr">
-                      <a:solidFill>
-                        <a:srgbClr val="D0D7DE"/>
-                      </a:solidFill>
-                      <a:prstDash val="solid"/>
-                    </a:lnT>
-                    <a:lnB w="9525" cap="flat" cmpd="sng" algn="ctr">
-                      <a:solidFill>
-                        <a:srgbClr val="D0D7DE"/>
-                      </a:solidFill>
-                      <a:prstDash val="solid"/>
-                    </a:lnB>
-                    <a:solidFill>
-                      <a:srgbClr val="F6F8FA"/>
-                    </a:solidFill>
-                  </a:tcPr>
-                </a:tc>
-                <a:tc>
-                  <a:txBody>
-                    <a:bodyPr wrap="square"/>
-                    <a:lstStyle/>
-                    <a:p>
-                      <a:r>
-                        <a:rPr sz="1300" b="0">
-                          <a:solidFill>
-                            <a:srgbClr val="1F2328"/>
-                          </a:solidFill>
-                          <a:latin typeface="Malgun Gothic"/>
-                        </a:rPr>
-                        <a:t>rank-1 31.8% → 76.4%, 촬영 모드별 재평가 채택</a:t>
-                      </a:r>
-                    </a:p>
-                  </a:txBody>
-                  <a:tcPr marL="88900" marR="88900" marT="63500" marB="63500" anchor="ctr">
-                    <a:lnL w="9525" cap="flat" cmpd="sng" algn="ctr">
-                      <a:solidFill>
-                        <a:srgbClr val="D0D7DE"/>
-                      </a:solidFill>
-                      <a:prstDash val="solid"/>
-                    </a:lnL>
-                    <a:lnR w="9525" cap="flat" cmpd="sng" algn="ctr">
-                      <a:solidFill>
-                        <a:srgbClr val="D0D7DE"/>
-                      </a:solidFill>
-                      <a:prstDash val="solid"/>
-                    </a:lnR>
-                    <a:lnT w="9525" cap="flat" cmpd="sng" algn="ctr">
-                      <a:solidFill>
-                        <a:srgbClr val="D0D7DE"/>
-                      </a:solidFill>
-                      <a:prstDash val="solid"/>
-                    </a:lnT>
-                    <a:lnB w="9525" cap="flat" cmpd="sng" algn="ctr">
-                      <a:solidFill>
-                        <a:srgbClr val="D0D7DE"/>
-                      </a:solidFill>
-                      <a:prstDash val="solid"/>
-                    </a:lnB>
-                    <a:solidFill>
-                      <a:srgbClr val="F6F8FA"/>
-                    </a:solidFill>
-                  </a:tcPr>
-                </a:tc>
-              </a:tr>
-              <a:tr h="365760">
-                <a:tc>
-                  <a:txBody>
-                    <a:bodyPr wrap="square"/>
-                    <a:lstStyle/>
-                    <a:p>
-                      <a:r>
-                        <a:rPr sz="1300" b="0">
-                          <a:solidFill>
-                            <a:srgbClr val="1F2328"/>
-                          </a:solidFill>
-                          <a:latin typeface="Malgun Gothic"/>
-                        </a:rPr>
-                        <a:t>06~08</a:t>
-                      </a:r>
-                    </a:p>
-                  </a:txBody>
-                  <a:tcPr marL="88900" marR="88900" marT="63500" marB="63500" anchor="ctr">
-                    <a:lnL w="9525" cap="flat" cmpd="sng" algn="ctr">
-                      <a:solidFill>
-                        <a:srgbClr val="D0D7DE"/>
-                      </a:solidFill>
-                      <a:prstDash val="solid"/>
-                    </a:lnL>
-                    <a:lnR w="9525" cap="flat" cmpd="sng" algn="ctr">
-                      <a:solidFill>
-                        <a:srgbClr val="D0D7DE"/>
-                      </a:solidFill>
-                      <a:prstDash val="solid"/>
-                    </a:lnR>
-                    <a:lnT w="9525" cap="flat" cmpd="sng" algn="ctr">
-                      <a:solidFill>
-                        <a:srgbClr val="D0D7DE"/>
-                      </a:solidFill>
-                      <a:prstDash val="solid"/>
-                    </a:lnT>
-                    <a:lnB w="9525" cap="flat" cmpd="sng" algn="ctr">
-                      <a:solidFill>
-                        <a:srgbClr val="D0D7DE"/>
-                      </a:solidFill>
-                      <a:prstDash val="solid"/>
-                    </a:lnB>
-                    <a:solidFill>
-                      <a:srgbClr val="FFFFFF"/>
-                    </a:solidFill>
-                  </a:tcPr>
-                </a:tc>
-                <a:tc>
-                  <a:txBody>
-                    <a:bodyPr wrap="square"/>
-                    <a:lstStyle/>
-                    <a:p>
-                      <a:r>
-                        <a:rPr sz="1300" b="0">
-                          <a:solidFill>
-                            <a:srgbClr val="1F2328"/>
-                          </a:solidFill>
-                          <a:latin typeface="Malgun Gothic"/>
-                        </a:rPr>
-                        <a:t>실시간 루프</a:t>
-                      </a:r>
-                    </a:p>
-                  </a:txBody>
-                  <a:tcPr marL="88900" marR="88900" marT="63500" marB="63500" anchor="ctr">
-                    <a:lnL w="9525" cap="flat" cmpd="sng" algn="ctr">
-                      <a:solidFill>
-                        <a:srgbClr val="D0D7DE"/>
-                      </a:solidFill>
-                      <a:prstDash val="solid"/>
-                    </a:lnL>
-                    <a:lnR w="9525" cap="flat" cmpd="sng" algn="ctr">
-                      <a:solidFill>
-                        <a:srgbClr val="D0D7DE"/>
-                      </a:solidFill>
-                      <a:prstDash val="solid"/>
-                    </a:lnR>
-                    <a:lnT w="9525" cap="flat" cmpd="sng" algn="ctr">
-                      <a:solidFill>
-                        <a:srgbClr val="D0D7DE"/>
-                      </a:solidFill>
-                      <a:prstDash val="solid"/>
-                    </a:lnT>
-                    <a:lnB w="9525" cap="flat" cmpd="sng" algn="ctr">
-                      <a:solidFill>
-                        <a:srgbClr val="D0D7DE"/>
-                      </a:solidFill>
-                      <a:prstDash val="solid"/>
-                    </a:lnB>
-                    <a:solidFill>
-                      <a:srgbClr val="FFFFFF"/>
-                    </a:solidFill>
-                  </a:tcPr>
-                </a:tc>
-                <a:tc>
-                  <a:txBody>
-                    <a:bodyPr wrap="square"/>
-                    <a:lstStyle/>
-                    <a:p>
-                      <a:r>
-                        <a:rPr sz="1300" b="0">
-                          <a:solidFill>
-                            <a:srgbClr val="1F2328"/>
-                          </a:solidFill>
-                          <a:latin typeface="Malgun Gothic"/>
-                        </a:rPr>
-                        <a:t>알람 10초 수신, 감지~기록 end-to-end, 실장비 보정 개통(08-12)</a:t>
-                      </a:r>
-                    </a:p>
-                  </a:txBody>
-                  <a:tcPr marL="88900" marR="88900" marT="63500" marB="63500" anchor="ctr">
-                    <a:lnL w="9525" cap="flat" cmpd="sng" algn="ctr">
-                      <a:solidFill>
-                        <a:srgbClr val="D0D7DE"/>
-                      </a:solidFill>
-                      <a:prstDash val="solid"/>
-                    </a:lnL>
-                    <a:lnR w="9525" cap="flat" cmpd="sng" algn="ctr">
-                      <a:solidFill>
-                        <a:srgbClr val="D0D7DE"/>
-                      </a:solidFill>
-                      <a:prstDash val="solid"/>
-                    </a:lnR>
-                    <a:lnT w="9525" cap="flat" cmpd="sng" algn="ctr">
-                      <a:solidFill>
-                        <a:srgbClr val="D0D7DE"/>
-                      </a:solidFill>
-                      <a:prstDash val="solid"/>
-                    </a:lnT>
-                    <a:lnB w="9525" cap="flat" cmpd="sng" algn="ctr">
-                      <a:solidFill>
-                        <a:srgbClr val="D0D7DE"/>
-                      </a:solidFill>
-                      <a:prstDash val="solid"/>
-                    </a:lnB>
-                    <a:solidFill>
-                      <a:srgbClr val="FFFFFF"/>
-                    </a:solidFill>
-                  </a:tcPr>
-                </a:tc>
-              </a:tr>
-              <a:tr h="365760">
-                <a:tc>
-                  <a:txBody>
-                    <a:bodyPr wrap="square"/>
-                    <a:lstStyle/>
-                    <a:p>
-                      <a:r>
-                        <a:rPr sz="1300" b="0">
-                          <a:solidFill>
-                            <a:srgbClr val="1F2328"/>
-                          </a:solidFill>
-                          <a:latin typeface="Malgun Gothic"/>
-                        </a:rPr>
-                        <a:t>08~09</a:t>
-                      </a:r>
-                    </a:p>
-                  </a:txBody>
-                  <a:tcPr marL="88900" marR="88900" marT="63500" marB="63500" anchor="ctr">
-                    <a:lnL w="9525" cap="flat" cmpd="sng" algn="ctr">
-                      <a:solidFill>
-                        <a:srgbClr val="D0D7DE"/>
-                      </a:solidFill>
-                      <a:prstDash val="solid"/>
-                    </a:lnL>
-                    <a:lnR w="9525" cap="flat" cmpd="sng" algn="ctr">
-                      <a:solidFill>
-                        <a:srgbClr val="D0D7DE"/>
-                      </a:solidFill>
-                      <a:prstDash val="solid"/>
-                    </a:lnR>
-                    <a:lnT w="9525" cap="flat" cmpd="sng" algn="ctr">
-                      <a:solidFill>
-                        <a:srgbClr val="D0D7DE"/>
-                      </a:solidFill>
-                      <a:prstDash val="solid"/>
-                    </a:lnT>
-                    <a:lnB w="9525" cap="flat" cmpd="sng" algn="ctr">
-                      <a:solidFill>
-                        <a:srgbClr val="D0D7DE"/>
-                      </a:solidFill>
-                      <a:prstDash val="solid"/>
-                    </a:lnB>
-                    <a:solidFill>
-                      <a:srgbClr val="F6F8FA"/>
-                    </a:solidFill>
-                  </a:tcPr>
-                </a:tc>
-                <a:tc>
-                  <a:txBody>
-                    <a:bodyPr wrap="square"/>
-                    <a:lstStyle/>
-                    <a:p>
-                      <a:r>
-                        <a:rPr sz="1300" b="0">
-                          <a:solidFill>
-                            <a:srgbClr val="1F2328"/>
-                          </a:solidFill>
-                          <a:latin typeface="Malgun Gothic"/>
-                        </a:rPr>
-                        <a:t>기록 계층 + 실알람 완주</a:t>
-                      </a:r>
-                    </a:p>
-                  </a:txBody>
-                  <a:tcPr marL="88900" marR="88900" marT="63500" marB="63500" anchor="ctr">
-                    <a:lnL w="9525" cap="flat" cmpd="sng" algn="ctr">
-                      <a:solidFill>
-                        <a:srgbClr val="D0D7DE"/>
-                      </a:solidFill>
-                      <a:prstDash val="solid"/>
-                    </a:lnL>
-                    <a:lnR w="9525" cap="flat" cmpd="sng" algn="ctr">
-                      <a:solidFill>
-                        <a:srgbClr val="D0D7DE"/>
-                      </a:solidFill>
-                      <a:prstDash val="solid"/>
-                    </a:lnR>
-                    <a:lnT w="9525" cap="flat" cmpd="sng" algn="ctr">
-                      <a:solidFill>
-                        <a:srgbClr val="D0D7DE"/>
-                      </a:solidFill>
-                      <a:prstDash val="solid"/>
-                    </a:lnT>
-                    <a:lnB w="9525" cap="flat" cmpd="sng" algn="ctr">
-                      <a:solidFill>
-                        <a:srgbClr val="D0D7DE"/>
-                      </a:solidFill>
-                      <a:prstDash val="solid"/>
-                    </a:lnB>
-                    <a:solidFill>
-                      <a:srgbClr val="F6F8FA"/>
-                    </a:solidFill>
-                  </a:tcPr>
-                </a:tc>
-                <a:tc>
-                  <a:txBody>
-                    <a:bodyPr wrap="square"/>
-                    <a:lstStyle/>
-                    <a:p>
-                      <a:r>
-                        <a:rPr sz="1300" b="0">
-                          <a:solidFill>
-                            <a:srgbClr val="1F2328"/>
-                          </a:solidFill>
-                          <a:latin typeface="Malgun Gothic"/>
-                        </a:rPr>
-                        <a:t>Recovery Episode, 실알람 3건 1분 미만 실측, 전용 PC 확보·26대 배치 준비</a:t>
+                        <a:t>확인 안 되면 클릭하지 않고 담당자에게 알림. 점검 모드 → 반자동 → 합동 시험 → 배치의 단계적 게이트</a:t>
                       </a:r>
                     </a:p>
                   </a:txBody>
@@ -14849,7 +12688,7 @@
 </p:sld>
 </file>
 
-<file path=ppt/slides/slide7.xml><?xml version="1.0" encoding="utf-8"?>
+<file path=ppt/slides/slide6.xml><?xml version="1.0" encoding="utf-8"?>
 <p:sld xmlns:a="http://schemas.openxmlformats.org/drawingml/2006/main" xmlns:p="http://schemas.openxmlformats.org/presentationml/2006/main" xmlns:r="http://schemas.openxmlformats.org/officeDocument/2006/relationships">
   <p:cSld>
     <p:spTree>
@@ -15884,7 +13723,7 @@
 </p:sld>
 </file>
 
-<file path=ppt/slides/slide8.xml><?xml version="1.0" encoding="utf-8"?>
+<file path=ppt/slides/slide7.xml><?xml version="1.0" encoding="utf-8"?>
 <p:sld xmlns:a="http://schemas.openxmlformats.org/drawingml/2006/main" xmlns:p="http://schemas.openxmlformats.org/presentationml/2006/main" xmlns:r="http://schemas.openxmlformats.org/officeDocument/2006/relationships">
   <p:cSld>
     <p:spTree>
@@ -16847,7 +14686,7 @@
 </p:sld>
 </file>
 
-<file path=ppt/slides/slide9.xml><?xml version="1.0" encoding="utf-8"?>
+<file path=ppt/slides/slide8.xml><?xml version="1.0" encoding="utf-8"?>
 <p:sld xmlns:a="http://schemas.openxmlformats.org/drawingml/2006/main" xmlns:p="http://schemas.openxmlformats.org/presentationml/2006/main" xmlns:r="http://schemas.openxmlformats.org/officeDocument/2006/relationships">
   <p:cSld>
     <p:spTree>
@@ -18329,6 +16168,969 @@
                     </a:lnB>
                     <a:solidFill>
                       <a:srgbClr val="F6F8FA"/>
+                    </a:solidFill>
+                  </a:tcPr>
+                </a:tc>
+              </a:tr>
+            </a:tbl>
+          </a:graphicData>
+        </a:graphic>
+      </p:graphicFrame>
+    </p:spTree>
+  </p:cSld>
+  <p:clrMapOvr>
+    <a:masterClrMapping/>
+  </p:clrMapOvr>
+</p:sld>
+</file>
+
+<file path=ppt/slides/slide9.xml><?xml version="1.0" encoding="utf-8"?>
+<p:sld xmlns:a="http://schemas.openxmlformats.org/drawingml/2006/main" xmlns:p="http://schemas.openxmlformats.org/presentationml/2006/main" xmlns:r="http://schemas.openxmlformats.org/officeDocument/2006/relationships">
+  <p:cSld>
+    <p:spTree>
+      <p:nvGrpSpPr>
+        <p:cNvPr id="1" name=""/>
+        <p:cNvGrpSpPr/>
+        <p:nvPr/>
+      </p:nvGrpSpPr>
+      <p:grpSpPr/>
+      <p:sp>
+        <p:nvSpPr>
+          <p:cNvPr id="2" name="TextBox 1"/>
+          <p:cNvSpPr txBox="1"/>
+          <p:nvPr/>
+        </p:nvSpPr>
+        <p:spPr>
+          <a:xfrm>
+            <a:off x="457200" y="320040"/>
+            <a:ext cx="11277295" cy="548640"/>
+          </a:xfrm>
+          <a:prstGeom prst="rect">
+            <a:avLst/>
+          </a:prstGeom>
+          <a:noFill/>
+        </p:spPr>
+        <p:txBody>
+          <a:bodyPr wrap="none" lIns="0">
+            <a:spAutoFit/>
+          </a:bodyPr>
+          <a:lstStyle/>
+          <a:p>
+            <a:r>
+              <a:rPr sz="2400" b="1">
+                <a:solidFill>
+                  <a:srgbClr val="1E3A8A"/>
+                </a:solidFill>
+                <a:latin typeface="Malgun Gothic"/>
+              </a:rPr>
+              <a:t>3.3 정성 성과</a:t>
+            </a:r>
+          </a:p>
+        </p:txBody>
+      </p:sp>
+      <p:sp>
+        <p:nvSpPr>
+          <p:cNvPr id="3" name="Rectangle 2"/>
+          <p:cNvSpPr/>
+          <p:nvPr/>
+        </p:nvSpPr>
+        <p:spPr>
+          <a:xfrm>
+            <a:off x="457200" y="914400"/>
+            <a:ext cx="11277295" cy="25400"/>
+          </a:xfrm>
+          <a:prstGeom prst="rect">
+            <a:avLst/>
+          </a:prstGeom>
+          <a:solidFill>
+            <a:srgbClr val="1E3A8A"/>
+          </a:solidFill>
+          <a:ln>
+            <a:noFill/>
+          </a:ln>
+          <a:effectLst/>
+        </p:spPr>
+        <p:style>
+          <a:lnRef idx="1">
+            <a:schemeClr val="accent1"/>
+          </a:lnRef>
+          <a:fillRef idx="3">
+            <a:schemeClr val="accent1"/>
+          </a:fillRef>
+          <a:effectRef idx="2">
+            <a:schemeClr val="accent1"/>
+          </a:effectRef>
+          <a:fontRef idx="minor">
+            <a:schemeClr val="lt1"/>
+          </a:fontRef>
+        </p:style>
+        <p:txBody>
+          <a:bodyPr rtlCol="0" anchor="ctr"/>
+          <a:lstStyle/>
+          <a:p>
+            <a:pPr algn="ctr"/>
+          </a:p>
+        </p:txBody>
+      </p:sp>
+      <p:graphicFrame>
+        <p:nvGraphicFramePr>
+          <p:cNvPr id="4" name="Table 3"/>
+          <p:cNvGraphicFramePr>
+            <a:graphicFrameLocks noGrp="1"/>
+          </p:cNvGraphicFramePr>
+          <p:nvPr/>
+        </p:nvGraphicFramePr>
+        <p:xfrm>
+          <a:off x="457200" y="1097280"/>
+          <a:ext cx="11277294" cy="2194560"/>
+        </p:xfrm>
+        <a:graphic>
+          <a:graphicData uri="http://schemas.openxmlformats.org/drawingml/2006/table">
+            <a:tbl>
+              <a:tblPr firstRow="1" bandRow="0">
+                <a:tableStyleId>{5C22544A-7EE6-4342-B048-85BDC9FD1C3A}</a:tableStyleId>
+              </a:tblPr>
+              <a:tblGrid>
+                <a:gridCol w="1339876"/>
+                <a:gridCol w="3238035"/>
+                <a:gridCol w="6699383"/>
+              </a:tblGrid>
+              <a:tr h="365760">
+                <a:tc>
+                  <a:txBody>
+                    <a:bodyPr wrap="square"/>
+                    <a:lstStyle/>
+                    <a:p>
+                      <a:r>
+                        <a:rPr sz="1450" b="1">
+                          <a:solidFill>
+                            <a:srgbClr val="FFFFFF"/>
+                          </a:solidFill>
+                          <a:latin typeface="Malgun Gothic"/>
+                        </a:rPr>
+                        <a:t>항목</a:t>
+                      </a:r>
+                    </a:p>
+                  </a:txBody>
+                  <a:tcPr marL="88900" marR="88900" marT="63500" marB="63500" anchor="ctr">
+                    <a:lnL w="9525" cap="flat" cmpd="sng" algn="ctr">
+                      <a:solidFill>
+                        <a:srgbClr val="D0D7DE"/>
+                      </a:solidFill>
+                      <a:prstDash val="solid"/>
+                    </a:lnL>
+                    <a:lnR w="9525" cap="flat" cmpd="sng" algn="ctr">
+                      <a:solidFill>
+                        <a:srgbClr val="D0D7DE"/>
+                      </a:solidFill>
+                      <a:prstDash val="solid"/>
+                    </a:lnR>
+                    <a:lnT w="9525" cap="flat" cmpd="sng" algn="ctr">
+                      <a:solidFill>
+                        <a:srgbClr val="D0D7DE"/>
+                      </a:solidFill>
+                      <a:prstDash val="solid"/>
+                    </a:lnT>
+                    <a:lnB w="9525" cap="flat" cmpd="sng" algn="ctr">
+                      <a:solidFill>
+                        <a:srgbClr val="D0D7DE"/>
+                      </a:solidFill>
+                      <a:prstDash val="solid"/>
+                    </a:lnB>
+                    <a:solidFill>
+                      <a:srgbClr val="1E3A8A"/>
+                    </a:solidFill>
+                  </a:tcPr>
+                </a:tc>
+                <a:tc>
+                  <a:txBody>
+                    <a:bodyPr wrap="square"/>
+                    <a:lstStyle/>
+                    <a:p>
+                      <a:r>
+                        <a:rPr sz="1450" b="1">
+                          <a:solidFill>
+                            <a:srgbClr val="FFFFFF"/>
+                          </a:solidFill>
+                          <a:latin typeface="Malgun Gothic"/>
+                        </a:rPr>
+                        <a:t>Before</a:t>
+                      </a:r>
+                    </a:p>
+                  </a:txBody>
+                  <a:tcPr marL="88900" marR="88900" marT="63500" marB="63500" anchor="ctr">
+                    <a:lnL w="9525" cap="flat" cmpd="sng" algn="ctr">
+                      <a:solidFill>
+                        <a:srgbClr val="D0D7DE"/>
+                      </a:solidFill>
+                      <a:prstDash val="solid"/>
+                    </a:lnL>
+                    <a:lnR w="9525" cap="flat" cmpd="sng" algn="ctr">
+                      <a:solidFill>
+                        <a:srgbClr val="D0D7DE"/>
+                      </a:solidFill>
+                      <a:prstDash val="solid"/>
+                    </a:lnR>
+                    <a:lnT w="9525" cap="flat" cmpd="sng" algn="ctr">
+                      <a:solidFill>
+                        <a:srgbClr val="D0D7DE"/>
+                      </a:solidFill>
+                      <a:prstDash val="solid"/>
+                    </a:lnT>
+                    <a:lnB w="9525" cap="flat" cmpd="sng" algn="ctr">
+                      <a:solidFill>
+                        <a:srgbClr val="D0D7DE"/>
+                      </a:solidFill>
+                      <a:prstDash val="solid"/>
+                    </a:lnB>
+                    <a:solidFill>
+                      <a:srgbClr val="1E3A8A"/>
+                    </a:solidFill>
+                  </a:tcPr>
+                </a:tc>
+                <a:tc>
+                  <a:txBody>
+                    <a:bodyPr wrap="square"/>
+                    <a:lstStyle/>
+                    <a:p>
+                      <a:r>
+                        <a:rPr sz="1450" b="1">
+                          <a:solidFill>
+                            <a:srgbClr val="FFFFFF"/>
+                          </a:solidFill>
+                          <a:latin typeface="Malgun Gothic"/>
+                        </a:rPr>
+                        <a:t>After</a:t>
+                      </a:r>
+                    </a:p>
+                  </a:txBody>
+                  <a:tcPr marL="88900" marR="88900" marT="63500" marB="63500" anchor="ctr">
+                    <a:lnL w="9525" cap="flat" cmpd="sng" algn="ctr">
+                      <a:solidFill>
+                        <a:srgbClr val="D0D7DE"/>
+                      </a:solidFill>
+                      <a:prstDash val="solid"/>
+                    </a:lnL>
+                    <a:lnR w="9525" cap="flat" cmpd="sng" algn="ctr">
+                      <a:solidFill>
+                        <a:srgbClr val="D0D7DE"/>
+                      </a:solidFill>
+                      <a:prstDash val="solid"/>
+                    </a:lnR>
+                    <a:lnT w="9525" cap="flat" cmpd="sng" algn="ctr">
+                      <a:solidFill>
+                        <a:srgbClr val="D0D7DE"/>
+                      </a:solidFill>
+                      <a:prstDash val="solid"/>
+                    </a:lnT>
+                    <a:lnB w="9525" cap="flat" cmpd="sng" algn="ctr">
+                      <a:solidFill>
+                        <a:srgbClr val="D0D7DE"/>
+                      </a:solidFill>
+                      <a:prstDash val="solid"/>
+                    </a:lnB>
+                    <a:solidFill>
+                      <a:srgbClr val="1E3A8A"/>
+                    </a:solidFill>
+                  </a:tcPr>
+                </a:tc>
+              </a:tr>
+              <a:tr h="365760">
+                <a:tc>
+                  <a:txBody>
+                    <a:bodyPr wrap="square"/>
+                    <a:lstStyle/>
+                    <a:p>
+                      <a:r>
+                        <a:rPr sz="1400" b="0">
+                          <a:solidFill>
+                            <a:srgbClr val="1F2328"/>
+                          </a:solidFill>
+                          <a:latin typeface="Malgun Gothic"/>
+                        </a:rPr>
+                        <a:t>24시간 대응 체계</a:t>
+                      </a:r>
+                    </a:p>
+                  </a:txBody>
+                  <a:tcPr marL="88900" marR="88900" marT="63500" marB="63500" anchor="ctr">
+                    <a:lnL w="9525" cap="flat" cmpd="sng" algn="ctr">
+                      <a:solidFill>
+                        <a:srgbClr val="D0D7DE"/>
+                      </a:solidFill>
+                      <a:prstDash val="solid"/>
+                    </a:lnL>
+                    <a:lnR w="9525" cap="flat" cmpd="sng" algn="ctr">
+                      <a:solidFill>
+                        <a:srgbClr val="D0D7DE"/>
+                      </a:solidFill>
+                      <a:prstDash val="solid"/>
+                    </a:lnR>
+                    <a:lnT w="9525" cap="flat" cmpd="sng" algn="ctr">
+                      <a:solidFill>
+                        <a:srgbClr val="D0D7DE"/>
+                      </a:solidFill>
+                      <a:prstDash val="solid"/>
+                    </a:lnT>
+                    <a:lnB w="9525" cap="flat" cmpd="sng" algn="ctr">
+                      <a:solidFill>
+                        <a:srgbClr val="D0D7DE"/>
+                      </a:solidFill>
+                      <a:prstDash val="solid"/>
+                    </a:lnB>
+                    <a:solidFill>
+                      <a:srgbClr val="FFFFFF"/>
+                    </a:solidFill>
+                  </a:tcPr>
+                </a:tc>
+                <a:tc>
+                  <a:txBody>
+                    <a:bodyPr wrap="square"/>
+                    <a:lstStyle/>
+                    <a:p>
+                      <a:r>
+                        <a:rPr sz="1400" b="0">
+                          <a:solidFill>
+                            <a:srgbClr val="1F2328"/>
+                          </a:solidFill>
+                          <a:latin typeface="Malgun Gothic"/>
+                        </a:rPr>
+                        <a:t>인라인·엔지니어가 교대로 모니터 감시·접속·육안 탐색</a:t>
+                      </a:r>
+                    </a:p>
+                  </a:txBody>
+                  <a:tcPr marL="88900" marR="88900" marT="63500" marB="63500" anchor="ctr">
+                    <a:lnL w="9525" cap="flat" cmpd="sng" algn="ctr">
+                      <a:solidFill>
+                        <a:srgbClr val="D0D7DE"/>
+                      </a:solidFill>
+                      <a:prstDash val="solid"/>
+                    </a:lnL>
+                    <a:lnR w="9525" cap="flat" cmpd="sng" algn="ctr">
+                      <a:solidFill>
+                        <a:srgbClr val="D0D7DE"/>
+                      </a:solidFill>
+                      <a:prstDash val="solid"/>
+                    </a:lnR>
+                    <a:lnT w="9525" cap="flat" cmpd="sng" algn="ctr">
+                      <a:solidFill>
+                        <a:srgbClr val="D0D7DE"/>
+                      </a:solidFill>
+                      <a:prstDash val="solid"/>
+                    </a:lnT>
+                    <a:lnB w="9525" cap="flat" cmpd="sng" algn="ctr">
+                      <a:solidFill>
+                        <a:srgbClr val="D0D7DE"/>
+                      </a:solidFill>
+                      <a:prstDash val="solid"/>
+                    </a:lnB>
+                    <a:solidFill>
+                      <a:srgbClr val="FFFFFF"/>
+                    </a:solidFill>
+                  </a:tcPr>
+                </a:tc>
+                <a:tc>
+                  <a:txBody>
+                    <a:bodyPr wrap="square"/>
+                    <a:lstStyle/>
+                    <a:p>
+                      <a:r>
+                        <a:rPr sz="1400" b="0">
+                          <a:solidFill>
+                            <a:srgbClr val="1F2328"/>
+                          </a:solidFill>
+                          <a:latin typeface="Malgun Gothic"/>
+                        </a:rPr>
+                        <a:t>감지·접속·재조정 자동, 담당자는 예외 판단</a:t>
+                      </a:r>
+                    </a:p>
+                  </a:txBody>
+                  <a:tcPr marL="88900" marR="88900" marT="63500" marB="63500" anchor="ctr">
+                    <a:lnL w="9525" cap="flat" cmpd="sng" algn="ctr">
+                      <a:solidFill>
+                        <a:srgbClr val="D0D7DE"/>
+                      </a:solidFill>
+                      <a:prstDash val="solid"/>
+                    </a:lnL>
+                    <a:lnR w="9525" cap="flat" cmpd="sng" algn="ctr">
+                      <a:solidFill>
+                        <a:srgbClr val="D0D7DE"/>
+                      </a:solidFill>
+                      <a:prstDash val="solid"/>
+                    </a:lnR>
+                    <a:lnT w="9525" cap="flat" cmpd="sng" algn="ctr">
+                      <a:solidFill>
+                        <a:srgbClr val="D0D7DE"/>
+                      </a:solidFill>
+                      <a:prstDash val="solid"/>
+                    </a:lnT>
+                    <a:lnB w="9525" cap="flat" cmpd="sng" algn="ctr">
+                      <a:solidFill>
+                        <a:srgbClr val="D0D7DE"/>
+                      </a:solidFill>
+                      <a:prstDash val="solid"/>
+                    </a:lnB>
+                    <a:solidFill>
+                      <a:srgbClr val="FFFFFF"/>
+                    </a:solidFill>
+                  </a:tcPr>
+                </a:tc>
+              </a:tr>
+              <a:tr h="365760">
+                <a:tc>
+                  <a:txBody>
+                    <a:bodyPr wrap="square"/>
+                    <a:lstStyle/>
+                    <a:p>
+                      <a:r>
+                        <a:rPr sz="1400" b="0">
+                          <a:solidFill>
+                            <a:srgbClr val="1F2328"/>
+                          </a:solidFill>
+                          <a:latin typeface="Malgun Gothic"/>
+                        </a:rPr>
+                        <a:t>실패 원인 기록</a:t>
+                      </a:r>
+                    </a:p>
+                  </a:txBody>
+                  <a:tcPr marL="88900" marR="88900" marT="63500" marB="63500" anchor="ctr">
+                    <a:lnL w="9525" cap="flat" cmpd="sng" algn="ctr">
+                      <a:solidFill>
+                        <a:srgbClr val="D0D7DE"/>
+                      </a:solidFill>
+                      <a:prstDash val="solid"/>
+                    </a:lnL>
+                    <a:lnR w="9525" cap="flat" cmpd="sng" algn="ctr">
+                      <a:solidFill>
+                        <a:srgbClr val="D0D7DE"/>
+                      </a:solidFill>
+                      <a:prstDash val="solid"/>
+                    </a:lnR>
+                    <a:lnT w="9525" cap="flat" cmpd="sng" algn="ctr">
+                      <a:solidFill>
+                        <a:srgbClr val="D0D7DE"/>
+                      </a:solidFill>
+                      <a:prstDash val="solid"/>
+                    </a:lnT>
+                    <a:lnB w="9525" cap="flat" cmpd="sng" algn="ctr">
+                      <a:solidFill>
+                        <a:srgbClr val="D0D7DE"/>
+                      </a:solidFill>
+                      <a:prstDash val="solid"/>
+                    </a:lnB>
+                    <a:solidFill>
+                      <a:srgbClr val="F6F8FA"/>
+                    </a:solidFill>
+                  </a:tcPr>
+                </a:tc>
+                <a:tc>
+                  <a:txBody>
+                    <a:bodyPr wrap="square"/>
+                    <a:lstStyle/>
+                    <a:p>
+                      <a:r>
+                        <a:rPr sz="1400" b="0">
+                          <a:solidFill>
+                            <a:srgbClr val="1F2328"/>
+                          </a:solidFill>
+                          <a:latin typeface="Malgun Gothic"/>
+                        </a:rPr>
+                        <a:t>없음</a:t>
+                      </a:r>
+                    </a:p>
+                  </a:txBody>
+                  <a:tcPr marL="88900" marR="88900" marT="63500" marB="63500" anchor="ctr">
+                    <a:lnL w="9525" cap="flat" cmpd="sng" algn="ctr">
+                      <a:solidFill>
+                        <a:srgbClr val="D0D7DE"/>
+                      </a:solidFill>
+                      <a:prstDash val="solid"/>
+                    </a:lnL>
+                    <a:lnR w="9525" cap="flat" cmpd="sng" algn="ctr">
+                      <a:solidFill>
+                        <a:srgbClr val="D0D7DE"/>
+                      </a:solidFill>
+                      <a:prstDash val="solid"/>
+                    </a:lnR>
+                    <a:lnT w="9525" cap="flat" cmpd="sng" algn="ctr">
+                      <a:solidFill>
+                        <a:srgbClr val="D0D7DE"/>
+                      </a:solidFill>
+                      <a:prstDash val="solid"/>
+                    </a:lnT>
+                    <a:lnB w="9525" cap="flat" cmpd="sng" algn="ctr">
+                      <a:solidFill>
+                        <a:srgbClr val="D0D7DE"/>
+                      </a:solidFill>
+                      <a:prstDash val="solid"/>
+                    </a:lnB>
+                    <a:solidFill>
+                      <a:srgbClr val="F6F8FA"/>
+                    </a:solidFill>
+                  </a:tcPr>
+                </a:tc>
+                <a:tc>
+                  <a:txBody>
+                    <a:bodyPr wrap="square"/>
+                    <a:lstStyle/>
+                    <a:p>
+                      <a:r>
+                        <a:rPr sz="1400" b="0">
+                          <a:solidFill>
+                            <a:srgbClr val="1F2328"/>
+                          </a:solidFill>
+                          <a:latin typeface="Malgun Gothic"/>
+                        </a:rPr>
+                        <a:t>실패 화면 + 전 구간 녹화 + 대응 1건 = 기록 1줄</a:t>
+                      </a:r>
+                    </a:p>
+                  </a:txBody>
+                  <a:tcPr marL="88900" marR="88900" marT="63500" marB="63500" anchor="ctr">
+                    <a:lnL w="9525" cap="flat" cmpd="sng" algn="ctr">
+                      <a:solidFill>
+                        <a:srgbClr val="D0D7DE"/>
+                      </a:solidFill>
+                      <a:prstDash val="solid"/>
+                    </a:lnL>
+                    <a:lnR w="9525" cap="flat" cmpd="sng" algn="ctr">
+                      <a:solidFill>
+                        <a:srgbClr val="D0D7DE"/>
+                      </a:solidFill>
+                      <a:prstDash val="solid"/>
+                    </a:lnR>
+                    <a:lnT w="9525" cap="flat" cmpd="sng" algn="ctr">
+                      <a:solidFill>
+                        <a:srgbClr val="D0D7DE"/>
+                      </a:solidFill>
+                      <a:prstDash val="solid"/>
+                    </a:lnT>
+                    <a:lnB w="9525" cap="flat" cmpd="sng" algn="ctr">
+                      <a:solidFill>
+                        <a:srgbClr val="D0D7DE"/>
+                      </a:solidFill>
+                      <a:prstDash val="solid"/>
+                    </a:lnB>
+                    <a:solidFill>
+                      <a:srgbClr val="F6F8FA"/>
+                    </a:solidFill>
+                  </a:tcPr>
+                </a:tc>
+              </a:tr>
+              <a:tr h="365760">
+                <a:tc>
+                  <a:txBody>
+                    <a:bodyPr wrap="square"/>
+                    <a:lstStyle/>
+                    <a:p>
+                      <a:r>
+                        <a:rPr sz="1400" b="0">
+                          <a:solidFill>
+                            <a:srgbClr val="1F2328"/>
+                          </a:solidFill>
+                          <a:latin typeface="Malgun Gothic"/>
+                        </a:rPr>
+                        <a:t>재등록 필요성 판단</a:t>
+                      </a:r>
+                    </a:p>
+                  </a:txBody>
+                  <a:tcPr marL="88900" marR="88900" marT="63500" marB="63500" anchor="ctr">
+                    <a:lnL w="9525" cap="flat" cmpd="sng" algn="ctr">
+                      <a:solidFill>
+                        <a:srgbClr val="D0D7DE"/>
+                      </a:solidFill>
+                      <a:prstDash val="solid"/>
+                    </a:lnL>
+                    <a:lnR w="9525" cap="flat" cmpd="sng" algn="ctr">
+                      <a:solidFill>
+                        <a:srgbClr val="D0D7DE"/>
+                      </a:solidFill>
+                      <a:prstDash val="solid"/>
+                    </a:lnR>
+                    <a:lnT w="9525" cap="flat" cmpd="sng" algn="ctr">
+                      <a:solidFill>
+                        <a:srgbClr val="D0D7DE"/>
+                      </a:solidFill>
+                      <a:prstDash val="solid"/>
+                    </a:lnT>
+                    <a:lnB w="9525" cap="flat" cmpd="sng" algn="ctr">
+                      <a:solidFill>
+                        <a:srgbClr val="D0D7DE"/>
+                      </a:solidFill>
+                      <a:prstDash val="solid"/>
+                    </a:lnB>
+                    <a:solidFill>
+                      <a:srgbClr val="FFFFFF"/>
+                    </a:solidFill>
+                  </a:tcPr>
+                </a:tc>
+                <a:tc>
+                  <a:txBody>
+                    <a:bodyPr wrap="square"/>
+                    <a:lstStyle/>
+                    <a:p>
+                      <a:r>
+                        <a:rPr sz="1400" b="0">
+                          <a:solidFill>
+                            <a:srgbClr val="1F2328"/>
+                          </a:solidFill>
+                          <a:latin typeface="Malgun Gothic"/>
+                        </a:rPr>
+                        <a:t>화면 근거 없음, 경험에 의존</a:t>
+                      </a:r>
+                    </a:p>
+                  </a:txBody>
+                  <a:tcPr marL="88900" marR="88900" marT="63500" marB="63500" anchor="ctr">
+                    <a:lnL w="9525" cap="flat" cmpd="sng" algn="ctr">
+                      <a:solidFill>
+                        <a:srgbClr val="D0D7DE"/>
+                      </a:solidFill>
+                      <a:prstDash val="solid"/>
+                    </a:lnL>
+                    <a:lnR w="9525" cap="flat" cmpd="sng" algn="ctr">
+                      <a:solidFill>
+                        <a:srgbClr val="D0D7DE"/>
+                      </a:solidFill>
+                      <a:prstDash val="solid"/>
+                    </a:lnR>
+                    <a:lnT w="9525" cap="flat" cmpd="sng" algn="ctr">
+                      <a:solidFill>
+                        <a:srgbClr val="D0D7DE"/>
+                      </a:solidFill>
+                      <a:prstDash val="solid"/>
+                    </a:lnT>
+                    <a:lnB w="9525" cap="flat" cmpd="sng" algn="ctr">
+                      <a:solidFill>
+                        <a:srgbClr val="D0D7DE"/>
+                      </a:solidFill>
+                      <a:prstDash val="solid"/>
+                    </a:lnB>
+                    <a:solidFill>
+                      <a:srgbClr val="FFFFFF"/>
+                    </a:solidFill>
+                  </a:tcPr>
+                </a:tc>
+                <a:tc>
+                  <a:txBody>
+                    <a:bodyPr wrap="square"/>
+                    <a:lstStyle/>
+                    <a:p>
+                      <a:r>
+                        <a:rPr sz="1400" b="0">
+                          <a:solidFill>
+                            <a:srgbClr val="1F2328"/>
+                          </a:solidFill>
+                          <a:latin typeface="Malgun Gothic"/>
+                        </a:rPr>
+                        <a:t>헷갈리는 Align Key Recipe 목록을 자동 산출(SEM Recipe 104개 중 84개), 현업 대조 중</a:t>
+                      </a:r>
+                    </a:p>
+                  </a:txBody>
+                  <a:tcPr marL="88900" marR="88900" marT="63500" marB="63500" anchor="ctr">
+                    <a:lnL w="9525" cap="flat" cmpd="sng" algn="ctr">
+                      <a:solidFill>
+                        <a:srgbClr val="D0D7DE"/>
+                      </a:solidFill>
+                      <a:prstDash val="solid"/>
+                    </a:lnL>
+                    <a:lnR w="9525" cap="flat" cmpd="sng" algn="ctr">
+                      <a:solidFill>
+                        <a:srgbClr val="D0D7DE"/>
+                      </a:solidFill>
+                      <a:prstDash val="solid"/>
+                    </a:lnR>
+                    <a:lnT w="9525" cap="flat" cmpd="sng" algn="ctr">
+                      <a:solidFill>
+                        <a:srgbClr val="D0D7DE"/>
+                      </a:solidFill>
+                      <a:prstDash val="solid"/>
+                    </a:lnT>
+                    <a:lnB w="9525" cap="flat" cmpd="sng" algn="ctr">
+                      <a:solidFill>
+                        <a:srgbClr val="D0D7DE"/>
+                      </a:solidFill>
+                      <a:prstDash val="solid"/>
+                    </a:lnB>
+                    <a:solidFill>
+                      <a:srgbClr val="FFFFFF"/>
+                    </a:solidFill>
+                  </a:tcPr>
+                </a:tc>
+              </a:tr>
+              <a:tr h="365760">
+                <a:tc>
+                  <a:txBody>
+                    <a:bodyPr wrap="square"/>
+                    <a:lstStyle/>
+                    <a:p>
+                      <a:r>
+                        <a:rPr sz="1400" b="0">
+                          <a:solidFill>
+                            <a:srgbClr val="1F2328"/>
+                          </a:solidFill>
+                          <a:latin typeface="Malgun Gothic"/>
+                        </a:rPr>
+                        <a:t>보정 불가 알림</a:t>
+                      </a:r>
+                    </a:p>
+                  </a:txBody>
+                  <a:tcPr marL="88900" marR="88900" marT="63500" marB="63500" anchor="ctr">
+                    <a:lnL w="9525" cap="flat" cmpd="sng" algn="ctr">
+                      <a:solidFill>
+                        <a:srgbClr val="D0D7DE"/>
+                      </a:solidFill>
+                      <a:prstDash val="solid"/>
+                    </a:lnL>
+                    <a:lnR w="9525" cap="flat" cmpd="sng" algn="ctr">
+                      <a:solidFill>
+                        <a:srgbClr val="D0D7DE"/>
+                      </a:solidFill>
+                      <a:prstDash val="solid"/>
+                    </a:lnR>
+                    <a:lnT w="9525" cap="flat" cmpd="sng" algn="ctr">
+                      <a:solidFill>
+                        <a:srgbClr val="D0D7DE"/>
+                      </a:solidFill>
+                      <a:prstDash val="solid"/>
+                    </a:lnT>
+                    <a:lnB w="9525" cap="flat" cmpd="sng" algn="ctr">
+                      <a:solidFill>
+                        <a:srgbClr val="D0D7DE"/>
+                      </a:solidFill>
+                      <a:prstDash val="solid"/>
+                    </a:lnB>
+                    <a:solidFill>
+                      <a:srgbClr val="F6F8FA"/>
+                    </a:solidFill>
+                  </a:tcPr>
+                </a:tc>
+                <a:tc>
+                  <a:txBody>
+                    <a:bodyPr wrap="square"/>
+                    <a:lstStyle/>
+                    <a:p>
+                      <a:r>
+                        <a:rPr sz="1400" b="0">
+                          <a:solidFill>
+                            <a:srgbClr val="1F2328"/>
+                          </a:solidFill>
+                          <a:latin typeface="Malgun Gothic"/>
+                        </a:rPr>
+                        <a:t>상태 코드 한 줄</a:t>
+                      </a:r>
+                    </a:p>
+                  </a:txBody>
+                  <a:tcPr marL="88900" marR="88900" marT="63500" marB="63500" anchor="ctr">
+                    <a:lnL w="9525" cap="flat" cmpd="sng" algn="ctr">
+                      <a:solidFill>
+                        <a:srgbClr val="D0D7DE"/>
+                      </a:solidFill>
+                      <a:prstDash val="solid"/>
+                    </a:lnL>
+                    <a:lnR w="9525" cap="flat" cmpd="sng" algn="ctr">
+                      <a:solidFill>
+                        <a:srgbClr val="D0D7DE"/>
+                      </a:solidFill>
+                      <a:prstDash val="solid"/>
+                    </a:lnR>
+                    <a:lnT w="9525" cap="flat" cmpd="sng" algn="ctr">
+                      <a:solidFill>
+                        <a:srgbClr val="D0D7DE"/>
+                      </a:solidFill>
+                      <a:prstDash val="solid"/>
+                    </a:lnT>
+                    <a:lnB w="9525" cap="flat" cmpd="sng" algn="ctr">
+                      <a:solidFill>
+                        <a:srgbClr val="D0D7DE"/>
+                      </a:solidFill>
+                      <a:prstDash val="solid"/>
+                    </a:lnB>
+                    <a:solidFill>
+                      <a:srgbClr val="F6F8FA"/>
+                    </a:solidFill>
+                  </a:tcPr>
+                </a:tc>
+                <a:tc>
+                  <a:txBody>
+                    <a:bodyPr wrap="square"/>
+                    <a:lstStyle/>
+                    <a:p>
+                      <a:r>
+                        <a:rPr sz="1400" b="0">
+                          <a:solidFill>
+                            <a:srgbClr val="1F2328"/>
+                          </a:solidFill>
+                          <a:latin typeface="Malgun Gothic"/>
+                        </a:rPr>
+                        <a:t>원인·요구 행동을 담아 담당자에게 큐브 알림. 설정 문제와 재등록 검토를 구분</a:t>
+                      </a:r>
+                    </a:p>
+                  </a:txBody>
+                  <a:tcPr marL="88900" marR="88900" marT="63500" marB="63500" anchor="ctr">
+                    <a:lnL w="9525" cap="flat" cmpd="sng" algn="ctr">
+                      <a:solidFill>
+                        <a:srgbClr val="D0D7DE"/>
+                      </a:solidFill>
+                      <a:prstDash val="solid"/>
+                    </a:lnL>
+                    <a:lnR w="9525" cap="flat" cmpd="sng" algn="ctr">
+                      <a:solidFill>
+                        <a:srgbClr val="D0D7DE"/>
+                      </a:solidFill>
+                      <a:prstDash val="solid"/>
+                    </a:lnR>
+                    <a:lnT w="9525" cap="flat" cmpd="sng" algn="ctr">
+                      <a:solidFill>
+                        <a:srgbClr val="D0D7DE"/>
+                      </a:solidFill>
+                      <a:prstDash val="solid"/>
+                    </a:lnT>
+                    <a:lnB w="9525" cap="flat" cmpd="sng" algn="ctr">
+                      <a:solidFill>
+                        <a:srgbClr val="D0D7DE"/>
+                      </a:solidFill>
+                      <a:prstDash val="solid"/>
+                    </a:lnB>
+                    <a:solidFill>
+                      <a:srgbClr val="F6F8FA"/>
+                    </a:solidFill>
+                  </a:tcPr>
+                </a:tc>
+              </a:tr>
+              <a:tr h="365760">
+                <a:tc>
+                  <a:txBody>
+                    <a:bodyPr wrap="square"/>
+                    <a:lstStyle/>
+                    <a:p>
+                      <a:r>
+                        <a:rPr sz="1400" b="0">
+                          <a:solidFill>
+                            <a:srgbClr val="1F2328"/>
+                          </a:solidFill>
+                          <a:latin typeface="Malgun Gothic"/>
+                        </a:rPr>
+                        <a:t>엔지니어 조작 지식</a:t>
+                      </a:r>
+                    </a:p>
+                  </a:txBody>
+                  <a:tcPr marL="88900" marR="88900" marT="63500" marB="63500" anchor="ctr">
+                    <a:lnL w="9525" cap="flat" cmpd="sng" algn="ctr">
+                      <a:solidFill>
+                        <a:srgbClr val="D0D7DE"/>
+                      </a:solidFill>
+                      <a:prstDash val="solid"/>
+                    </a:lnL>
+                    <a:lnR w="9525" cap="flat" cmpd="sng" algn="ctr">
+                      <a:solidFill>
+                        <a:srgbClr val="D0D7DE"/>
+                      </a:solidFill>
+                      <a:prstDash val="solid"/>
+                    </a:lnR>
+                    <a:lnT w="9525" cap="flat" cmpd="sng" algn="ctr">
+                      <a:solidFill>
+                        <a:srgbClr val="D0D7DE"/>
+                      </a:solidFill>
+                      <a:prstDash val="solid"/>
+                    </a:lnT>
+                    <a:lnB w="9525" cap="flat" cmpd="sng" algn="ctr">
+                      <a:solidFill>
+                        <a:srgbClr val="D0D7DE"/>
+                      </a:solidFill>
+                      <a:prstDash val="solid"/>
+                    </a:lnB>
+                    <a:solidFill>
+                      <a:srgbClr val="FFFFFF"/>
+                    </a:solidFill>
+                  </a:tcPr>
+                </a:tc>
+                <a:tc>
+                  <a:txBody>
+                    <a:bodyPr wrap="square"/>
+                    <a:lstStyle/>
+                    <a:p>
+                      <a:r>
+                        <a:rPr sz="1400" b="0">
+                          <a:solidFill>
+                            <a:srgbClr val="1F2328"/>
+                          </a:solidFill>
+                          <a:latin typeface="Malgun Gothic"/>
+                        </a:rPr>
+                        <a:t>개인 암묵지</a:t>
+                      </a:r>
+                    </a:p>
+                  </a:txBody>
+                  <a:tcPr marL="88900" marR="88900" marT="63500" marB="63500" anchor="ctr">
+                    <a:lnL w="9525" cap="flat" cmpd="sng" algn="ctr">
+                      <a:solidFill>
+                        <a:srgbClr val="D0D7DE"/>
+                      </a:solidFill>
+                      <a:prstDash val="solid"/>
+                    </a:lnL>
+                    <a:lnR w="9525" cap="flat" cmpd="sng" algn="ctr">
+                      <a:solidFill>
+                        <a:srgbClr val="D0D7DE"/>
+                      </a:solidFill>
+                      <a:prstDash val="solid"/>
+                    </a:lnR>
+                    <a:lnT w="9525" cap="flat" cmpd="sng" algn="ctr">
+                      <a:solidFill>
+                        <a:srgbClr val="D0D7DE"/>
+                      </a:solidFill>
+                      <a:prstDash val="solid"/>
+                    </a:lnT>
+                    <a:lnB w="9525" cap="flat" cmpd="sng" algn="ctr">
+                      <a:solidFill>
+                        <a:srgbClr val="D0D7DE"/>
+                      </a:solidFill>
+                      <a:prstDash val="solid"/>
+                    </a:lnB>
+                    <a:solidFill>
+                      <a:srgbClr val="FFFFFF"/>
+                    </a:solidFill>
+                  </a:tcPr>
+                </a:tc>
+                <a:tc>
+                  <a:txBody>
+                    <a:bodyPr wrap="square"/>
+                    <a:lstStyle/>
+                    <a:p>
+                      <a:r>
+                        <a:rPr sz="1400" b="0">
+                          <a:solidFill>
+                            <a:srgbClr val="1F2328"/>
+                          </a:solidFill>
+                          <a:latin typeface="Malgun Gothic"/>
+                        </a:rPr>
+                        <a:t>녹화 → 조작 타임라인 → 절차서 변환 경로 확보</a:t>
+                      </a:r>
+                    </a:p>
+                  </a:txBody>
+                  <a:tcPr marL="88900" marR="88900" marT="63500" marB="63500" anchor="ctr">
+                    <a:lnL w="9525" cap="flat" cmpd="sng" algn="ctr">
+                      <a:solidFill>
+                        <a:srgbClr val="D0D7DE"/>
+                      </a:solidFill>
+                      <a:prstDash val="solid"/>
+                    </a:lnL>
+                    <a:lnR w="9525" cap="flat" cmpd="sng" algn="ctr">
+                      <a:solidFill>
+                        <a:srgbClr val="D0D7DE"/>
+                      </a:solidFill>
+                      <a:prstDash val="solid"/>
+                    </a:lnR>
+                    <a:lnT w="9525" cap="flat" cmpd="sng" algn="ctr">
+                      <a:solidFill>
+                        <a:srgbClr val="D0D7DE"/>
+                      </a:solidFill>
+                      <a:prstDash val="solid"/>
+                    </a:lnT>
+                    <a:lnB w="9525" cap="flat" cmpd="sng" algn="ctr">
+                      <a:solidFill>
+                        <a:srgbClr val="D0D7DE"/>
+                      </a:solidFill>
+                      <a:prstDash val="solid"/>
+                    </a:lnB>
+                    <a:solidFill>
+                      <a:srgbClr val="FFFFFF"/>
                     </a:solidFill>
                   </a:tcPr>
                 </a:tc>

--- a/docs/project_progress/img/07/07_slides.pptx
+++ b/docs/project_progress/img/07/07_slides.pptx
@@ -13830,9 +13830,9 @@
                 <a:tableStyleId>{5C22544A-7EE6-4342-B048-85BDC9FD1C3A}</a:tableStyleId>
               </a:tblPr>
               <a:tblGrid>
-                <a:gridCol w="2850305"/>
-                <a:gridCol w="1487115"/>
-                <a:gridCol w="6939873"/>
+                <a:gridCol w="2985166"/>
+                <a:gridCol w="1990110"/>
+                <a:gridCol w="6302017"/>
               </a:tblGrid>
               <a:tr h="365760">
                 <a:tc>
@@ -14079,7 +14079,7 @@
                           </a:solidFill>
                           <a:latin typeface="Malgun Gothic"/>
                         </a:rPr>
-                        <a:t>RCS 로그인·장비 선택·캡처·닫기를 실장비에서 자동 수행. 버튼 인식+클릭 500회 중 99% 성공</a:t>
+                        <a:t>RCS 로그인~장비 접속~닫기 실장비 자동 수행, 클릭 성공률 99%</a:t>
                       </a:r>
                     </a:p>
                   </a:txBody>
@@ -14127,7 +14127,7 @@
                           </a:solidFill>
                           <a:latin typeface="Malgun Gothic"/>
                         </a:rPr>
-                        <a:t>화면 이해 AI 사내 자체 배포·운영</a:t>
+                        <a:t>화면 이해 AI 사내 자체 배포</a:t>
                       </a:r>
                     </a:p>
                   </a:txBody>
@@ -14219,7 +14219,7 @@
                           </a:solidFill>
                           <a:latin typeface="Malgun Gothic"/>
                         </a:rPr>
-                        <a:t>사내 HCP 에 VLM 1종 + OCR 1종 상시 운영, 통합 API</a:t>
+                        <a:t>사내 HCP 에 VLM 1종 + OCR 1종 상시 운영</a:t>
                       </a:r>
                     </a:p>
                   </a:txBody>
@@ -14359,7 +14359,7 @@
                           </a:solidFill>
                           <a:latin typeface="Malgun Gothic"/>
                         </a:rPr>
-                        <a:t>첫 시도에 정답 위치를 맞춘 비율 31.8% → 76.4% (오프라인 평가)</a:t>
+                        <a:t>첫 시도 정답률 31.8% → 76.4%</a:t>
                       </a:r>
                     </a:p>
                   </a:txBody>
@@ -14407,7 +14407,7 @@
                           </a:solidFill>
                           <a:latin typeface="Malgun Gothic"/>
                         </a:rPr>
-                        <a:t>감지~보정~기록 무인 루프 · 실알람 완주</a:t>
+                        <a:t>감지~보정~기록 무인 루프</a:t>
                       </a:r>
                     </a:p>
                   </a:txBody>
@@ -14499,7 +14499,7 @@
                           </a:solidFill>
                           <a:latin typeface="Malgun Gothic"/>
                         </a:rPr>
-                        <a:t>08월 실장비 보정 개통, 실알람 3건 감지~재조정 1분 미만. 기록은 현장 적재 확인 중</a:t>
+                        <a:t>실알람 3건 감지~재조정 1분 미만. 기록은 현장 적재 확인 중</a:t>
                       </a:r>
                     </a:p>
                   </a:txBody>
@@ -14639,7 +14639,7 @@
                           </a:solidFill>
                           <a:latin typeface="Malgun Gothic"/>
                         </a:rPr>
-                        <a:t>전용 PC 확보(방화벽 해제·AI용 ID 할당 진행), R3 26대 배치 준비</a:t>
+                        <a:t>전용 PC 확보, R3 26대 배치 준비</a:t>
                       </a:r>
                     </a:p>
                   </a:txBody>
@@ -14784,7 +14784,7 @@
         </p:nvGraphicFramePr>
         <p:xfrm>
           <a:off x="457200" y="1097280"/>
-          <a:ext cx="11277292" cy="2560320"/>
+          <a:ext cx="11277294" cy="1828800"/>
         </p:xfrm>
         <a:graphic>
           <a:graphicData uri="http://schemas.openxmlformats.org/drawingml/2006/table">
@@ -14793,10 +14793,10 @@
                 <a:tableStyleId>{5C22544A-7EE6-4342-B048-85BDC9FD1C3A}</a:tableStyleId>
               </a:tblPr>
               <a:tblGrid>
-                <a:gridCol w="2385581"/>
-                <a:gridCol w="1409661"/>
-                <a:gridCol w="4662727"/>
-                <a:gridCol w="2819323"/>
+                <a:gridCol w="2276151"/>
+                <a:gridCol w="1241537"/>
+                <a:gridCol w="5276532"/>
+                <a:gridCol w="2483074"/>
               </a:tblGrid>
               <a:tr h="365760">
                 <a:tc>
@@ -14805,7 +14805,7 @@
                     <a:lstStyle/>
                     <a:p>
                       <a:r>
-                        <a:rPr sz="1350" b="1">
+                        <a:rPr sz="1450" b="1">
                           <a:solidFill>
                             <a:srgbClr val="FFFFFF"/>
                           </a:solidFill>
@@ -14851,7 +14851,7 @@
                     <a:lstStyle/>
                     <a:p>
                       <a:r>
-                        <a:rPr sz="1350" b="1">
+                        <a:rPr sz="1450" b="1">
                           <a:solidFill>
                             <a:srgbClr val="FFFFFF"/>
                           </a:solidFill>
@@ -14897,7 +14897,7 @@
                     <a:lstStyle/>
                     <a:p>
                       <a:r>
-                        <a:rPr sz="1350" b="1">
+                        <a:rPr sz="1450" b="1">
                           <a:solidFill>
                             <a:srgbClr val="FFFFFF"/>
                           </a:solidFill>
@@ -14943,13 +14943,13 @@
                     <a:lstStyle/>
                     <a:p>
                       <a:r>
-                        <a:rPr sz="1350" b="1">
+                        <a:rPr sz="1450" b="1">
                           <a:solidFill>
                             <a:srgbClr val="FFFFFF"/>
                           </a:solidFill>
                           <a:latin typeface="Malgun Gothic"/>
                         </a:rPr>
-                        <a:t>비고</a:t>
+                        <a:t>근거</a:t>
                       </a:r>
                     </a:p>
                   </a:txBody>
@@ -14991,7 +14991,7 @@
                     <a:lstStyle/>
                     <a:p>
                       <a:r>
-                        <a:rPr sz="1300" b="0">
+                        <a:rPr sz="1400" b="0">
                           <a:solidFill>
                             <a:srgbClr val="1F2328"/>
                           </a:solidFill>
@@ -15037,7 +15037,7 @@
                     <a:lstStyle/>
                     <a:p>
                       <a:r>
-                        <a:rPr sz="1300" b="0">
+                        <a:rPr sz="1400" b="0">
                           <a:solidFill>
                             <a:srgbClr val="1F2328"/>
                           </a:solidFill>
@@ -15083,7 +15083,7 @@
                     <a:lstStyle/>
                     <a:p>
                       <a:r>
-                        <a:rPr sz="1300" b="1">
+                        <a:rPr sz="1400" b="1">
                           <a:solidFill>
                             <a:srgbClr val="1F2328"/>
                           </a:solidFill>
@@ -15129,16 +15129,16 @@
                     <a:lstStyle/>
                     <a:p>
                       <a:r>
-                        <a:rPr sz="1300" b="0">
+                        <a:rPr sz="1400" b="0">
                           <a:solidFill>
                             <a:srgbClr val="1F2328"/>
                           </a:solidFill>
                           <a:latin typeface="Malgun Gothic"/>
                         </a:rPr>
-                        <a:t>실알람 3건 실측 </a:t>
+                        <a:t>실알람 3건 </a:t>
                       </a:r>
                       <a:r>
-                        <a:rPr sz="1300" b="1">
+                        <a:rPr sz="1400" b="1">
                           <a:solidFill>
                             <a:srgbClr val="166534"/>
                           </a:solidFill>
@@ -15186,7 +15186,7 @@
                     <a:lstStyle/>
                     <a:p>
                       <a:r>
-                        <a:rPr sz="1300" b="0">
+                        <a:rPr sz="1400" b="0">
                           <a:solidFill>
                             <a:srgbClr val="1F2328"/>
                           </a:solidFill>
@@ -15232,7 +15232,7 @@
                     <a:lstStyle/>
                     <a:p>
                       <a:r>
-                        <a:rPr sz="1300" b="0">
+                        <a:rPr sz="1400" b="0">
                           <a:solidFill>
                             <a:srgbClr val="1F2328"/>
                           </a:solidFill>
@@ -15278,7 +15278,7 @@
                     <a:lstStyle/>
                     <a:p>
                       <a:r>
-                        <a:rPr sz="1300" b="1">
+                        <a:rPr sz="1400" b="1">
                           <a:solidFill>
                             <a:srgbClr val="1F2328"/>
                           </a:solidFill>
@@ -15287,7 +15287,7 @@
                         <a:t>76.4%</a:t>
                       </a:r>
                       <a:r>
-                        <a:rPr sz="1300" b="0">
+                        <a:rPr sz="1400" b="0">
                           <a:solidFill>
                             <a:srgbClr val="1F2328"/>
                           </a:solidFill>
@@ -15333,7 +15333,7 @@
                     <a:lstStyle/>
                     <a:p>
                       <a:r>
-                        <a:rPr sz="1300" b="0">
+                        <a:rPr sz="1400" b="0">
                           <a:solidFill>
                             <a:srgbClr val="1F2328"/>
                           </a:solidFill>
@@ -15342,7 +15342,7 @@
                         <a:t>Recipe 200개 오프라인 평가 </a:t>
                       </a:r>
                       <a:r>
-                        <a:rPr sz="1300" b="1">
+                        <a:rPr sz="1400" b="1">
                           <a:solidFill>
                             <a:srgbClr val="166534"/>
                           </a:solidFill>
@@ -15390,13 +15390,13 @@
                     <a:lstStyle/>
                     <a:p>
                       <a:r>
-                        <a:rPr sz="1300" b="0">
+                        <a:rPr sz="1400" b="0">
                           <a:solidFill>
                             <a:srgbClr val="1F2328"/>
                           </a:solidFill>
                           <a:latin typeface="Malgun Gothic"/>
                         </a:rPr>
-                        <a:t>AI 가 낸 후보 안에 정답이 든 비율</a:t>
+                        <a:t>화면 버튼 인식 + 클릭 성공률</a:t>
                       </a:r>
                     </a:p>
                   </a:txBody>
@@ -15436,13 +15436,13 @@
                     <a:lstStyle/>
                     <a:p>
                       <a:r>
-                        <a:rPr sz="1300" b="0">
+                        <a:rPr sz="1400" b="0">
                           <a:solidFill>
                             <a:srgbClr val="1F2328"/>
                           </a:solidFill>
                           <a:latin typeface="Malgun Gothic"/>
                         </a:rPr>
-                        <a:t>43.4%</a:t>
+                        <a:t>자주 빗나감</a:t>
                       </a:r>
                     </a:p>
                   </a:txBody>
@@ -15482,13 +15482,22 @@
                     <a:lstStyle/>
                     <a:p>
                       <a:r>
-                        <a:rPr sz="1300" b="1">
+                        <a:rPr sz="1400" b="1">
                           <a:solidFill>
                             <a:srgbClr val="1F2328"/>
                           </a:solidFill>
                           <a:latin typeface="Malgun Gothic"/>
                         </a:rPr>
-                        <a:t>87.6%</a:t>
+                        <a:t>99%</a:t>
+                      </a:r>
+                      <a:r>
+                        <a:rPr sz="1400" b="0">
+                          <a:solidFill>
+                            <a:srgbClr val="1F2328"/>
+                          </a:solidFill>
+                          <a:latin typeface="Malgun Gothic"/>
+                        </a:rPr>
+                        <a:t> (500회)</a:t>
                       </a:r>
                     </a:p>
                   </a:txBody>
@@ -15528,16 +15537,7 @@
                     <a:lstStyle/>
                     <a:p>
                       <a:r>
-                        <a:rPr sz="1300" b="0">
-                          <a:solidFill>
-                            <a:srgbClr val="1F2328"/>
-                          </a:solidFill>
-                          <a:latin typeface="Malgun Gothic"/>
-                        </a:rPr>
-                        <a:t>같은 평가 </a:t>
-                      </a:r>
-                      <a:r>
-                        <a:rPr sz="1300" b="1">
+                        <a:rPr sz="1400" b="1">
                           <a:solidFill>
                             <a:srgbClr val="166534"/>
                           </a:solidFill>
@@ -15585,13 +15585,13 @@
                     <a:lstStyle/>
                     <a:p>
                       <a:r>
-                        <a:rPr sz="1300" b="0">
+                        <a:rPr sz="1400" b="0">
                           <a:solidFill>
                             <a:srgbClr val="1F2328"/>
                           </a:solidFill>
                           <a:latin typeface="Malgun Gothic"/>
                         </a:rPr>
-                        <a:t>화면 버튼 인식 + 클릭 성공률</a:t>
+                        <a:t>주당 회수 장비 시간 · 환산(400건)</a:t>
                       </a:r>
                     </a:p>
                   </a:txBody>
@@ -15631,13 +15631,13 @@
                     <a:lstStyle/>
                     <a:p>
                       <a:r>
-                        <a:rPr sz="1300" b="0">
+                        <a:rPr sz="1400" b="0">
                           <a:solidFill>
                             <a:srgbClr val="1F2328"/>
                           </a:solidFill>
                           <a:latin typeface="Malgun Gothic"/>
                         </a:rPr>
-                        <a:t>단일 모델: 자주 빗나감</a:t>
+                        <a:t>-</a:t>
                       </a:r>
                     </a:p>
                   </a:txBody>
@@ -15677,22 +15677,22 @@
                     <a:lstStyle/>
                     <a:p>
                       <a:r>
-                        <a:rPr sz="1300" b="1">
+                        <a:rPr sz="1400" b="1">
                           <a:solidFill>
                             <a:srgbClr val="1F2328"/>
                           </a:solidFill>
                           <a:latin typeface="Malgun Gothic"/>
                         </a:rPr>
-                        <a:t>99%</a:t>
+                        <a:t>약 27시간</a:t>
                       </a:r>
                       <a:r>
-                        <a:rPr sz="1300" b="0">
+                        <a:rPr sz="1400" b="0">
                           <a:solidFill>
                             <a:srgbClr val="1F2328"/>
                           </a:solidFill>
                           <a:latin typeface="Malgun Gothic"/>
                         </a:rPr>
-                        <a:t> (500회)</a:t>
+                        <a:t> = WAFER 약 100장/주 = 장비 약 0.2대(Capex 약 4~5억 원)</a:t>
                       </a:r>
                     </a:p>
                   </a:txBody>
@@ -15732,406 +15732,7 @@
                     <a:lstStyle/>
                     <a:p>
                       <a:r>
-                        <a:rPr sz="1300" b="0">
-                          <a:solidFill>
-                            <a:srgbClr val="1F2328"/>
-                          </a:solidFill>
-                          <a:latin typeface="Malgun Gothic"/>
-                        </a:rPr>
-                        <a:t>현업 집계 </a:t>
-                      </a:r>
-                      <a:r>
-                        <a:rPr sz="1300" b="1">
-                          <a:solidFill>
-                            <a:srgbClr val="166534"/>
-                          </a:solidFill>
-                          <a:latin typeface="Malgun Gothic"/>
-                        </a:rPr>
-                        <a:t>[검증]</a:t>
-                      </a:r>
-                    </a:p>
-                  </a:txBody>
-                  <a:tcPr marL="88900" marR="88900" marT="63500" marB="63500" anchor="ctr">
-                    <a:lnL w="9525" cap="flat" cmpd="sng" algn="ctr">
-                      <a:solidFill>
-                        <a:srgbClr val="D0D7DE"/>
-                      </a:solidFill>
-                      <a:prstDash val="solid"/>
-                    </a:lnL>
-                    <a:lnR w="9525" cap="flat" cmpd="sng" algn="ctr">
-                      <a:solidFill>
-                        <a:srgbClr val="D0D7DE"/>
-                      </a:solidFill>
-                      <a:prstDash val="solid"/>
-                    </a:lnR>
-                    <a:lnT w="9525" cap="flat" cmpd="sng" algn="ctr">
-                      <a:solidFill>
-                        <a:srgbClr val="D0D7DE"/>
-                      </a:solidFill>
-                      <a:prstDash val="solid"/>
-                    </a:lnT>
-                    <a:lnB w="9525" cap="flat" cmpd="sng" algn="ctr">
-                      <a:solidFill>
-                        <a:srgbClr val="D0D7DE"/>
-                      </a:solidFill>
-                      <a:prstDash val="solid"/>
-                    </a:lnB>
-                    <a:solidFill>
-                      <a:srgbClr val="F6F8FA"/>
-                    </a:solidFill>
-                  </a:tcPr>
-                </a:tc>
-              </a:tr>
-              <a:tr h="365760">
-                <a:tc>
-                  <a:txBody>
-                    <a:bodyPr wrap="square"/>
-                    <a:lstStyle/>
-                    <a:p>
-                      <a:r>
-                        <a:rPr sz="1300" b="0">
-                          <a:solidFill>
-                            <a:srgbClr val="1F2328"/>
-                          </a:solidFill>
-                          <a:latin typeface="Malgun Gothic"/>
-                        </a:rPr>
-                        <a:t>주당 회수되는 장비 시간(400건)</a:t>
-                      </a:r>
-                    </a:p>
-                  </a:txBody>
-                  <a:tcPr marL="88900" marR="88900" marT="63500" marB="63500" anchor="ctr">
-                    <a:lnL w="9525" cap="flat" cmpd="sng" algn="ctr">
-                      <a:solidFill>
-                        <a:srgbClr val="D0D7DE"/>
-                      </a:solidFill>
-                      <a:prstDash val="solid"/>
-                    </a:lnL>
-                    <a:lnR w="9525" cap="flat" cmpd="sng" algn="ctr">
-                      <a:solidFill>
-                        <a:srgbClr val="D0D7DE"/>
-                      </a:solidFill>
-                      <a:prstDash val="solid"/>
-                    </a:lnR>
-                    <a:lnT w="9525" cap="flat" cmpd="sng" algn="ctr">
-                      <a:solidFill>
-                        <a:srgbClr val="D0D7DE"/>
-                      </a:solidFill>
-                      <a:prstDash val="solid"/>
-                    </a:lnT>
-                    <a:lnB w="9525" cap="flat" cmpd="sng" algn="ctr">
-                      <a:solidFill>
-                        <a:srgbClr val="D0D7DE"/>
-                      </a:solidFill>
-                      <a:prstDash val="solid"/>
-                    </a:lnB>
-                    <a:solidFill>
-                      <a:srgbClr val="FFFFFF"/>
-                    </a:solidFill>
-                  </a:tcPr>
-                </a:tc>
-                <a:tc>
-                  <a:txBody>
-                    <a:bodyPr wrap="square"/>
-                    <a:lstStyle/>
-                    <a:p>
-                      <a:r>
-                        <a:rPr sz="1300" b="0">
-                          <a:solidFill>
-                            <a:srgbClr val="1F2328"/>
-                          </a:solidFill>
-                          <a:latin typeface="Malgun Gothic"/>
-                        </a:rPr>
-                        <a:t>-</a:t>
-                      </a:r>
-                    </a:p>
-                  </a:txBody>
-                  <a:tcPr marL="88900" marR="88900" marT="63500" marB="63500" anchor="ctr">
-                    <a:lnL w="9525" cap="flat" cmpd="sng" algn="ctr">
-                      <a:solidFill>
-                        <a:srgbClr val="D0D7DE"/>
-                      </a:solidFill>
-                      <a:prstDash val="solid"/>
-                    </a:lnL>
-                    <a:lnR w="9525" cap="flat" cmpd="sng" algn="ctr">
-                      <a:solidFill>
-                        <a:srgbClr val="D0D7DE"/>
-                      </a:solidFill>
-                      <a:prstDash val="solid"/>
-                    </a:lnR>
-                    <a:lnT w="9525" cap="flat" cmpd="sng" algn="ctr">
-                      <a:solidFill>
-                        <a:srgbClr val="D0D7DE"/>
-                      </a:solidFill>
-                      <a:prstDash val="solid"/>
-                    </a:lnT>
-                    <a:lnB w="9525" cap="flat" cmpd="sng" algn="ctr">
-                      <a:solidFill>
-                        <a:srgbClr val="D0D7DE"/>
-                      </a:solidFill>
-                      <a:prstDash val="solid"/>
-                    </a:lnB>
-                    <a:solidFill>
-                      <a:srgbClr val="FFFFFF"/>
-                    </a:solidFill>
-                  </a:tcPr>
-                </a:tc>
-                <a:tc>
-                  <a:txBody>
-                    <a:bodyPr wrap="square"/>
-                    <a:lstStyle/>
-                    <a:p>
-                      <a:r>
-                        <a:rPr sz="1300" b="1">
-                          <a:solidFill>
-                            <a:srgbClr val="1F2328"/>
-                          </a:solidFill>
-                          <a:latin typeface="Malgun Gothic"/>
-                        </a:rPr>
-                        <a:t>약 27시간</a:t>
-                      </a:r>
-                    </a:p>
-                  </a:txBody>
-                  <a:tcPr marL="88900" marR="88900" marT="63500" marB="63500" anchor="ctr">
-                    <a:lnL w="9525" cap="flat" cmpd="sng" algn="ctr">
-                      <a:solidFill>
-                        <a:srgbClr val="D0D7DE"/>
-                      </a:solidFill>
-                      <a:prstDash val="solid"/>
-                    </a:lnL>
-                    <a:lnR w="9525" cap="flat" cmpd="sng" algn="ctr">
-                      <a:solidFill>
-                        <a:srgbClr val="D0D7DE"/>
-                      </a:solidFill>
-                      <a:prstDash val="solid"/>
-                    </a:lnR>
-                    <a:lnT w="9525" cap="flat" cmpd="sng" algn="ctr">
-                      <a:solidFill>
-                        <a:srgbClr val="D0D7DE"/>
-                      </a:solidFill>
-                      <a:prstDash val="solid"/>
-                    </a:lnT>
-                    <a:lnB w="9525" cap="flat" cmpd="sng" algn="ctr">
-                      <a:solidFill>
-                        <a:srgbClr val="D0D7DE"/>
-                      </a:solidFill>
-                      <a:prstDash val="solid"/>
-                    </a:lnB>
-                    <a:solidFill>
-                      <a:srgbClr val="FFFFFF"/>
-                    </a:solidFill>
-                  </a:tcPr>
-                </a:tc>
-                <a:tc>
-                  <a:txBody>
-                    <a:bodyPr wrap="square"/>
-                    <a:lstStyle/>
-                    <a:p>
-                      <a:r>
-                        <a:rPr sz="1300" b="0">
-                          <a:solidFill>
-                            <a:srgbClr val="1F2328"/>
-                          </a:solidFill>
-                          <a:latin typeface="Malgun Gothic"/>
-                        </a:rPr>
-                        <a:t>400건 × 4분 </a:t>
-                      </a:r>
-                      <a:r>
-                        <a:rPr sz="1300" b="1">
-                          <a:solidFill>
-                            <a:srgbClr val="92400E"/>
-                          </a:solidFill>
-                          <a:latin typeface="Malgun Gothic"/>
-                        </a:rPr>
-                        <a:t>[목표]</a:t>
-                      </a:r>
-                    </a:p>
-                  </a:txBody>
-                  <a:tcPr marL="88900" marR="88900" marT="63500" marB="63500" anchor="ctr">
-                    <a:lnL w="9525" cap="flat" cmpd="sng" algn="ctr">
-                      <a:solidFill>
-                        <a:srgbClr val="D0D7DE"/>
-                      </a:solidFill>
-                      <a:prstDash val="solid"/>
-                    </a:lnL>
-                    <a:lnR w="9525" cap="flat" cmpd="sng" algn="ctr">
-                      <a:solidFill>
-                        <a:srgbClr val="D0D7DE"/>
-                      </a:solidFill>
-                      <a:prstDash val="solid"/>
-                    </a:lnR>
-                    <a:lnT w="9525" cap="flat" cmpd="sng" algn="ctr">
-                      <a:solidFill>
-                        <a:srgbClr val="D0D7DE"/>
-                      </a:solidFill>
-                      <a:prstDash val="solid"/>
-                    </a:lnT>
-                    <a:lnB w="9525" cap="flat" cmpd="sng" algn="ctr">
-                      <a:solidFill>
-                        <a:srgbClr val="D0D7DE"/>
-                      </a:solidFill>
-                      <a:prstDash val="solid"/>
-                    </a:lnB>
-                    <a:solidFill>
-                      <a:srgbClr val="FFFFFF"/>
-                    </a:solidFill>
-                  </a:tcPr>
-                </a:tc>
-              </a:tr>
-              <a:tr h="365760">
-                <a:tc>
-                  <a:txBody>
-                    <a:bodyPr wrap="square"/>
-                    <a:lstStyle/>
-                    <a:p>
-                      <a:r>
-                        <a:rPr sz="1300" b="0">
-                          <a:solidFill>
-                            <a:srgbClr val="1F2328"/>
-                          </a:solidFill>
-                          <a:latin typeface="Malgun Gothic"/>
-                        </a:rPr>
-                        <a:t>추가 측정량 · 장비 환산</a:t>
-                      </a:r>
-                    </a:p>
-                  </a:txBody>
-                  <a:tcPr marL="88900" marR="88900" marT="63500" marB="63500" anchor="ctr">
-                    <a:lnL w="9525" cap="flat" cmpd="sng" algn="ctr">
-                      <a:solidFill>
-                        <a:srgbClr val="D0D7DE"/>
-                      </a:solidFill>
-                      <a:prstDash val="solid"/>
-                    </a:lnL>
-                    <a:lnR w="9525" cap="flat" cmpd="sng" algn="ctr">
-                      <a:solidFill>
-                        <a:srgbClr val="D0D7DE"/>
-                      </a:solidFill>
-                      <a:prstDash val="solid"/>
-                    </a:lnR>
-                    <a:lnT w="9525" cap="flat" cmpd="sng" algn="ctr">
-                      <a:solidFill>
-                        <a:srgbClr val="D0D7DE"/>
-                      </a:solidFill>
-                      <a:prstDash val="solid"/>
-                    </a:lnT>
-                    <a:lnB w="9525" cap="flat" cmpd="sng" algn="ctr">
-                      <a:solidFill>
-                        <a:srgbClr val="D0D7DE"/>
-                      </a:solidFill>
-                      <a:prstDash val="solid"/>
-                    </a:lnB>
-                    <a:solidFill>
-                      <a:srgbClr val="F6F8FA"/>
-                    </a:solidFill>
-                  </a:tcPr>
-                </a:tc>
-                <a:tc>
-                  <a:txBody>
-                    <a:bodyPr wrap="square"/>
-                    <a:lstStyle/>
-                    <a:p>
-                      <a:r>
-                        <a:rPr sz="1300" b="0">
-                          <a:solidFill>
-                            <a:srgbClr val="1F2328"/>
-                          </a:solidFill>
-                          <a:latin typeface="Malgun Gothic"/>
-                        </a:rPr>
-                        <a:t>-</a:t>
-                      </a:r>
-                    </a:p>
-                  </a:txBody>
-                  <a:tcPr marL="88900" marR="88900" marT="63500" marB="63500" anchor="ctr">
-                    <a:lnL w="9525" cap="flat" cmpd="sng" algn="ctr">
-                      <a:solidFill>
-                        <a:srgbClr val="D0D7DE"/>
-                      </a:solidFill>
-                      <a:prstDash val="solid"/>
-                    </a:lnL>
-                    <a:lnR w="9525" cap="flat" cmpd="sng" algn="ctr">
-                      <a:solidFill>
-                        <a:srgbClr val="D0D7DE"/>
-                      </a:solidFill>
-                      <a:prstDash val="solid"/>
-                    </a:lnR>
-                    <a:lnT w="9525" cap="flat" cmpd="sng" algn="ctr">
-                      <a:solidFill>
-                        <a:srgbClr val="D0D7DE"/>
-                      </a:solidFill>
-                      <a:prstDash val="solid"/>
-                    </a:lnT>
-                    <a:lnB w="9525" cap="flat" cmpd="sng" algn="ctr">
-                      <a:solidFill>
-                        <a:srgbClr val="D0D7DE"/>
-                      </a:solidFill>
-                      <a:prstDash val="solid"/>
-                    </a:lnB>
-                    <a:solidFill>
-                      <a:srgbClr val="F6F8FA"/>
-                    </a:solidFill>
-                  </a:tcPr>
-                </a:tc>
-                <a:tc>
-                  <a:txBody>
-                    <a:bodyPr wrap="square"/>
-                    <a:lstStyle/>
-                    <a:p>
-                      <a:r>
-                        <a:rPr sz="1300" b="1">
-                          <a:solidFill>
-                            <a:srgbClr val="1F2328"/>
-                          </a:solidFill>
-                          <a:latin typeface="Malgun Gothic"/>
-                        </a:rPr>
-                        <a:t>WAFER 약 100장/주 · 장비 약 0.2대 = Capex 약 4~5억 원</a:t>
-                      </a:r>
-                    </a:p>
-                  </a:txBody>
-                  <a:tcPr marL="88900" marR="88900" marT="63500" marB="63500" anchor="ctr">
-                    <a:lnL w="9525" cap="flat" cmpd="sng" algn="ctr">
-                      <a:solidFill>
-                        <a:srgbClr val="D0D7DE"/>
-                      </a:solidFill>
-                      <a:prstDash val="solid"/>
-                    </a:lnL>
-                    <a:lnR w="9525" cap="flat" cmpd="sng" algn="ctr">
-                      <a:solidFill>
-                        <a:srgbClr val="D0D7DE"/>
-                      </a:solidFill>
-                      <a:prstDash val="solid"/>
-                    </a:lnR>
-                    <a:lnT w="9525" cap="flat" cmpd="sng" algn="ctr">
-                      <a:solidFill>
-                        <a:srgbClr val="D0D7DE"/>
-                      </a:solidFill>
-                      <a:prstDash val="solid"/>
-                    </a:lnT>
-                    <a:lnB w="9525" cap="flat" cmpd="sng" algn="ctr">
-                      <a:solidFill>
-                        <a:srgbClr val="D0D7DE"/>
-                      </a:solidFill>
-                      <a:prstDash val="solid"/>
-                    </a:lnB>
-                    <a:solidFill>
-                      <a:srgbClr val="F6F8FA"/>
-                    </a:solidFill>
-                  </a:tcPr>
-                </a:tc>
-                <a:tc>
-                  <a:txBody>
-                    <a:bodyPr wrap="square"/>
-                    <a:lstStyle/>
-                    <a:p>
-                      <a:r>
-                        <a:rPr sz="1300" b="0">
-                          <a:solidFill>
-                            <a:srgbClr val="1F2328"/>
-                          </a:solidFill>
-                          <a:latin typeface="Malgun Gothic"/>
-                        </a:rPr>
-                        <a:t>장당 15분, 1대 약 20억 원 추산 </a:t>
-                      </a:r>
-                      <a:r>
-                        <a:rPr sz="1300" b="1">
+                        <a:rPr sz="1400" b="1">
                           <a:solidFill>
                             <a:srgbClr val="92400E"/>
                           </a:solidFill>
@@ -16282,7 +15883,7 @@
         </p:nvGraphicFramePr>
         <p:xfrm>
           <a:off x="457200" y="1097280"/>
-          <a:ext cx="11277294" cy="2194560"/>
+          <a:ext cx="11277294" cy="1828800"/>
         </p:xfrm>
         <a:graphic>
           <a:graphicData uri="http://schemas.openxmlformats.org/drawingml/2006/table">
@@ -16291,9 +15892,9 @@
                 <a:tableStyleId>{5C22544A-7EE6-4342-B048-85BDC9FD1C3A}</a:tableStyleId>
               </a:tblPr>
               <a:tblGrid>
-                <a:gridCol w="1339876"/>
-                <a:gridCol w="3238035"/>
-                <a:gridCol w="6699383"/>
+                <a:gridCol w="2218484"/>
+                <a:gridCol w="3512600"/>
+                <a:gridCol w="5546210"/>
               </a:tblGrid>
               <a:tr h="365760">
                 <a:tc>
@@ -16494,7 +16095,7 @@
                           </a:solidFill>
                           <a:latin typeface="Malgun Gothic"/>
                         </a:rPr>
-                        <a:t>인라인·엔지니어가 교대로 모니터 감시·접속·육안 탐색</a:t>
+                        <a:t>교대로 모니터 감시·접속·육안 탐색</a:t>
                       </a:r>
                     </a:p>
                   </a:txBody>
@@ -16588,7 +16189,7 @@
                           </a:solidFill>
                           <a:latin typeface="Malgun Gothic"/>
                         </a:rPr>
-                        <a:t>실패 원인 기록</a:t>
+                        <a:t>실패 기록</a:t>
                       </a:r>
                     </a:p>
                   </a:txBody>
@@ -16680,7 +16281,7 @@
                           </a:solidFill>
                           <a:latin typeface="Malgun Gothic"/>
                         </a:rPr>
-                        <a:t>실패 화면 + 전 구간 녹화 + 대응 1건 = 기록 1줄</a:t>
+                        <a:t>실패 화면 + 녹화 + 대응 1건 = 기록 1줄</a:t>
                       </a:r>
                     </a:p>
                   </a:txBody>
@@ -16774,7 +16375,7 @@
                           </a:solidFill>
                           <a:latin typeface="Malgun Gothic"/>
                         </a:rPr>
-                        <a:t>화면 근거 없음, 경험에 의존</a:t>
+                        <a:t>경험에 의존</a:t>
                       </a:r>
                     </a:p>
                   </a:txBody>
@@ -16820,7 +16421,7 @@
                           </a:solidFill>
                           <a:latin typeface="Malgun Gothic"/>
                         </a:rPr>
-                        <a:t>헷갈리는 Align Key Recipe 목록을 자동 산출(SEM Recipe 104개 중 84개), 현업 대조 중</a:t>
+                        <a:t>헷갈리는 Align Key Recipe 목록 자동 산출</a:t>
                       </a:r>
                     </a:p>
                   </a:txBody>
@@ -16960,7 +16561,7 @@
                           </a:solidFill>
                           <a:latin typeface="Malgun Gothic"/>
                         </a:rPr>
-                        <a:t>원인·요구 행동을 담아 담당자에게 큐브 알림. 설정 문제와 재등록 검토를 구분</a:t>
+                        <a:t>원인·요구 행동을 담아 담당자에게 큐브 알림</a:t>
                       </a:r>
                     </a:p>
                   </a:txBody>
@@ -16991,146 +16592,6 @@
                     </a:lnB>
                     <a:solidFill>
                       <a:srgbClr val="F6F8FA"/>
-                    </a:solidFill>
-                  </a:tcPr>
-                </a:tc>
-              </a:tr>
-              <a:tr h="365760">
-                <a:tc>
-                  <a:txBody>
-                    <a:bodyPr wrap="square"/>
-                    <a:lstStyle/>
-                    <a:p>
-                      <a:r>
-                        <a:rPr sz="1400" b="0">
-                          <a:solidFill>
-                            <a:srgbClr val="1F2328"/>
-                          </a:solidFill>
-                          <a:latin typeface="Malgun Gothic"/>
-                        </a:rPr>
-                        <a:t>엔지니어 조작 지식</a:t>
-                      </a:r>
-                    </a:p>
-                  </a:txBody>
-                  <a:tcPr marL="88900" marR="88900" marT="63500" marB="63500" anchor="ctr">
-                    <a:lnL w="9525" cap="flat" cmpd="sng" algn="ctr">
-                      <a:solidFill>
-                        <a:srgbClr val="D0D7DE"/>
-                      </a:solidFill>
-                      <a:prstDash val="solid"/>
-                    </a:lnL>
-                    <a:lnR w="9525" cap="flat" cmpd="sng" algn="ctr">
-                      <a:solidFill>
-                        <a:srgbClr val="D0D7DE"/>
-                      </a:solidFill>
-                      <a:prstDash val="solid"/>
-                    </a:lnR>
-                    <a:lnT w="9525" cap="flat" cmpd="sng" algn="ctr">
-                      <a:solidFill>
-                        <a:srgbClr val="D0D7DE"/>
-                      </a:solidFill>
-                      <a:prstDash val="solid"/>
-                    </a:lnT>
-                    <a:lnB w="9525" cap="flat" cmpd="sng" algn="ctr">
-                      <a:solidFill>
-                        <a:srgbClr val="D0D7DE"/>
-                      </a:solidFill>
-                      <a:prstDash val="solid"/>
-                    </a:lnB>
-                    <a:solidFill>
-                      <a:srgbClr val="FFFFFF"/>
-                    </a:solidFill>
-                  </a:tcPr>
-                </a:tc>
-                <a:tc>
-                  <a:txBody>
-                    <a:bodyPr wrap="square"/>
-                    <a:lstStyle/>
-                    <a:p>
-                      <a:r>
-                        <a:rPr sz="1400" b="0">
-                          <a:solidFill>
-                            <a:srgbClr val="1F2328"/>
-                          </a:solidFill>
-                          <a:latin typeface="Malgun Gothic"/>
-                        </a:rPr>
-                        <a:t>개인 암묵지</a:t>
-                      </a:r>
-                    </a:p>
-                  </a:txBody>
-                  <a:tcPr marL="88900" marR="88900" marT="63500" marB="63500" anchor="ctr">
-                    <a:lnL w="9525" cap="flat" cmpd="sng" algn="ctr">
-                      <a:solidFill>
-                        <a:srgbClr val="D0D7DE"/>
-                      </a:solidFill>
-                      <a:prstDash val="solid"/>
-                    </a:lnL>
-                    <a:lnR w="9525" cap="flat" cmpd="sng" algn="ctr">
-                      <a:solidFill>
-                        <a:srgbClr val="D0D7DE"/>
-                      </a:solidFill>
-                      <a:prstDash val="solid"/>
-                    </a:lnR>
-                    <a:lnT w="9525" cap="flat" cmpd="sng" algn="ctr">
-                      <a:solidFill>
-                        <a:srgbClr val="D0D7DE"/>
-                      </a:solidFill>
-                      <a:prstDash val="solid"/>
-                    </a:lnT>
-                    <a:lnB w="9525" cap="flat" cmpd="sng" algn="ctr">
-                      <a:solidFill>
-                        <a:srgbClr val="D0D7DE"/>
-                      </a:solidFill>
-                      <a:prstDash val="solid"/>
-                    </a:lnB>
-                    <a:solidFill>
-                      <a:srgbClr val="FFFFFF"/>
-                    </a:solidFill>
-                  </a:tcPr>
-                </a:tc>
-                <a:tc>
-                  <a:txBody>
-                    <a:bodyPr wrap="square"/>
-                    <a:lstStyle/>
-                    <a:p>
-                      <a:r>
-                        <a:rPr sz="1400" b="0">
-                          <a:solidFill>
-                            <a:srgbClr val="1F2328"/>
-                          </a:solidFill>
-                          <a:latin typeface="Malgun Gothic"/>
-                        </a:rPr>
-                        <a:t>녹화 → 조작 타임라인 → 절차서 변환 경로 확보</a:t>
-                      </a:r>
-                    </a:p>
-                  </a:txBody>
-                  <a:tcPr marL="88900" marR="88900" marT="63500" marB="63500" anchor="ctr">
-                    <a:lnL w="9525" cap="flat" cmpd="sng" algn="ctr">
-                      <a:solidFill>
-                        <a:srgbClr val="D0D7DE"/>
-                      </a:solidFill>
-                      <a:prstDash val="solid"/>
-                    </a:lnL>
-                    <a:lnR w="9525" cap="flat" cmpd="sng" algn="ctr">
-                      <a:solidFill>
-                        <a:srgbClr val="D0D7DE"/>
-                      </a:solidFill>
-                      <a:prstDash val="solid"/>
-                    </a:lnR>
-                    <a:lnT w="9525" cap="flat" cmpd="sng" algn="ctr">
-                      <a:solidFill>
-                        <a:srgbClr val="D0D7DE"/>
-                      </a:solidFill>
-                      <a:prstDash val="solid"/>
-                    </a:lnT>
-                    <a:lnB w="9525" cap="flat" cmpd="sng" algn="ctr">
-                      <a:solidFill>
-                        <a:srgbClr val="D0D7DE"/>
-                      </a:solidFill>
-                      <a:prstDash val="solid"/>
-                    </a:lnB>
-                    <a:solidFill>
-                      <a:srgbClr val="FFFFFF"/>
                     </a:solidFill>
                   </a:tcPr>
                 </a:tc>

--- a/docs/project_progress/img/07/07_slides.pptx
+++ b/docs/project_progress/img/07/07_slides.pptx
@@ -6543,7 +6543,7 @@
         </p:nvGraphicFramePr>
         <p:xfrm>
           <a:off x="457200" y="1097280"/>
-          <a:ext cx="11277293" cy="2560320"/>
+          <a:ext cx="11277293" cy="1828800"/>
         </p:xfrm>
         <a:graphic>
           <a:graphicData uri="http://schemas.openxmlformats.org/drawingml/2006/table">
@@ -6552,9 +6552,9 @@
                 <a:tableStyleId>{5C22544A-7EE6-4342-B048-85BDC9FD1C3A}</a:tableStyleId>
               </a:tblPr>
               <a:tblGrid>
-                <a:gridCol w="1253032"/>
-                <a:gridCol w="6265163"/>
-                <a:gridCol w="3759098"/>
+                <a:gridCol w="1650335"/>
+                <a:gridCol w="6051231"/>
+                <a:gridCol w="3575727"/>
               </a:tblGrid>
               <a:tr h="365760">
                 <a:tc>
@@ -6563,7 +6563,7 @@
                     <a:lstStyle/>
                     <a:p>
                       <a:r>
-                        <a:rPr sz="1350" b="1">
+                        <a:rPr sz="1450" b="1">
                           <a:solidFill>
                             <a:srgbClr val="FFFFFF"/>
                           </a:solidFill>
@@ -6609,7 +6609,7 @@
                     <a:lstStyle/>
                     <a:p>
                       <a:r>
-                        <a:rPr sz="1350" b="1">
+                        <a:rPr sz="1450" b="1">
                           <a:solidFill>
                             <a:srgbClr val="FFFFFF"/>
                           </a:solidFill>
@@ -6655,7 +6655,7 @@
                     <a:lstStyle/>
                     <a:p>
                       <a:r>
-                        <a:rPr sz="1350" b="1">
+                        <a:rPr sz="1450" b="1">
                           <a:solidFill>
                             <a:srgbClr val="FFFFFF"/>
                           </a:solidFill>
@@ -6703,7 +6703,7 @@
                     <a:lstStyle/>
                     <a:p>
                       <a:r>
-                        <a:rPr sz="1300" b="1">
+                        <a:rPr sz="1400" b="1">
                           <a:solidFill>
                             <a:srgbClr val="1F2328"/>
                           </a:solidFill>
@@ -6749,13 +6749,13 @@
                     <a:lstStyle/>
                     <a:p>
                       <a:r>
-                        <a:rPr sz="1300" b="0">
+                        <a:rPr sz="1400" b="0">
                           <a:solidFill>
                             <a:srgbClr val="1F2328"/>
                           </a:solidFill>
                           <a:latin typeface="Malgun Gothic"/>
                         </a:rPr>
-                        <a:t>알람을 10초마다 조회해 Align Fail만 골라 발동. 접속 후 화면에서 라이브 영역·촬영 모드·타인 점유를 읽음</a:t>
+                        <a:t>알람을 10초마다 조회해 Align Fail만 발동, 접속 후 화면 상태를 읽음</a:t>
                       </a:r>
                     </a:p>
                   </a:txBody>
@@ -6795,13 +6795,13 @@
                     <a:lstStyle/>
                     <a:p>
                       <a:r>
-                        <a:rPr sz="1300" b="0">
+                        <a:rPr sz="1400" b="0">
                           <a:solidFill>
                             <a:srgbClr val="1F2328"/>
                           </a:solidFill>
                           <a:latin typeface="Malgun Gothic"/>
                         </a:rPr>
-                        <a:t>24시간 모니터 감시가 자동화되고 화면 상태를 시스템이 먼저 읽음</a:t>
+                        <a:t>24시간 모니터 감시 자동화</a:t>
                       </a:r>
                     </a:p>
                   </a:txBody>
@@ -6843,7 +6843,7 @@
                     <a:lstStyle/>
                     <a:p>
                       <a:r>
-                        <a:rPr sz="1300" b="1">
+                        <a:rPr sz="1400" b="1">
                           <a:solidFill>
                             <a:srgbClr val="1F2328"/>
                           </a:solidFill>
@@ -6889,13 +6889,13 @@
                     <a:lstStyle/>
                     <a:p>
                       <a:r>
-                        <a:rPr sz="1300" b="0">
+                        <a:rPr sz="1400" b="0">
                           <a:solidFill>
                             <a:srgbClr val="1F2328"/>
                           </a:solidFill>
                           <a:latin typeface="Malgun Gothic"/>
                         </a:rPr>
-                        <a:t>RCS 접속 → 녹화 → 최근 성공 사례 기준으로 위치 계산 → 재정렬 → 확정 → 측정 재개 감시 → 종료</a:t>
+                        <a:t>RCS 접속 → 녹화 → 성공 사례 기준 재정렬 → 확정 → 종료</a:t>
                       </a:r>
                     </a:p>
                   </a:txBody>
@@ -6935,7 +6935,7 @@
                     <a:lstStyle/>
                     <a:p>
                       <a:r>
-                        <a:rPr sz="1300" b="0">
+                        <a:rPr sz="1400" b="0">
                           <a:solidFill>
                             <a:srgbClr val="1F2328"/>
                           </a:solidFill>
@@ -6983,13 +6983,13 @@
                     <a:lstStyle/>
                     <a:p>
                       <a:r>
-                        <a:rPr sz="1300" b="1">
+                        <a:rPr sz="1400" b="1">
                           <a:solidFill>
                             <a:srgbClr val="1F2328"/>
                           </a:solidFill>
                           <a:latin typeface="Malgun Gothic"/>
                         </a:rPr>
-                        <a:t>판단 지원</a:t>
+                        <a:t>이상치 필터·예외 알림</a:t>
                       </a:r>
                     </a:p>
                   </a:txBody>
@@ -7029,13 +7029,13 @@
                     <a:lstStyle/>
                     <a:p>
                       <a:r>
-                        <a:rPr sz="1300" b="0">
+                        <a:rPr sz="1400" b="0">
                           <a:solidFill>
                             <a:srgbClr val="1F2328"/>
                           </a:solidFill>
                           <a:latin typeface="Malgun Gothic"/>
                         </a:rPr>
-                        <a:t>헷갈리는 Align Key Recipe를 재등록 검토 후보로 제시, 대응 기록의 실패 분포 집계</a:t>
+                        <a:t>확인 안 되면 클릭·보정 보류, 원인·요구 행동을 담아 담당자에게 큐브 알림</a:t>
                       </a:r>
                     </a:p>
                   </a:txBody>
@@ -7075,13 +7075,13 @@
                     <a:lstStyle/>
                     <a:p>
                       <a:r>
-                        <a:rPr sz="1300" b="0">
+                        <a:rPr sz="1400" b="0">
                           <a:solidFill>
                             <a:srgbClr val="1F2328"/>
                           </a:solidFill>
                           <a:latin typeface="Malgun Gothic"/>
                         </a:rPr>
-                        <a:t>"무엇을 먼저 고칠지"를 감이 아니라 데이터로</a:t>
+                        <a:t>불확실한 조작은 하지 않고 담당자는 예외만 판단</a:t>
                       </a:r>
                     </a:p>
                   </a:txBody>
@@ -7123,13 +7123,13 @@
                     <a:lstStyle/>
                     <a:p>
                       <a:r>
-                        <a:rPr sz="1300" b="1">
+                        <a:rPr sz="1400" b="1">
                           <a:solidFill>
                             <a:srgbClr val="1F2328"/>
                           </a:solidFill>
                           <a:latin typeface="Malgun Gothic"/>
                         </a:rPr>
-                        <a:t>이상치 필터</a:t>
+                        <a:t>기록·자산화</a:t>
                       </a:r>
                     </a:p>
                   </a:txBody>
@@ -7169,13 +7169,13 @@
                     <a:lstStyle/>
                     <a:p>
                       <a:r>
-                        <a:rPr sz="1300" b="0">
+                        <a:rPr sz="1400" b="0">
                           <a:solidFill>
                             <a:srgbClr val="1F2328"/>
                           </a:solidFill>
                           <a:latin typeface="Malgun Gothic"/>
                         </a:rPr>
-                        <a:t>버튼을 못 찾거나 라벨이 다르거나 모드를 못 읽으면 클릭·보정 보류. 보정 뒤 오측이 보이면 후속 측정 중단</a:t>
+                        <a:t>대응 1건 = 기록 1줄, 실패 화면·녹화 보존, 재등록 검토 후보 산출</a:t>
                       </a:r>
                     </a:p>
                   </a:txBody>
@@ -7215,293 +7215,13 @@
                     <a:lstStyle/>
                     <a:p>
                       <a:r>
-                        <a:rPr sz="1300" b="0">
+                        <a:rPr sz="1400" b="0">
                           <a:solidFill>
                             <a:srgbClr val="1F2328"/>
                           </a:solidFill>
                           <a:latin typeface="Malgun Gothic"/>
                         </a:rPr>
-                        <a:t>불확실한 조작은 하지 않음</a:t>
-                      </a:r>
-                    </a:p>
-                  </a:txBody>
-                  <a:tcPr marL="88900" marR="88900" marT="63500" marB="63500" anchor="ctr">
-                    <a:lnL w="9525" cap="flat" cmpd="sng" algn="ctr">
-                      <a:solidFill>
-                        <a:srgbClr val="D0D7DE"/>
-                      </a:solidFill>
-                      <a:prstDash val="solid"/>
-                    </a:lnL>
-                    <a:lnR w="9525" cap="flat" cmpd="sng" algn="ctr">
-                      <a:solidFill>
-                        <a:srgbClr val="D0D7DE"/>
-                      </a:solidFill>
-                      <a:prstDash val="solid"/>
-                    </a:lnR>
-                    <a:lnT w="9525" cap="flat" cmpd="sng" algn="ctr">
-                      <a:solidFill>
-                        <a:srgbClr val="D0D7DE"/>
-                      </a:solidFill>
-                      <a:prstDash val="solid"/>
-                    </a:lnT>
-                    <a:lnB w="9525" cap="flat" cmpd="sng" algn="ctr">
-                      <a:solidFill>
-                        <a:srgbClr val="D0D7DE"/>
-                      </a:solidFill>
-                      <a:prstDash val="solid"/>
-                    </a:lnB>
-                    <a:solidFill>
-                      <a:srgbClr val="F6F8FA"/>
-                    </a:solidFill>
-                  </a:tcPr>
-                </a:tc>
-              </a:tr>
-              <a:tr h="365760">
-                <a:tc>
-                  <a:txBody>
-                    <a:bodyPr wrap="square"/>
-                    <a:lstStyle/>
-                    <a:p>
-                      <a:r>
-                        <a:rPr sz="1300" b="1">
-                          <a:solidFill>
-                            <a:srgbClr val="1F2328"/>
-                          </a:solidFill>
-                          <a:latin typeface="Malgun Gothic"/>
-                        </a:rPr>
-                        <a:t>예외 알림</a:t>
-                      </a:r>
-                    </a:p>
-                  </a:txBody>
-                  <a:tcPr marL="88900" marR="88900" marT="63500" marB="63500" anchor="ctr">
-                    <a:lnL w="9525" cap="flat" cmpd="sng" algn="ctr">
-                      <a:solidFill>
-                        <a:srgbClr val="D0D7DE"/>
-                      </a:solidFill>
-                      <a:prstDash val="solid"/>
-                    </a:lnL>
-                    <a:lnR w="9525" cap="flat" cmpd="sng" algn="ctr">
-                      <a:solidFill>
-                        <a:srgbClr val="D0D7DE"/>
-                      </a:solidFill>
-                      <a:prstDash val="solid"/>
-                    </a:lnR>
-                    <a:lnT w="9525" cap="flat" cmpd="sng" algn="ctr">
-                      <a:solidFill>
-                        <a:srgbClr val="D0D7DE"/>
-                      </a:solidFill>
-                      <a:prstDash val="solid"/>
-                    </a:lnT>
-                    <a:lnB w="9525" cap="flat" cmpd="sng" algn="ctr">
-                      <a:solidFill>
-                        <a:srgbClr val="D0D7DE"/>
-                      </a:solidFill>
-                      <a:prstDash val="solid"/>
-                    </a:lnB>
-                    <a:solidFill>
-                      <a:srgbClr val="FFFFFF"/>
-                    </a:solidFill>
-                  </a:tcPr>
-                </a:tc>
-                <a:tc>
-                  <a:txBody>
-                    <a:bodyPr wrap="square"/>
-                    <a:lstStyle/>
-                    <a:p>
-                      <a:r>
-                        <a:rPr sz="1300" b="0">
-                          <a:solidFill>
-                            <a:srgbClr val="1F2328"/>
-                          </a:solidFill>
-                          <a:latin typeface="Malgun Gothic"/>
-                        </a:rPr>
-                        <a:t>AI가 진행 못하면 원인·요구 행동을 담아 담당자에게 큐브 알림. 설정 문제와 재등록 검토를 구분</a:t>
-                      </a:r>
-                    </a:p>
-                  </a:txBody>
-                  <a:tcPr marL="88900" marR="88900" marT="63500" marB="63500" anchor="ctr">
-                    <a:lnL w="9525" cap="flat" cmpd="sng" algn="ctr">
-                      <a:solidFill>
-                        <a:srgbClr val="D0D7DE"/>
-                      </a:solidFill>
-                      <a:prstDash val="solid"/>
-                    </a:lnL>
-                    <a:lnR w="9525" cap="flat" cmpd="sng" algn="ctr">
-                      <a:solidFill>
-                        <a:srgbClr val="D0D7DE"/>
-                      </a:solidFill>
-                      <a:prstDash val="solid"/>
-                    </a:lnR>
-                    <a:lnT w="9525" cap="flat" cmpd="sng" algn="ctr">
-                      <a:solidFill>
-                        <a:srgbClr val="D0D7DE"/>
-                      </a:solidFill>
-                      <a:prstDash val="solid"/>
-                    </a:lnT>
-                    <a:lnB w="9525" cap="flat" cmpd="sng" algn="ctr">
-                      <a:solidFill>
-                        <a:srgbClr val="D0D7DE"/>
-                      </a:solidFill>
-                      <a:prstDash val="solid"/>
-                    </a:lnB>
-                    <a:solidFill>
-                      <a:srgbClr val="FFFFFF"/>
-                    </a:solidFill>
-                  </a:tcPr>
-                </a:tc>
-                <a:tc>
-                  <a:txBody>
-                    <a:bodyPr wrap="square"/>
-                    <a:lstStyle/>
-                    <a:p>
-                      <a:r>
-                        <a:rPr sz="1300" b="0">
-                          <a:solidFill>
-                            <a:srgbClr val="1F2328"/>
-                          </a:solidFill>
-                          <a:latin typeface="Malgun Gothic"/>
-                        </a:rPr>
-                        <a:t>담당자는 예외만 판단, 다음 행동의 근거 확보</a:t>
-                      </a:r>
-                    </a:p>
-                  </a:txBody>
-                  <a:tcPr marL="88900" marR="88900" marT="63500" marB="63500" anchor="ctr">
-                    <a:lnL w="9525" cap="flat" cmpd="sng" algn="ctr">
-                      <a:solidFill>
-                        <a:srgbClr val="D0D7DE"/>
-                      </a:solidFill>
-                      <a:prstDash val="solid"/>
-                    </a:lnL>
-                    <a:lnR w="9525" cap="flat" cmpd="sng" algn="ctr">
-                      <a:solidFill>
-                        <a:srgbClr val="D0D7DE"/>
-                      </a:solidFill>
-                      <a:prstDash val="solid"/>
-                    </a:lnR>
-                    <a:lnT w="9525" cap="flat" cmpd="sng" algn="ctr">
-                      <a:solidFill>
-                        <a:srgbClr val="D0D7DE"/>
-                      </a:solidFill>
-                      <a:prstDash val="solid"/>
-                    </a:lnT>
-                    <a:lnB w="9525" cap="flat" cmpd="sng" algn="ctr">
-                      <a:solidFill>
-                        <a:srgbClr val="D0D7DE"/>
-                      </a:solidFill>
-                      <a:prstDash val="solid"/>
-                    </a:lnB>
-                    <a:solidFill>
-                      <a:srgbClr val="FFFFFF"/>
-                    </a:solidFill>
-                  </a:tcPr>
-                </a:tc>
-              </a:tr>
-              <a:tr h="365760">
-                <a:tc>
-                  <a:txBody>
-                    <a:bodyPr wrap="square"/>
-                    <a:lstStyle/>
-                    <a:p>
-                      <a:r>
-                        <a:rPr sz="1300" b="1">
-                          <a:solidFill>
-                            <a:srgbClr val="1F2328"/>
-                          </a:solidFill>
-                          <a:latin typeface="Malgun Gothic"/>
-                        </a:rPr>
-                        <a:t>기록·자산화</a:t>
-                      </a:r>
-                    </a:p>
-                  </a:txBody>
-                  <a:tcPr marL="88900" marR="88900" marT="63500" marB="63500" anchor="ctr">
-                    <a:lnL w="9525" cap="flat" cmpd="sng" algn="ctr">
-                      <a:solidFill>
-                        <a:srgbClr val="D0D7DE"/>
-                      </a:solidFill>
-                      <a:prstDash val="solid"/>
-                    </a:lnL>
-                    <a:lnR w="9525" cap="flat" cmpd="sng" algn="ctr">
-                      <a:solidFill>
-                        <a:srgbClr val="D0D7DE"/>
-                      </a:solidFill>
-                      <a:prstDash val="solid"/>
-                    </a:lnR>
-                    <a:lnT w="9525" cap="flat" cmpd="sng" algn="ctr">
-                      <a:solidFill>
-                        <a:srgbClr val="D0D7DE"/>
-                      </a:solidFill>
-                      <a:prstDash val="solid"/>
-                    </a:lnT>
-                    <a:lnB w="9525" cap="flat" cmpd="sng" algn="ctr">
-                      <a:solidFill>
-                        <a:srgbClr val="D0D7DE"/>
-                      </a:solidFill>
-                      <a:prstDash val="solid"/>
-                    </a:lnB>
-                    <a:solidFill>
-                      <a:srgbClr val="F6F8FA"/>
-                    </a:solidFill>
-                  </a:tcPr>
-                </a:tc>
-                <a:tc>
-                  <a:txBody>
-                    <a:bodyPr wrap="square"/>
-                    <a:lstStyle/>
-                    <a:p>
-                      <a:r>
-                        <a:rPr sz="1300" b="0">
-                          <a:solidFill>
-                            <a:srgbClr val="1F2328"/>
-                          </a:solidFill>
-                          <a:latin typeface="Malgun Gothic"/>
-                        </a:rPr>
-                        <a:t>대응 1건 = 기록 1줄, 실패 화면·녹화 보존. 수동 조작 녹화 → 절차서 변환 경로</a:t>
-                      </a:r>
-                    </a:p>
-                  </a:txBody>
-                  <a:tcPr marL="88900" marR="88900" marT="63500" marB="63500" anchor="ctr">
-                    <a:lnL w="9525" cap="flat" cmpd="sng" algn="ctr">
-                      <a:solidFill>
-                        <a:srgbClr val="D0D7DE"/>
-                      </a:solidFill>
-                      <a:prstDash val="solid"/>
-                    </a:lnL>
-                    <a:lnR w="9525" cap="flat" cmpd="sng" algn="ctr">
-                      <a:solidFill>
-                        <a:srgbClr val="D0D7DE"/>
-                      </a:solidFill>
-                      <a:prstDash val="solid"/>
-                    </a:lnR>
-                    <a:lnT w="9525" cap="flat" cmpd="sng" algn="ctr">
-                      <a:solidFill>
-                        <a:srgbClr val="D0D7DE"/>
-                      </a:solidFill>
-                      <a:prstDash val="solid"/>
-                    </a:lnT>
-                    <a:lnB w="9525" cap="flat" cmpd="sng" algn="ctr">
-                      <a:solidFill>
-                        <a:srgbClr val="D0D7DE"/>
-                      </a:solidFill>
-                      <a:prstDash val="solid"/>
-                    </a:lnB>
-                    <a:solidFill>
-                      <a:srgbClr val="F6F8FA"/>
-                    </a:solidFill>
-                  </a:tcPr>
-                </a:tc>
-                <a:tc>
-                  <a:txBody>
-                    <a:bodyPr wrap="square"/>
-                    <a:lstStyle/>
-                    <a:p>
-                      <a:r>
-                        <a:rPr sz="1300" b="0">
-                          <a:solidFill>
-                            <a:srgbClr val="1F2328"/>
-                          </a:solidFill>
-                          <a:latin typeface="Malgun Gothic"/>
-                        </a:rPr>
-                        <a:t>개인 경험이 기록으로 남고 개선 근거가 쌓임</a:t>
+                        <a:t>개선 순서를 감이 아니라 데이터로</a:t>
                       </a:r>
                     </a:p>
                   </a:txBody>

--- a/docs/project_progress/img/07/07_slides.pptx
+++ b/docs/project_progress/img/07/07_slides.pptx
@@ -6543,7 +6543,7 @@
         </p:nvGraphicFramePr>
         <p:xfrm>
           <a:off x="457200" y="1097280"/>
-          <a:ext cx="11277293" cy="1828800"/>
+          <a:ext cx="11277294" cy="1828800"/>
         </p:xfrm>
         <a:graphic>
           <a:graphicData uri="http://schemas.openxmlformats.org/drawingml/2006/table">
@@ -6552,9 +6552,9 @@
                 <a:tableStyleId>{5C22544A-7EE6-4342-B048-85BDC9FD1C3A}</a:tableStyleId>
               </a:tblPr>
               <a:tblGrid>
-                <a:gridCol w="1650335"/>
-                <a:gridCol w="6051231"/>
-                <a:gridCol w="3575727"/>
+                <a:gridCol w="1380893"/>
+                <a:gridCol w="6904466"/>
+                <a:gridCol w="2991935"/>
               </a:tblGrid>
               <a:tr h="365760">
                 <a:tc>
@@ -7035,7 +7035,7 @@
                           </a:solidFill>
                           <a:latin typeface="Malgun Gothic"/>
                         </a:rPr>
-                        <a:t>확인 안 되면 클릭·보정 보류, 원인·요구 행동을 담아 담당자에게 큐브 알림</a:t>
+                        <a:t>확인 안 되면 클릭·보정 보류, 보정 뒤 오측이 보이면 후속 측정 중단, 원인·요구 행동을 담아 담당자에게 큐브 알림</a:t>
                       </a:r>
                     </a:p>
                   </a:txBody>
@@ -15603,7 +15603,7 @@
         </p:nvGraphicFramePr>
         <p:xfrm>
           <a:off x="457200" y="1097280"/>
-          <a:ext cx="11277294" cy="1828800"/>
+          <a:ext cx="11277293" cy="1828800"/>
         </p:xfrm>
         <a:graphic>
           <a:graphicData uri="http://schemas.openxmlformats.org/drawingml/2006/table">
@@ -15612,9 +15612,9 @@
                 <a:tableStyleId>{5C22544A-7EE6-4342-B048-85BDC9FD1C3A}</a:tableStyleId>
               </a:tblPr>
               <a:tblGrid>
-                <a:gridCol w="2218484"/>
-                <a:gridCol w="3512600"/>
-                <a:gridCol w="5546210"/>
+                <a:gridCol w="1650335"/>
+                <a:gridCol w="2613031"/>
+                <a:gridCol w="7013927"/>
               </a:tblGrid>
               <a:tr h="365760">
                 <a:tc>
@@ -16141,7 +16141,7 @@
                           </a:solidFill>
                           <a:latin typeface="Malgun Gothic"/>
                         </a:rPr>
-                        <a:t>헷갈리는 Align Key Recipe 목록 자동 산출</a:t>
+                        <a:t>헷갈리는 Align Key Recipe 목록 자동 산출(오프라인 평가 기반, 현업 대조 중)</a:t>
                       </a:r>
                     </a:p>
                   </a:txBody>

--- a/docs/project_progress/img/07/07_slides.pptx
+++ b/docs/project_progress/img/07/07_slides.pptx
@@ -10872,8 +10872,8 @@
         </p:nvSpPr>
         <p:spPr>
           <a:xfrm>
-            <a:off x="8417821" y="5771241"/>
-            <a:ext cx="3354176" cy="177772"/>
+            <a:off x="8438455" y="5771241"/>
+            <a:ext cx="3312908" cy="177772"/>
           </a:xfrm>
           <a:prstGeom prst="rect">
             <a:avLst/>
@@ -10894,7 +10894,7 @@
                 </a:solidFill>
                 <a:latin typeface="Malgun Gothic"/>
               </a:rPr>
-              <a:t>≈ 웨이퍼 100장/주 · Capex 약 4~5억 원</a:t>
+              <a:t>≈ Wafer 100장/주 · Capex 약 4~5억 원</a:t>
             </a:r>
           </a:p>
         </p:txBody>
@@ -13080,7 +13080,7 @@
                           </a:solidFill>
                           <a:latin typeface="Malgun Gothic"/>
                         </a:rPr>
-                        <a:t>WAFER 약 100장/주</a:t>
+                        <a:t>Wafer 약 100장/주</a:t>
                       </a:r>
                       <a:r>
                         <a:rPr sz="1400" b="0">
@@ -15412,7 +15412,7 @@
                           </a:solidFill>
                           <a:latin typeface="Malgun Gothic"/>
                         </a:rPr>
-                        <a:t> = WAFER 약 100장/주 = 장비 약 0.2대(Capex 약 4~5억 원)</a:t>
+                        <a:t> = Wafer 약 100장/주 = 장비 약 0.2대(Capex 약 4~5억 원)</a:t>
                       </a:r>
                     </a:p>
                   </a:txBody>

--- a/docs/project_progress/img/07/07_slides.pptx
+++ b/docs/project_progress/img/07/07_slides.pptx
@@ -5381,8 +5381,8 @@
         </p:nvSpPr>
         <p:spPr>
           <a:xfrm>
-            <a:off x="9860695" y="4367477"/>
-            <a:ext cx="2373129" cy="195549"/>
+            <a:off x="10473532" y="4367477"/>
+            <a:ext cx="1147454" cy="195549"/>
           </a:xfrm>
           <a:prstGeom prst="rect">
             <a:avLst/>
@@ -5403,7 +5403,7 @@
                 </a:solidFill>
                 <a:latin typeface="Malgun Gothic"/>
               </a:rPr>
-              <a:t>감지~재조정 · 실알람 3건</a:t>
+              <a:t>감지~재조정</a:t>
             </a:r>
           </a:p>
         </p:txBody>

--- a/docs/project_progress/img/07/07_slides.pptx
+++ b/docs/project_progress/img/07/07_slides.pptx
@@ -8021,8 +8021,8 @@
         </p:nvSpPr>
         <p:spPr>
           <a:xfrm>
-            <a:off x="3030568" y="4075423"/>
-            <a:ext cx="3208403" cy="195549"/>
+            <a:off x="3071423" y="4075423"/>
+            <a:ext cx="3126692" cy="195549"/>
           </a:xfrm>
           <a:prstGeom prst="rect">
             <a:avLst/>
@@ -8043,7 +8043,7 @@
                 </a:solidFill>
                 <a:latin typeface="Malgun Gothic"/>
               </a:rPr>
-              <a:t>fail-closed : 미확인 = 클릭 금지</a:t>
+              <a:t>사내 소형 AI 모델 · fail-closed</a:t>
             </a:r>
           </a:p>
         </p:txBody>
@@ -13550,9 +13550,9 @@
                 <a:tableStyleId>{5C22544A-7EE6-4342-B048-85BDC9FD1C3A}</a:tableStyleId>
               </a:tblPr>
               <a:tblGrid>
-                <a:gridCol w="2985166"/>
-                <a:gridCol w="1990110"/>
-                <a:gridCol w="6302017"/>
+                <a:gridCol w="2899875"/>
+                <a:gridCol w="1933250"/>
+                <a:gridCol w="6444168"/>
               </a:tblGrid>
               <a:tr h="365760">
                 <a:tc>
@@ -13939,7 +13939,7 @@
                           </a:solidFill>
                           <a:latin typeface="Malgun Gothic"/>
                         </a:rPr>
-                        <a:t>사내 HCP 에 VLM 1종 + OCR 1종 상시 운영</a:t>
+                        <a:t>사내 HCP 에 AI 모델 2종(VLM 1종 + OCR 1종) 상시 운영</a:t>
                       </a:r>
                     </a:p>
                   </a:txBody>

--- a/docs/project_progress/img/07/07_slides.pptx
+++ b/docs/project_progress/img/07/07_slides.pptx
@@ -9748,8 +9748,8 @@
         </p:nvSpPr>
         <p:spPr>
           <a:xfrm>
-            <a:off x="842194" y="5771241"/>
-            <a:ext cx="2759910" cy="177772"/>
+            <a:off x="805053" y="5771241"/>
+            <a:ext cx="2834193" cy="177772"/>
           </a:xfrm>
           <a:prstGeom prst="rect">
             <a:avLst/>
@@ -9770,7 +9770,7 @@
                 </a:solidFill>
                 <a:latin typeface="Malgun Gothic"/>
               </a:rPr>
-              <a:t>감지 → 위치 재조정 · 실알람 3건</a:t>
+              <a:t>감지 → 위치 재조정 · 실장비 실측</a:t>
             </a:r>
           </a:p>
         </p:txBody>
@@ -14219,7 +14219,7 @@
                           </a:solidFill>
                           <a:latin typeface="Malgun Gothic"/>
                         </a:rPr>
-                        <a:t>실알람 3건 감지~재조정 1분 미만. 기록은 현장 적재 확인 중</a:t>
+                        <a:t>실장비에서 감지~재조정 1분 미만. 기록은 현장 적재 확인 중</a:t>
                       </a:r>
                     </a:p>
                   </a:txBody>
@@ -14855,7 +14855,7 @@
                           </a:solidFill>
                           <a:latin typeface="Malgun Gothic"/>
                         </a:rPr>
-                        <a:t>실알람 3건 </a:t>
+                        <a:t>실장비 실측 </a:t>
                       </a:r>
                       <a:r>
                         <a:rPr sz="1400" b="1">

--- a/docs/project_progress/img/07/07_slides.pptx
+++ b/docs/project_progress/img/07/07_slides.pptx
@@ -4468,7 +4468,7 @@
         <p:spPr>
           <a:xfrm>
             <a:off x="406336" y="4259544"/>
-            <a:ext cx="1220087" cy="195549"/>
+            <a:ext cx="1120217" cy="195549"/>
           </a:xfrm>
           <a:prstGeom prst="rect">
             <a:avLst/>
@@ -4489,7 +4489,7 @@
                 </a:solidFill>
                 <a:latin typeface="Malgun Gothic"/>
               </a:rPr>
-              <a:t>AI Agent 가</a:t>
+              <a:t>AI Agent가</a:t>
             </a:r>
           </a:p>
         </p:txBody>
@@ -5625,8 +5625,8 @@
         </p:nvSpPr>
         <p:spPr>
           <a:xfrm>
-            <a:off x="1986729" y="5160467"/>
-            <a:ext cx="1994601" cy="213326"/>
+            <a:off x="2041203" y="5160467"/>
+            <a:ext cx="1885653" cy="213326"/>
           </a:xfrm>
           <a:prstGeom prst="rect">
             <a:avLst/>
@@ -5647,7 +5647,7 @@
                 </a:solidFill>
                 <a:latin typeface="Malgun Gothic"/>
               </a:rPr>
-              <a:t>AI 가 처리 안될 때</a:t>
+              <a:t>AI가 처리 안될 때</a:t>
             </a:r>
           </a:p>
         </p:txBody>
@@ -5896,8 +5896,8 @@
         </p:nvSpPr>
         <p:spPr>
           <a:xfrm>
-            <a:off x="6092627" y="5416331"/>
-            <a:ext cx="1807941" cy="159994"/>
+            <a:off x="6133483" y="5416331"/>
+            <a:ext cx="1726229" cy="159994"/>
           </a:xfrm>
           <a:prstGeom prst="rect">
             <a:avLst/>
@@ -5918,7 +5918,7 @@
                 </a:solidFill>
                 <a:latin typeface="Malgun Gothic"/>
               </a:rPr>
-              <a:t>수동 정렬 · AI 는 관전</a:t>
+              <a:t>수동 정렬 · AI는 관전</a:t>
             </a:r>
           </a:p>
         </p:txBody>
@@ -6340,8 +6340,8 @@
         </p:nvSpPr>
         <p:spPr>
           <a:xfrm>
-            <a:off x="812100" y="5808700"/>
-            <a:ext cx="10362710" cy="195549"/>
+            <a:off x="862035" y="5808700"/>
+            <a:ext cx="10262841" cy="195549"/>
           </a:xfrm>
           <a:prstGeom prst="rect">
             <a:avLst/>
@@ -6362,7 +6362,7 @@
                 </a:solidFill>
                 <a:latin typeface="Malgun Gothic"/>
               </a:rPr>
-              <a:t>안전 원칙 : 확인 안 되면 VLM 이 확정하지 않고 엔지니어에게 인폼 및 작업 요청 (녹화를 위해 추후 개선 루프 발동)</a:t>
+              <a:t>안전 원칙 : 확인 안 되면 VLM이 확정하지 않고 엔지니어에게 인폼 및 작업 요청 (녹화를 위해 추후 개선 루프 발동)</a:t>
             </a:r>
           </a:p>
         </p:txBody>
@@ -6484,7 +6484,7 @@
                 </a:solidFill>
                 <a:latin typeface="Malgun Gothic"/>
               </a:rPr>
-              <a:t>4.3 Operation Improvement with AI</a:t>
+              <a:t>5. Operation Improvement with AI</a:t>
             </a:r>
           </a:p>
         </p:txBody>
@@ -6755,7 +6755,7 @@
                           </a:solidFill>
                           <a:latin typeface="Malgun Gothic"/>
                         </a:rPr>
-                        <a:t>알람을 10초마다 조회해 Align Fail만 발동, 접속 후 화면 상태를 읽음</a:t>
+                        <a:t>알람을 10초마다 조회해 Align Fail에만 신규 발생 시 1회 발동, 접속 후 화면 상태를 읽음</a:t>
                       </a:r>
                     </a:p>
                   </a:txBody>
@@ -7321,8 +7321,8 @@
         </p:nvSpPr>
         <p:spPr>
           <a:xfrm>
-            <a:off x="318846" y="551093"/>
-            <a:ext cx="11552386" cy="213326"/>
+            <a:off x="591218" y="551093"/>
+            <a:ext cx="11007642" cy="213326"/>
           </a:xfrm>
           <a:prstGeom prst="rect">
             <a:avLst/>
@@ -7343,7 +7343,7 @@
                 </a:solidFill>
                 <a:latin typeface="Malgun Gothic"/>
               </a:rPr>
-              <a:t>한 모델에 다 맡기지 않는다 · UI 는 VLM 이 찍고 OCR 이 확인 · 좌표는 CV 만 결정 · AI 가 못 푸는 것은 현업 담당자</a:t>
+              <a:t>한 모델에 다 맡기지 않는다 · UI는 VLM이 찍고 OCR이 확인 · 좌표는 CV만 결정 · AI가 못 푸는 것은 현업 담당자</a:t>
             </a:r>
           </a:p>
         </p:txBody>
@@ -7357,7 +7357,7 @@
         <p:spPr>
           <a:xfrm>
             <a:off x="380940" y="1015840"/>
-            <a:ext cx="2666580" cy="3682420"/>
+            <a:ext cx="2666580" cy="3428460"/>
           </a:xfrm>
           <a:prstGeom prst="roundRect">
             <a:avLst>
@@ -7707,7 +7707,7 @@
         <p:spPr>
           <a:xfrm>
             <a:off x="3301480" y="1015840"/>
-            <a:ext cx="2666580" cy="3682420"/>
+            <a:ext cx="2666580" cy="3428460"/>
           </a:xfrm>
           <a:prstGeom prst="roundRect">
             <a:avLst>
@@ -8057,7 +8057,7 @@
         <p:spPr>
           <a:xfrm>
             <a:off x="6222020" y="1015840"/>
-            <a:ext cx="2666580" cy="3682420"/>
+            <a:ext cx="2666580" cy="3428460"/>
           </a:xfrm>
           <a:prstGeom prst="roundRect">
             <a:avLst>
@@ -8371,8 +8371,8 @@
         </p:nvSpPr>
         <p:spPr>
           <a:xfrm>
-            <a:off x="6459536" y="4075423"/>
-            <a:ext cx="2191547" cy="195549"/>
+            <a:off x="6509470" y="4075423"/>
+            <a:ext cx="2091678" cy="195549"/>
           </a:xfrm>
           <a:prstGeom prst="rect">
             <a:avLst/>
@@ -8393,7 +8393,7 @@
                 </a:solidFill>
                 <a:latin typeface="Malgun Gothic"/>
               </a:rPr>
-              <a:t>정렬 좌표는 CV 만 결정</a:t>
+              <a:t>정렬 좌표는 CV만 결정</a:t>
             </a:r>
           </a:p>
         </p:txBody>
@@ -8407,7 +8407,7 @@
         <p:spPr>
           <a:xfrm>
             <a:off x="9142560" y="1015840"/>
-            <a:ext cx="2666580" cy="3682420"/>
+            <a:ext cx="2666580" cy="3428460"/>
           </a:xfrm>
           <a:prstGeom prst="roundRect">
             <a:avLst>
@@ -8535,8 +8535,8 @@
         </p:nvSpPr>
         <p:spPr>
           <a:xfrm>
-            <a:off x="9216843" y="1831686"/>
-            <a:ext cx="2518013" cy="266658"/>
+            <a:off x="9284936" y="1831686"/>
+            <a:ext cx="2381827" cy="266658"/>
           </a:xfrm>
           <a:prstGeom prst="rect">
             <a:avLst/>
@@ -8557,7 +8557,7 @@
                 </a:solidFill>
                 <a:latin typeface="Malgun Gothic"/>
               </a:rPr>
-              <a:t>"AI 가 못 푸는 것"</a:t>
+              <a:t>"AI가 못 푸는 것"</a:t>
             </a:r>
           </a:p>
         </p:txBody>
@@ -8721,8 +8721,8 @@
         </p:nvSpPr>
         <p:spPr>
           <a:xfrm>
-            <a:off x="9107703" y="4075423"/>
-            <a:ext cx="2736292" cy="195549"/>
+            <a:off x="9157638" y="4075423"/>
+            <a:ext cx="2636422" cy="195549"/>
           </a:xfrm>
           <a:prstGeom prst="rect">
             <a:avLst/>
@@ -8743,7 +8743,7 @@
                 </a:solidFill>
                 <a:latin typeface="Malgun Gothic"/>
               </a:rPr>
-              <a:t>담당자가 개입하면 AI 는 양보</a:t>
+              <a:t>담당자가 개입하면 AI는 양보</a:t>
             </a:r>
           </a:p>
         </p:txBody>
@@ -8951,14 +8951,14 @@
         <p:spPr>
           <a:xfrm>
             <a:off x="8888600.0" y="2984030.0"/>
-            <a:ext cx="126980.0" cy="0.0"/>
+            <a:ext cx="101584.0" cy="0.0"/>
           </a:xfrm>
           <a:prstGeom prst="line">
             <a:avLst/>
           </a:prstGeom>
-          <a:ln w="15240">
+          <a:ln w="38100">
             <a:solidFill>
-              <a:srgbClr val="6B7280"/>
+              <a:srgbClr val="7C3AED"/>
             </a:solidFill>
           </a:ln>
         </p:spPr>
@@ -8985,8 +8985,8 @@
         </p:nvSpPr>
         <p:spPr>
           <a:xfrm>
-            <a:off x="8990184" y="2926889"/>
-            <a:ext cx="152376" cy="114282"/>
+            <a:off x="8939392" y="2869748"/>
+            <a:ext cx="203168" cy="228564"/>
           </a:xfrm>
           <a:custGeom>
             <a:avLst/>
@@ -8995,22 +8995,22 @@
             <a:cxnLst/>
             <a:rect l="l" t="t" r="r" b="b"/>
             <a:pathLst>
-              <a:path w="24" h="18">
+              <a:path w="32" h="36">
                 <a:moveTo>
                   <a:pt x="0" y="0"/>
                 </a:moveTo>
                 <a:lnTo>
-                  <a:pt x="24" y="9"/>
+                  <a:pt x="32" y="18"/>
                 </a:lnTo>
                 <a:lnTo>
-                  <a:pt x="0" y="18"/>
+                  <a:pt x="0" y="36"/>
                 </a:lnTo>
                 <a:close/>
               </a:path>
             </a:pathLst>
           </a:custGeom>
           <a:solidFill>
-            <a:srgbClr val="6B7280"/>
+            <a:srgbClr val="7C3AED"/>
           </a:solidFill>
           <a:ln>
             <a:noFill/>
@@ -9041,14 +9041,62 @@
       </p:sp>
       <p:sp>
         <p:nvSpPr>
-          <p:cNvPr id="46" name="TextBox 45"/>
+          <p:cNvPr id="46" name="Rounded Rectangle 45"/>
+          <p:cNvSpPr/>
+          <p:nvPr/>
+        </p:nvSpPr>
+        <p:spPr>
+          <a:xfrm>
+            <a:off x="6222020" y="4520488"/>
+            <a:ext cx="5587120" cy="419034"/>
+          </a:xfrm>
+          <a:prstGeom prst="roundRect">
+            <a:avLst>
+              <a:gd name="adj" fmla="val 50000"/>
+            </a:avLst>
+          </a:prstGeom>
+          <a:solidFill>
+            <a:srgbClr val="F5F3FF"/>
+          </a:solidFill>
+          <a:ln w="19050">
+            <a:solidFill>
+              <a:srgbClr val="7C3AED"/>
+            </a:solidFill>
+          </a:ln>
+          <a:effectLst/>
+        </p:spPr>
+        <p:style>
+          <a:lnRef idx="1">
+            <a:schemeClr val="accent1"/>
+          </a:lnRef>
+          <a:fillRef idx="3">
+            <a:schemeClr val="accent1"/>
+          </a:fillRef>
+          <a:effectRef idx="2">
+            <a:schemeClr val="accent1"/>
+          </a:effectRef>
+          <a:fontRef idx="minor">
+            <a:schemeClr val="lt1"/>
+          </a:fontRef>
+        </p:style>
+        <p:txBody>
+          <a:bodyPr rtlCol="0" anchor="ctr"/>
+          <a:lstStyle/>
+          <a:p>
+            <a:pPr algn="ctr"/>
+          </a:p>
+        </p:txBody>
+      </p:sp>
+      <p:sp>
+        <p:nvSpPr>
+          <p:cNvPr id="47" name="TextBox 46"/>
           <p:cNvSpPr txBox="1"/>
           <p:nvPr/>
         </p:nvSpPr>
         <p:spPr>
           <a:xfrm>
-            <a:off x="8620449" y="2711657"/>
-            <a:ext cx="790260" cy="159994"/>
+            <a:off x="5853016" y="4613183"/>
+            <a:ext cx="6325127" cy="248880"/>
           </a:xfrm>
           <a:prstGeom prst="rect">
             <a:avLst/>
@@ -9063,20 +9111,20 @@
           <a:p>
             <a:pPr algn="ctr"/>
             <a:r>
-              <a:rPr sz="900" b="0">
+              <a:rPr sz="1400" b="1">
                 <a:solidFill>
-                  <a:srgbClr val="7C3AED"/>
+                  <a:srgbClr val="6D28D9"/>
                 </a:solidFill>
                 <a:latin typeface="Malgun Gothic"/>
               </a:rPr>
-              <a:t>큐브 알림</a:t>
+              <a:t>AI가 못 풀면 즉시 엔지니어에게 인계 - 큐브 알림 발송</a:t>
             </a:r>
           </a:p>
         </p:txBody>
       </p:sp>
       <p:sp>
         <p:nvSpPr>
-          <p:cNvPr id="47" name="Rounded Rectangle 46"/>
+          <p:cNvPr id="48" name="Rounded Rectangle 47"/>
           <p:cNvSpPr/>
           <p:nvPr/>
         </p:nvSpPr>
@@ -9122,7 +9170,7 @@
       </p:sp>
       <p:sp>
         <p:nvSpPr>
-          <p:cNvPr id="48" name="TextBox 47"/>
+          <p:cNvPr id="49" name="TextBox 48"/>
           <p:cNvSpPr txBox="1"/>
           <p:nvPr/>
         </p:nvSpPr>
@@ -9157,14 +9205,14 @@
       </p:sp>
       <p:sp>
         <p:nvSpPr>
-          <p:cNvPr id="49" name="TextBox 48"/>
+          <p:cNvPr id="50" name="TextBox 49"/>
           <p:cNvSpPr txBox="1"/>
           <p:nvPr/>
         </p:nvSpPr>
         <p:spPr>
           <a:xfrm>
-            <a:off x="-1439191" y="5414427"/>
-            <a:ext cx="15068462" cy="213326"/>
+            <a:off x="-1275768" y="5414427"/>
+            <a:ext cx="14741616" cy="213326"/>
           </a:xfrm>
           <a:prstGeom prst="rect">
             <a:avLst/>
@@ -9185,14 +9233,14 @@
                 </a:solidFill>
                 <a:latin typeface="Malgun Gothic"/>
               </a:rPr>
-              <a:t>① VLM 의 답이 낮은 CV 점수를 덮지 못한다   ② 확인 안 되면 VLM 이 확정하지 않고 엔지니어에게 인폼·작업 요청   ③ 되돌릴 수 없는 확정(OK) 은 담당자가</a:t>
+              <a:t>① VLM의 답이 낮은 CV 점수를 덮지 못한다   ② 확인 안 되면 VLM이 확정하지 않고 엔지니어에게 인폼·작업 요청   ③ 되돌릴 수 없는 확정(OK)은 담당자가</a:t>
             </a:r>
           </a:p>
         </p:txBody>
       </p:sp>
       <p:sp>
         <p:nvSpPr>
-          <p:cNvPr id="50" name="TextBox 49"/>
+          <p:cNvPr id="51" name="TextBox 50"/>
           <p:cNvSpPr txBox="1"/>
           <p:nvPr/>
         </p:nvSpPr>
@@ -11205,7 +11253,7 @@
                           </a:solidFill>
                           <a:latin typeface="Malgun Gothic"/>
                         </a:rPr>
-                        <a:t>10초 주기로 알람을 조회해 Align Fail만 선별, 신규 발생 시 1회 발동. 담당자에게 "AI 가 대응 시작" 큐브 알림</a:t>
+                        <a:t>10초 주기로 알람을 조회해 Align Fail만 선별, 신규 발생 시 1회 발동. 담당자에게 "AI가 대응 시작" 큐브 알림</a:t>
                       </a:r>
                     </a:p>
                   </a:txBody>
@@ -11923,8 +11971,8 @@
                 <a:tableStyleId>{5C22544A-7EE6-4342-B048-85BDC9FD1C3A}</a:tableStyleId>
               </a:tblPr>
               <a:tblGrid>
-                <a:gridCol w="4556482"/>
-                <a:gridCol w="6720812"/>
+                <a:gridCol w="4577911"/>
+                <a:gridCol w="6699383"/>
               </a:tblGrid>
               <a:tr h="365760">
                 <a:tc>
@@ -12033,7 +12081,7 @@
                           </a:solidFill>
                           <a:latin typeface="Malgun Gothic"/>
                         </a:rPr>
-                        <a:t>계측 화면이 표준 UI가 아니라 기존 자동화 도구가 버튼을 인식하지 못함</a:t>
+                        <a:t>계측 화면이 표준 UI가 아니어서 기존 자동화 도구가 버튼을 인식하지 못함</a:t>
                       </a:r>
                     </a:p>
                   </a:txBody>
@@ -12267,7 +12315,7 @@
                           </a:solidFill>
                           <a:latin typeface="Malgun Gothic"/>
                         </a:rPr>
-                        <a:t>촬영 모드별로 기준 이미지·평가 방식을 분리. 남는 실패는 Align Key 재등록 과제로 현업과 검토</a:t>
+                        <a:t>촬영 모드별로 기준 이미지·평가 방식을 분리. 남은 실패는 Align Key 재등록 과제로 분류해 현업과 검토</a:t>
                       </a:r>
                     </a:p>
                   </a:txBody>
@@ -12315,7 +12363,7 @@
                           </a:solidFill>
                           <a:latin typeface="Malgun Gothic"/>
                         </a:rPr>
-                        <a:t>실장비 클릭은 오동작 시 측정에 영향</a:t>
+                        <a:t>실장비 클릭 오동작 시 측정에 영향을 줌</a:t>
                       </a:r>
                     </a:p>
                   </a:txBody>
@@ -12506,7 +12554,7 @@
         </p:nvGraphicFramePr>
         <p:xfrm>
           <a:off x="457200" y="1097280"/>
-          <a:ext cx="11277294" cy="2194560"/>
+          <a:ext cx="11277293" cy="2194560"/>
         </p:xfrm>
         <a:graphic>
           <a:graphicData uri="http://schemas.openxmlformats.org/drawingml/2006/table">
@@ -12515,9 +12563,9 @@
                 <a:tableStyleId>{5C22544A-7EE6-4342-B048-85BDC9FD1C3A}</a:tableStyleId>
               </a:tblPr>
               <a:tblGrid>
-                <a:gridCol w="2506065"/>
-                <a:gridCol w="3303450"/>
-                <a:gridCol w="5467779"/>
+                <a:gridCol w="2408742"/>
+                <a:gridCol w="3613113"/>
+                <a:gridCol w="5255438"/>
               </a:tblGrid>
               <a:tr h="365760">
                 <a:tc>
@@ -13210,7 +13258,7 @@
                           </a:solidFill>
                           <a:latin typeface="Malgun Gothic"/>
                         </a:rPr>
-                        <a:t>인라인·엔지니어가 교대로 모니터 감시·접속·육안 탐색</a:t>
+                        <a:t>인라인 구성원·엔지니어가 교대로 모니터 감시·접속·육안 탐색</a:t>
                       </a:r>
                     </a:p>
                   </a:txBody>
@@ -13541,7 +13589,7 @@
         </p:nvGraphicFramePr>
         <p:xfrm>
           <a:off x="457200" y="1097280"/>
-          <a:ext cx="11277293" cy="2194560"/>
+          <a:ext cx="11277294" cy="2194560"/>
         </p:xfrm>
         <a:graphic>
           <a:graphicData uri="http://schemas.openxmlformats.org/drawingml/2006/table">
@@ -13550,9 +13598,9 @@
                 <a:tableStyleId>{5C22544A-7EE6-4342-B048-85BDC9FD1C3A}</a:tableStyleId>
               </a:tblPr>
               <a:tblGrid>
-                <a:gridCol w="2899875"/>
-                <a:gridCol w="1933250"/>
-                <a:gridCol w="6444168"/>
+                <a:gridCol w="2743125"/>
+                <a:gridCol w="2285938"/>
+                <a:gridCol w="6248231"/>
               </a:tblGrid>
               <a:tr h="365760">
                 <a:tc>
@@ -13753,7 +13801,7 @@
                           </a:solidFill>
                           <a:latin typeface="Malgun Gothic"/>
                         </a:rPr>
-                        <a:t>✅</a:t>
+                        <a:t>달성</a:t>
                       </a:r>
                     </a:p>
                   </a:txBody>
@@ -13799,7 +13847,7 @@
                           </a:solidFill>
                           <a:latin typeface="Malgun Gothic"/>
                         </a:rPr>
-                        <a:t>RCS 로그인~장비 접속~닫기 실장비 자동 수행, 클릭 성공률 99%</a:t>
+                        <a:t>RCS 로그인~장비 접속~닫기를 실장비에서 자동 수행, 클릭 성공률 99%</a:t>
                       </a:r>
                     </a:p>
                   </a:txBody>
@@ -13893,7 +13941,7 @@
                           </a:solidFill>
                           <a:latin typeface="Malgun Gothic"/>
                         </a:rPr>
-                        <a:t>✅</a:t>
+                        <a:t>달성</a:t>
                       </a:r>
                     </a:p>
                   </a:txBody>
@@ -13939,7 +13987,7 @@
                           </a:solidFill>
                           <a:latin typeface="Malgun Gothic"/>
                         </a:rPr>
-                        <a:t>사내 HCP 에 AI 모델 2종(VLM 1종 + OCR 1종) 상시 운영</a:t>
+                        <a:t>사내 HCP에 AI 모델 2종(VLM 1종 + OCR 1종) 상시 운영</a:t>
                       </a:r>
                     </a:p>
                   </a:txBody>
@@ -14033,7 +14081,7 @@
                           </a:solidFill>
                           <a:latin typeface="Malgun Gothic"/>
                         </a:rPr>
-                        <a:t>✅</a:t>
+                        <a:t>달성</a:t>
                       </a:r>
                     </a:p>
                   </a:txBody>
@@ -14173,7 +14221,7 @@
                           </a:solidFill>
                           <a:latin typeface="Malgun Gothic"/>
                         </a:rPr>
-                        <a:t>✅ / 🔄</a:t>
+                        <a:t>달성 (기록 현장 확인 중)</a:t>
                       </a:r>
                     </a:p>
                   </a:txBody>
@@ -14219,7 +14267,7 @@
                           </a:solidFill>
                           <a:latin typeface="Malgun Gothic"/>
                         </a:rPr>
-                        <a:t>실장비에서 감지~재조정 1분 미만. 기록은 현장 적재 확인 중</a:t>
+                        <a:t>실장비에서 감지~재조정 1분 미만</a:t>
                       </a:r>
                     </a:p>
                   </a:txBody>
@@ -14313,7 +14361,7 @@
                           </a:solidFill>
                           <a:latin typeface="Malgun Gothic"/>
                         </a:rPr>
-                        <a:t>🔄</a:t>
+                        <a:t>준비 중</a:t>
                       </a:r>
                     </a:p>
                   </a:txBody>
@@ -14359,7 +14407,7 @@
                           </a:solidFill>
                           <a:latin typeface="Malgun Gothic"/>
                         </a:rPr>
-                        <a:t>전용 PC 확보, R3 26대 배치 준비</a:t>
+                        <a:t>전용 PC 확보, R3 26대 대상</a:t>
                       </a:r>
                     </a:p>
                   </a:txBody>
@@ -14513,10 +14561,10 @@
                 <a:tableStyleId>{5C22544A-7EE6-4342-B048-85BDC9FD1C3A}</a:tableStyleId>
               </a:tblPr>
               <a:tblGrid>
-                <a:gridCol w="2276151"/>
-                <a:gridCol w="1241537"/>
-                <a:gridCol w="5276532"/>
-                <a:gridCol w="2483074"/>
+                <a:gridCol w="2255459"/>
+                <a:gridCol w="1332771"/>
+                <a:gridCol w="5228564"/>
+                <a:gridCol w="2460500"/>
               </a:tblGrid>
               <a:tr h="365760">
                 <a:tc>
@@ -15162,7 +15210,7 @@
                           </a:solidFill>
                           <a:latin typeface="Malgun Gothic"/>
                         </a:rPr>
-                        <a:t>자주 빗나감</a:t>
+                        <a:t>클릭 지점이 매번 어긋남</a:t>
                       </a:r>
                     </a:p>
                   </a:txBody>
@@ -15603,7 +15651,7 @@
         </p:nvGraphicFramePr>
         <p:xfrm>
           <a:off x="457200" y="1097280"/>
-          <a:ext cx="11277293" cy="1828800"/>
+          <a:ext cx="11277294" cy="1828800"/>
         </p:xfrm>
         <a:graphic>
           <a:graphicData uri="http://schemas.openxmlformats.org/drawingml/2006/table">
@@ -15612,9 +15660,9 @@
                 <a:tableStyleId>{5C22544A-7EE6-4342-B048-85BDC9FD1C3A}</a:tableStyleId>
               </a:tblPr>
               <a:tblGrid>
-                <a:gridCol w="1650335"/>
-                <a:gridCol w="2613031"/>
-                <a:gridCol w="7013927"/>
+                <a:gridCol w="1573576"/>
+                <a:gridCol w="2491495"/>
+                <a:gridCol w="7212223"/>
               </a:tblGrid>
               <a:tr h="365760">
                 <a:tc>
@@ -16141,7 +16189,7 @@
                           </a:solidFill>
                           <a:latin typeface="Malgun Gothic"/>
                         </a:rPr>
-                        <a:t>헷갈리는 Align Key Recipe 목록 자동 산출(오프라인 평가 기반, 현업 대조 중)</a:t>
+                        <a:t>구분이 어려운 Align Key Recipe 목록 자동 산출(오프라인 평가 기반, 현업과 대조 중)</a:t>
                       </a:r>
                     </a:p>
                   </a:txBody>

--- a/docs/project_progress/img/07/07_slides.pptx
+++ b/docs/project_progress/img/07/07_slides.pptx
@@ -13598,9 +13598,9 @@
                 <a:tableStyleId>{5C22544A-7EE6-4342-B048-85BDC9FD1C3A}</a:tableStyleId>
               </a:tblPr>
               <a:tblGrid>
-                <a:gridCol w="2743125"/>
-                <a:gridCol w="2285938"/>
-                <a:gridCol w="6248231"/>
+                <a:gridCol w="2182702"/>
+                <a:gridCol w="1818918"/>
+                <a:gridCol w="7275674"/>
               </a:tblGrid>
               <a:tr h="365760">
                 <a:tc>
@@ -14407,7 +14407,7 @@
                           </a:solidFill>
                           <a:latin typeface="Malgun Gothic"/>
                         </a:rPr>
-                        <a:t>전용 PC 확보, R3 26대 대상</a:t>
+                        <a:t>08월 실제 장비에서 가동 가능 확인. 상시 운영용 별도 PC 준비, PC IP 방화벽 해제, AI 전용 RCS 계정 발행 진행 중</a:t>
                       </a:r>
                     </a:p>
                   </a:txBody>

--- a/docs/project_progress/img/07/07_slides.pptx
+++ b/docs/project_progress/img/07/07_slides.pptx
@@ -12269,7 +12269,7 @@
                           </a:solidFill>
                           <a:latin typeface="Malgun Gothic"/>
                         </a:rPr>
-                        <a:t>고배율 SEM 화면은 반복 패턴이라 가짜 후보가 많음</a:t>
+                        <a:t>고배율 SEM 화면은 위치를 특정할 단서가 드물어 가짜 후보가 많음</a:t>
                       </a:r>
                     </a:p>
                   </a:txBody>
@@ -12363,7 +12363,7 @@
                           </a:solidFill>
                           <a:latin typeface="Malgun Gothic"/>
                         </a:rPr>
-                        <a:t>실장비 클릭 오동작 시 측정에 영향을 줌</a:t>
+                        <a:t>얼라인 위치 재설정 오동작 시 측정에 영향을 줌</a:t>
                       </a:r>
                     </a:p>
                   </a:txBody>
